--- a/regression_deck/Deck3_Sim_vs_Measured.pptx
+++ b/regression_deck/Deck3_Sim_vs_Measured.pptx
@@ -2792,7 +2792,7 @@
                           <a:ea typeface="Calibri" pitchFamily="34" charset="-122"/>
                           <a:cs typeface="Calibri" pitchFamily="34" charset="-120"/>
                         </a:rPr>
-                        <a:t>single tumor height only</a:t>
+                        <a:t>single height (≈ +40 mm in sim frame)</a:t>
                       </a:r>
                       <a:endParaRPr lang="en-US" sz="1350" dirty="0">
                         <a:latin typeface="Calibri" charset="0"/>

--- a/regression_deck/Deck3_Sim_vs_Measured.pptx
+++ b/regression_deck/Deck3_Sim_vs_Measured.pptx
@@ -12,9 +12,10 @@
     <p:sldId id="260" r:id="rId6"/>
     <p:sldId id="261" r:id="rId7"/>
     <p:sldId id="262" r:id="rId8"/>
+    <p:sldId id="263" r:id="rId9"/>
   </p:sldIdLst>
   <p:notesMasterIdLst>
-    <p:notesMasterId r:id="rId9"/>
+    <p:notesMasterId r:id="rId10"/>
   </p:notesMasterIdLst>
   <p:sldSz cx="12188952" cy="6858000"/>
   <p:notesSz cx="6858000" cy="12188952"/>
@@ -1060,6 +1061,94 @@
             <a:fld id="{F7021451-1387-4CA6-816F-3879F97B5CBC}" type="slidenum">
               <a:rPr lang="en-US"/>
               <a:t>7</a:t>
+            </a:fld>
+            <a:endParaRPr lang="en-US"/>
+          </a:p>
+        </p:txBody>
+      </p:sp>
+    </p:spTree>
+    <p:extLst>
+      <p:ext uri="{BB962C8B-B14F-4D97-AF65-F5344CB8AC3E}">
+        <p14:creationId xmlns:p14="http://schemas.microsoft.com/office/powerpoint/2010/main" val="1024086991"/>
+      </p:ext>
+    </p:extLst>
+  </p:cSld>
+  <p:clrMapOvr>
+    <a:masterClrMapping/>
+  </p:clrMapOvr>
+</p:notes>
+</file>
+
+<file path=ppt/notesSlides/notesSlide8.xml><?xml version="1.0" encoding="utf-8"?>
+<p:notes xmlns:a="http://schemas.openxmlformats.org/drawingml/2006/main" xmlns:r="http://schemas.openxmlformats.org/officeDocument/2006/relationships" xmlns:p="http://schemas.openxmlformats.org/presentationml/2006/main">
+  <p:cSld>
+    <p:spTree>
+      <p:nvGrpSpPr>
+        <p:cNvPr id="1" name=""/>
+        <p:cNvGrpSpPr/>
+        <p:nvPr/>
+      </p:nvGrpSpPr>
+      <p:grpSpPr>
+        <a:xfrm>
+          <a:off x="0" y="0"/>
+          <a:ext cx="0" cy="0"/>
+          <a:chOff x="0" y="0"/>
+          <a:chExt cx="0" cy="0"/>
+        </a:xfrm>
+      </p:grpSpPr>
+      <p:sp>
+        <p:nvSpPr>
+          <p:cNvPr id="2" name="Slide Image Placeholder 1"/>
+          <p:cNvSpPr>
+            <a:spLocks noGrp="1" noRot="1" noChangeAspect="1"/>
+          </p:cNvSpPr>
+          <p:nvPr>
+            <p:ph type="sldImg"/>
+          </p:nvPr>
+        </p:nvSpPr>
+        <p:spPr/>
+      </p:sp>
+      <p:sp>
+        <p:nvSpPr>
+          <p:cNvPr id="3" name="Notes Placeholder 2"/>
+          <p:cNvSpPr>
+            <a:spLocks noGrp="1"/>
+          </p:cNvSpPr>
+          <p:nvPr>
+            <p:ph type="body" idx="1"/>
+          </p:nvPr>
+        </p:nvSpPr>
+        <p:spPr/>
+        <p:txBody>
+          <a:bodyPr/>
+          <a:lstStyle/>
+          <a:p>
+            <a:r>
+              <a:rPr lang="en-US" dirty="0"/>
+              <a:t/>
+            </a:r>
+            <a:endParaRPr lang="en-US" dirty="0"/>
+          </a:p>
+        </p:txBody>
+      </p:sp>
+      <p:sp>
+        <p:nvSpPr>
+          <p:cNvPr id="4" name="Slide Number Placeholder 3"/>
+          <p:cNvSpPr>
+            <a:spLocks noGrp="1"/>
+          </p:cNvSpPr>
+          <p:nvPr>
+            <p:ph type="sldNum" sz="quarter" idx="10"/>
+          </p:nvPr>
+        </p:nvSpPr>
+        <p:spPr/>
+        <p:txBody>
+          <a:bodyPr/>
+          <a:lstStyle/>
+          <a:p>
+            <a:fld id="{F7021451-1387-4CA6-816F-3879F97B5CBC}" type="slidenum">
+              <a:rPr lang="en-US"/>
+              <a:t>8</a:t>
             </a:fld>
             <a:endParaRPr lang="en-US"/>
           </a:p>
@@ -1391,7 +1480,7 @@
     <p:bg>
       <p:bgPr>
         <a:solidFill>
-          <a:srgbClr val="0E2233"/>
+          <a:srgbClr val="FDF8F6"/>
         </a:solidFill>
       </p:bgPr>
     </p:bg>
@@ -1411,14 +1500,54 @@
       </p:grpSpPr>
       <p:sp>
         <p:nvSpPr>
-          <p:cNvPr id="2" name="Text 0"/>
+          <p:cNvPr id="2" name="Shape 0"/>
           <p:cNvSpPr/>
           <p:nvPr/>
         </p:nvSpPr>
         <p:spPr>
           <a:xfrm>
-            <a:off x="822960" y="1874520"/>
-            <a:ext cx="10515600" cy="457200"/>
+            <a:off x="0" y="0"/>
+            <a:ext cx="12188952" cy="237744"/>
+          </a:xfrm>
+          <a:prstGeom prst="rect">
+            <a:avLst/>
+          </a:prstGeom>
+          <a:solidFill>
+            <a:srgbClr val="BE0000"/>
+          </a:solidFill>
+          <a:ln/>
+        </p:spPr>
+      </p:sp>
+      <p:sp>
+        <p:nvSpPr>
+          <p:cNvPr id="3" name="Shape 1"/>
+          <p:cNvSpPr/>
+          <p:nvPr/>
+        </p:nvSpPr>
+        <p:spPr>
+          <a:xfrm>
+            <a:off x="822960" y="1847088"/>
+            <a:ext cx="82296" cy="1371600"/>
+          </a:xfrm>
+          <a:prstGeom prst="rect">
+            <a:avLst/>
+          </a:prstGeom>
+          <a:solidFill>
+            <a:srgbClr val="BE0000"/>
+          </a:solidFill>
+          <a:ln/>
+        </p:spPr>
+      </p:sp>
+      <p:sp>
+        <p:nvSpPr>
+          <p:cNvPr id="4" name="Text 2"/>
+          <p:cNvSpPr/>
+          <p:nvPr/>
+        </p:nvSpPr>
+        <p:spPr>
+          <a:xfrm>
+            <a:off x="1097280" y="1847088"/>
+            <a:ext cx="10058400" cy="411480"/>
           </a:xfrm>
           <a:prstGeom prst="rect">
             <a:avLst/>
@@ -1436,13 +1565,13 @@
             <a:r>
               <a:rPr lang="en-US" sz="1500" b="1" spc="300" kern="0" dirty="0">
                 <a:solidFill>
-                  <a:srgbClr val="2CC4A3"/>
+                  <a:srgbClr val="BE0000"/>
                 </a:solidFill>
                 <a:latin typeface="Calibri" pitchFamily="34" charset="0"/>
                 <a:ea typeface="Calibri" pitchFamily="34" charset="-122"/>
                 <a:cs typeface="Calibri" pitchFamily="34" charset="-120"/>
               </a:rPr>
-              <a:t>PART 3 · SIM  ↔  MEASURED</a:t>
+              <a:t>PART 3 . SIM vs MEASURED</a:t>
             </a:r>
             <a:endParaRPr lang="en-US" sz="1500" dirty="0"/>
           </a:p>
@@ -1450,14 +1579,14 @@
       </p:sp>
       <p:sp>
         <p:nvSpPr>
-          <p:cNvPr id="3" name="Text 1"/>
+          <p:cNvPr id="5" name="Text 3"/>
           <p:cNvSpPr/>
           <p:nvPr/>
         </p:nvSpPr>
         <p:spPr>
           <a:xfrm>
-            <a:off x="822960" y="2377440"/>
-            <a:ext cx="10607040" cy="1005840"/>
+            <a:off x="1097280" y="2286000"/>
+            <a:ext cx="10241280" cy="914400"/>
           </a:xfrm>
           <a:prstGeom prst="rect">
             <a:avLst/>
@@ -1473,30 +1602,30 @@
               <a:buNone/>
             </a:pPr>
             <a:r>
-              <a:rPr lang="en-US" sz="3600" b="1" dirty="0">
+              <a:rPr lang="en-US" sz="3400" b="1" dirty="0">
                 <a:solidFill>
-                  <a:srgbClr val="FFFFFF"/>
+                  <a:srgbClr val="2A1618"/>
                 </a:solidFill>
                 <a:latin typeface="Cambria" pitchFamily="34" charset="0"/>
                 <a:ea typeface="Cambria" pitchFamily="34" charset="-122"/>
                 <a:cs typeface="Cambria" pitchFamily="34" charset="-120"/>
               </a:rPr>
-              <a:t>Comparing simulation and bench — empty phantom</a:t>
+              <a:t>Comparing simulation and bench, empty phantom</a:t>
             </a:r>
-            <a:endParaRPr lang="en-US" sz="3600" dirty="0"/>
+            <a:endParaRPr lang="en-US" sz="3400" dirty="0"/>
           </a:p>
         </p:txBody>
       </p:sp>
       <p:sp>
         <p:nvSpPr>
-          <p:cNvPr id="4" name="Text 2"/>
+          <p:cNvPr id="6" name="Text 4"/>
           <p:cNvSpPr/>
           <p:nvPr/>
         </p:nvSpPr>
         <p:spPr>
           <a:xfrm>
-            <a:off x="822960" y="3474720"/>
-            <a:ext cx="10424160" cy="640080"/>
+            <a:off x="1097280" y="3310128"/>
+            <a:ext cx="10058400" cy="640080"/>
           </a:xfrm>
           <a:prstGeom prst="rect">
             <a:avLst/>
@@ -1514,13 +1643,13 @@
             <a:r>
               <a:rPr lang="en-US" sz="1550" dirty="0">
                 <a:solidFill>
-                  <a:srgbClr val="AECBD6"/>
+                  <a:srgbClr val="836A68"/>
                 </a:solidFill>
                 <a:latin typeface="Calibri" pitchFamily="34" charset="0"/>
                 <a:ea typeface="Calibri" pitchFamily="34" charset="-122"/>
                 <a:cs typeface="Calibri" pitchFamily="34" charset="-120"/>
               </a:rPr>
-              <a:t>Do the two agree? The signal interpolates equally well on both — the apparent gap is data coverage, not simulation fidelity</a:t>
+              <a:t>Do the two agree? The signal interpolates equally well on both; the apparent gap is data coverage, not simulation fidelity</a:t>
             </a:r>
             <a:endParaRPr lang="en-US" sz="1550" dirty="0"/>
           </a:p>
@@ -1528,14 +1657,14 @@
       </p:sp>
       <p:sp>
         <p:nvSpPr>
-          <p:cNvPr id="5" name="Text 3"/>
+          <p:cNvPr id="7" name="Text 5"/>
           <p:cNvSpPr/>
           <p:nvPr/>
         </p:nvSpPr>
         <p:spPr>
           <a:xfrm>
-            <a:off x="822960" y="4526280"/>
-            <a:ext cx="3566160" cy="640080"/>
+            <a:off x="1097280" y="4526280"/>
+            <a:ext cx="3520440" cy="640080"/>
           </a:xfrm>
           <a:prstGeom prst="rect">
             <a:avLst/>
@@ -1553,13 +1682,13 @@
             <a:r>
               <a:rPr lang="en-US" sz="2500" b="1" dirty="0">
                 <a:solidFill>
-                  <a:srgbClr val="2CC4A3"/>
+                  <a:srgbClr val="BE0000"/>
                 </a:solidFill>
                 <a:latin typeface="Cambria" pitchFamily="34" charset="0"/>
                 <a:ea typeface="Cambria" pitchFamily="34" charset="-122"/>
                 <a:cs typeface="Cambria" pitchFamily="34" charset="-120"/>
               </a:rPr>
-              <a:t>6.7 ≈ 6.0 mm</a:t>
+              <a:t>6.7 vs 6.0 mm</a:t>
             </a:r>
             <a:endParaRPr lang="en-US" sz="2500" dirty="0"/>
           </a:p>
@@ -1567,13 +1696,13 @@
       </p:sp>
       <p:sp>
         <p:nvSpPr>
-          <p:cNvPr id="6" name="Text 4"/>
+          <p:cNvPr id="8" name="Text 6"/>
           <p:cNvSpPr/>
           <p:nvPr/>
         </p:nvSpPr>
         <p:spPr>
           <a:xfrm>
-            <a:off x="822960" y="5138928"/>
+            <a:off x="1097280" y="5138928"/>
             <a:ext cx="3566160" cy="548640"/>
           </a:xfrm>
           <a:prstGeom prst="rect">
@@ -1592,13 +1721,13 @@
             <a:r>
               <a:rPr lang="en-US" sz="1250" dirty="0">
                 <a:solidFill>
-                  <a:srgbClr val="AECBD6"/>
+                  <a:srgbClr val="836A68"/>
                 </a:solidFill>
                 <a:latin typeface="Calibri" pitchFamily="34" charset="0"/>
                 <a:ea typeface="Calibri" pitchFamily="34" charset="-122"/>
                 <a:cs typeface="Calibri" pitchFamily="34" charset="-120"/>
               </a:rPr>
-              <a:t>k-NN signal floor: sim ≈ measured</a:t>
+              <a:t>k-NN signal floor: sim ~ measured</a:t>
             </a:r>
             <a:endParaRPr lang="en-US" sz="1250" dirty="0"/>
           </a:p>
@@ -1606,14 +1735,14 @@
       </p:sp>
       <p:sp>
         <p:nvSpPr>
-          <p:cNvPr id="7" name="Text 5"/>
+          <p:cNvPr id="9" name="Text 7"/>
           <p:cNvSpPr/>
           <p:nvPr/>
         </p:nvSpPr>
         <p:spPr>
           <a:xfrm>
-            <a:off x="4434840" y="4526280"/>
-            <a:ext cx="3566160" cy="640080"/>
+            <a:off x="4709160" y="4526280"/>
+            <a:ext cx="3520440" cy="640080"/>
           </a:xfrm>
           <a:prstGeom prst="rect">
             <a:avLst/>
@@ -1631,7 +1760,7 @@
             <a:r>
               <a:rPr lang="en-US" sz="2500" b="1" dirty="0">
                 <a:solidFill>
-                  <a:srgbClr val="2CC4A3"/>
+                  <a:srgbClr val="BE0000"/>
                 </a:solidFill>
                 <a:latin typeface="Cambria" pitchFamily="34" charset="0"/>
                 <a:ea typeface="Cambria" pitchFamily="34" charset="-122"/>
@@ -1645,13 +1774,13 @@
       </p:sp>
       <p:sp>
         <p:nvSpPr>
-          <p:cNvPr id="8" name="Text 6"/>
+          <p:cNvPr id="10" name="Text 8"/>
           <p:cNvSpPr/>
           <p:nvPr/>
         </p:nvSpPr>
         <p:spPr>
           <a:xfrm>
-            <a:off x="4434840" y="5138928"/>
+            <a:off x="4709160" y="5138928"/>
             <a:ext cx="3566160" cy="548640"/>
           </a:xfrm>
           <a:prstGeom prst="rect">
@@ -1670,7 +1799,7 @@
             <a:r>
               <a:rPr lang="en-US" sz="1250" dirty="0">
                 <a:solidFill>
-                  <a:srgbClr val="AECBD6"/>
+                  <a:srgbClr val="836A68"/>
                 </a:solidFill>
                 <a:latin typeface="Calibri" pitchFamily="34" charset="0"/>
                 <a:ea typeface="Calibri" pitchFamily="34" charset="-122"/>
@@ -1684,14 +1813,14 @@
       </p:sp>
       <p:sp>
         <p:nvSpPr>
-          <p:cNvPr id="9" name="Text 7"/>
+          <p:cNvPr id="11" name="Text 9"/>
           <p:cNvSpPr/>
           <p:nvPr/>
         </p:nvSpPr>
         <p:spPr>
           <a:xfrm>
-            <a:off x="8046720" y="4526280"/>
-            <a:ext cx="3566160" cy="640080"/>
+            <a:off x="8321040" y="4526280"/>
+            <a:ext cx="3520440" cy="640080"/>
           </a:xfrm>
           <a:prstGeom prst="rect">
             <a:avLst/>
@@ -1709,13 +1838,13 @@
             <a:r>
               <a:rPr lang="en-US" sz="2500" b="1" dirty="0">
                 <a:solidFill>
-                  <a:srgbClr val="2CC4A3"/>
+                  <a:srgbClr val="BE0000"/>
                 </a:solidFill>
                 <a:latin typeface="Cambria" pitchFamily="34" charset="0"/>
                 <a:ea typeface="Cambria" pitchFamily="34" charset="-122"/>
                 <a:cs typeface="Cambria" pitchFamily="34" charset="-120"/>
               </a:rPr>
-              <a:t>R² = 0.65</a:t>
+              <a:t>R2 = 0.65</a:t>
             </a:r>
             <a:endParaRPr lang="en-US" sz="2500" dirty="0"/>
           </a:p>
@@ -1723,13 +1852,13 @@
       </p:sp>
       <p:sp>
         <p:nvSpPr>
-          <p:cNvPr id="10" name="Text 8"/>
+          <p:cNvPr id="12" name="Text 10"/>
           <p:cNvSpPr/>
           <p:nvPr/>
         </p:nvSpPr>
         <p:spPr>
           <a:xfrm>
-            <a:off x="8046720" y="5138928"/>
+            <a:off x="8321040" y="5138928"/>
             <a:ext cx="3566160" cy="548640"/>
           </a:xfrm>
           <a:prstGeom prst="rect">
@@ -1748,13 +1877,13 @@
             <a:r>
               <a:rPr lang="en-US" sz="1250" dirty="0">
                 <a:solidFill>
-                  <a:srgbClr val="AECBD6"/>
+                  <a:srgbClr val="836A68"/>
                 </a:solidFill>
                 <a:latin typeface="Calibri" pitchFamily="34" charset="0"/>
                 <a:ea typeface="Calibri" pitchFamily="34" charset="-122"/>
                 <a:cs typeface="Calibri" pitchFamily="34" charset="-120"/>
               </a:rPr>
-              <a:t>a learnable sim→measured transfer</a:t>
+              <a:t>a learnable sim-&gt;measured transfer</a:t>
             </a:r>
             <a:endParaRPr lang="en-US" sz="1250" dirty="0"/>
           </a:p>
@@ -1819,13 +1948,13 @@
             <a:r>
               <a:rPr lang="en-US" sz="2900" b="1" dirty="0">
                 <a:solidFill>
-                  <a:srgbClr val="1E293B"/>
+                  <a:srgbClr val="2A1618"/>
                 </a:solidFill>
                 <a:latin typeface="Cambria" pitchFamily="34" charset="0"/>
                 <a:ea typeface="Cambria" pitchFamily="34" charset="-122"/>
                 <a:cs typeface="Cambria" pitchFamily="34" charset="-120"/>
               </a:rPr>
-              <a:t>Two different sampling grids</a:t>
+              <a:t>Two sampling grids, and their overlay</a:t>
             </a:r>
             <a:endParaRPr lang="en-US" sz="2900" dirty="0"/>
           </a:p>
@@ -1858,13 +1987,13 @@
             <a:r>
               <a:rPr lang="en-US" sz="1400" b="1" dirty="0">
                 <a:solidFill>
-                  <a:srgbClr val="1C9AA8"/>
+                  <a:srgbClr val="BE0000"/>
                 </a:solidFill>
                 <a:latin typeface="Calibri" pitchFamily="34" charset="0"/>
                 <a:ea typeface="Calibri" pitchFamily="34" charset="-122"/>
                 <a:cs typeface="Calibri" pitchFamily="34" charset="-120"/>
               </a:rPr>
-              <a:t>Same phantom, very different coverage — this matters for every comparison that follows</a:t>
+              <a:t>Same phantom, different coverage; the right panel registers both into one physical frame</a:t>
             </a:r>
             <a:endParaRPr lang="en-US" sz="1400" dirty="0"/>
           </a:p>
@@ -1886,8 +2015,8 @@
         </p:blipFill>
         <p:spPr>
           <a:xfrm>
-            <a:off x="640080" y="1600200"/>
-            <a:ext cx="10972800" cy="4754880"/>
+            <a:off x="457200" y="1554480"/>
+            <a:ext cx="11292840" cy="4892040"/>
           </a:xfrm>
           <a:prstGeom prst="rect">
             <a:avLst/>
@@ -1953,7 +2082,7 @@
             <a:r>
               <a:rPr lang="en-US" sz="2900" b="1" dirty="0">
                 <a:solidFill>
-                  <a:srgbClr val="1E293B"/>
+                  <a:srgbClr val="2A1618"/>
                 </a:solidFill>
                 <a:latin typeface="Cambria" pitchFamily="34" charset="0"/>
                 <a:ea typeface="Cambria" pitchFamily="34" charset="-122"/>
@@ -1992,13 +2121,13 @@
             <a:r>
               <a:rPr lang="en-US" sz="1400" b="1" dirty="0">
                 <a:solidFill>
-                  <a:srgbClr val="1C9AA8"/>
+                  <a:srgbClr val="BE0000"/>
                 </a:solidFill>
                 <a:latin typeface="Calibri" pitchFamily="34" charset="0"/>
                 <a:ea typeface="Calibri" pitchFamily="34" charset="-122"/>
                 <a:cs typeface="Calibri" pitchFamily="34" charset="-120"/>
               </a:rPr>
-              <a:t>Antennas, grid, depth coverage and frequency span all differ</a:t>
+              <a:t>Same antenna design, but grid, depth coverage, band and noise differ</a:t>
             </a:r>
             <a:endParaRPr lang="en-US" sz="1400" dirty="0"/>
           </a:p>
@@ -2050,7 +2179,7 @@
                   <a:tcPr marL="76200" marR="76200" marT="50800" marB="50800" anchor="ctr">
                     <a:lnL w="12700" cap="flat" cmpd="sng" algn="ctr">
                       <a:solidFill>
-                        <a:srgbClr val="D8E2EA"/>
+                        <a:srgbClr val="E7D6D1"/>
                       </a:solidFill>
                       <a:prstDash val="solid"/>
                       <a:round/>
@@ -2059,7 +2188,7 @@
                     </a:lnL>
                     <a:lnR w="12700" cap="flat" cmpd="sng" algn="ctr">
                       <a:solidFill>
-                        <a:srgbClr val="D8E2EA"/>
+                        <a:srgbClr val="E7D6D1"/>
                       </a:solidFill>
                       <a:prstDash val="solid"/>
                       <a:round/>
@@ -2068,7 +2197,7 @@
                     </a:lnR>
                     <a:lnT w="12700" cap="flat" cmpd="sng" algn="ctr">
                       <a:solidFill>
-                        <a:srgbClr val="D8E2EA"/>
+                        <a:srgbClr val="E7D6D1"/>
                       </a:solidFill>
                       <a:prstDash val="solid"/>
                       <a:round/>
@@ -2077,7 +2206,7 @@
                     </a:lnT>
                     <a:lnB w="12700" cap="flat" cmpd="sng" algn="ctr">
                       <a:solidFill>
-                        <a:srgbClr val="D8E2EA"/>
+                        <a:srgbClr val="E7D6D1"/>
                       </a:solidFill>
                       <a:prstDash val="solid"/>
                       <a:round/>
@@ -2085,7 +2214,7 @@
                       <a:tailEnd type="none" w="med" len="med"/>
                     </a:lnB>
                     <a:solidFill>
-                      <a:srgbClr val="0B5D7A"/>
+                      <a:srgbClr val="BE0000"/>
                     </a:solidFill>
                   </a:tcPr>
                 </a:tc>
@@ -2118,7 +2247,7 @@
                   <a:tcPr marL="76200" marR="76200" marT="50800" marB="50800" anchor="ctr">
                     <a:lnL w="12700" cap="flat" cmpd="sng" algn="ctr">
                       <a:solidFill>
-                        <a:srgbClr val="D8E2EA"/>
+                        <a:srgbClr val="E7D6D1"/>
                       </a:solidFill>
                       <a:prstDash val="solid"/>
                       <a:round/>
@@ -2127,7 +2256,7 @@
                     </a:lnL>
                     <a:lnR w="12700" cap="flat" cmpd="sng" algn="ctr">
                       <a:solidFill>
-                        <a:srgbClr val="D8E2EA"/>
+                        <a:srgbClr val="E7D6D1"/>
                       </a:solidFill>
                       <a:prstDash val="solid"/>
                       <a:round/>
@@ -2136,7 +2265,7 @@
                     </a:lnR>
                     <a:lnT w="12700" cap="flat" cmpd="sng" algn="ctr">
                       <a:solidFill>
-                        <a:srgbClr val="D8E2EA"/>
+                        <a:srgbClr val="E7D6D1"/>
                       </a:solidFill>
                       <a:prstDash val="solid"/>
                       <a:round/>
@@ -2145,7 +2274,7 @@
                     </a:lnT>
                     <a:lnB w="12700" cap="flat" cmpd="sng" algn="ctr">
                       <a:solidFill>
-                        <a:srgbClr val="D8E2EA"/>
+                        <a:srgbClr val="E7D6D1"/>
                       </a:solidFill>
                       <a:prstDash val="solid"/>
                       <a:round/>
@@ -2153,7 +2282,7 @@
                       <a:tailEnd type="none" w="med" len="med"/>
                     </a:lnB>
                     <a:solidFill>
-                      <a:srgbClr val="0B5D7A"/>
+                      <a:srgbClr val="BE0000"/>
                     </a:solidFill>
                   </a:tcPr>
                 </a:tc>
@@ -2186,7 +2315,7 @@
                   <a:tcPr marL="76200" marR="76200" marT="50800" marB="50800" anchor="ctr">
                     <a:lnL w="12700" cap="flat" cmpd="sng" algn="ctr">
                       <a:solidFill>
-                        <a:srgbClr val="D8E2EA"/>
+                        <a:srgbClr val="E7D6D1"/>
                       </a:solidFill>
                       <a:prstDash val="solid"/>
                       <a:round/>
@@ -2195,7 +2324,7 @@
                     </a:lnL>
                     <a:lnR w="12700" cap="flat" cmpd="sng" algn="ctr">
                       <a:solidFill>
-                        <a:srgbClr val="D8E2EA"/>
+                        <a:srgbClr val="E7D6D1"/>
                       </a:solidFill>
                       <a:prstDash val="solid"/>
                       <a:round/>
@@ -2204,7 +2333,7 @@
                     </a:lnR>
                     <a:lnT w="12700" cap="flat" cmpd="sng" algn="ctr">
                       <a:solidFill>
-                        <a:srgbClr val="D8E2EA"/>
+                        <a:srgbClr val="E7D6D1"/>
                       </a:solidFill>
                       <a:prstDash val="solid"/>
                       <a:round/>
@@ -2213,7 +2342,7 @@
                     </a:lnT>
                     <a:lnB w="12700" cap="flat" cmpd="sng" algn="ctr">
                       <a:solidFill>
-                        <a:srgbClr val="D8E2EA"/>
+                        <a:srgbClr val="E7D6D1"/>
                       </a:solidFill>
                       <a:prstDash val="solid"/>
                       <a:round/>
@@ -2221,7 +2350,7 @@
                       <a:tailEnd type="none" w="med" len="med"/>
                     </a:lnB>
                     <a:solidFill>
-                      <a:srgbClr val="0B5D7A"/>
+                      <a:srgbClr val="BE0000"/>
                     </a:solidFill>
                   </a:tcPr>
                 </a:tc>
@@ -2238,7 +2367,7 @@
                       <a:r>
                         <a:rPr lang="en-US" sz="1350" b="1" dirty="0">
                           <a:solidFill>
-                            <a:srgbClr val="0B5D7A"/>
+                            <a:srgbClr val="BE0000"/>
                           </a:solidFill>
                           <a:latin typeface="Cambria" pitchFamily="34" charset="0"/>
                           <a:ea typeface="Cambria" pitchFamily="34" charset="-122"/>
@@ -2256,7 +2385,7 @@
                   <a:tcPr marL="76200" marR="76200" marT="50800" marB="50800" anchor="ctr">
                     <a:lnL w="12700" cap="flat" cmpd="sng" algn="ctr">
                       <a:solidFill>
-                        <a:srgbClr val="D8E2EA"/>
+                        <a:srgbClr val="E7D6D1"/>
                       </a:solidFill>
                       <a:prstDash val="solid"/>
                       <a:round/>
@@ -2265,7 +2394,7 @@
                     </a:lnL>
                     <a:lnR w="12700" cap="flat" cmpd="sng" algn="ctr">
                       <a:solidFill>
-                        <a:srgbClr val="D8E2EA"/>
+                        <a:srgbClr val="E7D6D1"/>
                       </a:solidFill>
                       <a:prstDash val="solid"/>
                       <a:round/>
@@ -2274,7 +2403,7 @@
                     </a:lnR>
                     <a:lnT w="12700" cap="flat" cmpd="sng" algn="ctr">
                       <a:solidFill>
-                        <a:srgbClr val="D8E2EA"/>
+                        <a:srgbClr val="E7D6D1"/>
                       </a:solidFill>
                       <a:prstDash val="solid"/>
                       <a:round/>
@@ -2283,7 +2412,7 @@
                     </a:lnT>
                     <a:lnB w="12700" cap="flat" cmpd="sng" algn="ctr">
                       <a:solidFill>
-                        <a:srgbClr val="D8E2EA"/>
+                        <a:srgbClr val="E7D6D1"/>
                       </a:solidFill>
                       <a:prstDash val="solid"/>
                       <a:round/>
@@ -2291,7 +2420,7 @@
                       <a:tailEnd type="none" w="med" len="med"/>
                     </a:lnB>
                     <a:solidFill>
-                      <a:srgbClr val="F3F7FA"/>
+                      <a:srgbClr val="FBF4F2"/>
                     </a:solidFill>
                   </a:tcPr>
                 </a:tc>
@@ -2306,13 +2435,13 @@
                       <a:r>
                         <a:rPr lang="en-US" sz="1350" dirty="0">
                           <a:solidFill>
-                            <a:srgbClr val="1E293B"/>
+                            <a:srgbClr val="2A1618"/>
                           </a:solidFill>
                           <a:latin typeface="Calibri" pitchFamily="34" charset="0"/>
                           <a:ea typeface="Calibri" pitchFamily="34" charset="-122"/>
                           <a:cs typeface="Calibri" pitchFamily="34" charset="-120"/>
                         </a:rPr>
-                        <a:t>'Sam' model, full-wave solve</a:t>
+                        <a:t>Sam's Medium Antennas (HFSS model)</a:t>
                       </a:r>
                       <a:endParaRPr lang="en-US" sz="1350" dirty="0">
                         <a:latin typeface="Calibri" charset="0"/>
@@ -2324,7 +2453,7 @@
                   <a:tcPr marL="76200" marR="76200" marT="50800" marB="50800" anchor="ctr">
                     <a:lnL w="12700" cap="flat" cmpd="sng" algn="ctr">
                       <a:solidFill>
-                        <a:srgbClr val="D8E2EA"/>
+                        <a:srgbClr val="E7D6D1"/>
                       </a:solidFill>
                       <a:prstDash val="solid"/>
                       <a:round/>
@@ -2333,7 +2462,7 @@
                     </a:lnL>
                     <a:lnR w="12700" cap="flat" cmpd="sng" algn="ctr">
                       <a:solidFill>
-                        <a:srgbClr val="D8E2EA"/>
+                        <a:srgbClr val="E7D6D1"/>
                       </a:solidFill>
                       <a:prstDash val="solid"/>
                       <a:round/>
@@ -2342,7 +2471,7 @@
                     </a:lnR>
                     <a:lnT w="12700" cap="flat" cmpd="sng" algn="ctr">
                       <a:solidFill>
-                        <a:srgbClr val="D8E2EA"/>
+                        <a:srgbClr val="E7D6D1"/>
                       </a:solidFill>
                       <a:prstDash val="solid"/>
                       <a:round/>
@@ -2351,7 +2480,7 @@
                     </a:lnT>
                     <a:lnB w="12700" cap="flat" cmpd="sng" algn="ctr">
                       <a:solidFill>
-                        <a:srgbClr val="D8E2EA"/>
+                        <a:srgbClr val="E7D6D1"/>
                       </a:solidFill>
                       <a:prstDash val="solid"/>
                       <a:round/>
@@ -2359,7 +2488,7 @@
                       <a:tailEnd type="none" w="med" len="med"/>
                     </a:lnB>
                     <a:solidFill>
-                      <a:srgbClr val="F3F7FA"/>
+                      <a:srgbClr val="FBF4F2"/>
                     </a:solidFill>
                   </a:tcPr>
                 </a:tc>
@@ -2374,13 +2503,13 @@
                       <a:r>
                         <a:rPr lang="en-US" sz="1350" dirty="0">
                           <a:solidFill>
-                            <a:srgbClr val="1E293B"/>
+                            <a:srgbClr val="2A1618"/>
                           </a:solidFill>
                           <a:latin typeface="Calibri" pitchFamily="34" charset="0"/>
                           <a:ea typeface="Calibri" pitchFamily="34" charset="-122"/>
                           <a:cs typeface="Calibri" pitchFamily="34" charset="-120"/>
                         </a:rPr>
-                        <a:t>'Sam Medium', physical build</a:t>
+                        <a:t>Sam's Medium Antennas (physical build)</a:t>
                       </a:r>
                       <a:endParaRPr lang="en-US" sz="1350" dirty="0">
                         <a:latin typeface="Calibri" charset="0"/>
@@ -2392,7 +2521,7 @@
                   <a:tcPr marL="76200" marR="76200" marT="50800" marB="50800" anchor="ctr">
                     <a:lnL w="12700" cap="flat" cmpd="sng" algn="ctr">
                       <a:solidFill>
-                        <a:srgbClr val="D8E2EA"/>
+                        <a:srgbClr val="E7D6D1"/>
                       </a:solidFill>
                       <a:prstDash val="solid"/>
                       <a:round/>
@@ -2401,7 +2530,7 @@
                     </a:lnL>
                     <a:lnR w="12700" cap="flat" cmpd="sng" algn="ctr">
                       <a:solidFill>
-                        <a:srgbClr val="D8E2EA"/>
+                        <a:srgbClr val="E7D6D1"/>
                       </a:solidFill>
                       <a:prstDash val="solid"/>
                       <a:round/>
@@ -2410,7 +2539,7 @@
                     </a:lnR>
                     <a:lnT w="12700" cap="flat" cmpd="sng" algn="ctr">
                       <a:solidFill>
-                        <a:srgbClr val="D8E2EA"/>
+                        <a:srgbClr val="E7D6D1"/>
                       </a:solidFill>
                       <a:prstDash val="solid"/>
                       <a:round/>
@@ -2419,7 +2548,7 @@
                     </a:lnT>
                     <a:lnB w="12700" cap="flat" cmpd="sng" algn="ctr">
                       <a:solidFill>
-                        <a:srgbClr val="D8E2EA"/>
+                        <a:srgbClr val="E7D6D1"/>
                       </a:solidFill>
                       <a:prstDash val="solid"/>
                       <a:round/>
@@ -2427,7 +2556,7 @@
                       <a:tailEnd type="none" w="med" len="med"/>
                     </a:lnB>
                     <a:solidFill>
-                      <a:srgbClr val="F3F7FA"/>
+                      <a:srgbClr val="FBF4F2"/>
                     </a:solidFill>
                   </a:tcPr>
                 </a:tc>
@@ -2444,7 +2573,7 @@
                       <a:r>
                         <a:rPr lang="en-US" sz="1350" b="1" dirty="0">
                           <a:solidFill>
-                            <a:srgbClr val="0B5D7A"/>
+                            <a:srgbClr val="BE0000"/>
                           </a:solidFill>
                           <a:latin typeface="Cambria" pitchFamily="34" charset="0"/>
                           <a:ea typeface="Cambria" pitchFamily="34" charset="-122"/>
@@ -2462,7 +2591,7 @@
                   <a:tcPr marL="76200" marR="76200" marT="50800" marB="50800" anchor="ctr">
                     <a:lnL w="12700" cap="flat" cmpd="sng" algn="ctr">
                       <a:solidFill>
-                        <a:srgbClr val="D8E2EA"/>
+                        <a:srgbClr val="E7D6D1"/>
                       </a:solidFill>
                       <a:prstDash val="solid"/>
                       <a:round/>
@@ -2471,7 +2600,7 @@
                     </a:lnL>
                     <a:lnR w="12700" cap="flat" cmpd="sng" algn="ctr">
                       <a:solidFill>
-                        <a:srgbClr val="D8E2EA"/>
+                        <a:srgbClr val="E7D6D1"/>
                       </a:solidFill>
                       <a:prstDash val="solid"/>
                       <a:round/>
@@ -2480,7 +2609,7 @@
                     </a:lnR>
                     <a:lnT w="12700" cap="flat" cmpd="sng" algn="ctr">
                       <a:solidFill>
-                        <a:srgbClr val="D8E2EA"/>
+                        <a:srgbClr val="E7D6D1"/>
                       </a:solidFill>
                       <a:prstDash val="solid"/>
                       <a:round/>
@@ -2489,7 +2618,7 @@
                     </a:lnT>
                     <a:lnB w="12700" cap="flat" cmpd="sng" algn="ctr">
                       <a:solidFill>
-                        <a:srgbClr val="D8E2EA"/>
+                        <a:srgbClr val="E7D6D1"/>
                       </a:solidFill>
                       <a:prstDash val="solid"/>
                       <a:round/>
@@ -2512,7 +2641,7 @@
                       <a:r>
                         <a:rPr lang="en-US" sz="1350" dirty="0">
                           <a:solidFill>
-                            <a:srgbClr val="1E293B"/>
+                            <a:srgbClr val="2A1618"/>
                           </a:solidFill>
                           <a:latin typeface="Calibri" pitchFamily="34" charset="0"/>
                           <a:ea typeface="Calibri" pitchFamily="34" charset="-122"/>
@@ -2530,7 +2659,7 @@
                   <a:tcPr marL="76200" marR="76200" marT="50800" marB="50800" anchor="ctr">
                     <a:lnL w="12700" cap="flat" cmpd="sng" algn="ctr">
                       <a:solidFill>
-                        <a:srgbClr val="D8E2EA"/>
+                        <a:srgbClr val="E7D6D1"/>
                       </a:solidFill>
                       <a:prstDash val="solid"/>
                       <a:round/>
@@ -2539,7 +2668,7 @@
                     </a:lnL>
                     <a:lnR w="12700" cap="flat" cmpd="sng" algn="ctr">
                       <a:solidFill>
-                        <a:srgbClr val="D8E2EA"/>
+                        <a:srgbClr val="E7D6D1"/>
                       </a:solidFill>
                       <a:prstDash val="solid"/>
                       <a:round/>
@@ -2548,7 +2677,7 @@
                     </a:lnR>
                     <a:lnT w="12700" cap="flat" cmpd="sng" algn="ctr">
                       <a:solidFill>
-                        <a:srgbClr val="D8E2EA"/>
+                        <a:srgbClr val="E7D6D1"/>
                       </a:solidFill>
                       <a:prstDash val="solid"/>
                       <a:round/>
@@ -2557,7 +2686,7 @@
                     </a:lnT>
                     <a:lnB w="12700" cap="flat" cmpd="sng" algn="ctr">
                       <a:solidFill>
-                        <a:srgbClr val="D8E2EA"/>
+                        <a:srgbClr val="E7D6D1"/>
                       </a:solidFill>
                       <a:prstDash val="solid"/>
                       <a:round/>
@@ -2580,13 +2709,13 @@
                       <a:r>
                         <a:rPr lang="en-US" sz="1350" dirty="0">
                           <a:solidFill>
-                            <a:srgbClr val="1E293B"/>
+                            <a:srgbClr val="2A1618"/>
                           </a:solidFill>
                           <a:latin typeface="Calibri" pitchFamily="34" charset="0"/>
                           <a:ea typeface="Calibri" pitchFamily="34" charset="-122"/>
                           <a:cs typeface="Calibri" pitchFamily="34" charset="-120"/>
                         </a:rPr>
-                        <a:t>6×6 cells, 4 corners each; 51 measured</a:t>
+                        <a:t>6x6 cells, 4 corners each; 51 measured</a:t>
                       </a:r>
                       <a:endParaRPr lang="en-US" sz="1350" dirty="0">
                         <a:latin typeface="Calibri" charset="0"/>
@@ -2598,7 +2727,7 @@
                   <a:tcPr marL="76200" marR="76200" marT="50800" marB="50800" anchor="ctr">
                     <a:lnL w="12700" cap="flat" cmpd="sng" algn="ctr">
                       <a:solidFill>
-                        <a:srgbClr val="D8E2EA"/>
+                        <a:srgbClr val="E7D6D1"/>
                       </a:solidFill>
                       <a:prstDash val="solid"/>
                       <a:round/>
@@ -2607,7 +2736,7 @@
                     </a:lnL>
                     <a:lnR w="12700" cap="flat" cmpd="sng" algn="ctr">
                       <a:solidFill>
-                        <a:srgbClr val="D8E2EA"/>
+                        <a:srgbClr val="E7D6D1"/>
                       </a:solidFill>
                       <a:prstDash val="solid"/>
                       <a:round/>
@@ -2616,7 +2745,7 @@
                     </a:lnR>
                     <a:lnT w="12700" cap="flat" cmpd="sng" algn="ctr">
                       <a:solidFill>
-                        <a:srgbClr val="D8E2EA"/>
+                        <a:srgbClr val="E7D6D1"/>
                       </a:solidFill>
                       <a:prstDash val="solid"/>
                       <a:round/>
@@ -2625,7 +2754,7 @@
                     </a:lnT>
                     <a:lnB w="12700" cap="flat" cmpd="sng" algn="ctr">
                       <a:solidFill>
-                        <a:srgbClr val="D8E2EA"/>
+                        <a:srgbClr val="E7D6D1"/>
                       </a:solidFill>
                       <a:prstDash val="solid"/>
                       <a:round/>
@@ -2650,7 +2779,7 @@
                       <a:r>
                         <a:rPr lang="en-US" sz="1350" b="1" dirty="0">
                           <a:solidFill>
-                            <a:srgbClr val="0B5D7A"/>
+                            <a:srgbClr val="BE0000"/>
                           </a:solidFill>
                           <a:latin typeface="Cambria" pitchFamily="34" charset="0"/>
                           <a:ea typeface="Cambria" pitchFamily="34" charset="-122"/>
@@ -2668,7 +2797,7 @@
                   <a:tcPr marL="76200" marR="76200" marT="50800" marB="50800" anchor="ctr">
                     <a:lnL w="12700" cap="flat" cmpd="sng" algn="ctr">
                       <a:solidFill>
-                        <a:srgbClr val="D8E2EA"/>
+                        <a:srgbClr val="E7D6D1"/>
                       </a:solidFill>
                       <a:prstDash val="solid"/>
                       <a:round/>
@@ -2677,7 +2806,7 @@
                     </a:lnL>
                     <a:lnR w="12700" cap="flat" cmpd="sng" algn="ctr">
                       <a:solidFill>
-                        <a:srgbClr val="D8E2EA"/>
+                        <a:srgbClr val="E7D6D1"/>
                       </a:solidFill>
                       <a:prstDash val="solid"/>
                       <a:round/>
@@ -2686,7 +2815,7 @@
                     </a:lnR>
                     <a:lnT w="12700" cap="flat" cmpd="sng" algn="ctr">
                       <a:solidFill>
-                        <a:srgbClr val="D8E2EA"/>
+                        <a:srgbClr val="E7D6D1"/>
                       </a:solidFill>
                       <a:prstDash val="solid"/>
                       <a:round/>
@@ -2695,7 +2824,7 @@
                     </a:lnT>
                     <a:lnB w="12700" cap="flat" cmpd="sng" algn="ctr">
                       <a:solidFill>
-                        <a:srgbClr val="D8E2EA"/>
+                        <a:srgbClr val="E7D6D1"/>
                       </a:solidFill>
                       <a:prstDash val="solid"/>
                       <a:round/>
@@ -2703,7 +2832,7 @@
                       <a:tailEnd type="none" w="med" len="med"/>
                     </a:lnB>
                     <a:solidFill>
-                      <a:srgbClr val="F3F7FA"/>
+                      <a:srgbClr val="FBF4F2"/>
                     </a:solidFill>
                   </a:tcPr>
                 </a:tc>
@@ -2718,13 +2847,13 @@
                       <a:r>
                         <a:rPr lang="en-US" sz="1350" dirty="0">
                           <a:solidFill>
-                            <a:srgbClr val="1E293B"/>
+                            <a:srgbClr val="2A1618"/>
                           </a:solidFill>
                           <a:latin typeface="Calibri" pitchFamily="34" charset="0"/>
                           <a:ea typeface="Calibri" pitchFamily="34" charset="-122"/>
                           <a:cs typeface="Calibri" pitchFamily="34" charset="-120"/>
                         </a:rPr>
-                        <a:t>13 planes, z = −15 … +45 mm</a:t>
+                        <a:t>13 planes, z = -15 to +45 mm</a:t>
                       </a:r>
                       <a:endParaRPr lang="en-US" sz="1350" dirty="0">
                         <a:latin typeface="Calibri" charset="0"/>
@@ -2736,7 +2865,7 @@
                   <a:tcPr marL="76200" marR="76200" marT="50800" marB="50800" anchor="ctr">
                     <a:lnL w="12700" cap="flat" cmpd="sng" algn="ctr">
                       <a:solidFill>
-                        <a:srgbClr val="D8E2EA"/>
+                        <a:srgbClr val="E7D6D1"/>
                       </a:solidFill>
                       <a:prstDash val="solid"/>
                       <a:round/>
@@ -2745,7 +2874,7 @@
                     </a:lnL>
                     <a:lnR w="12700" cap="flat" cmpd="sng" algn="ctr">
                       <a:solidFill>
-                        <a:srgbClr val="D8E2EA"/>
+                        <a:srgbClr val="E7D6D1"/>
                       </a:solidFill>
                       <a:prstDash val="solid"/>
                       <a:round/>
@@ -2754,7 +2883,7 @@
                     </a:lnR>
                     <a:lnT w="12700" cap="flat" cmpd="sng" algn="ctr">
                       <a:solidFill>
-                        <a:srgbClr val="D8E2EA"/>
+                        <a:srgbClr val="E7D6D1"/>
                       </a:solidFill>
                       <a:prstDash val="solid"/>
                       <a:round/>
@@ -2763,7 +2892,7 @@
                     </a:lnT>
                     <a:lnB w="12700" cap="flat" cmpd="sng" algn="ctr">
                       <a:solidFill>
-                        <a:srgbClr val="D8E2EA"/>
+                        <a:srgbClr val="E7D6D1"/>
                       </a:solidFill>
                       <a:prstDash val="solid"/>
                       <a:round/>
@@ -2771,7 +2900,7 @@
                       <a:tailEnd type="none" w="med" len="med"/>
                     </a:lnB>
                     <a:solidFill>
-                      <a:srgbClr val="F3F7FA"/>
+                      <a:srgbClr val="FBF4F2"/>
                     </a:solidFill>
                   </a:tcPr>
                 </a:tc>
@@ -2786,13 +2915,13 @@
                       <a:r>
                         <a:rPr lang="en-US" sz="1350" dirty="0">
                           <a:solidFill>
-                            <a:srgbClr val="1E293B"/>
+                            <a:srgbClr val="2A1618"/>
                           </a:solidFill>
                           <a:latin typeface="Calibri" pitchFamily="34" charset="0"/>
                           <a:ea typeface="Calibri" pitchFamily="34" charset="-122"/>
                           <a:cs typeface="Calibri" pitchFamily="34" charset="-120"/>
                         </a:rPr>
-                        <a:t>single height (≈ +40 mm in sim frame)</a:t>
+                        <a:t>single height, ~5 to 20 mm (near the patch)</a:t>
                       </a:r>
                       <a:endParaRPr lang="en-US" sz="1350" dirty="0">
                         <a:latin typeface="Calibri" charset="0"/>
@@ -2804,7 +2933,7 @@
                   <a:tcPr marL="76200" marR="76200" marT="50800" marB="50800" anchor="ctr">
                     <a:lnL w="12700" cap="flat" cmpd="sng" algn="ctr">
                       <a:solidFill>
-                        <a:srgbClr val="D8E2EA"/>
+                        <a:srgbClr val="E7D6D1"/>
                       </a:solidFill>
                       <a:prstDash val="solid"/>
                       <a:round/>
@@ -2813,7 +2942,7 @@
                     </a:lnL>
                     <a:lnR w="12700" cap="flat" cmpd="sng" algn="ctr">
                       <a:solidFill>
-                        <a:srgbClr val="D8E2EA"/>
+                        <a:srgbClr val="E7D6D1"/>
                       </a:solidFill>
                       <a:prstDash val="solid"/>
                       <a:round/>
@@ -2822,7 +2951,7 @@
                     </a:lnR>
                     <a:lnT w="12700" cap="flat" cmpd="sng" algn="ctr">
                       <a:solidFill>
-                        <a:srgbClr val="D8E2EA"/>
+                        <a:srgbClr val="E7D6D1"/>
                       </a:solidFill>
                       <a:prstDash val="solid"/>
                       <a:round/>
@@ -2831,7 +2960,7 @@
                     </a:lnT>
                     <a:lnB w="12700" cap="flat" cmpd="sng" algn="ctr">
                       <a:solidFill>
-                        <a:srgbClr val="D8E2EA"/>
+                        <a:srgbClr val="E7D6D1"/>
                       </a:solidFill>
                       <a:prstDash val="solid"/>
                       <a:round/>
@@ -2839,7 +2968,7 @@
                       <a:tailEnd type="none" w="med" len="med"/>
                     </a:lnB>
                     <a:solidFill>
-                      <a:srgbClr val="F3F7FA"/>
+                      <a:srgbClr val="FBF4F2"/>
                     </a:solidFill>
                   </a:tcPr>
                 </a:tc>
@@ -2856,7 +2985,7 @@
                       <a:r>
                         <a:rPr lang="en-US" sz="1350" b="1" dirty="0">
                           <a:solidFill>
-                            <a:srgbClr val="0B5D7A"/>
+                            <a:srgbClr val="BE0000"/>
                           </a:solidFill>
                           <a:latin typeface="Cambria" pitchFamily="34" charset="0"/>
                           <a:ea typeface="Cambria" pitchFamily="34" charset="-122"/>
@@ -2874,7 +3003,7 @@
                   <a:tcPr marL="76200" marR="76200" marT="50800" marB="50800" anchor="ctr">
                     <a:lnL w="12700" cap="flat" cmpd="sng" algn="ctr">
                       <a:solidFill>
-                        <a:srgbClr val="D8E2EA"/>
+                        <a:srgbClr val="E7D6D1"/>
                       </a:solidFill>
                       <a:prstDash val="solid"/>
                       <a:round/>
@@ -2883,7 +3012,7 @@
                     </a:lnL>
                     <a:lnR w="12700" cap="flat" cmpd="sng" algn="ctr">
                       <a:solidFill>
-                        <a:srgbClr val="D8E2EA"/>
+                        <a:srgbClr val="E7D6D1"/>
                       </a:solidFill>
                       <a:prstDash val="solid"/>
                       <a:round/>
@@ -2892,7 +3021,7 @@
                     </a:lnR>
                     <a:lnT w="12700" cap="flat" cmpd="sng" algn="ctr">
                       <a:solidFill>
-                        <a:srgbClr val="D8E2EA"/>
+                        <a:srgbClr val="E7D6D1"/>
                       </a:solidFill>
                       <a:prstDash val="solid"/>
                       <a:round/>
@@ -2901,7 +3030,7 @@
                     </a:lnT>
                     <a:lnB w="12700" cap="flat" cmpd="sng" algn="ctr">
                       <a:solidFill>
-                        <a:srgbClr val="D8E2EA"/>
+                        <a:srgbClr val="E7D6D1"/>
                       </a:solidFill>
                       <a:prstDash val="solid"/>
                       <a:round/>
@@ -2924,13 +3053,13 @@
                       <a:r>
                         <a:rPr lang="en-US" sz="1350" dirty="0">
                           <a:solidFill>
-                            <a:srgbClr val="1E293B"/>
+                            <a:srgbClr val="2A1618"/>
                           </a:solidFill>
                           <a:latin typeface="Calibri" pitchFamily="34" charset="0"/>
                           <a:ea typeface="Calibri" pitchFamily="34" charset="-122"/>
                           <a:cs typeface="Calibri" pitchFamily="34" charset="-120"/>
                         </a:rPr>
-                        <a:t>2–8 GHz, 3001 points</a:t>
+                        <a:t>2 to 8 GHz, 3001 points</a:t>
                       </a:r>
                       <a:endParaRPr lang="en-US" sz="1350" dirty="0">
                         <a:latin typeface="Calibri" charset="0"/>
@@ -2942,7 +3071,7 @@
                   <a:tcPr marL="76200" marR="76200" marT="50800" marB="50800" anchor="ctr">
                     <a:lnL w="12700" cap="flat" cmpd="sng" algn="ctr">
                       <a:solidFill>
-                        <a:srgbClr val="D8E2EA"/>
+                        <a:srgbClr val="E7D6D1"/>
                       </a:solidFill>
                       <a:prstDash val="solid"/>
                       <a:round/>
@@ -2951,7 +3080,7 @@
                     </a:lnL>
                     <a:lnR w="12700" cap="flat" cmpd="sng" algn="ctr">
                       <a:solidFill>
-                        <a:srgbClr val="D8E2EA"/>
+                        <a:srgbClr val="E7D6D1"/>
                       </a:solidFill>
                       <a:prstDash val="solid"/>
                       <a:round/>
@@ -2960,7 +3089,7 @@
                     </a:lnR>
                     <a:lnT w="12700" cap="flat" cmpd="sng" algn="ctr">
                       <a:solidFill>
-                        <a:srgbClr val="D8E2EA"/>
+                        <a:srgbClr val="E7D6D1"/>
                       </a:solidFill>
                       <a:prstDash val="solid"/>
                       <a:round/>
@@ -2969,7 +3098,7 @@
                     </a:lnT>
                     <a:lnB w="12700" cap="flat" cmpd="sng" algn="ctr">
                       <a:solidFill>
-                        <a:srgbClr val="D8E2EA"/>
+                        <a:srgbClr val="E7D6D1"/>
                       </a:solidFill>
                       <a:prstDash val="solid"/>
                       <a:round/>
@@ -2992,13 +3121,13 @@
                       <a:r>
                         <a:rPr lang="en-US" sz="1350" dirty="0">
                           <a:solidFill>
-                            <a:srgbClr val="1E293B"/>
+                            <a:srgbClr val="2A1618"/>
                           </a:solidFill>
                           <a:latin typeface="Calibri" pitchFamily="34" charset="0"/>
                           <a:ea typeface="Calibri" pitchFamily="34" charset="-122"/>
                           <a:cs typeface="Calibri" pitchFamily="34" charset="-120"/>
                         </a:rPr>
-                        <a:t>0.1–8 GHz, 791 points</a:t>
+                        <a:t>0.1 to 8 GHz, 791 points</a:t>
                       </a:r>
                       <a:endParaRPr lang="en-US" sz="1350" dirty="0">
                         <a:latin typeface="Calibri" charset="0"/>
@@ -3010,7 +3139,7 @@
                   <a:tcPr marL="76200" marR="76200" marT="50800" marB="50800" anchor="ctr">
                     <a:lnL w="12700" cap="flat" cmpd="sng" algn="ctr">
                       <a:solidFill>
-                        <a:srgbClr val="D8E2EA"/>
+                        <a:srgbClr val="E7D6D1"/>
                       </a:solidFill>
                       <a:prstDash val="solid"/>
                       <a:round/>
@@ -3019,7 +3148,7 @@
                     </a:lnL>
                     <a:lnR w="12700" cap="flat" cmpd="sng" algn="ctr">
                       <a:solidFill>
-                        <a:srgbClr val="D8E2EA"/>
+                        <a:srgbClr val="E7D6D1"/>
                       </a:solidFill>
                       <a:prstDash val="solid"/>
                       <a:round/>
@@ -3028,7 +3157,7 @@
                     </a:lnR>
                     <a:lnT w="12700" cap="flat" cmpd="sng" algn="ctr">
                       <a:solidFill>
-                        <a:srgbClr val="D8E2EA"/>
+                        <a:srgbClr val="E7D6D1"/>
                       </a:solidFill>
                       <a:prstDash val="solid"/>
                       <a:round/>
@@ -3037,7 +3166,7 @@
                     </a:lnT>
                     <a:lnB w="12700" cap="flat" cmpd="sng" algn="ctr">
                       <a:solidFill>
-                        <a:srgbClr val="D8E2EA"/>
+                        <a:srgbClr val="E7D6D1"/>
                       </a:solidFill>
                       <a:prstDash val="solid"/>
                       <a:round/>
@@ -3062,7 +3191,7 @@
                       <a:r>
                         <a:rPr lang="en-US" sz="1350" b="1" dirty="0">
                           <a:solidFill>
-                            <a:srgbClr val="0B5D7A"/>
+                            <a:srgbClr val="BE0000"/>
                           </a:solidFill>
                           <a:latin typeface="Cambria" pitchFamily="34" charset="0"/>
                           <a:ea typeface="Cambria" pitchFamily="34" charset="-122"/>
@@ -3080,7 +3209,7 @@
                   <a:tcPr marL="76200" marR="76200" marT="50800" marB="50800" anchor="ctr">
                     <a:lnL w="12700" cap="flat" cmpd="sng" algn="ctr">
                       <a:solidFill>
-                        <a:srgbClr val="D8E2EA"/>
+                        <a:srgbClr val="E7D6D1"/>
                       </a:solidFill>
                       <a:prstDash val="solid"/>
                       <a:round/>
@@ -3089,7 +3218,7 @@
                     </a:lnL>
                     <a:lnR w="12700" cap="flat" cmpd="sng" algn="ctr">
                       <a:solidFill>
-                        <a:srgbClr val="D8E2EA"/>
+                        <a:srgbClr val="E7D6D1"/>
                       </a:solidFill>
                       <a:prstDash val="solid"/>
                       <a:round/>
@@ -3098,7 +3227,7 @@
                     </a:lnR>
                     <a:lnT w="12700" cap="flat" cmpd="sng" algn="ctr">
                       <a:solidFill>
-                        <a:srgbClr val="D8E2EA"/>
+                        <a:srgbClr val="E7D6D1"/>
                       </a:solidFill>
                       <a:prstDash val="solid"/>
                       <a:round/>
@@ -3107,7 +3236,7 @@
                     </a:lnT>
                     <a:lnB w="12700" cap="flat" cmpd="sng" algn="ctr">
                       <a:solidFill>
-                        <a:srgbClr val="D8E2EA"/>
+                        <a:srgbClr val="E7D6D1"/>
                       </a:solidFill>
                       <a:prstDash val="solid"/>
                       <a:round/>
@@ -3115,7 +3244,7 @@
                       <a:tailEnd type="none" w="med" len="med"/>
                     </a:lnB>
                     <a:solidFill>
-                      <a:srgbClr val="F3F7FA"/>
+                      <a:srgbClr val="FBF4F2"/>
                     </a:solidFill>
                   </a:tcPr>
                 </a:tc>
@@ -3130,7 +3259,7 @@
                       <a:r>
                         <a:rPr lang="en-US" sz="1350" dirty="0">
                           <a:solidFill>
-                            <a:srgbClr val="1E293B"/>
+                            <a:srgbClr val="2A1618"/>
                           </a:solidFill>
                           <a:latin typeface="Calibri" pitchFamily="34" charset="0"/>
                           <a:ea typeface="Calibri" pitchFamily="34" charset="-122"/>
@@ -3148,7 +3277,7 @@
                   <a:tcPr marL="76200" marR="76200" marT="50800" marB="50800" anchor="ctr">
                     <a:lnL w="12700" cap="flat" cmpd="sng" algn="ctr">
                       <a:solidFill>
-                        <a:srgbClr val="D8E2EA"/>
+                        <a:srgbClr val="E7D6D1"/>
                       </a:solidFill>
                       <a:prstDash val="solid"/>
                       <a:round/>
@@ -3157,7 +3286,7 @@
                     </a:lnL>
                     <a:lnR w="12700" cap="flat" cmpd="sng" algn="ctr">
                       <a:solidFill>
-                        <a:srgbClr val="D8E2EA"/>
+                        <a:srgbClr val="E7D6D1"/>
                       </a:solidFill>
                       <a:prstDash val="solid"/>
                       <a:round/>
@@ -3166,7 +3295,7 @@
                     </a:lnR>
                     <a:lnT w="12700" cap="flat" cmpd="sng" algn="ctr">
                       <a:solidFill>
-                        <a:srgbClr val="D8E2EA"/>
+                        <a:srgbClr val="E7D6D1"/>
                       </a:solidFill>
                       <a:prstDash val="solid"/>
                       <a:round/>
@@ -3175,7 +3304,7 @@
                     </a:lnT>
                     <a:lnB w="12700" cap="flat" cmpd="sng" algn="ctr">
                       <a:solidFill>
-                        <a:srgbClr val="D8E2EA"/>
+                        <a:srgbClr val="E7D6D1"/>
                       </a:solidFill>
                       <a:prstDash val="solid"/>
                       <a:round/>
@@ -3183,7 +3312,7 @@
                       <a:tailEnd type="none" w="med" len="med"/>
                     </a:lnB>
                     <a:solidFill>
-                      <a:srgbClr val="F3F7FA"/>
+                      <a:srgbClr val="FBF4F2"/>
                     </a:solidFill>
                   </a:tcPr>
                 </a:tc>
@@ -3198,7 +3327,7 @@
                       <a:r>
                         <a:rPr lang="en-US" sz="1350" dirty="0">
                           <a:solidFill>
-                            <a:srgbClr val="1E293B"/>
+                            <a:srgbClr val="2A1618"/>
                           </a:solidFill>
                           <a:latin typeface="Calibri" pitchFamily="34" charset="0"/>
                           <a:ea typeface="Calibri" pitchFamily="34" charset="-122"/>
@@ -3216,7 +3345,7 @@
                   <a:tcPr marL="76200" marR="76200" marT="50800" marB="50800" anchor="ctr">
                     <a:lnL w="12700" cap="flat" cmpd="sng" algn="ctr">
                       <a:solidFill>
-                        <a:srgbClr val="D8E2EA"/>
+                        <a:srgbClr val="E7D6D1"/>
                       </a:solidFill>
                       <a:prstDash val="solid"/>
                       <a:round/>
@@ -3225,7 +3354,7 @@
                     </a:lnL>
                     <a:lnR w="12700" cap="flat" cmpd="sng" algn="ctr">
                       <a:solidFill>
-                        <a:srgbClr val="D8E2EA"/>
+                        <a:srgbClr val="E7D6D1"/>
                       </a:solidFill>
                       <a:prstDash val="solid"/>
                       <a:round/>
@@ -3234,7 +3363,7 @@
                     </a:lnR>
                     <a:lnT w="12700" cap="flat" cmpd="sng" algn="ctr">
                       <a:solidFill>
-                        <a:srgbClr val="D8E2EA"/>
+                        <a:srgbClr val="E7D6D1"/>
                       </a:solidFill>
                       <a:prstDash val="solid"/>
                       <a:round/>
@@ -3243,7 +3372,7 @@
                     </a:lnT>
                     <a:lnB w="12700" cap="flat" cmpd="sng" algn="ctr">
                       <a:solidFill>
-                        <a:srgbClr val="D8E2EA"/>
+                        <a:srgbClr val="E7D6D1"/>
                       </a:solidFill>
                       <a:prstDash val="solid"/>
                       <a:round/>
@@ -3251,7 +3380,7 @@
                       <a:tailEnd type="none" w="med" len="med"/>
                     </a:lnB>
                     <a:solidFill>
-                      <a:srgbClr val="F3F7FA"/>
+                      <a:srgbClr val="FBF4F2"/>
                     </a:solidFill>
                   </a:tcPr>
                 </a:tc>
@@ -3268,7 +3397,7 @@
                       <a:r>
                         <a:rPr lang="en-US" sz="1350" b="1" dirty="0">
                           <a:solidFill>
-                            <a:srgbClr val="0B5D7A"/>
+                            <a:srgbClr val="BE0000"/>
                           </a:solidFill>
                           <a:latin typeface="Cambria" pitchFamily="34" charset="0"/>
                           <a:ea typeface="Cambria" pitchFamily="34" charset="-122"/>
@@ -3286,7 +3415,7 @@
                   <a:tcPr marL="76200" marR="76200" marT="50800" marB="50800" anchor="ctr">
                     <a:lnL w="12700" cap="flat" cmpd="sng" algn="ctr">
                       <a:solidFill>
-                        <a:srgbClr val="D8E2EA"/>
+                        <a:srgbClr val="E7D6D1"/>
                       </a:solidFill>
                       <a:prstDash val="solid"/>
                       <a:round/>
@@ -3295,7 +3424,7 @@
                     </a:lnL>
                     <a:lnR w="12700" cap="flat" cmpd="sng" algn="ctr">
                       <a:solidFill>
-                        <a:srgbClr val="D8E2EA"/>
+                        <a:srgbClr val="E7D6D1"/>
                       </a:solidFill>
                       <a:prstDash val="solid"/>
                       <a:round/>
@@ -3304,7 +3433,7 @@
                     </a:lnR>
                     <a:lnT w="12700" cap="flat" cmpd="sng" algn="ctr">
                       <a:solidFill>
-                        <a:srgbClr val="D8E2EA"/>
+                        <a:srgbClr val="E7D6D1"/>
                       </a:solidFill>
                       <a:prstDash val="solid"/>
                       <a:round/>
@@ -3313,7 +3442,7 @@
                     </a:lnT>
                     <a:lnB w="12700" cap="flat" cmpd="sng" algn="ctr">
                       <a:solidFill>
-                        <a:srgbClr val="D8E2EA"/>
+                        <a:srgbClr val="E7D6D1"/>
                       </a:solidFill>
                       <a:prstDash val="solid"/>
                       <a:round/>
@@ -3336,7 +3465,7 @@
                       <a:r>
                         <a:rPr lang="en-US" sz="1350" dirty="0">
                           <a:solidFill>
-                            <a:srgbClr val="1E293B"/>
+                            <a:srgbClr val="2A1618"/>
                           </a:solidFill>
                           <a:latin typeface="Calibri" pitchFamily="34" charset="0"/>
                           <a:ea typeface="Calibri" pitchFamily="34" charset="-122"/>
@@ -3354,7 +3483,7 @@
                   <a:tcPr marL="76200" marR="76200" marT="50800" marB="50800" anchor="ctr">
                     <a:lnL w="12700" cap="flat" cmpd="sng" algn="ctr">
                       <a:solidFill>
-                        <a:srgbClr val="D8E2EA"/>
+                        <a:srgbClr val="E7D6D1"/>
                       </a:solidFill>
                       <a:prstDash val="solid"/>
                       <a:round/>
@@ -3363,7 +3492,7 @@
                     </a:lnL>
                     <a:lnR w="12700" cap="flat" cmpd="sng" algn="ctr">
                       <a:solidFill>
-                        <a:srgbClr val="D8E2EA"/>
+                        <a:srgbClr val="E7D6D1"/>
                       </a:solidFill>
                       <a:prstDash val="solid"/>
                       <a:round/>
@@ -3372,7 +3501,7 @@
                     </a:lnR>
                     <a:lnT w="12700" cap="flat" cmpd="sng" algn="ctr">
                       <a:solidFill>
-                        <a:srgbClr val="D8E2EA"/>
+                        <a:srgbClr val="E7D6D1"/>
                       </a:solidFill>
                       <a:prstDash val="solid"/>
                       <a:round/>
@@ -3381,7 +3510,7 @@
                     </a:lnT>
                     <a:lnB w="12700" cap="flat" cmpd="sng" algn="ctr">
                       <a:solidFill>
-                        <a:srgbClr val="D8E2EA"/>
+                        <a:srgbClr val="E7D6D1"/>
                       </a:solidFill>
                       <a:prstDash val="solid"/>
                       <a:round/>
@@ -3404,13 +3533,13 @@
                       <a:r>
                         <a:rPr lang="en-US" sz="1350" dirty="0">
                           <a:solidFill>
-                            <a:srgbClr val="1E293B"/>
+                            <a:srgbClr val="2A1618"/>
                           </a:solidFill>
                           <a:latin typeface="Calibri" pitchFamily="34" charset="0"/>
                           <a:ea typeface="Calibri" pitchFamily="34" charset="-122"/>
                           <a:cs typeface="Calibri" pitchFamily="34" charset="-120"/>
                         </a:rPr>
-                        <a:t>16 takes × 3 sessions per position</a:t>
+                        <a:t>16 takes x 3 sessions per position</a:t>
                       </a:r>
                       <a:endParaRPr lang="en-US" sz="1350" dirty="0">
                         <a:latin typeface="Calibri" charset="0"/>
@@ -3422,7 +3551,7 @@
                   <a:tcPr marL="76200" marR="76200" marT="50800" marB="50800" anchor="ctr">
                     <a:lnL w="12700" cap="flat" cmpd="sng" algn="ctr">
                       <a:solidFill>
-                        <a:srgbClr val="D8E2EA"/>
+                        <a:srgbClr val="E7D6D1"/>
                       </a:solidFill>
                       <a:prstDash val="solid"/>
                       <a:round/>
@@ -3431,7 +3560,7 @@
                     </a:lnL>
                     <a:lnR w="12700" cap="flat" cmpd="sng" algn="ctr">
                       <a:solidFill>
-                        <a:srgbClr val="D8E2EA"/>
+                        <a:srgbClr val="E7D6D1"/>
                       </a:solidFill>
                       <a:prstDash val="solid"/>
                       <a:round/>
@@ -3440,7 +3569,7 @@
                     </a:lnR>
                     <a:lnT w="12700" cap="flat" cmpd="sng" algn="ctr">
                       <a:solidFill>
-                        <a:srgbClr val="D8E2EA"/>
+                        <a:srgbClr val="E7D6D1"/>
                       </a:solidFill>
                       <a:prstDash val="solid"/>
                       <a:round/>
@@ -3449,7 +3578,7 @@
                     </a:lnT>
                     <a:lnB w="12700" cap="flat" cmpd="sng" algn="ctr">
                       <a:solidFill>
-                        <a:srgbClr val="D8E2EA"/>
+                        <a:srgbClr val="E7D6D1"/>
                       </a:solidFill>
                       <a:prstDash val="solid"/>
                       <a:round/>
@@ -3493,13 +3622,13 @@
             <a:r>
               <a:rPr lang="en-US" sz="1300" i="1" dirty="0">
                 <a:solidFill>
-                  <a:srgbClr val="5B6B7B"/>
+                  <a:srgbClr val="836A68"/>
                 </a:solidFill>
                 <a:latin typeface="Calibri" pitchFamily="34" charset="0"/>
                 <a:ea typeface="Calibri" pitchFamily="34" charset="-122"/>
                 <a:cs typeface="Calibri" pitchFamily="34" charset="-120"/>
               </a:rPr>
-              <a:t>Different geometry, coverage, band and noise — a fair sim↔measured comparison must control for all of these.</a:t>
+              <a:t>The 4 antennas are the SAME design in both; a fair sim vs measured comparison controls for the grid, depth, band and noise.</a:t>
             </a:r>
             <a:endParaRPr lang="en-US" sz="1300" dirty="0"/>
           </a:p>
@@ -3564,13 +3693,13 @@
             <a:r>
               <a:rPr lang="en-US" sz="2900" b="1" dirty="0">
                 <a:solidFill>
-                  <a:srgbClr val="1E293B"/>
+                  <a:srgbClr val="2A1618"/>
                 </a:solidFill>
                 <a:latin typeface="Cambria" pitchFamily="34" charset="0"/>
                 <a:ea typeface="Cambria" pitchFamily="34" charset="-122"/>
                 <a:cs typeface="Cambria" pitchFamily="34" charset="-120"/>
               </a:rPr>
-              <a:t>Raw S-parameters — the antenna domain gap</a:t>
+              <a:t>Reflection per antenna, sim vs measured</a:t>
             </a:r>
             <a:endParaRPr lang="en-US" sz="2900" dirty="0"/>
           </a:p>
@@ -3603,13 +3732,13 @@
             <a:r>
               <a:rPr lang="en-US" sz="1400" b="1" dirty="0">
                 <a:solidFill>
-                  <a:srgbClr val="1C9AA8"/>
+                  <a:srgbClr val="BE0000"/>
                 </a:solidFill>
                 <a:latin typeface="Calibri" pitchFamily="34" charset="0"/>
                 <a:ea typeface="Calibri" pitchFamily="34" charset="-122"/>
                 <a:cs typeface="Calibri" pitchFamily="34" charset="-120"/>
               </a:rPr>
-              <a:t>How far apart are the simulated and measured antennas, before any tumor?</a:t>
+              <a:t>Same design, yet the measured ports differ from each other; the sim ones are near-identical</a:t>
             </a:r>
             <a:endParaRPr lang="en-US" sz="1400" dirty="0"/>
           </a:p>
@@ -3631,53 +3760,14 @@
         </p:blipFill>
         <p:spPr>
           <a:xfrm>
-            <a:off x="640080" y="1645920"/>
-            <a:ext cx="10972800" cy="4206240"/>
+            <a:off x="2148840" y="1554480"/>
+            <a:ext cx="7863840" cy="4828032"/>
           </a:xfrm>
           <a:prstGeom prst="rect">
             <a:avLst/>
           </a:prstGeom>
         </p:spPr>
       </p:pic>
-      <p:sp>
-        <p:nvSpPr>
-          <p:cNvPr id="5" name="Text 2"/>
-          <p:cNvSpPr/>
-          <p:nvPr/>
-        </p:nvSpPr>
-        <p:spPr>
-          <a:xfrm>
-            <a:off x="640080" y="5989320"/>
-            <a:ext cx="10881360" cy="457200"/>
-          </a:xfrm>
-          <a:prstGeom prst="rect">
-            <a:avLst/>
-          </a:prstGeom>
-          <a:noFill/>
-          <a:ln/>
-        </p:spPr>
-        <p:txBody>
-          <a:bodyPr wrap="square" lIns="0" tIns="0" rIns="0" bIns="0" rtlCol="0" anchor="ctr"/>
-          <a:lstStyle/>
-          <a:p>
-            <a:pPr algn="ctr" indent="0" marL="0">
-              <a:buNone/>
-            </a:pPr>
-            <a:r>
-              <a:rPr lang="en-US" sz="1350" i="1" dirty="0">
-                <a:solidFill>
-                  <a:srgbClr val="5B6B7B"/>
-                </a:solidFill>
-                <a:latin typeface="Calibri" pitchFamily="34" charset="0"/>
-                <a:ea typeface="Calibri" pitchFamily="34" charset="-122"/>
-                <a:cs typeface="Calibri" pitchFamily="34" charset="-120"/>
-              </a:rPr>
-              <a:t>The two antenna models resonate and couple differently — a real domain gap that any sim→measured transfer must bridge.</a:t>
-            </a:r>
-            <a:endParaRPr lang="en-US" sz="1350" dirty="0"/>
-          </a:p>
-        </p:txBody>
-      </p:sp>
     </p:spTree>
   </p:cSld>
   <p:clrMapOvr>
@@ -3737,13 +3827,13 @@
             <a:r>
               <a:rPr lang="en-US" sz="2900" b="1" dirty="0">
                 <a:solidFill>
-                  <a:srgbClr val="1E293B"/>
+                  <a:srgbClr val="2A1618"/>
                 </a:solidFill>
                 <a:latin typeface="Cambria" pitchFamily="34" charset="0"/>
                 <a:ea typeface="Cambria" pitchFamily="34" charset="-122"/>
                 <a:cs typeface="Cambria" pitchFamily="34" charset="-120"/>
               </a:rPr>
-              <a:t>The numbers — signal vs. model</a:t>
+              <a:t>Detectable-difference pattern, measured vs sim</a:t>
             </a:r>
             <a:endParaRPr lang="en-US" sz="2900" dirty="0"/>
           </a:p>
@@ -3776,1364 +3866,42 @@
             <a:r>
               <a:rPr lang="en-US" sz="1400" b="1" dirty="0">
                 <a:solidFill>
-                  <a:srgbClr val="1C9AA8"/>
+                  <a:srgbClr val="BE0000"/>
                 </a:solidFill>
                 <a:latin typeface="Calibri" pitchFamily="34" charset="0"/>
                 <a:ea typeface="Calibri" pitchFamily="34" charset="-122"/>
                 <a:cs typeface="Calibri" pitchFamily="34" charset="-120"/>
               </a:rPr>
-              <a:t>Two probes of the empty phantom: does the SIGNAL interpolate, and can the CNN learn it?</a:t>
+              <a:t>The tumor's detectable change per position; the spatial pattern matches</a:t>
             </a:r>
             <a:endParaRPr lang="en-US" sz="1400" dirty="0"/>
           </a:p>
         </p:txBody>
       </p:sp>
-      <p:graphicFrame>
-        <p:nvGraphicFramePr>
-          <p:cNvPr id="6" name="Table 0"/>
-          <p:cNvGraphicFramePr>
-            <a:graphicFrameLocks noGrp="1"/>
-          </p:cNvGraphicFramePr>
-          <p:nvPr>
-            <p:extLst>
-              <p:ext uri="{D42A27DB-BD31-4B8C-83A1-F6EECF244321}">
-                <p14:modId xmlns:p14="http://schemas.microsoft.com/office/powerpoint/2010/main" val="1579011935"/>
-              </p:ext>
-            </p:extLst>
-          </p:nvPr>
-        </p:nvGraphicFramePr>
-        <p:xfrm>
-          <a:off x="548640" y="1645920"/>
-          <a:ext cx="6949440" cy="914400"/>
-        </p:xfrm>
-        <a:graphic>
-          <a:graphicData uri="http://schemas.openxmlformats.org/drawingml/2006/table">
-            <a:tbl>
-              <a:tblPr/>
-              <a:tblGrid>
-                <a:gridCol w="3200400"/>
-                <a:gridCol w="1280160"/>
-                <a:gridCol w="1234440"/>
-                <a:gridCol w="1234440"/>
-              </a:tblGrid>
-              <a:tr h="658368">
-                <a:tc>
-                  <a:txBody>
-                    <a:bodyPr/>
-                    <a:lstStyle/>
-                    <a:p>
-                      <a:pPr algn="l" indent="0" marL="0">
-                        <a:buNone/>
-                      </a:pPr>
-                      <a:r>
-                        <a:rPr lang="en-US" sz="1350" b="1" dirty="0">
-                          <a:solidFill>
-                            <a:srgbClr val="FFFFFF"/>
-                          </a:solidFill>
-                          <a:latin typeface="Calibri" pitchFamily="34" charset="0"/>
-                          <a:ea typeface="Calibri" pitchFamily="34" charset="-122"/>
-                          <a:cs typeface="Calibri" pitchFamily="34" charset="-120"/>
-                        </a:rPr>
-                        <a:t>Probe (leave-one-position-out)</a:t>
-                      </a:r>
-                      <a:endParaRPr lang="en-US" sz="1350" dirty="0">
-                        <a:latin typeface="Calibri" charset="0"/>
-                        <a:ea typeface="Calibri" charset="0"/>
-                        <a:cs typeface="Calibri" charset="0"/>
-                      </a:endParaRPr>
-                    </a:p>
-                  </a:txBody>
-                  <a:tcPr marL="76200" marR="76200" marT="63500" marB="63500" anchor="ctr">
-                    <a:lnL w="12700" cap="flat" cmpd="sng" algn="ctr">
-                      <a:solidFill>
-                        <a:srgbClr val="D8E2EA"/>
-                      </a:solidFill>
-                      <a:prstDash val="solid"/>
-                      <a:round/>
-                      <a:headEnd type="none" w="med" len="med"/>
-                      <a:tailEnd type="none" w="med" len="med"/>
-                    </a:lnL>
-                    <a:lnR w="12700" cap="flat" cmpd="sng" algn="ctr">
-                      <a:solidFill>
-                        <a:srgbClr val="D8E2EA"/>
-                      </a:solidFill>
-                      <a:prstDash val="solid"/>
-                      <a:round/>
-                      <a:headEnd type="none" w="med" len="med"/>
-                      <a:tailEnd type="none" w="med" len="med"/>
-                    </a:lnR>
-                    <a:lnT w="12700" cap="flat" cmpd="sng" algn="ctr">
-                      <a:solidFill>
-                        <a:srgbClr val="D8E2EA"/>
-                      </a:solidFill>
-                      <a:prstDash val="solid"/>
-                      <a:round/>
-                      <a:headEnd type="none" w="med" len="med"/>
-                      <a:tailEnd type="none" w="med" len="med"/>
-                    </a:lnT>
-                    <a:lnB w="12700" cap="flat" cmpd="sng" algn="ctr">
-                      <a:solidFill>
-                        <a:srgbClr val="D8E2EA"/>
-                      </a:solidFill>
-                      <a:prstDash val="solid"/>
-                      <a:round/>
-                      <a:headEnd type="none" w="med" len="med"/>
-                      <a:tailEnd type="none" w="med" len="med"/>
-                    </a:lnB>
-                    <a:solidFill>
-                      <a:srgbClr val="0B5D7A"/>
-                    </a:solidFill>
-                  </a:tcPr>
-                </a:tc>
-                <a:tc>
-                  <a:txBody>
-                    <a:bodyPr/>
-                    <a:lstStyle/>
-                    <a:p>
-                      <a:pPr algn="ctr" indent="0" marL="0">
-                        <a:buNone/>
-                      </a:pPr>
-                      <a:r>
-                        <a:rPr lang="en-US" sz="1350" b="1" dirty="0">
-                          <a:solidFill>
-                            <a:srgbClr val="FFFFFF"/>
-                          </a:solidFill>
-                          <a:latin typeface="Calibri" pitchFamily="34" charset="0"/>
-                          <a:ea typeface="Calibri" pitchFamily="34" charset="-122"/>
-                          <a:cs typeface="Calibri" pitchFamily="34" charset="-120"/>
-                        </a:rPr>
-                        <a:t>Trains on</a:t>
-                      </a:r>
-                      <a:endParaRPr lang="en-US" sz="1350" dirty="0">
-                        <a:latin typeface="Calibri" charset="0"/>
-                        <a:ea typeface="Calibri" charset="0"/>
-                        <a:cs typeface="Calibri" charset="0"/>
-                      </a:endParaRPr>
-                    </a:p>
-                  </a:txBody>
-                  <a:tcPr marL="76200" marR="76200" marT="63500" marB="63500" anchor="ctr">
-                    <a:lnL w="12700" cap="flat" cmpd="sng" algn="ctr">
-                      <a:solidFill>
-                        <a:srgbClr val="D8E2EA"/>
-                      </a:solidFill>
-                      <a:prstDash val="solid"/>
-                      <a:round/>
-                      <a:headEnd type="none" w="med" len="med"/>
-                      <a:tailEnd type="none" w="med" len="med"/>
-                    </a:lnL>
-                    <a:lnR w="12700" cap="flat" cmpd="sng" algn="ctr">
-                      <a:solidFill>
-                        <a:srgbClr val="D8E2EA"/>
-                      </a:solidFill>
-                      <a:prstDash val="solid"/>
-                      <a:round/>
-                      <a:headEnd type="none" w="med" len="med"/>
-                      <a:tailEnd type="none" w="med" len="med"/>
-                    </a:lnR>
-                    <a:lnT w="12700" cap="flat" cmpd="sng" algn="ctr">
-                      <a:solidFill>
-                        <a:srgbClr val="D8E2EA"/>
-                      </a:solidFill>
-                      <a:prstDash val="solid"/>
-                      <a:round/>
-                      <a:headEnd type="none" w="med" len="med"/>
-                      <a:tailEnd type="none" w="med" len="med"/>
-                    </a:lnT>
-                    <a:lnB w="12700" cap="flat" cmpd="sng" algn="ctr">
-                      <a:solidFill>
-                        <a:srgbClr val="D8E2EA"/>
-                      </a:solidFill>
-                      <a:prstDash val="solid"/>
-                      <a:round/>
-                      <a:headEnd type="none" w="med" len="med"/>
-                      <a:tailEnd type="none" w="med" len="med"/>
-                    </a:lnB>
-                    <a:solidFill>
-                      <a:srgbClr val="0B5D7A"/>
-                    </a:solidFill>
-                  </a:tcPr>
-                </a:tc>
-                <a:tc>
-                  <a:txBody>
-                    <a:bodyPr/>
-                    <a:lstStyle/>
-                    <a:p>
-                      <a:pPr algn="ctr" indent="0" marL="0">
-                        <a:buNone/>
-                      </a:pPr>
-                      <a:r>
-                        <a:rPr lang="en-US" sz="1350" b="1" dirty="0">
-                          <a:solidFill>
-                            <a:srgbClr val="FFFFFF"/>
-                          </a:solidFill>
-                          <a:latin typeface="Calibri" pitchFamily="34" charset="0"/>
-                          <a:ea typeface="Calibri" pitchFamily="34" charset="-122"/>
-                          <a:cs typeface="Calibri" pitchFamily="34" charset="-120"/>
-                        </a:rPr>
-                        <a:t>Sim empty</a:t>
-                      </a:r>
-                      <a:endParaRPr lang="en-US" sz="1350" dirty="0">
-                        <a:latin typeface="Calibri" charset="0"/>
-                        <a:ea typeface="Calibri" charset="0"/>
-                        <a:cs typeface="Calibri" charset="0"/>
-                      </a:endParaRPr>
-                    </a:p>
-                  </a:txBody>
-                  <a:tcPr marL="76200" marR="76200" marT="63500" marB="63500" anchor="ctr">
-                    <a:lnL w="12700" cap="flat" cmpd="sng" algn="ctr">
-                      <a:solidFill>
-                        <a:srgbClr val="D8E2EA"/>
-                      </a:solidFill>
-                      <a:prstDash val="solid"/>
-                      <a:round/>
-                      <a:headEnd type="none" w="med" len="med"/>
-                      <a:tailEnd type="none" w="med" len="med"/>
-                    </a:lnL>
-                    <a:lnR w="12700" cap="flat" cmpd="sng" algn="ctr">
-                      <a:solidFill>
-                        <a:srgbClr val="D8E2EA"/>
-                      </a:solidFill>
-                      <a:prstDash val="solid"/>
-                      <a:round/>
-                      <a:headEnd type="none" w="med" len="med"/>
-                      <a:tailEnd type="none" w="med" len="med"/>
-                    </a:lnR>
-                    <a:lnT w="12700" cap="flat" cmpd="sng" algn="ctr">
-                      <a:solidFill>
-                        <a:srgbClr val="D8E2EA"/>
-                      </a:solidFill>
-                      <a:prstDash val="solid"/>
-                      <a:round/>
-                      <a:headEnd type="none" w="med" len="med"/>
-                      <a:tailEnd type="none" w="med" len="med"/>
-                    </a:lnT>
-                    <a:lnB w="12700" cap="flat" cmpd="sng" algn="ctr">
-                      <a:solidFill>
-                        <a:srgbClr val="D8E2EA"/>
-                      </a:solidFill>
-                      <a:prstDash val="solid"/>
-                      <a:round/>
-                      <a:headEnd type="none" w="med" len="med"/>
-                      <a:tailEnd type="none" w="med" len="med"/>
-                    </a:lnB>
-                    <a:solidFill>
-                      <a:srgbClr val="0B5D7A"/>
-                    </a:solidFill>
-                  </a:tcPr>
-                </a:tc>
-                <a:tc>
-                  <a:txBody>
-                    <a:bodyPr/>
-                    <a:lstStyle/>
-                    <a:p>
-                      <a:pPr algn="ctr" indent="0" marL="0">
-                        <a:buNone/>
-                      </a:pPr>
-                      <a:r>
-                        <a:rPr lang="en-US" sz="1350" b="1" dirty="0">
-                          <a:solidFill>
-                            <a:srgbClr val="FFFFFF"/>
-                          </a:solidFill>
-                          <a:latin typeface="Calibri" pitchFamily="34" charset="0"/>
-                          <a:ea typeface="Calibri" pitchFamily="34" charset="-122"/>
-                          <a:cs typeface="Calibri" pitchFamily="34" charset="-120"/>
-                        </a:rPr>
-                        <a:t>Measured empty</a:t>
-                      </a:r>
-                      <a:endParaRPr lang="en-US" sz="1350" dirty="0">
-                        <a:latin typeface="Calibri" charset="0"/>
-                        <a:ea typeface="Calibri" charset="0"/>
-                        <a:cs typeface="Calibri" charset="0"/>
-                      </a:endParaRPr>
-                    </a:p>
-                  </a:txBody>
-                  <a:tcPr marL="76200" marR="76200" marT="63500" marB="63500" anchor="ctr">
-                    <a:lnL w="12700" cap="flat" cmpd="sng" algn="ctr">
-                      <a:solidFill>
-                        <a:srgbClr val="D8E2EA"/>
-                      </a:solidFill>
-                      <a:prstDash val="solid"/>
-                      <a:round/>
-                      <a:headEnd type="none" w="med" len="med"/>
-                      <a:tailEnd type="none" w="med" len="med"/>
-                    </a:lnL>
-                    <a:lnR w="12700" cap="flat" cmpd="sng" algn="ctr">
-                      <a:solidFill>
-                        <a:srgbClr val="D8E2EA"/>
-                      </a:solidFill>
-                      <a:prstDash val="solid"/>
-                      <a:round/>
-                      <a:headEnd type="none" w="med" len="med"/>
-                      <a:tailEnd type="none" w="med" len="med"/>
-                    </a:lnR>
-                    <a:lnT w="12700" cap="flat" cmpd="sng" algn="ctr">
-                      <a:solidFill>
-                        <a:srgbClr val="D8E2EA"/>
-                      </a:solidFill>
-                      <a:prstDash val="solid"/>
-                      <a:round/>
-                      <a:headEnd type="none" w="med" len="med"/>
-                      <a:tailEnd type="none" w="med" len="med"/>
-                    </a:lnT>
-                    <a:lnB w="12700" cap="flat" cmpd="sng" algn="ctr">
-                      <a:solidFill>
-                        <a:srgbClr val="D8E2EA"/>
-                      </a:solidFill>
-                      <a:prstDash val="solid"/>
-                      <a:round/>
-                      <a:headEnd type="none" w="med" len="med"/>
-                      <a:tailEnd type="none" w="med" len="med"/>
-                    </a:lnB>
-                    <a:solidFill>
-                      <a:srgbClr val="0B5D7A"/>
-                    </a:solidFill>
-                  </a:tcPr>
-                </a:tc>
-              </a:tr>
-              <a:tr h="658368">
-                <a:tc>
-                  <a:txBody>
-                    <a:bodyPr/>
-                    <a:lstStyle/>
-                    <a:p>
-                      <a:pPr algn="l" indent="0" marL="0">
-                        <a:buNone/>
-                      </a:pPr>
-                      <a:r>
-                        <a:rPr lang="en-US" sz="1400" b="1" dirty="0">
-                          <a:solidFill>
-                            <a:srgbClr val="1E293B"/>
-                          </a:solidFill>
-                          <a:latin typeface="Calibri" pitchFamily="34" charset="0"/>
-                          <a:ea typeface="Calibri" pitchFamily="34" charset="-122"/>
-                          <a:cs typeface="Calibri" pitchFamily="34" charset="-120"/>
-                        </a:rPr>
-                        <a:t>k-NN  (training-free — pure signal)</a:t>
-                      </a:r>
-                      <a:endParaRPr lang="en-US" sz="1400" dirty="0">
-                        <a:latin typeface="Calibri" charset="0"/>
-                        <a:ea typeface="Calibri" charset="0"/>
-                        <a:cs typeface="Calibri" charset="0"/>
-                      </a:endParaRPr>
-                    </a:p>
-                  </a:txBody>
-                  <a:tcPr marL="76200" marR="76200" marT="63500" marB="63500" anchor="ctr">
-                    <a:lnL w="12700" cap="flat" cmpd="sng" algn="ctr">
-                      <a:solidFill>
-                        <a:srgbClr val="D8E2EA"/>
-                      </a:solidFill>
-                      <a:prstDash val="solid"/>
-                      <a:round/>
-                      <a:headEnd type="none" w="med" len="med"/>
-                      <a:tailEnd type="none" w="med" len="med"/>
-                    </a:lnL>
-                    <a:lnR w="12700" cap="flat" cmpd="sng" algn="ctr">
-                      <a:solidFill>
-                        <a:srgbClr val="D8E2EA"/>
-                      </a:solidFill>
-                      <a:prstDash val="solid"/>
-                      <a:round/>
-                      <a:headEnd type="none" w="med" len="med"/>
-                      <a:tailEnd type="none" w="med" len="med"/>
-                    </a:lnR>
-                    <a:lnT w="12700" cap="flat" cmpd="sng" algn="ctr">
-                      <a:solidFill>
-                        <a:srgbClr val="D8E2EA"/>
-                      </a:solidFill>
-                      <a:prstDash val="solid"/>
-                      <a:round/>
-                      <a:headEnd type="none" w="med" len="med"/>
-                      <a:tailEnd type="none" w="med" len="med"/>
-                    </a:lnT>
-                    <a:lnB w="12700" cap="flat" cmpd="sng" algn="ctr">
-                      <a:solidFill>
-                        <a:srgbClr val="D8E2EA"/>
-                      </a:solidFill>
-                      <a:prstDash val="solid"/>
-                      <a:round/>
-                      <a:headEnd type="none" w="med" len="med"/>
-                      <a:tailEnd type="none" w="med" len="med"/>
-                    </a:lnB>
-                    <a:solidFill>
-                      <a:srgbClr val="F3F7FA"/>
-                    </a:solidFill>
-                  </a:tcPr>
-                </a:tc>
-                <a:tc>
-                  <a:txBody>
-                    <a:bodyPr/>
-                    <a:lstStyle/>
-                    <a:p>
-                      <a:pPr algn="ctr" indent="0" marL="0">
-                        <a:buNone/>
-                      </a:pPr>
-                      <a:r>
-                        <a:rPr lang="en-US" sz="1400" dirty="0">
-                          <a:solidFill>
-                            <a:srgbClr val="1E293B"/>
-                          </a:solidFill>
-                          <a:latin typeface="Calibri" pitchFamily="34" charset="0"/>
-                          <a:ea typeface="Calibri" pitchFamily="34" charset="-122"/>
-                          <a:cs typeface="Calibri" pitchFamily="34" charset="-120"/>
-                        </a:rPr>
-                        <a:t>nothing</a:t>
-                      </a:r>
-                      <a:endParaRPr lang="en-US" sz="1400" dirty="0">
-                        <a:latin typeface="Calibri" charset="0"/>
-                        <a:ea typeface="Calibri" charset="0"/>
-                        <a:cs typeface="Calibri" charset="0"/>
-                      </a:endParaRPr>
-                    </a:p>
-                  </a:txBody>
-                  <a:tcPr marL="76200" marR="76200" marT="63500" marB="63500" anchor="ctr">
-                    <a:lnL w="12700" cap="flat" cmpd="sng" algn="ctr">
-                      <a:solidFill>
-                        <a:srgbClr val="D8E2EA"/>
-                      </a:solidFill>
-                      <a:prstDash val="solid"/>
-                      <a:round/>
-                      <a:headEnd type="none" w="med" len="med"/>
-                      <a:tailEnd type="none" w="med" len="med"/>
-                    </a:lnL>
-                    <a:lnR w="12700" cap="flat" cmpd="sng" algn="ctr">
-                      <a:solidFill>
-                        <a:srgbClr val="D8E2EA"/>
-                      </a:solidFill>
-                      <a:prstDash val="solid"/>
-                      <a:round/>
-                      <a:headEnd type="none" w="med" len="med"/>
-                      <a:tailEnd type="none" w="med" len="med"/>
-                    </a:lnR>
-                    <a:lnT w="12700" cap="flat" cmpd="sng" algn="ctr">
-                      <a:solidFill>
-                        <a:srgbClr val="D8E2EA"/>
-                      </a:solidFill>
-                      <a:prstDash val="solid"/>
-                      <a:round/>
-                      <a:headEnd type="none" w="med" len="med"/>
-                      <a:tailEnd type="none" w="med" len="med"/>
-                    </a:lnT>
-                    <a:lnB w="12700" cap="flat" cmpd="sng" algn="ctr">
-                      <a:solidFill>
-                        <a:srgbClr val="D8E2EA"/>
-                      </a:solidFill>
-                      <a:prstDash val="solid"/>
-                      <a:round/>
-                      <a:headEnd type="none" w="med" len="med"/>
-                      <a:tailEnd type="none" w="med" len="med"/>
-                    </a:lnB>
-                    <a:solidFill>
-                      <a:srgbClr val="F3F7FA"/>
-                    </a:solidFill>
-                  </a:tcPr>
-                </a:tc>
-                <a:tc>
-                  <a:txBody>
-                    <a:bodyPr/>
-                    <a:lstStyle/>
-                    <a:p>
-                      <a:pPr algn="ctr" indent="0" marL="0">
-                        <a:buNone/>
-                      </a:pPr>
-                      <a:r>
-                        <a:rPr lang="en-US" sz="1400" dirty="0">
-                          <a:solidFill>
-                            <a:srgbClr val="0B5D7A"/>
-                          </a:solidFill>
-                          <a:latin typeface="Calibri" pitchFamily="34" charset="0"/>
-                          <a:ea typeface="Calibri" pitchFamily="34" charset="-122"/>
-                          <a:cs typeface="Calibri" pitchFamily="34" charset="-120"/>
-                        </a:rPr>
-                        <a:t>6.7 mm</a:t>
-                      </a:r>
-                      <a:endParaRPr lang="en-US" sz="1400" dirty="0">
-                        <a:latin typeface="Calibri" charset="0"/>
-                        <a:ea typeface="Calibri" charset="0"/>
-                        <a:cs typeface="Calibri" charset="0"/>
-                      </a:endParaRPr>
-                    </a:p>
-                  </a:txBody>
-                  <a:tcPr marL="76200" marR="76200" marT="63500" marB="63500" anchor="ctr">
-                    <a:lnL w="12700" cap="flat" cmpd="sng" algn="ctr">
-                      <a:solidFill>
-                        <a:srgbClr val="D8E2EA"/>
-                      </a:solidFill>
-                      <a:prstDash val="solid"/>
-                      <a:round/>
-                      <a:headEnd type="none" w="med" len="med"/>
-                      <a:tailEnd type="none" w="med" len="med"/>
-                    </a:lnL>
-                    <a:lnR w="12700" cap="flat" cmpd="sng" algn="ctr">
-                      <a:solidFill>
-                        <a:srgbClr val="D8E2EA"/>
-                      </a:solidFill>
-                      <a:prstDash val="solid"/>
-                      <a:round/>
-                      <a:headEnd type="none" w="med" len="med"/>
-                      <a:tailEnd type="none" w="med" len="med"/>
-                    </a:lnR>
-                    <a:lnT w="12700" cap="flat" cmpd="sng" algn="ctr">
-                      <a:solidFill>
-                        <a:srgbClr val="D8E2EA"/>
-                      </a:solidFill>
-                      <a:prstDash val="solid"/>
-                      <a:round/>
-                      <a:headEnd type="none" w="med" len="med"/>
-                      <a:tailEnd type="none" w="med" len="med"/>
-                    </a:lnT>
-                    <a:lnB w="12700" cap="flat" cmpd="sng" algn="ctr">
-                      <a:solidFill>
-                        <a:srgbClr val="D8E2EA"/>
-                      </a:solidFill>
-                      <a:prstDash val="solid"/>
-                      <a:round/>
-                      <a:headEnd type="none" w="med" len="med"/>
-                      <a:tailEnd type="none" w="med" len="med"/>
-                    </a:lnB>
-                    <a:solidFill>
-                      <a:srgbClr val="F3F7FA"/>
-                    </a:solidFill>
-                  </a:tcPr>
-                </a:tc>
-                <a:tc>
-                  <a:txBody>
-                    <a:bodyPr/>
-                    <a:lstStyle/>
-                    <a:p>
-                      <a:pPr algn="ctr" indent="0" marL="0">
-                        <a:buNone/>
-                      </a:pPr>
-                      <a:r>
-                        <a:rPr lang="en-US" sz="1400" dirty="0">
-                          <a:solidFill>
-                            <a:srgbClr val="0B5D7A"/>
-                          </a:solidFill>
-                          <a:latin typeface="Calibri" pitchFamily="34" charset="0"/>
-                          <a:ea typeface="Calibri" pitchFamily="34" charset="-122"/>
-                          <a:cs typeface="Calibri" pitchFamily="34" charset="-120"/>
-                        </a:rPr>
-                        <a:t>6.0 mm</a:t>
-                      </a:r>
-                      <a:endParaRPr lang="en-US" sz="1400" dirty="0">
-                        <a:latin typeface="Calibri" charset="0"/>
-                        <a:ea typeface="Calibri" charset="0"/>
-                        <a:cs typeface="Calibri" charset="0"/>
-                      </a:endParaRPr>
-                    </a:p>
-                  </a:txBody>
-                  <a:tcPr marL="76200" marR="76200" marT="63500" marB="63500" anchor="ctr">
-                    <a:lnL w="12700" cap="flat" cmpd="sng" algn="ctr">
-                      <a:solidFill>
-                        <a:srgbClr val="D8E2EA"/>
-                      </a:solidFill>
-                      <a:prstDash val="solid"/>
-                      <a:round/>
-                      <a:headEnd type="none" w="med" len="med"/>
-                      <a:tailEnd type="none" w="med" len="med"/>
-                    </a:lnL>
-                    <a:lnR w="12700" cap="flat" cmpd="sng" algn="ctr">
-                      <a:solidFill>
-                        <a:srgbClr val="D8E2EA"/>
-                      </a:solidFill>
-                      <a:prstDash val="solid"/>
-                      <a:round/>
-                      <a:headEnd type="none" w="med" len="med"/>
-                      <a:tailEnd type="none" w="med" len="med"/>
-                    </a:lnR>
-                    <a:lnT w="12700" cap="flat" cmpd="sng" algn="ctr">
-                      <a:solidFill>
-                        <a:srgbClr val="D8E2EA"/>
-                      </a:solidFill>
-                      <a:prstDash val="solid"/>
-                      <a:round/>
-                      <a:headEnd type="none" w="med" len="med"/>
-                      <a:tailEnd type="none" w="med" len="med"/>
-                    </a:lnT>
-                    <a:lnB w="12700" cap="flat" cmpd="sng" algn="ctr">
-                      <a:solidFill>
-                        <a:srgbClr val="D8E2EA"/>
-                      </a:solidFill>
-                      <a:prstDash val="solid"/>
-                      <a:round/>
-                      <a:headEnd type="none" w="med" len="med"/>
-                      <a:tailEnd type="none" w="med" len="med"/>
-                    </a:lnB>
-                    <a:solidFill>
-                      <a:srgbClr val="F3F7FA"/>
-                    </a:solidFill>
-                  </a:tcPr>
-                </a:tc>
-              </a:tr>
-              <a:tr h="658368">
-                <a:tc>
-                  <a:txBody>
-                    <a:bodyPr/>
-                    <a:lstStyle/>
-                    <a:p>
-                      <a:pPr algn="l" indent="0" marL="0">
-                        <a:buNone/>
-                      </a:pPr>
-                      <a:r>
-                        <a:rPr lang="en-US" sz="1400" b="1" dirty="0">
-                          <a:solidFill>
-                            <a:srgbClr val="1E293B"/>
-                          </a:solidFill>
-                          <a:latin typeface="Calibri" pitchFamily="34" charset="0"/>
-                          <a:ea typeface="Calibri" pitchFamily="34" charset="-122"/>
-                          <a:cs typeface="Calibri" pitchFamily="34" charset="-120"/>
-                        </a:rPr>
-                        <a:t>CNN  (~150 samples ≈ 50 positions)</a:t>
-                      </a:r>
-                      <a:endParaRPr lang="en-US" sz="1400" dirty="0">
-                        <a:latin typeface="Calibri" charset="0"/>
-                        <a:ea typeface="Calibri" charset="0"/>
-                        <a:cs typeface="Calibri" charset="0"/>
-                      </a:endParaRPr>
-                    </a:p>
-                  </a:txBody>
-                  <a:tcPr marL="76200" marR="76200" marT="63500" marB="63500" anchor="ctr">
-                    <a:lnL w="12700" cap="flat" cmpd="sng" algn="ctr">
-                      <a:solidFill>
-                        <a:srgbClr val="D8E2EA"/>
-                      </a:solidFill>
-                      <a:prstDash val="solid"/>
-                      <a:round/>
-                      <a:headEnd type="none" w="med" len="med"/>
-                      <a:tailEnd type="none" w="med" len="med"/>
-                    </a:lnL>
-                    <a:lnR w="12700" cap="flat" cmpd="sng" algn="ctr">
-                      <a:solidFill>
-                        <a:srgbClr val="D8E2EA"/>
-                      </a:solidFill>
-                      <a:prstDash val="solid"/>
-                      <a:round/>
-                      <a:headEnd type="none" w="med" len="med"/>
-                      <a:tailEnd type="none" w="med" len="med"/>
-                    </a:lnR>
-                    <a:lnT w="12700" cap="flat" cmpd="sng" algn="ctr">
-                      <a:solidFill>
-                        <a:srgbClr val="D8E2EA"/>
-                      </a:solidFill>
-                      <a:prstDash val="solid"/>
-                      <a:round/>
-                      <a:headEnd type="none" w="med" len="med"/>
-                      <a:tailEnd type="none" w="med" len="med"/>
-                    </a:lnT>
-                    <a:lnB w="12700" cap="flat" cmpd="sng" algn="ctr">
-                      <a:solidFill>
-                        <a:srgbClr val="D8E2EA"/>
-                      </a:solidFill>
-                      <a:prstDash val="solid"/>
-                      <a:round/>
-                      <a:headEnd type="none" w="med" len="med"/>
-                      <a:tailEnd type="none" w="med" len="med"/>
-                    </a:lnB>
-                    <a:solidFill>
-                      <a:srgbClr val="FFFFFF"/>
-                    </a:solidFill>
-                  </a:tcPr>
-                </a:tc>
-                <a:tc>
-                  <a:txBody>
-                    <a:bodyPr/>
-                    <a:lstStyle/>
-                    <a:p>
-                      <a:pPr algn="ctr" indent="0" marL="0">
-                        <a:buNone/>
-                      </a:pPr>
-                      <a:r>
-                        <a:rPr lang="en-US" sz="1400" dirty="0">
-                          <a:solidFill>
-                            <a:srgbClr val="1E293B"/>
-                          </a:solidFill>
-                          <a:latin typeface="Calibri" pitchFamily="34" charset="0"/>
-                          <a:ea typeface="Calibri" pitchFamily="34" charset="-122"/>
-                          <a:cs typeface="Calibri" pitchFamily="34" charset="-120"/>
-                        </a:rPr>
-                        <a:t>measured</a:t>
-                      </a:r>
-                      <a:endParaRPr lang="en-US" sz="1400" dirty="0">
-                        <a:latin typeface="Calibri" charset="0"/>
-                        <a:ea typeface="Calibri" charset="0"/>
-                        <a:cs typeface="Calibri" charset="0"/>
-                      </a:endParaRPr>
-                    </a:p>
-                  </a:txBody>
-                  <a:tcPr marL="76200" marR="76200" marT="63500" marB="63500" anchor="ctr">
-                    <a:lnL w="12700" cap="flat" cmpd="sng" algn="ctr">
-                      <a:solidFill>
-                        <a:srgbClr val="D8E2EA"/>
-                      </a:solidFill>
-                      <a:prstDash val="solid"/>
-                      <a:round/>
-                      <a:headEnd type="none" w="med" len="med"/>
-                      <a:tailEnd type="none" w="med" len="med"/>
-                    </a:lnL>
-                    <a:lnR w="12700" cap="flat" cmpd="sng" algn="ctr">
-                      <a:solidFill>
-                        <a:srgbClr val="D8E2EA"/>
-                      </a:solidFill>
-                      <a:prstDash val="solid"/>
-                      <a:round/>
-                      <a:headEnd type="none" w="med" len="med"/>
-                      <a:tailEnd type="none" w="med" len="med"/>
-                    </a:lnR>
-                    <a:lnT w="12700" cap="flat" cmpd="sng" algn="ctr">
-                      <a:solidFill>
-                        <a:srgbClr val="D8E2EA"/>
-                      </a:solidFill>
-                      <a:prstDash val="solid"/>
-                      <a:round/>
-                      <a:headEnd type="none" w="med" len="med"/>
-                      <a:tailEnd type="none" w="med" len="med"/>
-                    </a:lnT>
-                    <a:lnB w="12700" cap="flat" cmpd="sng" algn="ctr">
-                      <a:solidFill>
-                        <a:srgbClr val="D8E2EA"/>
-                      </a:solidFill>
-                      <a:prstDash val="solid"/>
-                      <a:round/>
-                      <a:headEnd type="none" w="med" len="med"/>
-                      <a:tailEnd type="none" w="med" len="med"/>
-                    </a:lnB>
-                    <a:solidFill>
-                      <a:srgbClr val="FFFFFF"/>
-                    </a:solidFill>
-                  </a:tcPr>
-                </a:tc>
-                <a:tc>
-                  <a:txBody>
-                    <a:bodyPr/>
-                    <a:lstStyle/>
-                    <a:p>
-                      <a:pPr algn="ctr" indent="0" marL="0">
-                        <a:buNone/>
-                      </a:pPr>
-                      <a:r>
-                        <a:rPr lang="en-US" sz="1400" dirty="0">
-                          <a:solidFill>
-                            <a:srgbClr val="0B5D7A"/>
-                          </a:solidFill>
-                          <a:latin typeface="Calibri" pitchFamily="34" charset="0"/>
-                          <a:ea typeface="Calibri" pitchFamily="34" charset="-122"/>
-                          <a:cs typeface="Calibri" pitchFamily="34" charset="-120"/>
-                        </a:rPr>
-                        <a:t>—</a:t>
-                      </a:r>
-                      <a:endParaRPr lang="en-US" sz="1400" dirty="0">
-                        <a:latin typeface="Calibri" charset="0"/>
-                        <a:ea typeface="Calibri" charset="0"/>
-                        <a:cs typeface="Calibri" charset="0"/>
-                      </a:endParaRPr>
-                    </a:p>
-                  </a:txBody>
-                  <a:tcPr marL="76200" marR="76200" marT="63500" marB="63500" anchor="ctr">
-                    <a:lnL w="12700" cap="flat" cmpd="sng" algn="ctr">
-                      <a:solidFill>
-                        <a:srgbClr val="D8E2EA"/>
-                      </a:solidFill>
-                      <a:prstDash val="solid"/>
-                      <a:round/>
-                      <a:headEnd type="none" w="med" len="med"/>
-                      <a:tailEnd type="none" w="med" len="med"/>
-                    </a:lnL>
-                    <a:lnR w="12700" cap="flat" cmpd="sng" algn="ctr">
-                      <a:solidFill>
-                        <a:srgbClr val="D8E2EA"/>
-                      </a:solidFill>
-                      <a:prstDash val="solid"/>
-                      <a:round/>
-                      <a:headEnd type="none" w="med" len="med"/>
-                      <a:tailEnd type="none" w="med" len="med"/>
-                    </a:lnR>
-                    <a:lnT w="12700" cap="flat" cmpd="sng" algn="ctr">
-                      <a:solidFill>
-                        <a:srgbClr val="D8E2EA"/>
-                      </a:solidFill>
-                      <a:prstDash val="solid"/>
-                      <a:round/>
-                      <a:headEnd type="none" w="med" len="med"/>
-                      <a:tailEnd type="none" w="med" len="med"/>
-                    </a:lnT>
-                    <a:lnB w="12700" cap="flat" cmpd="sng" algn="ctr">
-                      <a:solidFill>
-                        <a:srgbClr val="D8E2EA"/>
-                      </a:solidFill>
-                      <a:prstDash val="solid"/>
-                      <a:round/>
-                      <a:headEnd type="none" w="med" len="med"/>
-                      <a:tailEnd type="none" w="med" len="med"/>
-                    </a:lnB>
-                    <a:solidFill>
-                      <a:srgbClr val="FFFFFF"/>
-                    </a:solidFill>
-                  </a:tcPr>
-                </a:tc>
-                <a:tc>
-                  <a:txBody>
-                    <a:bodyPr/>
-                    <a:lstStyle/>
-                    <a:p>
-                      <a:pPr algn="ctr" indent="0" marL="0">
-                        <a:buNone/>
-                      </a:pPr>
-                      <a:r>
-                        <a:rPr lang="en-US" sz="1400" dirty="0">
-                          <a:solidFill>
-                            <a:srgbClr val="0B5D7A"/>
-                          </a:solidFill>
-                          <a:latin typeface="Calibri" pitchFamily="34" charset="0"/>
-                          <a:ea typeface="Calibri" pitchFamily="34" charset="-122"/>
-                          <a:cs typeface="Calibri" pitchFamily="34" charset="-120"/>
-                        </a:rPr>
-                        <a:t>9.9 mm</a:t>
-                      </a:r>
-                      <a:endParaRPr lang="en-US" sz="1400" dirty="0">
-                        <a:latin typeface="Calibri" charset="0"/>
-                        <a:ea typeface="Calibri" charset="0"/>
-                        <a:cs typeface="Calibri" charset="0"/>
-                      </a:endParaRPr>
-                    </a:p>
-                  </a:txBody>
-                  <a:tcPr marL="76200" marR="76200" marT="63500" marB="63500" anchor="ctr">
-                    <a:lnL w="12700" cap="flat" cmpd="sng" algn="ctr">
-                      <a:solidFill>
-                        <a:srgbClr val="D8E2EA"/>
-                      </a:solidFill>
-                      <a:prstDash val="solid"/>
-                      <a:round/>
-                      <a:headEnd type="none" w="med" len="med"/>
-                      <a:tailEnd type="none" w="med" len="med"/>
-                    </a:lnL>
-                    <a:lnR w="12700" cap="flat" cmpd="sng" algn="ctr">
-                      <a:solidFill>
-                        <a:srgbClr val="D8E2EA"/>
-                      </a:solidFill>
-                      <a:prstDash val="solid"/>
-                      <a:round/>
-                      <a:headEnd type="none" w="med" len="med"/>
-                      <a:tailEnd type="none" w="med" len="med"/>
-                    </a:lnR>
-                    <a:lnT w="12700" cap="flat" cmpd="sng" algn="ctr">
-                      <a:solidFill>
-                        <a:srgbClr val="D8E2EA"/>
-                      </a:solidFill>
-                      <a:prstDash val="solid"/>
-                      <a:round/>
-                      <a:headEnd type="none" w="med" len="med"/>
-                      <a:tailEnd type="none" w="med" len="med"/>
-                    </a:lnT>
-                    <a:lnB w="12700" cap="flat" cmpd="sng" algn="ctr">
-                      <a:solidFill>
-                        <a:srgbClr val="D8E2EA"/>
-                      </a:solidFill>
-                      <a:prstDash val="solid"/>
-                      <a:round/>
-                      <a:headEnd type="none" w="med" len="med"/>
-                      <a:tailEnd type="none" w="med" len="med"/>
-                    </a:lnB>
-                    <a:solidFill>
-                      <a:srgbClr val="FFFFFF"/>
-                    </a:solidFill>
-                  </a:tcPr>
-                </a:tc>
-              </a:tr>
-              <a:tr h="658368">
-                <a:tc>
-                  <a:txBody>
-                    <a:bodyPr/>
-                    <a:lstStyle/>
-                    <a:p>
-                      <a:pPr algn="l" indent="0" marL="0">
-                        <a:buNone/>
-                      </a:pPr>
-                      <a:r>
-                        <a:rPr lang="en-US" sz="1400" b="1" dirty="0">
-                          <a:solidFill>
-                            <a:srgbClr val="1E293B"/>
-                          </a:solidFill>
-                          <a:latin typeface="Calibri" pitchFamily="34" charset="0"/>
-                          <a:ea typeface="Calibri" pitchFamily="34" charset="-122"/>
-                          <a:cs typeface="Calibri" pitchFamily="34" charset="-120"/>
-                        </a:rPr>
-                        <a:t>CNN  (full depth stack, ~1000 pos)</a:t>
-                      </a:r>
-                      <a:endParaRPr lang="en-US" sz="1400" dirty="0">
-                        <a:latin typeface="Calibri" charset="0"/>
-                        <a:ea typeface="Calibri" charset="0"/>
-                        <a:cs typeface="Calibri" charset="0"/>
-                      </a:endParaRPr>
-                    </a:p>
-                  </a:txBody>
-                  <a:tcPr marL="76200" marR="76200" marT="63500" marB="63500" anchor="ctr">
-                    <a:lnL w="12700" cap="flat" cmpd="sng" algn="ctr">
-                      <a:solidFill>
-                        <a:srgbClr val="D8E2EA"/>
-                      </a:solidFill>
-                      <a:prstDash val="solid"/>
-                      <a:round/>
-                      <a:headEnd type="none" w="med" len="med"/>
-                      <a:tailEnd type="none" w="med" len="med"/>
-                    </a:lnL>
-                    <a:lnR w="12700" cap="flat" cmpd="sng" algn="ctr">
-                      <a:solidFill>
-                        <a:srgbClr val="D8E2EA"/>
-                      </a:solidFill>
-                      <a:prstDash val="solid"/>
-                      <a:round/>
-                      <a:headEnd type="none" w="med" len="med"/>
-                      <a:tailEnd type="none" w="med" len="med"/>
-                    </a:lnR>
-                    <a:lnT w="12700" cap="flat" cmpd="sng" algn="ctr">
-                      <a:solidFill>
-                        <a:srgbClr val="D8E2EA"/>
-                      </a:solidFill>
-                      <a:prstDash val="solid"/>
-                      <a:round/>
-                      <a:headEnd type="none" w="med" len="med"/>
-                      <a:tailEnd type="none" w="med" len="med"/>
-                    </a:lnT>
-                    <a:lnB w="12700" cap="flat" cmpd="sng" algn="ctr">
-                      <a:solidFill>
-                        <a:srgbClr val="D8E2EA"/>
-                      </a:solidFill>
-                      <a:prstDash val="solid"/>
-                      <a:round/>
-                      <a:headEnd type="none" w="med" len="med"/>
-                      <a:tailEnd type="none" w="med" len="med"/>
-                    </a:lnB>
-                    <a:solidFill>
-                      <a:srgbClr val="F3F7FA"/>
-                    </a:solidFill>
-                  </a:tcPr>
-                </a:tc>
-                <a:tc>
-                  <a:txBody>
-                    <a:bodyPr/>
-                    <a:lstStyle/>
-                    <a:p>
-                      <a:pPr algn="ctr" indent="0" marL="0">
-                        <a:buNone/>
-                      </a:pPr>
-                      <a:r>
-                        <a:rPr lang="en-US" sz="1400" dirty="0">
-                          <a:solidFill>
-                            <a:srgbClr val="1E293B"/>
-                          </a:solidFill>
-                          <a:latin typeface="Calibri" pitchFamily="34" charset="0"/>
-                          <a:ea typeface="Calibri" pitchFamily="34" charset="-122"/>
-                          <a:cs typeface="Calibri" pitchFamily="34" charset="-120"/>
-                        </a:rPr>
-                        <a:t>sim</a:t>
-                      </a:r>
-                      <a:endParaRPr lang="en-US" sz="1400" dirty="0">
-                        <a:latin typeface="Calibri" charset="0"/>
-                        <a:ea typeface="Calibri" charset="0"/>
-                        <a:cs typeface="Calibri" charset="0"/>
-                      </a:endParaRPr>
-                    </a:p>
-                  </a:txBody>
-                  <a:tcPr marL="76200" marR="76200" marT="63500" marB="63500" anchor="ctr">
-                    <a:lnL w="12700" cap="flat" cmpd="sng" algn="ctr">
-                      <a:solidFill>
-                        <a:srgbClr val="D8E2EA"/>
-                      </a:solidFill>
-                      <a:prstDash val="solid"/>
-                      <a:round/>
-                      <a:headEnd type="none" w="med" len="med"/>
-                      <a:tailEnd type="none" w="med" len="med"/>
-                    </a:lnL>
-                    <a:lnR w="12700" cap="flat" cmpd="sng" algn="ctr">
-                      <a:solidFill>
-                        <a:srgbClr val="D8E2EA"/>
-                      </a:solidFill>
-                      <a:prstDash val="solid"/>
-                      <a:round/>
-                      <a:headEnd type="none" w="med" len="med"/>
-                      <a:tailEnd type="none" w="med" len="med"/>
-                    </a:lnR>
-                    <a:lnT w="12700" cap="flat" cmpd="sng" algn="ctr">
-                      <a:solidFill>
-                        <a:srgbClr val="D8E2EA"/>
-                      </a:solidFill>
-                      <a:prstDash val="solid"/>
-                      <a:round/>
-                      <a:headEnd type="none" w="med" len="med"/>
-                      <a:tailEnd type="none" w="med" len="med"/>
-                    </a:lnT>
-                    <a:lnB w="12700" cap="flat" cmpd="sng" algn="ctr">
-                      <a:solidFill>
-                        <a:srgbClr val="D8E2EA"/>
-                      </a:solidFill>
-                      <a:prstDash val="solid"/>
-                      <a:round/>
-                      <a:headEnd type="none" w="med" len="med"/>
-                      <a:tailEnd type="none" w="med" len="med"/>
-                    </a:lnB>
-                    <a:solidFill>
-                      <a:srgbClr val="F3F7FA"/>
-                    </a:solidFill>
-                  </a:tcPr>
-                </a:tc>
-                <a:tc>
-                  <a:txBody>
-                    <a:bodyPr/>
-                    <a:lstStyle/>
-                    <a:p>
-                      <a:pPr algn="ctr" indent="0" marL="0">
-                        <a:buNone/>
-                      </a:pPr>
-                      <a:r>
-                        <a:rPr lang="en-US" sz="1400" dirty="0">
-                          <a:solidFill>
-                            <a:srgbClr val="0B5D7A"/>
-                          </a:solidFill>
-                          <a:latin typeface="Calibri" pitchFamily="34" charset="0"/>
-                          <a:ea typeface="Calibri" pitchFamily="34" charset="-122"/>
-                          <a:cs typeface="Calibri" pitchFamily="34" charset="-120"/>
-                        </a:rPr>
-                        <a:t>3.9 mm</a:t>
-                      </a:r>
-                      <a:endParaRPr lang="en-US" sz="1400" dirty="0">
-                        <a:latin typeface="Calibri" charset="0"/>
-                        <a:ea typeface="Calibri" charset="0"/>
-                        <a:cs typeface="Calibri" charset="0"/>
-                      </a:endParaRPr>
-                    </a:p>
-                  </a:txBody>
-                  <a:tcPr marL="76200" marR="76200" marT="63500" marB="63500" anchor="ctr">
-                    <a:lnL w="12700" cap="flat" cmpd="sng" algn="ctr">
-                      <a:solidFill>
-                        <a:srgbClr val="D8E2EA"/>
-                      </a:solidFill>
-                      <a:prstDash val="solid"/>
-                      <a:round/>
-                      <a:headEnd type="none" w="med" len="med"/>
-                      <a:tailEnd type="none" w="med" len="med"/>
-                    </a:lnL>
-                    <a:lnR w="12700" cap="flat" cmpd="sng" algn="ctr">
-                      <a:solidFill>
-                        <a:srgbClr val="D8E2EA"/>
-                      </a:solidFill>
-                      <a:prstDash val="solid"/>
-                      <a:round/>
-                      <a:headEnd type="none" w="med" len="med"/>
-                      <a:tailEnd type="none" w="med" len="med"/>
-                    </a:lnR>
-                    <a:lnT w="12700" cap="flat" cmpd="sng" algn="ctr">
-                      <a:solidFill>
-                        <a:srgbClr val="D8E2EA"/>
-                      </a:solidFill>
-                      <a:prstDash val="solid"/>
-                      <a:round/>
-                      <a:headEnd type="none" w="med" len="med"/>
-                      <a:tailEnd type="none" w="med" len="med"/>
-                    </a:lnT>
-                    <a:lnB w="12700" cap="flat" cmpd="sng" algn="ctr">
-                      <a:solidFill>
-                        <a:srgbClr val="D8E2EA"/>
-                      </a:solidFill>
-                      <a:prstDash val="solid"/>
-                      <a:round/>
-                      <a:headEnd type="none" w="med" len="med"/>
-                      <a:tailEnd type="none" w="med" len="med"/>
-                    </a:lnB>
-                    <a:solidFill>
-                      <a:srgbClr val="F3F7FA"/>
-                    </a:solidFill>
-                  </a:tcPr>
-                </a:tc>
-                <a:tc>
-                  <a:txBody>
-                    <a:bodyPr/>
-                    <a:lstStyle/>
-                    <a:p>
-                      <a:pPr algn="ctr" indent="0" marL="0">
-                        <a:buNone/>
-                      </a:pPr>
-                      <a:r>
-                        <a:rPr lang="en-US" sz="1400" dirty="0">
-                          <a:solidFill>
-                            <a:srgbClr val="0B5D7A"/>
-                          </a:solidFill>
-                          <a:latin typeface="Calibri" pitchFamily="34" charset="0"/>
-                          <a:ea typeface="Calibri" pitchFamily="34" charset="-122"/>
-                          <a:cs typeface="Calibri" pitchFamily="34" charset="-120"/>
-                        </a:rPr>
-                        <a:t>—</a:t>
-                      </a:r>
-                      <a:endParaRPr lang="en-US" sz="1400" dirty="0">
-                        <a:latin typeface="Calibri" charset="0"/>
-                        <a:ea typeface="Calibri" charset="0"/>
-                        <a:cs typeface="Calibri" charset="0"/>
-                      </a:endParaRPr>
-                    </a:p>
-                  </a:txBody>
-                  <a:tcPr marL="76200" marR="76200" marT="63500" marB="63500" anchor="ctr">
-                    <a:lnL w="12700" cap="flat" cmpd="sng" algn="ctr">
-                      <a:solidFill>
-                        <a:srgbClr val="D8E2EA"/>
-                      </a:solidFill>
-                      <a:prstDash val="solid"/>
-                      <a:round/>
-                      <a:headEnd type="none" w="med" len="med"/>
-                      <a:tailEnd type="none" w="med" len="med"/>
-                    </a:lnL>
-                    <a:lnR w="12700" cap="flat" cmpd="sng" algn="ctr">
-                      <a:solidFill>
-                        <a:srgbClr val="D8E2EA"/>
-                      </a:solidFill>
-                      <a:prstDash val="solid"/>
-                      <a:round/>
-                      <a:headEnd type="none" w="med" len="med"/>
-                      <a:tailEnd type="none" w="med" len="med"/>
-                    </a:lnR>
-                    <a:lnT w="12700" cap="flat" cmpd="sng" algn="ctr">
-                      <a:solidFill>
-                        <a:srgbClr val="D8E2EA"/>
-                      </a:solidFill>
-                      <a:prstDash val="solid"/>
-                      <a:round/>
-                      <a:headEnd type="none" w="med" len="med"/>
-                      <a:tailEnd type="none" w="med" len="med"/>
-                    </a:lnT>
-                    <a:lnB w="12700" cap="flat" cmpd="sng" algn="ctr">
-                      <a:solidFill>
-                        <a:srgbClr val="D8E2EA"/>
-                      </a:solidFill>
-                      <a:prstDash val="solid"/>
-                      <a:round/>
-                      <a:headEnd type="none" w="med" len="med"/>
-                      <a:tailEnd type="none" w="med" len="med"/>
-                    </a:lnB>
-                    <a:solidFill>
-                      <a:srgbClr val="F3F7FA"/>
-                    </a:solidFill>
-                  </a:tcPr>
-                </a:tc>
-              </a:tr>
-            </a:tbl>
-          </a:graphicData>
-        </a:graphic>
-      </p:graphicFrame>
-      <p:sp>
-        <p:nvSpPr>
-          <p:cNvPr id="5" name="Shape 2"/>
-          <p:cNvSpPr/>
+      <p:pic>
+        <p:nvPicPr>
+          <p:cNvPr id="4" name="Image 0" descr="dd_measured_vs_sim.png">    </p:cNvPr>
+          <p:cNvPicPr>
+            <a:picLocks noChangeAspect="1"/>
+          </p:cNvPicPr>
           <p:nvPr/>
-        </p:nvSpPr>
+        </p:nvPicPr>
+        <p:blipFill>
+          <a:blip r:embed="rId1"/>
+          <a:stretch>
+            <a:fillRect/>
+          </a:stretch>
+        </p:blipFill>
         <p:spPr>
           <a:xfrm>
-            <a:off x="7680960" y="1645920"/>
-            <a:ext cx="3931920" cy="4480560"/>
-          </a:xfrm>
-          <a:prstGeom prst="roundRect">
-            <a:avLst>
-              <a:gd name="adj" fmla="val 2093"/>
-            </a:avLst>
-          </a:prstGeom>
-          <a:solidFill>
-            <a:srgbClr val="F3F7FA"/>
-          </a:solidFill>
-          <a:ln w="12700">
-            <a:solidFill>
-              <a:srgbClr val="D8E2EA"/>
-            </a:solidFill>
-            <a:prstDash val="solid"/>
-          </a:ln>
-          <a:effectLst>
-            <a:outerShdw sx="100000" sy="100000" kx="0" ky="0" algn="bl" rotWithShape="0" blurRad="88900" dist="38100" dir="5400000">
-              <a:srgbClr val="5B6B7B">
-                <a:alpha val="18000"/>
-              </a:srgbClr>
-            </a:outerShdw>
-          </a:effectLst>
-        </p:spPr>
-      </p:sp>
-      <p:sp>
-        <p:nvSpPr>
-          <p:cNvPr id="6" name="Text 3"/>
-          <p:cNvSpPr/>
-          <p:nvPr/>
-        </p:nvSpPr>
-        <p:spPr>
-          <a:xfrm>
-            <a:off x="7909560" y="1810512"/>
-            <a:ext cx="3474720" cy="365760"/>
+            <a:off x="822960" y="1600200"/>
+            <a:ext cx="10515600" cy="4892040"/>
           </a:xfrm>
           <a:prstGeom prst="rect">
             <a:avLst/>
           </a:prstGeom>
-          <a:noFill/>
-          <a:ln/>
         </p:spPr>
-        <p:txBody>
-          <a:bodyPr wrap="square" lIns="0" tIns="0" rIns="0" bIns="0" rtlCol="0" anchor="ctr"/>
-          <a:lstStyle/>
-          <a:p>
-            <a:pPr indent="0" marL="0">
-              <a:buNone/>
-            </a:pPr>
-            <a:r>
-              <a:rPr lang="en-US" sz="1550" b="1" dirty="0">
-                <a:solidFill>
-                  <a:srgbClr val="0B5D7A"/>
-                </a:solidFill>
-                <a:latin typeface="Cambria" pitchFamily="34" charset="0"/>
-                <a:ea typeface="Cambria" pitchFamily="34" charset="-122"/>
-                <a:cs typeface="Cambria" pitchFamily="34" charset="-120"/>
-              </a:rPr>
-              <a:t>What the numbers mean</a:t>
-            </a:r>
-            <a:endParaRPr lang="en-US" sz="1550" dirty="0"/>
-          </a:p>
-        </p:txBody>
-      </p:sp>
-      <p:sp>
-        <p:nvSpPr>
-          <p:cNvPr id="7" name="Text 4"/>
-          <p:cNvSpPr/>
-          <p:nvPr/>
-        </p:nvSpPr>
-        <p:spPr>
-          <a:xfrm>
-            <a:off x="7909560" y="2286000"/>
-            <a:ext cx="3474720" cy="3749040"/>
-          </a:xfrm>
-          <a:prstGeom prst="rect">
-            <a:avLst/>
-          </a:prstGeom>
-          <a:noFill/>
-          <a:ln/>
-        </p:spPr>
-        <p:txBody>
-          <a:bodyPr wrap="square" lIns="0" tIns="0" rIns="0" bIns="0" rtlCol="0" anchor="t"/>
-          <a:lstStyle/>
-          <a:p>
-            <a:pPr marL="342900" indent="-342900">
-              <a:spcAft>
-                <a:spcPts val="800"/>
-              </a:spcAft>
-              <a:buSzPct val="100000"/>
-              <a:buChar char="•"/>
-            </a:pPr>
-            <a:r>
-              <a:rPr lang="en-US" sz="1200" dirty="0">
-                <a:solidFill>
-                  <a:srgbClr val="1E293B"/>
-                </a:solidFill>
-                <a:latin typeface="Calibri" pitchFamily="34" charset="0"/>
-                <a:ea typeface="Calibri" pitchFamily="34" charset="-122"/>
-                <a:cs typeface="Calibri" pitchFamily="34" charset="-120"/>
-              </a:rPr>
-              <a:t>Signal interpolates EQUALLY well: sim 6.7 ≈ measured 6.0 mm (k-NN). Sim is not unrealistically smooth.</a:t>
-            </a:r>
-            <a:endParaRPr lang="en-US" sz="1200" dirty="0"/>
-          </a:p>
-          <a:p>
-            <a:pPr marL="342900" indent="-342900">
-              <a:spcAft>
-                <a:spcPts val="800"/>
-              </a:spcAft>
-              <a:buSzPct val="100000"/>
-              <a:buChar char="•"/>
-            </a:pPr>
-            <a:r>
-              <a:rPr lang="en-US" sz="1200" dirty="0">
-                <a:solidFill>
-                  <a:srgbClr val="1E293B"/>
-                </a:solidFill>
-                <a:latin typeface="Calibri" pitchFamily="34" charset="0"/>
-                <a:ea typeface="Calibri" pitchFamily="34" charset="-122"/>
-                <a:cs typeface="Calibri" pitchFamily="34" charset="-120"/>
-              </a:rPr>
-              <a:t>The measured CNN (9.9 mm) trains on 16 takes × 3 sessions but only ~50 DISTINCT positions — data-starved, so it loses to k-NN.</a:t>
-            </a:r>
-            <a:endParaRPr lang="en-US" sz="1200" dirty="0"/>
-          </a:p>
-          <a:p>
-            <a:pPr marL="342900" indent="-342900">
-              <a:spcAft>
-                <a:spcPts val="800"/>
-              </a:spcAft>
-              <a:buSzPct val="100000"/>
-              <a:buChar char="•"/>
-            </a:pPr>
-            <a:r>
-              <a:rPr lang="en-US" sz="1200" dirty="0">
-                <a:solidFill>
-                  <a:srgbClr val="1E293B"/>
-                </a:solidFill>
-                <a:latin typeface="Calibri" pitchFamily="34" charset="0"/>
-                <a:ea typeface="Calibri" pitchFamily="34" charset="-122"/>
-                <a:cs typeface="Calibri" pitchFamily="34" charset="-120"/>
-              </a:rPr>
-              <a:t>The sim CNN reaches 3.9 mm only via ~1000 distinct positions (13 depths).</a:t>
-            </a:r>
-            <a:endParaRPr lang="en-US" sz="1200" dirty="0"/>
-          </a:p>
-          <a:p>
-            <a:pPr marL="342900" indent="-342900">
-              <a:spcAft>
-                <a:spcPts val="800"/>
-              </a:spcAft>
-              <a:buSzPct val="100000"/>
-              <a:buChar char="•"/>
-            </a:pPr>
-            <a:r>
-              <a:rPr lang="en-US" sz="1200" dirty="0">
-                <a:solidFill>
-                  <a:srgbClr val="1E293B"/>
-                </a:solidFill>
-                <a:latin typeface="Calibri" pitchFamily="34" charset="0"/>
-                <a:ea typeface="Calibri" pitchFamily="34" charset="-122"/>
-                <a:cs typeface="Calibri" pitchFamily="34" charset="-120"/>
-              </a:rPr>
-              <a:t>So the sim↔measured CNN gap is distinct-position COVERAGE, not fidelity.</a:t>
-            </a:r>
-            <a:endParaRPr lang="en-US" sz="1200" dirty="0"/>
-          </a:p>
-        </p:txBody>
-      </p:sp>
-      <p:sp>
-        <p:nvSpPr>
-          <p:cNvPr id="8" name="Text 5"/>
-          <p:cNvSpPr/>
-          <p:nvPr/>
-        </p:nvSpPr>
-        <p:spPr>
-          <a:xfrm>
-            <a:off x="548640" y="6263640"/>
-            <a:ext cx="6949440" cy="457200"/>
-          </a:xfrm>
-          <a:prstGeom prst="rect">
-            <a:avLst/>
-          </a:prstGeom>
-          <a:noFill/>
-          <a:ln/>
-        </p:spPr>
-        <p:txBody>
-          <a:bodyPr wrap="square" lIns="0" tIns="0" rIns="0" bIns="0" rtlCol="0" anchor="ctr"/>
-          <a:lstStyle/>
-          <a:p>
-            <a:pPr algn="l" indent="0" marL="0">
-              <a:buNone/>
-            </a:pPr>
-            <a:r>
-              <a:rPr lang="en-US" sz="1150" i="1" dirty="0">
-                <a:solidFill>
-                  <a:srgbClr val="5B6B7B"/>
-                </a:solidFill>
-                <a:latin typeface="Calibri" pitchFamily="34" charset="0"/>
-                <a:ea typeface="Calibri" pitchFamily="34" charset="-122"/>
-                <a:cs typeface="Calibri" pitchFamily="34" charset="-120"/>
-              </a:rPr>
-              <a:t>To match the sim's 3.9 mm on the bench we need more distinct measured locations (denser grid / more depths) — not a better model.</a:t>
-            </a:r>
-            <a:endParaRPr lang="en-US" sz="1150" dirty="0"/>
-          </a:p>
-        </p:txBody>
-      </p:sp>
+      </p:pic>
     </p:spTree>
   </p:cSld>
   <p:clrMapOvr>
@@ -5193,13 +3961,13 @@
             <a:r>
               <a:rPr lang="en-US" sz="2900" b="1" dirty="0">
                 <a:solidFill>
-                  <a:srgbClr val="1E293B"/>
+                  <a:srgbClr val="2A1618"/>
                 </a:solidFill>
                 <a:latin typeface="Cambria" pitchFamily="34" charset="0"/>
                 <a:ea typeface="Cambria" pitchFamily="34" charset="-122"/>
                 <a:cs typeface="Cambria" pitchFamily="34" charset="-120"/>
               </a:rPr>
-              <a:t>Can a model bridge the gap? (exploratory)</a:t>
+              <a:t>The numbers, signal vs. model</a:t>
             </a:r>
             <a:endParaRPr lang="en-US" sz="2900" dirty="0"/>
           </a:p>
@@ -5232,42 +4000,1079 @@
             <a:r>
               <a:rPr lang="en-US" sz="1400" b="1" dirty="0">
                 <a:solidFill>
-                  <a:srgbClr val="1C9AA8"/>
+                  <a:srgbClr val="BE0000"/>
                 </a:solidFill>
                 <a:latin typeface="Calibri" pitchFamily="34" charset="0"/>
                 <a:ea typeface="Calibri" pitchFamily="34" charset="-122"/>
                 <a:cs typeface="Calibri" pitchFamily="34" charset="-120"/>
               </a:rPr>
-              <a:t>Learn a sim→measured map on the empty baseline, test on unseen frequencies</a:t>
+              <a:t>Does the SIGNAL interpolate, and can the CNN learn it? (empty phantom)</a:t>
             </a:r>
             <a:endParaRPr lang="en-US" sz="1400" dirty="0"/>
           </a:p>
         </p:txBody>
       </p:sp>
-      <p:pic>
-        <p:nvPicPr>
-          <p:cNvPr id="4" name="Image 0" descr="sim_meas_correlation.png">    </p:cNvPr>
-          <p:cNvPicPr>
-            <a:picLocks noChangeAspect="1"/>
-          </p:cNvPicPr>
-          <p:nvPr/>
-        </p:nvPicPr>
-        <p:blipFill>
-          <a:blip r:embed="rId1"/>
-          <a:stretch>
-            <a:fillRect/>
-          </a:stretch>
-        </p:blipFill>
-        <p:spPr>
-          <a:xfrm>
-            <a:off x="502920" y="1600200"/>
-            <a:ext cx="7772400" cy="3566160"/>
-          </a:xfrm>
-          <a:prstGeom prst="rect">
-            <a:avLst/>
-          </a:prstGeom>
-        </p:spPr>
-      </p:pic>
+      <p:graphicFrame>
+        <p:nvGraphicFramePr>
+          <p:cNvPr id="7" name="Table 0"/>
+          <p:cNvGraphicFramePr>
+            <a:graphicFrameLocks noGrp="1"/>
+          </p:cNvGraphicFramePr>
+          <p:nvPr>
+            <p:extLst>
+              <p:ext uri="{D42A27DB-BD31-4B8C-83A1-F6EECF244321}">
+                <p14:modId xmlns:p14="http://schemas.microsoft.com/office/powerpoint/2010/main" val="1579011935"/>
+              </p:ext>
+            </p:extLst>
+          </p:nvPr>
+        </p:nvGraphicFramePr>
+        <p:xfrm>
+          <a:off x="548640" y="1645920"/>
+          <a:ext cx="7040880" cy="914400"/>
+        </p:xfrm>
+        <a:graphic>
+          <a:graphicData uri="http://schemas.openxmlformats.org/drawingml/2006/table">
+            <a:tbl>
+              <a:tblPr/>
+              <a:tblGrid>
+                <a:gridCol w="3931920"/>
+                <a:gridCol w="1554480"/>
+                <a:gridCol w="1554480"/>
+              </a:tblGrid>
+              <a:tr h="658368">
+                <a:tc>
+                  <a:txBody>
+                    <a:bodyPr/>
+                    <a:lstStyle/>
+                    <a:p>
+                      <a:pPr algn="l" indent="0" marL="0">
+                        <a:buNone/>
+                      </a:pPr>
+                      <a:r>
+                        <a:rPr lang="en-US" sz="1300" b="1" dirty="0">
+                          <a:solidFill>
+                            <a:srgbClr val="FFFFFF"/>
+                          </a:solidFill>
+                          <a:latin typeface="Calibri" pitchFamily="34" charset="0"/>
+                          <a:ea typeface="Calibri" pitchFamily="34" charset="-122"/>
+                          <a:cs typeface="Calibri" pitchFamily="34" charset="-120"/>
+                        </a:rPr>
+                        <a:t>Probe</a:t>
+                      </a:r>
+                      <a:endParaRPr lang="en-US" sz="1300" dirty="0">
+                        <a:latin typeface="Calibri" charset="0"/>
+                        <a:ea typeface="Calibri" charset="0"/>
+                        <a:cs typeface="Calibri" charset="0"/>
+                      </a:endParaRPr>
+                    </a:p>
+                  </a:txBody>
+                  <a:tcPr marL="76200" marR="76200" marT="63500" marB="63500" anchor="ctr">
+                    <a:lnL w="12700" cap="flat" cmpd="sng" algn="ctr">
+                      <a:solidFill>
+                        <a:srgbClr val="E7D6D1"/>
+                      </a:solidFill>
+                      <a:prstDash val="solid"/>
+                      <a:round/>
+                      <a:headEnd type="none" w="med" len="med"/>
+                      <a:tailEnd type="none" w="med" len="med"/>
+                    </a:lnL>
+                    <a:lnR w="12700" cap="flat" cmpd="sng" algn="ctr">
+                      <a:solidFill>
+                        <a:srgbClr val="E7D6D1"/>
+                      </a:solidFill>
+                      <a:prstDash val="solid"/>
+                      <a:round/>
+                      <a:headEnd type="none" w="med" len="med"/>
+                      <a:tailEnd type="none" w="med" len="med"/>
+                    </a:lnR>
+                    <a:lnT w="12700" cap="flat" cmpd="sng" algn="ctr">
+                      <a:solidFill>
+                        <a:srgbClr val="E7D6D1"/>
+                      </a:solidFill>
+                      <a:prstDash val="solid"/>
+                      <a:round/>
+                      <a:headEnd type="none" w="med" len="med"/>
+                      <a:tailEnd type="none" w="med" len="med"/>
+                    </a:lnT>
+                    <a:lnB w="12700" cap="flat" cmpd="sng" algn="ctr">
+                      <a:solidFill>
+                        <a:srgbClr val="E7D6D1"/>
+                      </a:solidFill>
+                      <a:prstDash val="solid"/>
+                      <a:round/>
+                      <a:headEnd type="none" w="med" len="med"/>
+                      <a:tailEnd type="none" w="med" len="med"/>
+                    </a:lnB>
+                    <a:solidFill>
+                      <a:srgbClr val="BE0000"/>
+                    </a:solidFill>
+                  </a:tcPr>
+                </a:tc>
+                <a:tc>
+                  <a:txBody>
+                    <a:bodyPr/>
+                    <a:lstStyle/>
+                    <a:p>
+                      <a:pPr algn="ctr" indent="0" marL="0">
+                        <a:buNone/>
+                      </a:pPr>
+                      <a:r>
+                        <a:rPr lang="en-US" sz="1300" b="1" dirty="0">
+                          <a:solidFill>
+                            <a:srgbClr val="FFFFFF"/>
+                          </a:solidFill>
+                          <a:latin typeface="Calibri" pitchFamily="34" charset="0"/>
+                          <a:ea typeface="Calibri" pitchFamily="34" charset="-122"/>
+                          <a:cs typeface="Calibri" pitchFamily="34" charset="-120"/>
+                        </a:rPr>
+                        <a:t>Sim empty</a:t>
+                      </a:r>
+                      <a:endParaRPr lang="en-US" sz="1300" dirty="0">
+                        <a:latin typeface="Calibri" charset="0"/>
+                        <a:ea typeface="Calibri" charset="0"/>
+                        <a:cs typeface="Calibri" charset="0"/>
+                      </a:endParaRPr>
+                    </a:p>
+                  </a:txBody>
+                  <a:tcPr marL="76200" marR="76200" marT="63500" marB="63500" anchor="ctr">
+                    <a:lnL w="12700" cap="flat" cmpd="sng" algn="ctr">
+                      <a:solidFill>
+                        <a:srgbClr val="E7D6D1"/>
+                      </a:solidFill>
+                      <a:prstDash val="solid"/>
+                      <a:round/>
+                      <a:headEnd type="none" w="med" len="med"/>
+                      <a:tailEnd type="none" w="med" len="med"/>
+                    </a:lnL>
+                    <a:lnR w="12700" cap="flat" cmpd="sng" algn="ctr">
+                      <a:solidFill>
+                        <a:srgbClr val="E7D6D1"/>
+                      </a:solidFill>
+                      <a:prstDash val="solid"/>
+                      <a:round/>
+                      <a:headEnd type="none" w="med" len="med"/>
+                      <a:tailEnd type="none" w="med" len="med"/>
+                    </a:lnR>
+                    <a:lnT w="12700" cap="flat" cmpd="sng" algn="ctr">
+                      <a:solidFill>
+                        <a:srgbClr val="E7D6D1"/>
+                      </a:solidFill>
+                      <a:prstDash val="solid"/>
+                      <a:round/>
+                      <a:headEnd type="none" w="med" len="med"/>
+                      <a:tailEnd type="none" w="med" len="med"/>
+                    </a:lnT>
+                    <a:lnB w="12700" cap="flat" cmpd="sng" algn="ctr">
+                      <a:solidFill>
+                        <a:srgbClr val="E7D6D1"/>
+                      </a:solidFill>
+                      <a:prstDash val="solid"/>
+                      <a:round/>
+                      <a:headEnd type="none" w="med" len="med"/>
+                      <a:tailEnd type="none" w="med" len="med"/>
+                    </a:lnB>
+                    <a:solidFill>
+                      <a:srgbClr val="BE0000"/>
+                    </a:solidFill>
+                  </a:tcPr>
+                </a:tc>
+                <a:tc>
+                  <a:txBody>
+                    <a:bodyPr/>
+                    <a:lstStyle/>
+                    <a:p>
+                      <a:pPr algn="ctr" indent="0" marL="0">
+                        <a:buNone/>
+                      </a:pPr>
+                      <a:r>
+                        <a:rPr lang="en-US" sz="1300" b="1" dirty="0">
+                          <a:solidFill>
+                            <a:srgbClr val="FFFFFF"/>
+                          </a:solidFill>
+                          <a:latin typeface="Calibri" pitchFamily="34" charset="0"/>
+                          <a:ea typeface="Calibri" pitchFamily="34" charset="-122"/>
+                          <a:cs typeface="Calibri" pitchFamily="34" charset="-120"/>
+                        </a:rPr>
+                        <a:t>Measured empty</a:t>
+                      </a:r>
+                      <a:endParaRPr lang="en-US" sz="1300" dirty="0">
+                        <a:latin typeface="Calibri" charset="0"/>
+                        <a:ea typeface="Calibri" charset="0"/>
+                        <a:cs typeface="Calibri" charset="0"/>
+                      </a:endParaRPr>
+                    </a:p>
+                  </a:txBody>
+                  <a:tcPr marL="76200" marR="76200" marT="63500" marB="63500" anchor="ctr">
+                    <a:lnL w="12700" cap="flat" cmpd="sng" algn="ctr">
+                      <a:solidFill>
+                        <a:srgbClr val="E7D6D1"/>
+                      </a:solidFill>
+                      <a:prstDash val="solid"/>
+                      <a:round/>
+                      <a:headEnd type="none" w="med" len="med"/>
+                      <a:tailEnd type="none" w="med" len="med"/>
+                    </a:lnL>
+                    <a:lnR w="12700" cap="flat" cmpd="sng" algn="ctr">
+                      <a:solidFill>
+                        <a:srgbClr val="E7D6D1"/>
+                      </a:solidFill>
+                      <a:prstDash val="solid"/>
+                      <a:round/>
+                      <a:headEnd type="none" w="med" len="med"/>
+                      <a:tailEnd type="none" w="med" len="med"/>
+                    </a:lnR>
+                    <a:lnT w="12700" cap="flat" cmpd="sng" algn="ctr">
+                      <a:solidFill>
+                        <a:srgbClr val="E7D6D1"/>
+                      </a:solidFill>
+                      <a:prstDash val="solid"/>
+                      <a:round/>
+                      <a:headEnd type="none" w="med" len="med"/>
+                      <a:tailEnd type="none" w="med" len="med"/>
+                    </a:lnT>
+                    <a:lnB w="12700" cap="flat" cmpd="sng" algn="ctr">
+                      <a:solidFill>
+                        <a:srgbClr val="E7D6D1"/>
+                      </a:solidFill>
+                      <a:prstDash val="solid"/>
+                      <a:round/>
+                      <a:headEnd type="none" w="med" len="med"/>
+                      <a:tailEnd type="none" w="med" len="med"/>
+                    </a:lnB>
+                    <a:solidFill>
+                      <a:srgbClr val="BE0000"/>
+                    </a:solidFill>
+                  </a:tcPr>
+                </a:tc>
+              </a:tr>
+              <a:tr h="658368">
+                <a:tc>
+                  <a:txBody>
+                    <a:bodyPr/>
+                    <a:lstStyle/>
+                    <a:p>
+                      <a:pPr algn="l" indent="0" marL="0">
+                        <a:buNone/>
+                      </a:pPr>
+                      <a:r>
+                        <a:rPr lang="en-US" sz="1300" b="1" dirty="0">
+                          <a:solidFill>
+                            <a:srgbClr val="2A1618"/>
+                          </a:solidFill>
+                          <a:latin typeface="Calibri" pitchFamily="34" charset="0"/>
+                          <a:ea typeface="Calibri" pitchFamily="34" charset="-122"/>
+                          <a:cs typeface="Calibri" pitchFamily="34" charset="-120"/>
+                        </a:rPr>
+                        <a:t>k-NN (training-free signal floor)</a:t>
+                      </a:r>
+                      <a:endParaRPr lang="en-US" sz="1300" dirty="0">
+                        <a:latin typeface="Calibri" charset="0"/>
+                        <a:ea typeface="Calibri" charset="0"/>
+                        <a:cs typeface="Calibri" charset="0"/>
+                      </a:endParaRPr>
+                    </a:p>
+                  </a:txBody>
+                  <a:tcPr marL="76200" marR="76200" marT="63500" marB="63500" anchor="ctr">
+                    <a:lnL w="12700" cap="flat" cmpd="sng" algn="ctr">
+                      <a:solidFill>
+                        <a:srgbClr val="E7D6D1"/>
+                      </a:solidFill>
+                      <a:prstDash val="solid"/>
+                      <a:round/>
+                      <a:headEnd type="none" w="med" len="med"/>
+                      <a:tailEnd type="none" w="med" len="med"/>
+                    </a:lnL>
+                    <a:lnR w="12700" cap="flat" cmpd="sng" algn="ctr">
+                      <a:solidFill>
+                        <a:srgbClr val="E7D6D1"/>
+                      </a:solidFill>
+                      <a:prstDash val="solid"/>
+                      <a:round/>
+                      <a:headEnd type="none" w="med" len="med"/>
+                      <a:tailEnd type="none" w="med" len="med"/>
+                    </a:lnR>
+                    <a:lnT w="12700" cap="flat" cmpd="sng" algn="ctr">
+                      <a:solidFill>
+                        <a:srgbClr val="E7D6D1"/>
+                      </a:solidFill>
+                      <a:prstDash val="solid"/>
+                      <a:round/>
+                      <a:headEnd type="none" w="med" len="med"/>
+                      <a:tailEnd type="none" w="med" len="med"/>
+                    </a:lnT>
+                    <a:lnB w="12700" cap="flat" cmpd="sng" algn="ctr">
+                      <a:solidFill>
+                        <a:srgbClr val="E7D6D1"/>
+                      </a:solidFill>
+                      <a:prstDash val="solid"/>
+                      <a:round/>
+                      <a:headEnd type="none" w="med" len="med"/>
+                      <a:tailEnd type="none" w="med" len="med"/>
+                    </a:lnB>
+                    <a:solidFill>
+                      <a:srgbClr val="FBF4F2"/>
+                    </a:solidFill>
+                  </a:tcPr>
+                </a:tc>
+                <a:tc>
+                  <a:txBody>
+                    <a:bodyPr/>
+                    <a:lstStyle/>
+                    <a:p>
+                      <a:pPr algn="ctr" indent="0" marL="0">
+                        <a:buNone/>
+                      </a:pPr>
+                      <a:r>
+                        <a:rPr lang="en-US" sz="1300" dirty="0">
+                          <a:solidFill>
+                            <a:srgbClr val="BE0000"/>
+                          </a:solidFill>
+                          <a:latin typeface="Calibri" pitchFamily="34" charset="0"/>
+                          <a:ea typeface="Calibri" pitchFamily="34" charset="-122"/>
+                          <a:cs typeface="Calibri" pitchFamily="34" charset="-120"/>
+                        </a:rPr>
+                        <a:t>6.7 mm</a:t>
+                      </a:r>
+                      <a:endParaRPr lang="en-US" sz="1300" dirty="0">
+                        <a:latin typeface="Calibri" charset="0"/>
+                        <a:ea typeface="Calibri" charset="0"/>
+                        <a:cs typeface="Calibri" charset="0"/>
+                      </a:endParaRPr>
+                    </a:p>
+                  </a:txBody>
+                  <a:tcPr marL="76200" marR="76200" marT="63500" marB="63500" anchor="ctr">
+                    <a:lnL w="12700" cap="flat" cmpd="sng" algn="ctr">
+                      <a:solidFill>
+                        <a:srgbClr val="E7D6D1"/>
+                      </a:solidFill>
+                      <a:prstDash val="solid"/>
+                      <a:round/>
+                      <a:headEnd type="none" w="med" len="med"/>
+                      <a:tailEnd type="none" w="med" len="med"/>
+                    </a:lnL>
+                    <a:lnR w="12700" cap="flat" cmpd="sng" algn="ctr">
+                      <a:solidFill>
+                        <a:srgbClr val="E7D6D1"/>
+                      </a:solidFill>
+                      <a:prstDash val="solid"/>
+                      <a:round/>
+                      <a:headEnd type="none" w="med" len="med"/>
+                      <a:tailEnd type="none" w="med" len="med"/>
+                    </a:lnR>
+                    <a:lnT w="12700" cap="flat" cmpd="sng" algn="ctr">
+                      <a:solidFill>
+                        <a:srgbClr val="E7D6D1"/>
+                      </a:solidFill>
+                      <a:prstDash val="solid"/>
+                      <a:round/>
+                      <a:headEnd type="none" w="med" len="med"/>
+                      <a:tailEnd type="none" w="med" len="med"/>
+                    </a:lnT>
+                    <a:lnB w="12700" cap="flat" cmpd="sng" algn="ctr">
+                      <a:solidFill>
+                        <a:srgbClr val="E7D6D1"/>
+                      </a:solidFill>
+                      <a:prstDash val="solid"/>
+                      <a:round/>
+                      <a:headEnd type="none" w="med" len="med"/>
+                      <a:tailEnd type="none" w="med" len="med"/>
+                    </a:lnB>
+                    <a:solidFill>
+                      <a:srgbClr val="FBF4F2"/>
+                    </a:solidFill>
+                  </a:tcPr>
+                </a:tc>
+                <a:tc>
+                  <a:txBody>
+                    <a:bodyPr/>
+                    <a:lstStyle/>
+                    <a:p>
+                      <a:pPr algn="ctr" indent="0" marL="0">
+                        <a:buNone/>
+                      </a:pPr>
+                      <a:r>
+                        <a:rPr lang="en-US" sz="1300" dirty="0">
+                          <a:solidFill>
+                            <a:srgbClr val="BE0000"/>
+                          </a:solidFill>
+                          <a:latin typeface="Calibri" pitchFamily="34" charset="0"/>
+                          <a:ea typeface="Calibri" pitchFamily="34" charset="-122"/>
+                          <a:cs typeface="Calibri" pitchFamily="34" charset="-120"/>
+                        </a:rPr>
+                        <a:t>6.0 mm</a:t>
+                      </a:r>
+                      <a:endParaRPr lang="en-US" sz="1300" dirty="0">
+                        <a:latin typeface="Calibri" charset="0"/>
+                        <a:ea typeface="Calibri" charset="0"/>
+                        <a:cs typeface="Calibri" charset="0"/>
+                      </a:endParaRPr>
+                    </a:p>
+                  </a:txBody>
+                  <a:tcPr marL="76200" marR="76200" marT="63500" marB="63500" anchor="ctr">
+                    <a:lnL w="12700" cap="flat" cmpd="sng" algn="ctr">
+                      <a:solidFill>
+                        <a:srgbClr val="E7D6D1"/>
+                      </a:solidFill>
+                      <a:prstDash val="solid"/>
+                      <a:round/>
+                      <a:headEnd type="none" w="med" len="med"/>
+                      <a:tailEnd type="none" w="med" len="med"/>
+                    </a:lnL>
+                    <a:lnR w="12700" cap="flat" cmpd="sng" algn="ctr">
+                      <a:solidFill>
+                        <a:srgbClr val="E7D6D1"/>
+                      </a:solidFill>
+                      <a:prstDash val="solid"/>
+                      <a:round/>
+                      <a:headEnd type="none" w="med" len="med"/>
+                      <a:tailEnd type="none" w="med" len="med"/>
+                    </a:lnR>
+                    <a:lnT w="12700" cap="flat" cmpd="sng" algn="ctr">
+                      <a:solidFill>
+                        <a:srgbClr val="E7D6D1"/>
+                      </a:solidFill>
+                      <a:prstDash val="solid"/>
+                      <a:round/>
+                      <a:headEnd type="none" w="med" len="med"/>
+                      <a:tailEnd type="none" w="med" len="med"/>
+                    </a:lnT>
+                    <a:lnB w="12700" cap="flat" cmpd="sng" algn="ctr">
+                      <a:solidFill>
+                        <a:srgbClr val="E7D6D1"/>
+                      </a:solidFill>
+                      <a:prstDash val="solid"/>
+                      <a:round/>
+                      <a:headEnd type="none" w="med" len="med"/>
+                      <a:tailEnd type="none" w="med" len="med"/>
+                    </a:lnB>
+                    <a:solidFill>
+                      <a:srgbClr val="FBF4F2"/>
+                    </a:solidFill>
+                  </a:tcPr>
+                </a:tc>
+              </a:tr>
+              <a:tr h="658368">
+                <a:tc>
+                  <a:txBody>
+                    <a:bodyPr/>
+                    <a:lstStyle/>
+                    <a:p>
+                      <a:pPr algn="l" indent="0" marL="0">
+                        <a:buNone/>
+                      </a:pPr>
+                      <a:r>
+                        <a:rPr lang="en-US" sz="1300" b="1" dirty="0">
+                          <a:solidFill>
+                            <a:srgbClr val="2A1618"/>
+                          </a:solidFill>
+                          <a:latin typeface="Calibri" pitchFamily="34" charset="0"/>
+                          <a:ea typeface="Calibri" pitchFamily="34" charset="-122"/>
+                          <a:cs typeface="Calibri" pitchFamily="34" charset="-120"/>
+                        </a:rPr>
+                        <a:t>CNN LOSO (new session, seen positions)</a:t>
+                      </a:r>
+                      <a:endParaRPr lang="en-US" sz="1300" dirty="0">
+                        <a:latin typeface="Calibri" charset="0"/>
+                        <a:ea typeface="Calibri" charset="0"/>
+                        <a:cs typeface="Calibri" charset="0"/>
+                      </a:endParaRPr>
+                    </a:p>
+                  </a:txBody>
+                  <a:tcPr marL="76200" marR="76200" marT="63500" marB="63500" anchor="ctr">
+                    <a:lnL w="12700" cap="flat" cmpd="sng" algn="ctr">
+                      <a:solidFill>
+                        <a:srgbClr val="E7D6D1"/>
+                      </a:solidFill>
+                      <a:prstDash val="solid"/>
+                      <a:round/>
+                      <a:headEnd type="none" w="med" len="med"/>
+                      <a:tailEnd type="none" w="med" len="med"/>
+                    </a:lnL>
+                    <a:lnR w="12700" cap="flat" cmpd="sng" algn="ctr">
+                      <a:solidFill>
+                        <a:srgbClr val="E7D6D1"/>
+                      </a:solidFill>
+                      <a:prstDash val="solid"/>
+                      <a:round/>
+                      <a:headEnd type="none" w="med" len="med"/>
+                      <a:tailEnd type="none" w="med" len="med"/>
+                    </a:lnR>
+                    <a:lnT w="12700" cap="flat" cmpd="sng" algn="ctr">
+                      <a:solidFill>
+                        <a:srgbClr val="E7D6D1"/>
+                      </a:solidFill>
+                      <a:prstDash val="solid"/>
+                      <a:round/>
+                      <a:headEnd type="none" w="med" len="med"/>
+                      <a:tailEnd type="none" w="med" len="med"/>
+                    </a:lnT>
+                    <a:lnB w="12700" cap="flat" cmpd="sng" algn="ctr">
+                      <a:solidFill>
+                        <a:srgbClr val="E7D6D1"/>
+                      </a:solidFill>
+                      <a:prstDash val="solid"/>
+                      <a:round/>
+                      <a:headEnd type="none" w="med" len="med"/>
+                      <a:tailEnd type="none" w="med" len="med"/>
+                    </a:lnB>
+                    <a:solidFill>
+                      <a:srgbClr val="FFFFFF"/>
+                    </a:solidFill>
+                  </a:tcPr>
+                </a:tc>
+                <a:tc>
+                  <a:txBody>
+                    <a:bodyPr/>
+                    <a:lstStyle/>
+                    <a:p>
+                      <a:pPr algn="ctr" indent="0" marL="0">
+                        <a:buNone/>
+                      </a:pPr>
+                      <a:r>
+                        <a:rPr lang="en-US" sz="1300" dirty="0">
+                          <a:solidFill>
+                            <a:srgbClr val="BE0000"/>
+                          </a:solidFill>
+                          <a:latin typeface="Calibri" pitchFamily="34" charset="0"/>
+                          <a:ea typeface="Calibri" pitchFamily="34" charset="-122"/>
+                          <a:cs typeface="Calibri" pitchFamily="34" charset="-120"/>
+                        </a:rPr>
+                        <a:t>-</a:t>
+                      </a:r>
+                      <a:endParaRPr lang="en-US" sz="1300" dirty="0">
+                        <a:latin typeface="Calibri" charset="0"/>
+                        <a:ea typeface="Calibri" charset="0"/>
+                        <a:cs typeface="Calibri" charset="0"/>
+                      </a:endParaRPr>
+                    </a:p>
+                  </a:txBody>
+                  <a:tcPr marL="76200" marR="76200" marT="63500" marB="63500" anchor="ctr">
+                    <a:lnL w="12700" cap="flat" cmpd="sng" algn="ctr">
+                      <a:solidFill>
+                        <a:srgbClr val="E7D6D1"/>
+                      </a:solidFill>
+                      <a:prstDash val="solid"/>
+                      <a:round/>
+                      <a:headEnd type="none" w="med" len="med"/>
+                      <a:tailEnd type="none" w="med" len="med"/>
+                    </a:lnL>
+                    <a:lnR w="12700" cap="flat" cmpd="sng" algn="ctr">
+                      <a:solidFill>
+                        <a:srgbClr val="E7D6D1"/>
+                      </a:solidFill>
+                      <a:prstDash val="solid"/>
+                      <a:round/>
+                      <a:headEnd type="none" w="med" len="med"/>
+                      <a:tailEnd type="none" w="med" len="med"/>
+                    </a:lnR>
+                    <a:lnT w="12700" cap="flat" cmpd="sng" algn="ctr">
+                      <a:solidFill>
+                        <a:srgbClr val="E7D6D1"/>
+                      </a:solidFill>
+                      <a:prstDash val="solid"/>
+                      <a:round/>
+                      <a:headEnd type="none" w="med" len="med"/>
+                      <a:tailEnd type="none" w="med" len="med"/>
+                    </a:lnT>
+                    <a:lnB w="12700" cap="flat" cmpd="sng" algn="ctr">
+                      <a:solidFill>
+                        <a:srgbClr val="E7D6D1"/>
+                      </a:solidFill>
+                      <a:prstDash val="solid"/>
+                      <a:round/>
+                      <a:headEnd type="none" w="med" len="med"/>
+                      <a:tailEnd type="none" w="med" len="med"/>
+                    </a:lnB>
+                    <a:solidFill>
+                      <a:srgbClr val="FFFFFF"/>
+                    </a:solidFill>
+                  </a:tcPr>
+                </a:tc>
+                <a:tc>
+                  <a:txBody>
+                    <a:bodyPr/>
+                    <a:lstStyle/>
+                    <a:p>
+                      <a:pPr algn="ctr" indent="0" marL="0">
+                        <a:buNone/>
+                      </a:pPr>
+                      <a:r>
+                        <a:rPr lang="en-US" sz="1300" dirty="0">
+                          <a:solidFill>
+                            <a:srgbClr val="BE0000"/>
+                          </a:solidFill>
+                          <a:latin typeface="Calibri" pitchFamily="34" charset="0"/>
+                          <a:ea typeface="Calibri" pitchFamily="34" charset="-122"/>
+                          <a:cs typeface="Calibri" pitchFamily="34" charset="-120"/>
+                        </a:rPr>
+                        <a:t>3.9 mm</a:t>
+                      </a:r>
+                      <a:endParaRPr lang="en-US" sz="1300" dirty="0">
+                        <a:latin typeface="Calibri" charset="0"/>
+                        <a:ea typeface="Calibri" charset="0"/>
+                        <a:cs typeface="Calibri" charset="0"/>
+                      </a:endParaRPr>
+                    </a:p>
+                  </a:txBody>
+                  <a:tcPr marL="76200" marR="76200" marT="63500" marB="63500" anchor="ctr">
+                    <a:lnL w="12700" cap="flat" cmpd="sng" algn="ctr">
+                      <a:solidFill>
+                        <a:srgbClr val="E7D6D1"/>
+                      </a:solidFill>
+                      <a:prstDash val="solid"/>
+                      <a:round/>
+                      <a:headEnd type="none" w="med" len="med"/>
+                      <a:tailEnd type="none" w="med" len="med"/>
+                    </a:lnL>
+                    <a:lnR w="12700" cap="flat" cmpd="sng" algn="ctr">
+                      <a:solidFill>
+                        <a:srgbClr val="E7D6D1"/>
+                      </a:solidFill>
+                      <a:prstDash val="solid"/>
+                      <a:round/>
+                      <a:headEnd type="none" w="med" len="med"/>
+                      <a:tailEnd type="none" w="med" len="med"/>
+                    </a:lnR>
+                    <a:lnT w="12700" cap="flat" cmpd="sng" algn="ctr">
+                      <a:solidFill>
+                        <a:srgbClr val="E7D6D1"/>
+                      </a:solidFill>
+                      <a:prstDash val="solid"/>
+                      <a:round/>
+                      <a:headEnd type="none" w="med" len="med"/>
+                      <a:tailEnd type="none" w="med" len="med"/>
+                    </a:lnT>
+                    <a:lnB w="12700" cap="flat" cmpd="sng" algn="ctr">
+                      <a:solidFill>
+                        <a:srgbClr val="E7D6D1"/>
+                      </a:solidFill>
+                      <a:prstDash val="solid"/>
+                      <a:round/>
+                      <a:headEnd type="none" w="med" len="med"/>
+                      <a:tailEnd type="none" w="med" len="med"/>
+                    </a:lnB>
+                    <a:solidFill>
+                      <a:srgbClr val="FFFFFF"/>
+                    </a:solidFill>
+                  </a:tcPr>
+                </a:tc>
+              </a:tr>
+              <a:tr h="658368">
+                <a:tc>
+                  <a:txBody>
+                    <a:bodyPr/>
+                    <a:lstStyle/>
+                    <a:p>
+                      <a:pPr algn="l" indent="0" marL="0">
+                        <a:buNone/>
+                      </a:pPr>
+                      <a:r>
+                        <a:rPr lang="en-US" sz="1300" b="1" dirty="0">
+                          <a:solidFill>
+                            <a:srgbClr val="2A1618"/>
+                          </a:solidFill>
+                          <a:latin typeface="Calibri" pitchFamily="34" charset="0"/>
+                          <a:ea typeface="Calibri" pitchFamily="34" charset="-122"/>
+                          <a:cs typeface="Calibri" pitchFamily="34" charset="-120"/>
+                        </a:rPr>
+                        <a:t>CNN LOPO single-position (unseen position)</a:t>
+                      </a:r>
+                      <a:endParaRPr lang="en-US" sz="1300" dirty="0">
+                        <a:latin typeface="Calibri" charset="0"/>
+                        <a:ea typeface="Calibri" charset="0"/>
+                        <a:cs typeface="Calibri" charset="0"/>
+                      </a:endParaRPr>
+                    </a:p>
+                  </a:txBody>
+                  <a:tcPr marL="76200" marR="76200" marT="63500" marB="63500" anchor="ctr">
+                    <a:lnL w="12700" cap="flat" cmpd="sng" algn="ctr">
+                      <a:solidFill>
+                        <a:srgbClr val="E7D6D1"/>
+                      </a:solidFill>
+                      <a:prstDash val="solid"/>
+                      <a:round/>
+                      <a:headEnd type="none" w="med" len="med"/>
+                      <a:tailEnd type="none" w="med" len="med"/>
+                    </a:lnL>
+                    <a:lnR w="12700" cap="flat" cmpd="sng" algn="ctr">
+                      <a:solidFill>
+                        <a:srgbClr val="E7D6D1"/>
+                      </a:solidFill>
+                      <a:prstDash val="solid"/>
+                      <a:round/>
+                      <a:headEnd type="none" w="med" len="med"/>
+                      <a:tailEnd type="none" w="med" len="med"/>
+                    </a:lnR>
+                    <a:lnT w="12700" cap="flat" cmpd="sng" algn="ctr">
+                      <a:solidFill>
+                        <a:srgbClr val="E7D6D1"/>
+                      </a:solidFill>
+                      <a:prstDash val="solid"/>
+                      <a:round/>
+                      <a:headEnd type="none" w="med" len="med"/>
+                      <a:tailEnd type="none" w="med" len="med"/>
+                    </a:lnT>
+                    <a:lnB w="12700" cap="flat" cmpd="sng" algn="ctr">
+                      <a:solidFill>
+                        <a:srgbClr val="E7D6D1"/>
+                      </a:solidFill>
+                      <a:prstDash val="solid"/>
+                      <a:round/>
+                      <a:headEnd type="none" w="med" len="med"/>
+                      <a:tailEnd type="none" w="med" len="med"/>
+                    </a:lnB>
+                    <a:solidFill>
+                      <a:srgbClr val="FBF4F2"/>
+                    </a:solidFill>
+                  </a:tcPr>
+                </a:tc>
+                <a:tc>
+                  <a:txBody>
+                    <a:bodyPr/>
+                    <a:lstStyle/>
+                    <a:p>
+                      <a:pPr algn="ctr" indent="0" marL="0">
+                        <a:buNone/>
+                      </a:pPr>
+                      <a:r>
+                        <a:rPr lang="en-US" sz="1300" dirty="0">
+                          <a:solidFill>
+                            <a:srgbClr val="BE0000"/>
+                          </a:solidFill>
+                          <a:latin typeface="Calibri" pitchFamily="34" charset="0"/>
+                          <a:ea typeface="Calibri" pitchFamily="34" charset="-122"/>
+                          <a:cs typeface="Calibri" pitchFamily="34" charset="-120"/>
+                        </a:rPr>
+                        <a:t>-</a:t>
+                      </a:r>
+                      <a:endParaRPr lang="en-US" sz="1300" dirty="0">
+                        <a:latin typeface="Calibri" charset="0"/>
+                        <a:ea typeface="Calibri" charset="0"/>
+                        <a:cs typeface="Calibri" charset="0"/>
+                      </a:endParaRPr>
+                    </a:p>
+                  </a:txBody>
+                  <a:tcPr marL="76200" marR="76200" marT="63500" marB="63500" anchor="ctr">
+                    <a:lnL w="12700" cap="flat" cmpd="sng" algn="ctr">
+                      <a:solidFill>
+                        <a:srgbClr val="E7D6D1"/>
+                      </a:solidFill>
+                      <a:prstDash val="solid"/>
+                      <a:round/>
+                      <a:headEnd type="none" w="med" len="med"/>
+                      <a:tailEnd type="none" w="med" len="med"/>
+                    </a:lnL>
+                    <a:lnR w="12700" cap="flat" cmpd="sng" algn="ctr">
+                      <a:solidFill>
+                        <a:srgbClr val="E7D6D1"/>
+                      </a:solidFill>
+                      <a:prstDash val="solid"/>
+                      <a:round/>
+                      <a:headEnd type="none" w="med" len="med"/>
+                      <a:tailEnd type="none" w="med" len="med"/>
+                    </a:lnR>
+                    <a:lnT w="12700" cap="flat" cmpd="sng" algn="ctr">
+                      <a:solidFill>
+                        <a:srgbClr val="E7D6D1"/>
+                      </a:solidFill>
+                      <a:prstDash val="solid"/>
+                      <a:round/>
+                      <a:headEnd type="none" w="med" len="med"/>
+                      <a:tailEnd type="none" w="med" len="med"/>
+                    </a:lnT>
+                    <a:lnB w="12700" cap="flat" cmpd="sng" algn="ctr">
+                      <a:solidFill>
+                        <a:srgbClr val="E7D6D1"/>
+                      </a:solidFill>
+                      <a:prstDash val="solid"/>
+                      <a:round/>
+                      <a:headEnd type="none" w="med" len="med"/>
+                      <a:tailEnd type="none" w="med" len="med"/>
+                    </a:lnB>
+                    <a:solidFill>
+                      <a:srgbClr val="FBF4F2"/>
+                    </a:solidFill>
+                  </a:tcPr>
+                </a:tc>
+                <a:tc>
+                  <a:txBody>
+                    <a:bodyPr/>
+                    <a:lstStyle/>
+                    <a:p>
+                      <a:pPr algn="ctr" indent="0" marL="0">
+                        <a:buNone/>
+                      </a:pPr>
+                      <a:r>
+                        <a:rPr lang="en-US" sz="1300" dirty="0">
+                          <a:solidFill>
+                            <a:srgbClr val="BE0000"/>
+                          </a:solidFill>
+                          <a:latin typeface="Calibri" pitchFamily="34" charset="0"/>
+                          <a:ea typeface="Calibri" pitchFamily="34" charset="-122"/>
+                          <a:cs typeface="Calibri" pitchFamily="34" charset="-120"/>
+                        </a:rPr>
+                        <a:t>9.9 mm</a:t>
+                      </a:r>
+                      <a:endParaRPr lang="en-US" sz="1300" dirty="0">
+                        <a:latin typeface="Calibri" charset="0"/>
+                        <a:ea typeface="Calibri" charset="0"/>
+                        <a:cs typeface="Calibri" charset="0"/>
+                      </a:endParaRPr>
+                    </a:p>
+                  </a:txBody>
+                  <a:tcPr marL="76200" marR="76200" marT="63500" marB="63500" anchor="ctr">
+                    <a:lnL w="12700" cap="flat" cmpd="sng" algn="ctr">
+                      <a:solidFill>
+                        <a:srgbClr val="E7D6D1"/>
+                      </a:solidFill>
+                      <a:prstDash val="solid"/>
+                      <a:round/>
+                      <a:headEnd type="none" w="med" len="med"/>
+                      <a:tailEnd type="none" w="med" len="med"/>
+                    </a:lnL>
+                    <a:lnR w="12700" cap="flat" cmpd="sng" algn="ctr">
+                      <a:solidFill>
+                        <a:srgbClr val="E7D6D1"/>
+                      </a:solidFill>
+                      <a:prstDash val="solid"/>
+                      <a:round/>
+                      <a:headEnd type="none" w="med" len="med"/>
+                      <a:tailEnd type="none" w="med" len="med"/>
+                    </a:lnR>
+                    <a:lnT w="12700" cap="flat" cmpd="sng" algn="ctr">
+                      <a:solidFill>
+                        <a:srgbClr val="E7D6D1"/>
+                      </a:solidFill>
+                      <a:prstDash val="solid"/>
+                      <a:round/>
+                      <a:headEnd type="none" w="med" len="med"/>
+                      <a:tailEnd type="none" w="med" len="med"/>
+                    </a:lnT>
+                    <a:lnB w="12700" cap="flat" cmpd="sng" algn="ctr">
+                      <a:solidFill>
+                        <a:srgbClr val="E7D6D1"/>
+                      </a:solidFill>
+                      <a:prstDash val="solid"/>
+                      <a:round/>
+                      <a:headEnd type="none" w="med" len="med"/>
+                      <a:tailEnd type="none" w="med" len="med"/>
+                    </a:lnB>
+                    <a:solidFill>
+                      <a:srgbClr val="FBF4F2"/>
+                    </a:solidFill>
+                  </a:tcPr>
+                </a:tc>
+              </a:tr>
+              <a:tr h="658368">
+                <a:tc>
+                  <a:txBody>
+                    <a:bodyPr/>
+                    <a:lstStyle/>
+                    <a:p>
+                      <a:pPr algn="l" indent="0" marL="0">
+                        <a:buNone/>
+                      </a:pPr>
+                      <a:r>
+                        <a:rPr lang="en-US" sz="1300" b="1" dirty="0">
+                          <a:solidFill>
+                            <a:srgbClr val="2A1618"/>
+                          </a:solidFill>
+                          <a:latin typeface="Calibri" pitchFamily="34" charset="0"/>
+                          <a:ea typeface="Calibri" pitchFamily="34" charset="-122"/>
+                          <a:cs typeface="Calibri" pitchFamily="34" charset="-120"/>
+                        </a:rPr>
+                        <a:t>CNN 8-fold (full depth stack, ~1000 pos)</a:t>
+                      </a:r>
+                      <a:endParaRPr lang="en-US" sz="1300" dirty="0">
+                        <a:latin typeface="Calibri" charset="0"/>
+                        <a:ea typeface="Calibri" charset="0"/>
+                        <a:cs typeface="Calibri" charset="0"/>
+                      </a:endParaRPr>
+                    </a:p>
+                  </a:txBody>
+                  <a:tcPr marL="76200" marR="76200" marT="63500" marB="63500" anchor="ctr">
+                    <a:lnL w="12700" cap="flat" cmpd="sng" algn="ctr">
+                      <a:solidFill>
+                        <a:srgbClr val="E7D6D1"/>
+                      </a:solidFill>
+                      <a:prstDash val="solid"/>
+                      <a:round/>
+                      <a:headEnd type="none" w="med" len="med"/>
+                      <a:tailEnd type="none" w="med" len="med"/>
+                    </a:lnL>
+                    <a:lnR w="12700" cap="flat" cmpd="sng" algn="ctr">
+                      <a:solidFill>
+                        <a:srgbClr val="E7D6D1"/>
+                      </a:solidFill>
+                      <a:prstDash val="solid"/>
+                      <a:round/>
+                      <a:headEnd type="none" w="med" len="med"/>
+                      <a:tailEnd type="none" w="med" len="med"/>
+                    </a:lnR>
+                    <a:lnT w="12700" cap="flat" cmpd="sng" algn="ctr">
+                      <a:solidFill>
+                        <a:srgbClr val="E7D6D1"/>
+                      </a:solidFill>
+                      <a:prstDash val="solid"/>
+                      <a:round/>
+                      <a:headEnd type="none" w="med" len="med"/>
+                      <a:tailEnd type="none" w="med" len="med"/>
+                    </a:lnT>
+                    <a:lnB w="12700" cap="flat" cmpd="sng" algn="ctr">
+                      <a:solidFill>
+                        <a:srgbClr val="E7D6D1"/>
+                      </a:solidFill>
+                      <a:prstDash val="solid"/>
+                      <a:round/>
+                      <a:headEnd type="none" w="med" len="med"/>
+                      <a:tailEnd type="none" w="med" len="med"/>
+                    </a:lnB>
+                    <a:solidFill>
+                      <a:srgbClr val="FFFFFF"/>
+                    </a:solidFill>
+                  </a:tcPr>
+                </a:tc>
+                <a:tc>
+                  <a:txBody>
+                    <a:bodyPr/>
+                    <a:lstStyle/>
+                    <a:p>
+                      <a:pPr algn="ctr" indent="0" marL="0">
+                        <a:buNone/>
+                      </a:pPr>
+                      <a:r>
+                        <a:rPr lang="en-US" sz="1300" dirty="0">
+                          <a:solidFill>
+                            <a:srgbClr val="BE0000"/>
+                          </a:solidFill>
+                          <a:latin typeface="Calibri" pitchFamily="34" charset="0"/>
+                          <a:ea typeface="Calibri" pitchFamily="34" charset="-122"/>
+                          <a:cs typeface="Calibri" pitchFamily="34" charset="-120"/>
+                        </a:rPr>
+                        <a:t>3.9 mm</a:t>
+                      </a:r>
+                      <a:endParaRPr lang="en-US" sz="1300" dirty="0">
+                        <a:latin typeface="Calibri" charset="0"/>
+                        <a:ea typeface="Calibri" charset="0"/>
+                        <a:cs typeface="Calibri" charset="0"/>
+                      </a:endParaRPr>
+                    </a:p>
+                  </a:txBody>
+                  <a:tcPr marL="76200" marR="76200" marT="63500" marB="63500" anchor="ctr">
+                    <a:lnL w="12700" cap="flat" cmpd="sng" algn="ctr">
+                      <a:solidFill>
+                        <a:srgbClr val="E7D6D1"/>
+                      </a:solidFill>
+                      <a:prstDash val="solid"/>
+                      <a:round/>
+                      <a:headEnd type="none" w="med" len="med"/>
+                      <a:tailEnd type="none" w="med" len="med"/>
+                    </a:lnL>
+                    <a:lnR w="12700" cap="flat" cmpd="sng" algn="ctr">
+                      <a:solidFill>
+                        <a:srgbClr val="E7D6D1"/>
+                      </a:solidFill>
+                      <a:prstDash val="solid"/>
+                      <a:round/>
+                      <a:headEnd type="none" w="med" len="med"/>
+                      <a:tailEnd type="none" w="med" len="med"/>
+                    </a:lnR>
+                    <a:lnT w="12700" cap="flat" cmpd="sng" algn="ctr">
+                      <a:solidFill>
+                        <a:srgbClr val="E7D6D1"/>
+                      </a:solidFill>
+                      <a:prstDash val="solid"/>
+                      <a:round/>
+                      <a:headEnd type="none" w="med" len="med"/>
+                      <a:tailEnd type="none" w="med" len="med"/>
+                    </a:lnT>
+                    <a:lnB w="12700" cap="flat" cmpd="sng" algn="ctr">
+                      <a:solidFill>
+                        <a:srgbClr val="E7D6D1"/>
+                      </a:solidFill>
+                      <a:prstDash val="solid"/>
+                      <a:round/>
+                      <a:headEnd type="none" w="med" len="med"/>
+                      <a:tailEnd type="none" w="med" len="med"/>
+                    </a:lnB>
+                    <a:solidFill>
+                      <a:srgbClr val="FFFFFF"/>
+                    </a:solidFill>
+                  </a:tcPr>
+                </a:tc>
+                <a:tc>
+                  <a:txBody>
+                    <a:bodyPr/>
+                    <a:lstStyle/>
+                    <a:p>
+                      <a:pPr algn="ctr" indent="0" marL="0">
+                        <a:buNone/>
+                      </a:pPr>
+                      <a:r>
+                        <a:rPr lang="en-US" sz="1300" dirty="0">
+                          <a:solidFill>
+                            <a:srgbClr val="BE0000"/>
+                          </a:solidFill>
+                          <a:latin typeface="Calibri" pitchFamily="34" charset="0"/>
+                          <a:ea typeface="Calibri" pitchFamily="34" charset="-122"/>
+                          <a:cs typeface="Calibri" pitchFamily="34" charset="-120"/>
+                        </a:rPr>
+                        <a:t>-</a:t>
+                      </a:r>
+                      <a:endParaRPr lang="en-US" sz="1300" dirty="0">
+                        <a:latin typeface="Calibri" charset="0"/>
+                        <a:ea typeface="Calibri" charset="0"/>
+                        <a:cs typeface="Calibri" charset="0"/>
+                      </a:endParaRPr>
+                    </a:p>
+                  </a:txBody>
+                  <a:tcPr marL="76200" marR="76200" marT="63500" marB="63500" anchor="ctr">
+                    <a:lnL w="12700" cap="flat" cmpd="sng" algn="ctr">
+                      <a:solidFill>
+                        <a:srgbClr val="E7D6D1"/>
+                      </a:solidFill>
+                      <a:prstDash val="solid"/>
+                      <a:round/>
+                      <a:headEnd type="none" w="med" len="med"/>
+                      <a:tailEnd type="none" w="med" len="med"/>
+                    </a:lnL>
+                    <a:lnR w="12700" cap="flat" cmpd="sng" algn="ctr">
+                      <a:solidFill>
+                        <a:srgbClr val="E7D6D1"/>
+                      </a:solidFill>
+                      <a:prstDash val="solid"/>
+                      <a:round/>
+                      <a:headEnd type="none" w="med" len="med"/>
+                      <a:tailEnd type="none" w="med" len="med"/>
+                    </a:lnR>
+                    <a:lnT w="12700" cap="flat" cmpd="sng" algn="ctr">
+                      <a:solidFill>
+                        <a:srgbClr val="E7D6D1"/>
+                      </a:solidFill>
+                      <a:prstDash val="solid"/>
+                      <a:round/>
+                      <a:headEnd type="none" w="med" len="med"/>
+                      <a:tailEnd type="none" w="med" len="med"/>
+                    </a:lnT>
+                    <a:lnB w="12700" cap="flat" cmpd="sng" algn="ctr">
+                      <a:solidFill>
+                        <a:srgbClr val="E7D6D1"/>
+                      </a:solidFill>
+                      <a:prstDash val="solid"/>
+                      <a:round/>
+                      <a:headEnd type="none" w="med" len="med"/>
+                      <a:tailEnd type="none" w="med" len="med"/>
+                    </a:lnB>
+                    <a:solidFill>
+                      <a:srgbClr val="FFFFFF"/>
+                    </a:solidFill>
+                  </a:tcPr>
+                </a:tc>
+              </a:tr>
+            </a:tbl>
+          </a:graphicData>
+        </a:graphic>
+      </p:graphicFrame>
       <p:sp>
         <p:nvSpPr>
           <p:cNvPr id="5" name="Shape 2"/>
@@ -5276,26 +5081,26 @@
         </p:nvSpPr>
         <p:spPr>
           <a:xfrm>
-            <a:off x="8412480" y="1600200"/>
-            <a:ext cx="3246120" cy="3566160"/>
+            <a:off x="7772400" y="1645920"/>
+            <a:ext cx="3886200" cy="1828800"/>
           </a:xfrm>
           <a:prstGeom prst="roundRect">
             <a:avLst>
-              <a:gd name="adj" fmla="val 2535"/>
+              <a:gd name="adj" fmla="val 4500"/>
             </a:avLst>
           </a:prstGeom>
           <a:solidFill>
-            <a:srgbClr val="F3F7FA"/>
+            <a:srgbClr val="FBF4F2"/>
           </a:solidFill>
           <a:ln w="12700">
             <a:solidFill>
-              <a:srgbClr val="D8E2EA"/>
+              <a:srgbClr val="E7D6D1"/>
             </a:solidFill>
             <a:prstDash val="solid"/>
           </a:ln>
           <a:effectLst>
             <a:outerShdw sx="100000" sy="100000" kx="0" ky="0" algn="bl" rotWithShape="0" blurRad="88900" dist="38100" dir="5400000">
-              <a:srgbClr val="5B6B7B">
+              <a:srgbClr val="7A5C5E">
                 <a:alpha val="18000"/>
               </a:srgbClr>
             </a:outerShdw>
@@ -5310,8 +5115,8 @@
         </p:nvSpPr>
         <p:spPr>
           <a:xfrm>
-            <a:off x="8595360" y="1755648"/>
-            <a:ext cx="2926080" cy="365760"/>
+            <a:off x="7955280" y="1783080"/>
+            <a:ext cx="3474720" cy="320040"/>
           </a:xfrm>
           <a:prstGeom prst="rect">
             <a:avLst/>
@@ -5327,17 +5132,17 @@
               <a:buNone/>
             </a:pPr>
             <a:r>
-              <a:rPr lang="en-US" sz="1500" b="1" dirty="0">
+              <a:rPr lang="en-US" sz="1400" b="1" dirty="0">
                 <a:solidFill>
-                  <a:srgbClr val="0B5D7A"/>
+                  <a:srgbClr val="BE0000"/>
                 </a:solidFill>
                 <a:latin typeface="Cambria" pitchFamily="34" charset="0"/>
                 <a:ea typeface="Cambria" pitchFamily="34" charset="-122"/>
                 <a:cs typeface="Cambria" pitchFamily="34" charset="-120"/>
               </a:rPr>
-              <a:t>First-pass finding</a:t>
+              <a:t>What is k-NN?</a:t>
             </a:r>
-            <a:endParaRPr lang="en-US" sz="1500" dirty="0"/>
+            <a:endParaRPr lang="en-US" sz="1400" dirty="0"/>
           </a:p>
         </p:txBody>
       </p:sp>
@@ -5349,8 +5154,8 @@
         </p:nvSpPr>
         <p:spPr>
           <a:xfrm>
-            <a:off x="8595360" y="2240280"/>
-            <a:ext cx="2926080" cy="2834640"/>
+            <a:off x="7955280" y="2148840"/>
+            <a:ext cx="3520440" cy="1280160"/>
           </a:xfrm>
           <a:prstGeom prst="rect">
             <a:avLst/>
@@ -5362,80 +5167,68 @@
           <a:bodyPr wrap="square" lIns="0" tIns="0" rIns="0" bIns="0" rtlCol="0" anchor="t"/>
           <a:lstStyle/>
           <a:p>
-            <a:pPr marL="342900" indent="-342900">
-              <a:spcAft>
-                <a:spcPts val="800"/>
-              </a:spcAft>
-              <a:buSzPct val="100000"/>
-              <a:buChar char="•"/>
+            <a:pPr indent="0" marL="0">
+              <a:buNone/>
             </a:pPr>
             <a:r>
               <a:rPr lang="en-US" sz="1150" dirty="0">
                 <a:solidFill>
-                  <a:srgbClr val="1E293B"/>
+                  <a:srgbClr val="2A1618"/>
                 </a:solidFill>
                 <a:latin typeface="Calibri" pitchFamily="34" charset="0"/>
                 <a:ea typeface="Calibri" pitchFamily="34" charset="-122"/>
                 <a:cs typeface="Calibri" pitchFamily="34" charset="-120"/>
               </a:rPr>
-              <a:t>Raw sim-vs-measured |S| correlation: 0.61.</a:t>
+              <a:t>A training-free baseline: to locate a held-out spot it just averages the (x,y) of the most similar measured signals. Nothing is fit, so it measures how well the SIGNAL alone pins down location, a floor any trained model should beat.</a:t>
             </a:r>
             <a:endParaRPr lang="en-US" sz="1150" dirty="0"/>
           </a:p>
-          <a:p>
-            <a:pPr marL="342900" indent="-342900">
-              <a:spcAft>
-                <a:spcPts val="800"/>
-              </a:spcAft>
-              <a:buSzPct val="100000"/>
-              <a:buChar char="•"/>
-            </a:pPr>
-            <a:r>
-              <a:rPr lang="en-US" sz="1150" dirty="0">
-                <a:solidFill>
-                  <a:srgbClr val="1E293B"/>
-                </a:solidFill>
-                <a:latin typeface="Calibri" pitchFamily="34" charset="0"/>
-                <a:ea typeface="Calibri" pitchFamily="34" charset="-122"/>
-                <a:cs typeface="Calibri" pitchFamily="34" charset="-120"/>
-              </a:rPr>
-              <a:t>A LINEAR transfer predicts measured from sim to R² = 0.65 on frequencies it never saw — a real, learnable relationship.</a:t>
-            </a:r>
-            <a:endParaRPr lang="en-US" sz="1150" dirty="0"/>
-          </a:p>
-          <a:p>
-            <a:pPr marL="342900" indent="-342900">
-              <a:spcAft>
-                <a:spcPts val="800"/>
-              </a:spcAft>
-              <a:buSzPct val="100000"/>
-              <a:buChar char="•"/>
-            </a:pPr>
-            <a:r>
-              <a:rPr lang="en-US" sz="1150" dirty="0">
-                <a:solidFill>
-                  <a:srgbClr val="1E293B"/>
-                </a:solidFill>
-                <a:latin typeface="Calibri" pitchFamily="34" charset="0"/>
-                <a:ea typeface="Calibri" pitchFamily="34" charset="-122"/>
-                <a:cs typeface="Calibri" pitchFamily="34" charset="-120"/>
-              </a:rPr>
-              <a:t>A flexible MLP overfits the single paired baseline (R² &lt; 0).</a:t>
-            </a:r>
-            <a:endParaRPr lang="en-US" sz="1150" dirty="0"/>
-          </a:p>
         </p:txBody>
       </p:sp>
       <p:sp>
         <p:nvSpPr>
-          <p:cNvPr id="8" name="Text 5"/>
+          <p:cNvPr id="8" name="Shape 5"/>
           <p:cNvSpPr/>
           <p:nvPr/>
         </p:nvSpPr>
         <p:spPr>
           <a:xfrm>
-            <a:off x="548640" y="6126480"/>
-            <a:ext cx="11091672" cy="548640"/>
+            <a:off x="7772400" y="3611880"/>
+            <a:ext cx="3886200" cy="2514600"/>
+          </a:xfrm>
+          <a:prstGeom prst="roundRect">
+            <a:avLst>
+              <a:gd name="adj" fmla="val 3273"/>
+            </a:avLst>
+          </a:prstGeom>
+          <a:solidFill>
+            <a:srgbClr val="FBF4F2"/>
+          </a:solidFill>
+          <a:ln w="12700">
+            <a:solidFill>
+              <a:srgbClr val="E7D6D1"/>
+            </a:solidFill>
+            <a:prstDash val="solid"/>
+          </a:ln>
+          <a:effectLst>
+            <a:outerShdw sx="100000" sy="100000" kx="0" ky="0" algn="bl" rotWithShape="0" blurRad="88900" dist="38100" dir="5400000">
+              <a:srgbClr val="7A5C5E">
+                <a:alpha val="18000"/>
+              </a:srgbClr>
+            </a:outerShdw>
+          </a:effectLst>
+        </p:spPr>
+      </p:sp>
+      <p:sp>
+        <p:nvSpPr>
+          <p:cNvPr id="9" name="Text 6"/>
+          <p:cNvSpPr/>
+          <p:nvPr/>
+        </p:nvSpPr>
+        <p:spPr>
+          <a:xfrm>
+            <a:off x="7955280" y="3749040"/>
+            <a:ext cx="3474720" cy="320040"/>
           </a:xfrm>
           <a:prstGeom prst="rect">
             <a:avLst/>
@@ -5447,21 +5240,145 @@
           <a:bodyPr wrap="square" lIns="0" tIns="0" rIns="0" bIns="0" rtlCol="0" anchor="ctr"/>
           <a:lstStyle/>
           <a:p>
-            <a:pPr algn="ctr" indent="0" marL="0">
+            <a:pPr indent="0" marL="0">
               <a:buNone/>
             </a:pPr>
             <a:r>
-              <a:rPr lang="en-US" sz="1250" i="1" dirty="0">
+              <a:rPr lang="en-US" sz="1400" b="1" dirty="0">
                 <a:solidFill>
-                  <a:srgbClr val="5B6B7B"/>
+                  <a:srgbClr val="BE0000"/>
+                </a:solidFill>
+                <a:latin typeface="Cambria" pitchFamily="34" charset="0"/>
+                <a:ea typeface="Cambria" pitchFamily="34" charset="-122"/>
+                <a:cs typeface="Cambria" pitchFamily="34" charset="-120"/>
+              </a:rPr>
+              <a:t>What the numbers mean</a:t>
+            </a:r>
+            <a:endParaRPr lang="en-US" sz="1400" dirty="0"/>
+          </a:p>
+        </p:txBody>
+      </p:sp>
+      <p:sp>
+        <p:nvSpPr>
+          <p:cNvPr id="10" name="Text 7"/>
+          <p:cNvSpPr/>
+          <p:nvPr/>
+        </p:nvSpPr>
+        <p:spPr>
+          <a:xfrm>
+            <a:off x="7955280" y="4114800"/>
+            <a:ext cx="3520440" cy="1920240"/>
+          </a:xfrm>
+          <a:prstGeom prst="rect">
+            <a:avLst/>
+          </a:prstGeom>
+          <a:noFill/>
+          <a:ln/>
+        </p:spPr>
+        <p:txBody>
+          <a:bodyPr wrap="square" lIns="0" tIns="0" rIns="0" bIns="0" rtlCol="0" anchor="t"/>
+          <a:lstStyle/>
+          <a:p>
+            <a:pPr marL="342900" indent="-342900">
+              <a:spcAft>
+                <a:spcPts val="800"/>
+              </a:spcAft>
+              <a:buSzPct val="100000"/>
+              <a:buChar char="•"/>
+            </a:pPr>
+            <a:r>
+              <a:rPr lang="en-US" sz="1050" dirty="0">
+                <a:solidFill>
+                  <a:srgbClr val="2A1618"/>
                 </a:solidFill>
                 <a:latin typeface="Calibri" pitchFamily="34" charset="0"/>
                 <a:ea typeface="Calibri" pitchFamily="34" charset="-122"/>
                 <a:cs typeface="Calibri" pitchFamily="34" charset="-120"/>
               </a:rPr>
-              <a:t>Preliminary — only the empty baseline is cleanly paired. Nonlinear domain adaptation (and any use for calibrating sim toward the bench) needs far more paired data: multiple sessions and, ideally, matched tumor positions.</a:t>
+              <a:t>Signal floor is the same: sim 6.7 ~ measured 6.0 mm. Sim is realistic, not smoother.</a:t>
             </a:r>
-            <a:endParaRPr lang="en-US" sz="1250" dirty="0"/>
+            <a:endParaRPr lang="en-US" sz="1050" dirty="0"/>
+          </a:p>
+          <a:p>
+            <a:pPr marL="342900" indent="-342900">
+              <a:spcAft>
+                <a:spcPts val="800"/>
+              </a:spcAft>
+              <a:buSzPct val="100000"/>
+              <a:buChar char="•"/>
+            </a:pPr>
+            <a:r>
+              <a:rPr lang="en-US" sz="1050" dirty="0">
+                <a:solidFill>
+                  <a:srgbClr val="2A1618"/>
+                </a:solidFill>
+                <a:latin typeface="Calibri" pitchFamily="34" charset="0"/>
+                <a:ea typeface="Calibri" pitchFamily="34" charset="-122"/>
+                <a:cs typeface="Calibri" pitchFamily="34" charset="-120"/>
+              </a:rPr>
+              <a:t>LOSO (3.9) sees a new session at KNOWN spots (easy); LOPO single-position (9.9) reaches an UNSEEN spot (hard, ~50 distinct positions).</a:t>
+            </a:r>
+            <a:endParaRPr lang="en-US" sz="1050" dirty="0"/>
+          </a:p>
+          <a:p>
+            <a:pPr marL="342900" indent="-342900">
+              <a:spcAft>
+                <a:spcPts val="800"/>
+              </a:spcAft>
+              <a:buSzPct val="100000"/>
+              <a:buChar char="•"/>
+            </a:pPr>
+            <a:r>
+              <a:rPr lang="en-US" sz="1050" dirty="0">
+                <a:solidFill>
+                  <a:srgbClr val="2A1618"/>
+                </a:solidFill>
+                <a:latin typeface="Calibri" pitchFamily="34" charset="0"/>
+                <a:ea typeface="Calibri" pitchFamily="34" charset="-122"/>
+                <a:cs typeface="Calibri" pitchFamily="34" charset="-120"/>
+              </a:rPr>
+              <a:t>Sim hits 3.9 on unseen spots only via ~1000 distinct positions.</a:t>
+            </a:r>
+            <a:endParaRPr lang="en-US" sz="1050" dirty="0"/>
+          </a:p>
+        </p:txBody>
+      </p:sp>
+      <p:sp>
+        <p:nvSpPr>
+          <p:cNvPr id="11" name="Text 8"/>
+          <p:cNvSpPr/>
+          <p:nvPr/>
+        </p:nvSpPr>
+        <p:spPr>
+          <a:xfrm>
+            <a:off x="548640" y="6172200"/>
+            <a:ext cx="7040880" cy="502920"/>
+          </a:xfrm>
+          <a:prstGeom prst="rect">
+            <a:avLst/>
+          </a:prstGeom>
+          <a:noFill/>
+          <a:ln/>
+        </p:spPr>
+        <p:txBody>
+          <a:bodyPr wrap="square" lIns="0" tIns="0" rIns="0" bIns="0" rtlCol="0" anchor="ctr"/>
+          <a:lstStyle/>
+          <a:p>
+            <a:pPr algn="l" indent="0" marL="0">
+              <a:buNone/>
+            </a:pPr>
+            <a:r>
+              <a:rPr lang="en-US" sz="1150" i="1" dirty="0">
+                <a:solidFill>
+                  <a:srgbClr val="836A68"/>
+                </a:solidFill>
+                <a:latin typeface="Calibri" pitchFamily="34" charset="0"/>
+                <a:ea typeface="Calibri" pitchFamily="34" charset="-122"/>
+                <a:cs typeface="Calibri" pitchFamily="34" charset="-120"/>
+              </a:rPr>
+              <a:t>The sim vs measured CNN gap is distinct-position COVERAGE, not fidelity. To match 3.9 mm on the bench: denser grid / more depths, not a better model.</a:t>
+            </a:r>
+            <a:endParaRPr lang="en-US" sz="1150" dirty="0"/>
           </a:p>
         </p:txBody>
       </p:sp>
@@ -5479,7 +5396,7 @@
     <p:bg>
       <p:bgPr>
         <a:solidFill>
-          <a:srgbClr val="0E2233"/>
+          <a:srgbClr val="FFFFFF"/>
         </a:solidFill>
       </p:bgPr>
     </p:bg>
@@ -5505,7 +5422,358 @@
         </p:nvSpPr>
         <p:spPr>
           <a:xfrm>
-            <a:off x="822960" y="685800"/>
+            <a:off x="548640" y="384048"/>
+            <a:ext cx="11091672" cy="640080"/>
+          </a:xfrm>
+          <a:prstGeom prst="rect">
+            <a:avLst/>
+          </a:prstGeom>
+          <a:noFill/>
+          <a:ln/>
+        </p:spPr>
+        <p:txBody>
+          <a:bodyPr wrap="square" lIns="0" tIns="0" rIns="0" bIns="0" rtlCol="0" anchor="ctr"/>
+          <a:lstStyle/>
+          <a:p>
+            <a:pPr indent="0" marL="0">
+              <a:buNone/>
+            </a:pPr>
+            <a:r>
+              <a:rPr lang="en-US" sz="2900" b="1" dirty="0">
+                <a:solidFill>
+                  <a:srgbClr val="2A1618"/>
+                </a:solidFill>
+                <a:latin typeface="Cambria" pitchFamily="34" charset="0"/>
+                <a:ea typeface="Cambria" pitchFamily="34" charset="-122"/>
+                <a:cs typeface="Cambria" pitchFamily="34" charset="-120"/>
+              </a:rPr>
+              <a:t>Can a model bridge the gap? (exploratory)</a:t>
+            </a:r>
+            <a:endParaRPr lang="en-US" sz="2900" dirty="0"/>
+          </a:p>
+        </p:txBody>
+      </p:sp>
+      <p:sp>
+        <p:nvSpPr>
+          <p:cNvPr id="3" name="Text 1"/>
+          <p:cNvSpPr/>
+          <p:nvPr/>
+        </p:nvSpPr>
+        <p:spPr>
+          <a:xfrm>
+            <a:off x="548640" y="1033272"/>
+            <a:ext cx="11091672" cy="365760"/>
+          </a:xfrm>
+          <a:prstGeom prst="rect">
+            <a:avLst/>
+          </a:prstGeom>
+          <a:noFill/>
+          <a:ln/>
+        </p:spPr>
+        <p:txBody>
+          <a:bodyPr wrap="square" lIns="0" tIns="0" rIns="0" bIns="0" rtlCol="0" anchor="ctr"/>
+          <a:lstStyle/>
+          <a:p>
+            <a:pPr indent="0" marL="0">
+              <a:buNone/>
+            </a:pPr>
+            <a:r>
+              <a:rPr lang="en-US" sz="1400" b="1" dirty="0">
+                <a:solidFill>
+                  <a:srgbClr val="BE0000"/>
+                </a:solidFill>
+                <a:latin typeface="Calibri" pitchFamily="34" charset="0"/>
+                <a:ea typeface="Calibri" pitchFamily="34" charset="-122"/>
+                <a:cs typeface="Calibri" pitchFamily="34" charset="-120"/>
+              </a:rPr>
+              <a:t>Learn a sim to measured map on the empty baseline, test on unseen frequencies</a:t>
+            </a:r>
+            <a:endParaRPr lang="en-US" sz="1400" dirty="0"/>
+          </a:p>
+        </p:txBody>
+      </p:sp>
+      <p:pic>
+        <p:nvPicPr>
+          <p:cNvPr id="4" name="Image 0" descr="sim_meas_correlation.png">    </p:cNvPr>
+          <p:cNvPicPr>
+            <a:picLocks noChangeAspect="1"/>
+          </p:cNvPicPr>
+          <p:nvPr/>
+        </p:nvPicPr>
+        <p:blipFill>
+          <a:blip r:embed="rId1"/>
+          <a:stretch>
+            <a:fillRect/>
+          </a:stretch>
+        </p:blipFill>
+        <p:spPr>
+          <a:xfrm>
+            <a:off x="457200" y="1737360"/>
+            <a:ext cx="7772400" cy="3154680"/>
+          </a:xfrm>
+          <a:prstGeom prst="rect">
+            <a:avLst/>
+          </a:prstGeom>
+        </p:spPr>
+      </p:pic>
+      <p:sp>
+        <p:nvSpPr>
+          <p:cNvPr id="5" name="Shape 2"/>
+          <p:cNvSpPr/>
+          <p:nvPr/>
+        </p:nvSpPr>
+        <p:spPr>
+          <a:xfrm>
+            <a:off x="8412480" y="1645920"/>
+            <a:ext cx="3246120" cy="3749040"/>
+          </a:xfrm>
+          <a:prstGeom prst="roundRect">
+            <a:avLst>
+              <a:gd name="adj" fmla="val 2535"/>
+            </a:avLst>
+          </a:prstGeom>
+          <a:solidFill>
+            <a:srgbClr val="FBF4F2"/>
+          </a:solidFill>
+          <a:ln w="12700">
+            <a:solidFill>
+              <a:srgbClr val="E7D6D1"/>
+            </a:solidFill>
+            <a:prstDash val="solid"/>
+          </a:ln>
+          <a:effectLst>
+            <a:outerShdw sx="100000" sy="100000" kx="0" ky="0" algn="bl" rotWithShape="0" blurRad="88900" dist="38100" dir="5400000">
+              <a:srgbClr val="7A5C5E">
+                <a:alpha val="18000"/>
+              </a:srgbClr>
+            </a:outerShdw>
+          </a:effectLst>
+        </p:spPr>
+      </p:sp>
+      <p:sp>
+        <p:nvSpPr>
+          <p:cNvPr id="6" name="Text 3"/>
+          <p:cNvSpPr/>
+          <p:nvPr/>
+        </p:nvSpPr>
+        <p:spPr>
+          <a:xfrm>
+            <a:off x="8595360" y="1801368"/>
+            <a:ext cx="2926080" cy="365760"/>
+          </a:xfrm>
+          <a:prstGeom prst="rect">
+            <a:avLst/>
+          </a:prstGeom>
+          <a:noFill/>
+          <a:ln/>
+        </p:spPr>
+        <p:txBody>
+          <a:bodyPr wrap="square" lIns="0" tIns="0" rIns="0" bIns="0" rtlCol="0" anchor="ctr"/>
+          <a:lstStyle/>
+          <a:p>
+            <a:pPr indent="0" marL="0">
+              <a:buNone/>
+            </a:pPr>
+            <a:r>
+              <a:rPr lang="en-US" sz="1500" b="1" dirty="0">
+                <a:solidFill>
+                  <a:srgbClr val="BE0000"/>
+                </a:solidFill>
+                <a:latin typeface="Cambria" pitchFamily="34" charset="0"/>
+                <a:ea typeface="Cambria" pitchFamily="34" charset="-122"/>
+                <a:cs typeface="Cambria" pitchFamily="34" charset="-120"/>
+              </a:rPr>
+              <a:t>First-pass finding</a:t>
+            </a:r>
+            <a:endParaRPr lang="en-US" sz="1500" dirty="0"/>
+          </a:p>
+        </p:txBody>
+      </p:sp>
+      <p:sp>
+        <p:nvSpPr>
+          <p:cNvPr id="7" name="Text 4"/>
+          <p:cNvSpPr/>
+          <p:nvPr/>
+        </p:nvSpPr>
+        <p:spPr>
+          <a:xfrm>
+            <a:off x="8595360" y="2286000"/>
+            <a:ext cx="2971800" cy="2926080"/>
+          </a:xfrm>
+          <a:prstGeom prst="rect">
+            <a:avLst/>
+          </a:prstGeom>
+          <a:noFill/>
+          <a:ln/>
+        </p:spPr>
+        <p:txBody>
+          <a:bodyPr wrap="square" lIns="0" tIns="0" rIns="0" bIns="0" rtlCol="0" anchor="t"/>
+          <a:lstStyle/>
+          <a:p>
+            <a:pPr marL="342900" indent="-342900">
+              <a:spcAft>
+                <a:spcPts val="800"/>
+              </a:spcAft>
+              <a:buSzPct val="100000"/>
+              <a:buChar char="•"/>
+            </a:pPr>
+            <a:r>
+              <a:rPr lang="en-US" sz="1150" dirty="0">
+                <a:solidFill>
+                  <a:srgbClr val="2A1618"/>
+                </a:solidFill>
+                <a:latin typeface="Calibri" pitchFamily="34" charset="0"/>
+                <a:ea typeface="Calibri" pitchFamily="34" charset="-122"/>
+                <a:cs typeface="Calibri" pitchFamily="34" charset="-120"/>
+              </a:rPr>
+              <a:t>Raw sim-vs-measured |S| correlation: 0.61.</a:t>
+            </a:r>
+            <a:endParaRPr lang="en-US" sz="1150" dirty="0"/>
+          </a:p>
+          <a:p>
+            <a:pPr marL="342900" indent="-342900">
+              <a:spcAft>
+                <a:spcPts val="800"/>
+              </a:spcAft>
+              <a:buSzPct val="100000"/>
+              <a:buChar char="•"/>
+            </a:pPr>
+            <a:r>
+              <a:rPr lang="en-US" sz="1150" dirty="0">
+                <a:solidFill>
+                  <a:srgbClr val="2A1618"/>
+                </a:solidFill>
+                <a:latin typeface="Calibri" pitchFamily="34" charset="0"/>
+                <a:ea typeface="Calibri" pitchFamily="34" charset="-122"/>
+                <a:cs typeface="Calibri" pitchFamily="34" charset="-120"/>
+              </a:rPr>
+              <a:t>A LINEAR transfer predicts measured from sim to R2 = 0.65 on frequencies it never saw, a real learnable relationship.</a:t>
+            </a:r>
+            <a:endParaRPr lang="en-US" sz="1150" dirty="0"/>
+          </a:p>
+          <a:p>
+            <a:pPr marL="342900" indent="-342900">
+              <a:spcAft>
+                <a:spcPts val="800"/>
+              </a:spcAft>
+              <a:buSzPct val="100000"/>
+              <a:buChar char="•"/>
+            </a:pPr>
+            <a:r>
+              <a:rPr lang="en-US" sz="1150" dirty="0">
+                <a:solidFill>
+                  <a:srgbClr val="2A1618"/>
+                </a:solidFill>
+                <a:latin typeface="Calibri" pitchFamily="34" charset="0"/>
+                <a:ea typeface="Calibri" pitchFamily="34" charset="-122"/>
+                <a:cs typeface="Calibri" pitchFamily="34" charset="-120"/>
+              </a:rPr>
+              <a:t>A flexible MLP overfits the single paired baseline (R2 &lt; 0).</a:t>
+            </a:r>
+            <a:endParaRPr lang="en-US" sz="1150" dirty="0"/>
+          </a:p>
+        </p:txBody>
+      </p:sp>
+      <p:sp>
+        <p:nvSpPr>
+          <p:cNvPr id="8" name="Text 5"/>
+          <p:cNvSpPr/>
+          <p:nvPr/>
+        </p:nvSpPr>
+        <p:spPr>
+          <a:xfrm>
+            <a:off x="548640" y="6035040"/>
+            <a:ext cx="11091672" cy="548640"/>
+          </a:xfrm>
+          <a:prstGeom prst="rect">
+            <a:avLst/>
+          </a:prstGeom>
+          <a:noFill/>
+          <a:ln/>
+        </p:spPr>
+        <p:txBody>
+          <a:bodyPr wrap="square" lIns="0" tIns="0" rIns="0" bIns="0" rtlCol="0" anchor="ctr"/>
+          <a:lstStyle/>
+          <a:p>
+            <a:pPr algn="ctr" indent="0" marL="0">
+              <a:buNone/>
+            </a:pPr>
+            <a:r>
+              <a:rPr lang="en-US" sz="1250" i="1" dirty="0">
+                <a:solidFill>
+                  <a:srgbClr val="836A68"/>
+                </a:solidFill>
+                <a:latin typeface="Calibri" pitchFamily="34" charset="0"/>
+                <a:ea typeface="Calibri" pitchFamily="34" charset="-122"/>
+                <a:cs typeface="Calibri" pitchFamily="34" charset="-120"/>
+              </a:rPr>
+              <a:t>Preliminary: only the empty baseline is cleanly paired. Nonlinear domain adaptation (and any use for calibrating sim toward the bench) needs far more paired data: multiple sessions and, ideally, matched tumor positions.</a:t>
+            </a:r>
+            <a:endParaRPr lang="en-US" sz="1250" dirty="0"/>
+          </a:p>
+        </p:txBody>
+      </p:sp>
+    </p:spTree>
+  </p:cSld>
+  <p:clrMapOvr>
+    <a:masterClrMapping/>
+  </p:clrMapOvr>
+</p:sld>
+</file>
+
+<file path=ppt/slides/slide8.xml><?xml version="1.0" encoding="utf-8"?>
+<p:sld xmlns:a="http://schemas.openxmlformats.org/drawingml/2006/main" xmlns:r="http://schemas.openxmlformats.org/officeDocument/2006/relationships" xmlns:p="http://schemas.openxmlformats.org/presentationml/2006/main">
+  <p:cSld name="Slide 8">
+    <p:bg>
+      <p:bgPr>
+        <a:solidFill>
+          <a:srgbClr val="FDF8F6"/>
+        </a:solidFill>
+      </p:bgPr>
+    </p:bg>
+    <p:spTree>
+      <p:nvGrpSpPr>
+        <p:cNvPr id="1" name=""/>
+        <p:cNvGrpSpPr/>
+        <p:nvPr/>
+      </p:nvGrpSpPr>
+      <p:grpSpPr>
+        <a:xfrm>
+          <a:off x="0" y="0"/>
+          <a:ext cx="0" cy="0"/>
+          <a:chOff x="0" y="0"/>
+          <a:chExt cx="0" cy="0"/>
+        </a:xfrm>
+      </p:grpSpPr>
+      <p:sp>
+        <p:nvSpPr>
+          <p:cNvPr id="2" name="Shape 0"/>
+          <p:cNvSpPr/>
+          <p:nvPr/>
+        </p:nvSpPr>
+        <p:spPr>
+          <a:xfrm>
+            <a:off x="0" y="0"/>
+            <a:ext cx="12188952" cy="237744"/>
+          </a:xfrm>
+          <a:prstGeom prst="rect">
+            <a:avLst/>
+          </a:prstGeom>
+          <a:solidFill>
+            <a:srgbClr val="BE0000"/>
+          </a:solidFill>
+          <a:ln/>
+        </p:spPr>
+      </p:sp>
+      <p:sp>
+        <p:nvSpPr>
+          <p:cNvPr id="3" name="Text 1"/>
+          <p:cNvSpPr/>
+          <p:nvPr/>
+        </p:nvSpPr>
+        <p:spPr>
+          <a:xfrm>
+            <a:off x="822960" y="640080"/>
             <a:ext cx="10058400" cy="731520"/>
           </a:xfrm>
           <a:prstGeom prst="rect">
@@ -5524,13 +5792,13 @@
             <a:r>
               <a:rPr lang="en-US" sz="2800" b="1" dirty="0">
                 <a:solidFill>
-                  <a:srgbClr val="FFFFFF"/>
+                  <a:srgbClr val="BE0000"/>
                 </a:solidFill>
                 <a:latin typeface="Cambria" pitchFamily="34" charset="0"/>
                 <a:ea typeface="Cambria" pitchFamily="34" charset="-122"/>
                 <a:cs typeface="Cambria" pitchFamily="34" charset="-120"/>
               </a:rPr>
-              <a:t>Part 3 — bottom line</a:t>
+              <a:t>Part 3, bottom line</a:t>
             </a:r>
             <a:endParaRPr lang="en-US" sz="2800" dirty="0"/>
           </a:p>
@@ -5538,7 +5806,7 @@
       </p:sp>
       <p:sp>
         <p:nvSpPr>
-          <p:cNvPr id="3" name="Shape 1"/>
+          <p:cNvPr id="4" name="Shape 2"/>
           <p:cNvSpPr/>
           <p:nvPr/>
         </p:nvSpPr>
@@ -5551,14 +5819,14 @@
             <a:avLst/>
           </a:prstGeom>
           <a:solidFill>
-            <a:srgbClr val="2CC4A3"/>
+            <a:srgbClr val="BE0000"/>
           </a:solidFill>
           <a:ln/>
         </p:spPr>
       </p:sp>
       <p:sp>
         <p:nvSpPr>
-          <p:cNvPr id="4" name="Text 2"/>
+          <p:cNvPr id="5" name="Text 3"/>
           <p:cNvSpPr/>
           <p:nvPr/>
         </p:nvSpPr>
@@ -5583,7 +5851,7 @@
             <a:r>
               <a:rPr lang="en-US" sz="1500" b="1" dirty="0">
                 <a:solidFill>
-                  <a:srgbClr val="0E2233"/>
+                  <a:srgbClr val="FFFFFF"/>
                 </a:solidFill>
                 <a:latin typeface="Cambria" pitchFamily="34" charset="0"/>
                 <a:ea typeface="Cambria" pitchFamily="34" charset="-122"/>
@@ -5597,7 +5865,7 @@
       </p:sp>
       <p:sp>
         <p:nvSpPr>
-          <p:cNvPr id="5" name="Text 3"/>
+          <p:cNvPr id="6" name="Text 4"/>
           <p:cNvSpPr/>
           <p:nvPr/>
         </p:nvSpPr>
@@ -5622,13 +5890,13 @@
             <a:r>
               <a:rPr lang="en-US" sz="1400" b="1" dirty="0">
                 <a:solidFill>
-                  <a:srgbClr val="FFFFFF"/>
+                  <a:srgbClr val="2A1618"/>
                 </a:solidFill>
                 <a:latin typeface="Calibri" pitchFamily="34" charset="0"/>
                 <a:ea typeface="Calibri" pitchFamily="34" charset="-122"/>
                 <a:cs typeface="Calibri" pitchFamily="34" charset="-120"/>
               </a:rPr>
-              <a:t>Sim and measured agree at the signal level  —  </a:t>
+              <a:t>Sim and measured agree at the signal level:  </a:t>
             </a:r>
             <a:pPr indent="0" marL="0">
               <a:buNone/>
@@ -5636,13 +5904,13 @@
             <a:r>
               <a:rPr lang="en-US" sz="1400" dirty="0">
                 <a:solidFill>
-                  <a:srgbClr val="AECBD6"/>
+                  <a:srgbClr val="836A68"/>
                 </a:solidFill>
                 <a:latin typeface="Calibri" pitchFamily="34" charset="0"/>
                 <a:ea typeface="Calibri" pitchFamily="34" charset="-122"/>
                 <a:cs typeface="Calibri" pitchFamily="34" charset="-120"/>
               </a:rPr>
-              <a:t>the empty phantom interpolates to ~6 mm on BOTH benches (k-NN) — the simulation is realistic, not artificially smooth.</a:t>
+              <a:t>the empty phantom interpolates to ~6 mm on BOTH (k-NN); the simulation is realistic, not artificially smooth.</a:t>
             </a:r>
             <a:endParaRPr lang="en-US" sz="1400" dirty="0"/>
           </a:p>
@@ -5650,7 +5918,7 @@
       </p:sp>
       <p:sp>
         <p:nvSpPr>
-          <p:cNvPr id="6" name="Shape 4"/>
+          <p:cNvPr id="7" name="Shape 5"/>
           <p:cNvSpPr/>
           <p:nvPr/>
         </p:nvSpPr>
@@ -5663,14 +5931,14 @@
             <a:avLst/>
           </a:prstGeom>
           <a:solidFill>
-            <a:srgbClr val="2CC4A3"/>
+            <a:srgbClr val="BE0000"/>
           </a:solidFill>
           <a:ln/>
         </p:spPr>
       </p:sp>
       <p:sp>
         <p:nvSpPr>
-          <p:cNvPr id="7" name="Text 5"/>
+          <p:cNvPr id="8" name="Text 6"/>
           <p:cNvSpPr/>
           <p:nvPr/>
         </p:nvSpPr>
@@ -5695,7 +5963,7 @@
             <a:r>
               <a:rPr lang="en-US" sz="1500" b="1" dirty="0">
                 <a:solidFill>
-                  <a:srgbClr val="0E2233"/>
+                  <a:srgbClr val="FFFFFF"/>
                 </a:solidFill>
                 <a:latin typeface="Cambria" pitchFamily="34" charset="0"/>
                 <a:ea typeface="Cambria" pitchFamily="34" charset="-122"/>
@@ -5709,7 +5977,7 @@
       </p:sp>
       <p:sp>
         <p:nvSpPr>
-          <p:cNvPr id="8" name="Text 6"/>
+          <p:cNvPr id="9" name="Text 7"/>
           <p:cNvSpPr/>
           <p:nvPr/>
         </p:nvSpPr>
@@ -5734,13 +6002,13 @@
             <a:r>
               <a:rPr lang="en-US" sz="1400" b="1" dirty="0">
                 <a:solidFill>
-                  <a:srgbClr val="FFFFFF"/>
+                  <a:srgbClr val="2A1618"/>
                 </a:solidFill>
                 <a:latin typeface="Calibri" pitchFamily="34" charset="0"/>
                 <a:ea typeface="Calibri" pitchFamily="34" charset="-122"/>
                 <a:cs typeface="Calibri" pitchFamily="34" charset="-120"/>
               </a:rPr>
-              <a:t>The CNN gap is data coverage, not fidelity  —  </a:t>
+              <a:t>The detectable-difference pattern matches:  </a:t>
             </a:r>
             <a:pPr indent="0" marL="0">
               <a:buNone/>
@@ -5748,13 +6016,13 @@
             <a:r>
               <a:rPr lang="en-US" sz="1400" dirty="0">
                 <a:solidFill>
-                  <a:srgbClr val="AECBD6"/>
+                  <a:srgbClr val="836A68"/>
                 </a:solidFill>
                 <a:latin typeface="Calibri" pitchFamily="34" charset="0"/>
                 <a:ea typeface="Calibri" pitchFamily="34" charset="-122"/>
                 <a:cs typeface="Calibri" pitchFamily="34" charset="-120"/>
               </a:rPr>
-              <a:t>sim's 3.9 mm comes from ~1000 distinct positions; measured's 9.9 mm from only ~50. Same model, different coverage.</a:t>
+              <a:t>bench and sim place the tumor's strongest change in the same regions (toward the antenna sides).</a:t>
             </a:r>
             <a:endParaRPr lang="en-US" sz="1400" dirty="0"/>
           </a:p>
@@ -5762,7 +6030,7 @@
       </p:sp>
       <p:sp>
         <p:nvSpPr>
-          <p:cNvPr id="9" name="Shape 7"/>
+          <p:cNvPr id="10" name="Shape 8"/>
           <p:cNvSpPr/>
           <p:nvPr/>
         </p:nvSpPr>
@@ -5775,14 +6043,14 @@
             <a:avLst/>
           </a:prstGeom>
           <a:solidFill>
-            <a:srgbClr val="2CC4A3"/>
+            <a:srgbClr val="BE0000"/>
           </a:solidFill>
           <a:ln/>
         </p:spPr>
       </p:sp>
       <p:sp>
         <p:nvSpPr>
-          <p:cNvPr id="10" name="Text 8"/>
+          <p:cNvPr id="11" name="Text 9"/>
           <p:cNvSpPr/>
           <p:nvPr/>
         </p:nvSpPr>
@@ -5807,7 +6075,7 @@
             <a:r>
               <a:rPr lang="en-US" sz="1500" b="1" dirty="0">
                 <a:solidFill>
-                  <a:srgbClr val="0E2233"/>
+                  <a:srgbClr val="FFFFFF"/>
                 </a:solidFill>
                 <a:latin typeface="Cambria" pitchFamily="34" charset="0"/>
                 <a:ea typeface="Cambria" pitchFamily="34" charset="-122"/>
@@ -5821,7 +6089,7 @@
       </p:sp>
       <p:sp>
         <p:nvSpPr>
-          <p:cNvPr id="11" name="Text 9"/>
+          <p:cNvPr id="12" name="Text 10"/>
           <p:cNvSpPr/>
           <p:nvPr/>
         </p:nvSpPr>
@@ -5846,13 +6114,13 @@
             <a:r>
               <a:rPr lang="en-US" sz="1400" b="1" dirty="0">
                 <a:solidFill>
-                  <a:srgbClr val="FFFFFF"/>
+                  <a:srgbClr val="2A1618"/>
                 </a:solidFill>
                 <a:latin typeface="Calibri" pitchFamily="34" charset="0"/>
                 <a:ea typeface="Calibri" pitchFamily="34" charset="-122"/>
                 <a:cs typeface="Calibri" pitchFamily="34" charset="-120"/>
               </a:rPr>
-              <a:t>Takes and sessions ≠ new positions  —  </a:t>
+              <a:t>The CNN gap is data coverage, not fidelity:  </a:t>
             </a:r>
             <a:pPr indent="0" marL="0">
               <a:buNone/>
@@ -5860,13 +6128,13 @@
             <a:r>
               <a:rPr lang="en-US" sz="1400" dirty="0">
                 <a:solidFill>
-                  <a:srgbClr val="AECBD6"/>
+                  <a:srgbClr val="836A68"/>
                 </a:solidFill>
                 <a:latin typeface="Calibri" pitchFamily="34" charset="0"/>
                 <a:ea typeface="Calibri" pitchFamily="34" charset="-122"/>
                 <a:cs typeface="Calibri" pitchFamily="34" charset="-120"/>
               </a:rPr>
-              <a:t>16 takes × 3 sessions add robustness (great for LOSO) but no new tumor locations (no help for interpolation).</a:t>
+              <a:t>sim's 3.9 mm comes from ~1000 distinct positions; measured's 9.9 mm from only ~50. Same model, different coverage.</a:t>
             </a:r>
             <a:endParaRPr lang="en-US" sz="1400" dirty="0"/>
           </a:p>
@@ -5874,7 +6142,7 @@
       </p:sp>
       <p:sp>
         <p:nvSpPr>
-          <p:cNvPr id="12" name="Shape 10"/>
+          <p:cNvPr id="13" name="Shape 11"/>
           <p:cNvSpPr/>
           <p:nvPr/>
         </p:nvSpPr>
@@ -5887,14 +6155,14 @@
             <a:avLst/>
           </a:prstGeom>
           <a:solidFill>
-            <a:srgbClr val="2CC4A3"/>
+            <a:srgbClr val="BE0000"/>
           </a:solidFill>
           <a:ln/>
         </p:spPr>
       </p:sp>
       <p:sp>
         <p:nvSpPr>
-          <p:cNvPr id="13" name="Text 11"/>
+          <p:cNvPr id="14" name="Text 12"/>
           <p:cNvSpPr/>
           <p:nvPr/>
         </p:nvSpPr>
@@ -5919,7 +6187,7 @@
             <a:r>
               <a:rPr lang="en-US" sz="1500" b="1" dirty="0">
                 <a:solidFill>
-                  <a:srgbClr val="0E2233"/>
+                  <a:srgbClr val="FFFFFF"/>
                 </a:solidFill>
                 <a:latin typeface="Cambria" pitchFamily="34" charset="0"/>
                 <a:ea typeface="Cambria" pitchFamily="34" charset="-122"/>
@@ -5933,7 +6201,7 @@
       </p:sp>
       <p:sp>
         <p:nvSpPr>
-          <p:cNvPr id="14" name="Text 12"/>
+          <p:cNvPr id="15" name="Text 13"/>
           <p:cNvSpPr/>
           <p:nvPr/>
         </p:nvSpPr>
@@ -5958,13 +6226,13 @@
             <a:r>
               <a:rPr lang="en-US" sz="1400" b="1" dirty="0">
                 <a:solidFill>
-                  <a:srgbClr val="FFFFFF"/>
+                  <a:srgbClr val="2A1618"/>
                 </a:solidFill>
                 <a:latin typeface="Calibri" pitchFamily="34" charset="0"/>
                 <a:ea typeface="Calibri" pitchFamily="34" charset="-122"/>
                 <a:cs typeface="Calibri" pitchFamily="34" charset="-120"/>
               </a:rPr>
-              <a:t>A real antenna domain gap exists  —  </a:t>
+              <a:t>Takes and sessions are not new positions:  </a:t>
             </a:r>
             <a:pPr indent="0" marL="0">
               <a:buNone/>
@@ -5972,13 +6240,13 @@
             <a:r>
               <a:rPr lang="en-US" sz="1400" dirty="0">
                 <a:solidFill>
-                  <a:srgbClr val="AECBD6"/>
+                  <a:srgbClr val="836A68"/>
                 </a:solidFill>
                 <a:latin typeface="Calibri" pitchFamily="34" charset="0"/>
                 <a:ea typeface="Calibri" pitchFamily="34" charset="-122"/>
                 <a:cs typeface="Calibri" pitchFamily="34" charset="-120"/>
               </a:rPr>
-              <a:t>simulated and measured antennas resonate/couple differently — visible in the raw S-parameters.</a:t>
+              <a:t>16 takes x 3 sessions add robustness (great for LOSO) but no new tumor locations (no help for interpolation).</a:t>
             </a:r>
             <a:endParaRPr lang="en-US" sz="1400" dirty="0"/>
           </a:p>
@@ -5986,7 +6254,7 @@
       </p:sp>
       <p:sp>
         <p:nvSpPr>
-          <p:cNvPr id="15" name="Shape 13"/>
+          <p:cNvPr id="16" name="Shape 14"/>
           <p:cNvSpPr/>
           <p:nvPr/>
         </p:nvSpPr>
@@ -5999,14 +6267,14 @@
             <a:avLst/>
           </a:prstGeom>
           <a:solidFill>
-            <a:srgbClr val="2CC4A3"/>
+            <a:srgbClr val="BE0000"/>
           </a:solidFill>
           <a:ln/>
         </p:spPr>
       </p:sp>
       <p:sp>
         <p:nvSpPr>
-          <p:cNvPr id="16" name="Text 14"/>
+          <p:cNvPr id="17" name="Text 15"/>
           <p:cNvSpPr/>
           <p:nvPr/>
         </p:nvSpPr>
@@ -6031,7 +6299,7 @@
             <a:r>
               <a:rPr lang="en-US" sz="1500" b="1" dirty="0">
                 <a:solidFill>
-                  <a:srgbClr val="0E2233"/>
+                  <a:srgbClr val="FFFFFF"/>
                 </a:solidFill>
                 <a:latin typeface="Cambria" pitchFamily="34" charset="0"/>
                 <a:ea typeface="Cambria" pitchFamily="34" charset="-122"/>
@@ -6045,7 +6313,7 @@
       </p:sp>
       <p:sp>
         <p:nvSpPr>
-          <p:cNvPr id="17" name="Text 15"/>
+          <p:cNvPr id="18" name="Text 16"/>
           <p:cNvSpPr/>
           <p:nvPr/>
         </p:nvSpPr>
@@ -6070,13 +6338,13 @@
             <a:r>
               <a:rPr lang="en-US" sz="1400" b="1" dirty="0">
                 <a:solidFill>
-                  <a:srgbClr val="FFFFFF"/>
+                  <a:srgbClr val="2A1618"/>
                 </a:solidFill>
                 <a:latin typeface="Calibri" pitchFamily="34" charset="0"/>
                 <a:ea typeface="Calibri" pitchFamily="34" charset="-122"/>
                 <a:cs typeface="Calibri" pitchFamily="34" charset="-120"/>
               </a:rPr>
-              <a:t>A sim→measured transfer is learnable  —  </a:t>
+              <a:t>A sim to measured transfer is learnable:  </a:t>
             </a:r>
             <a:pPr indent="0" marL="0">
               <a:buNone/>
@@ -6084,13 +6352,13 @@
             <a:r>
               <a:rPr lang="en-US" sz="1400" dirty="0">
                 <a:solidFill>
-                  <a:srgbClr val="AECBD6"/>
+                  <a:srgbClr val="836A68"/>
                 </a:solidFill>
                 <a:latin typeface="Calibri" pitchFamily="34" charset="0"/>
                 <a:ea typeface="Calibri" pitchFamily="34" charset="-122"/>
                 <a:cs typeface="Calibri" pitchFamily="34" charset="-120"/>
               </a:rPr>
-              <a:t>a linear map already reaches R² = 0.65 on unseen frequencies — a promising, if preliminary, calibration path.</a:t>
+              <a:t>a linear map already reaches R2 = 0.65 on unseen frequencies, a promising if preliminary calibration path.</a:t>
             </a:r>
             <a:endParaRPr lang="en-US" sz="1400" dirty="0"/>
           </a:p>
@@ -6098,7 +6366,7 @@
       </p:sp>
       <p:sp>
         <p:nvSpPr>
-          <p:cNvPr id="18" name="Text 16"/>
+          <p:cNvPr id="19" name="Text 17"/>
           <p:cNvSpPr/>
           <p:nvPr/>
         </p:nvSpPr>
@@ -6123,7 +6391,7 @@
             <a:r>
               <a:rPr lang="en-US" sz="1100" dirty="0">
                 <a:solidFill>
-                  <a:srgbClr val="1C9AA8"/>
+                  <a:srgbClr val="BE0000"/>
                 </a:solidFill>
                 <a:latin typeface="Calibri" pitchFamily="34" charset="0"/>
                 <a:ea typeface="Calibri" pitchFamily="34" charset="-122"/>

--- a/regression_deck/Deck3_Sim_vs_Measured.pptx
+++ b/regression_deck/Deck3_Sim_vs_Measured.pptx
@@ -13,9 +13,10 @@
     <p:sldId id="261" r:id="rId7"/>
     <p:sldId id="262" r:id="rId8"/>
     <p:sldId id="263" r:id="rId9"/>
+    <p:sldId id="264" r:id="rId10"/>
   </p:sldIdLst>
   <p:notesMasterIdLst>
-    <p:notesMasterId r:id="rId10"/>
+    <p:notesMasterId r:id="rId11"/>
   </p:notesMasterIdLst>
   <p:sldSz cx="12188952" cy="6858000"/>
   <p:notesSz cx="6858000" cy="12188952"/>
@@ -1149,6 +1150,94 @@
             <a:fld id="{F7021451-1387-4CA6-816F-3879F97B5CBC}" type="slidenum">
               <a:rPr lang="en-US"/>
               <a:t>8</a:t>
+            </a:fld>
+            <a:endParaRPr lang="en-US"/>
+          </a:p>
+        </p:txBody>
+      </p:sp>
+    </p:spTree>
+    <p:extLst>
+      <p:ext uri="{BB962C8B-B14F-4D97-AF65-F5344CB8AC3E}">
+        <p14:creationId xmlns:p14="http://schemas.microsoft.com/office/powerpoint/2010/main" val="1024086991"/>
+      </p:ext>
+    </p:extLst>
+  </p:cSld>
+  <p:clrMapOvr>
+    <a:masterClrMapping/>
+  </p:clrMapOvr>
+</p:notes>
+</file>
+
+<file path=ppt/notesSlides/notesSlide9.xml><?xml version="1.0" encoding="utf-8"?>
+<p:notes xmlns:a="http://schemas.openxmlformats.org/drawingml/2006/main" xmlns:r="http://schemas.openxmlformats.org/officeDocument/2006/relationships" xmlns:p="http://schemas.openxmlformats.org/presentationml/2006/main">
+  <p:cSld>
+    <p:spTree>
+      <p:nvGrpSpPr>
+        <p:cNvPr id="1" name=""/>
+        <p:cNvGrpSpPr/>
+        <p:nvPr/>
+      </p:nvGrpSpPr>
+      <p:grpSpPr>
+        <a:xfrm>
+          <a:off x="0" y="0"/>
+          <a:ext cx="0" cy="0"/>
+          <a:chOff x="0" y="0"/>
+          <a:chExt cx="0" cy="0"/>
+        </a:xfrm>
+      </p:grpSpPr>
+      <p:sp>
+        <p:nvSpPr>
+          <p:cNvPr id="2" name="Slide Image Placeholder 1"/>
+          <p:cNvSpPr>
+            <a:spLocks noGrp="1" noRot="1" noChangeAspect="1"/>
+          </p:cNvSpPr>
+          <p:nvPr>
+            <p:ph type="sldImg"/>
+          </p:nvPr>
+        </p:nvSpPr>
+        <p:spPr/>
+      </p:sp>
+      <p:sp>
+        <p:nvSpPr>
+          <p:cNvPr id="3" name="Notes Placeholder 2"/>
+          <p:cNvSpPr>
+            <a:spLocks noGrp="1"/>
+          </p:cNvSpPr>
+          <p:nvPr>
+            <p:ph type="body" idx="1"/>
+          </p:nvPr>
+        </p:nvSpPr>
+        <p:spPr/>
+        <p:txBody>
+          <a:bodyPr/>
+          <a:lstStyle/>
+          <a:p>
+            <a:r>
+              <a:rPr lang="en-US" dirty="0"/>
+              <a:t/>
+            </a:r>
+            <a:endParaRPr lang="en-US" dirty="0"/>
+          </a:p>
+        </p:txBody>
+      </p:sp>
+      <p:sp>
+        <p:nvSpPr>
+          <p:cNvPr id="4" name="Slide Number Placeholder 3"/>
+          <p:cNvSpPr>
+            <a:spLocks noGrp="1"/>
+          </p:cNvSpPr>
+          <p:nvPr>
+            <p:ph type="sldNum" sz="quarter" idx="10"/>
+          </p:nvPr>
+        </p:nvSpPr>
+        <p:spPr/>
+        <p:txBody>
+          <a:bodyPr/>
+          <a:lstStyle/>
+          <a:p>
+            <a:fld id="{F7021451-1387-4CA6-816F-3879F97B5CBC}" type="slidenum">
+              <a:rPr lang="en-US"/>
+              <a:t>9</a:t>
             </a:fld>
             <a:endParaRPr lang="en-US"/>
           </a:p>
@@ -1954,6 +2043,310 @@
                 <a:ea typeface="Cambria" pitchFamily="34" charset="-122"/>
                 <a:cs typeface="Cambria" pitchFamily="34" charset="-120"/>
               </a:rPr>
+              <a:t>The two setups, side by side</a:t>
+            </a:r>
+            <a:endParaRPr lang="en-US" sz="2900" dirty="0"/>
+          </a:p>
+        </p:txBody>
+      </p:sp>
+      <p:sp>
+        <p:nvSpPr>
+          <p:cNvPr id="3" name="Text 1"/>
+          <p:cNvSpPr/>
+          <p:nvPr/>
+        </p:nvSpPr>
+        <p:spPr>
+          <a:xfrm>
+            <a:off x="548640" y="1033272"/>
+            <a:ext cx="11091672" cy="365760"/>
+          </a:xfrm>
+          <a:prstGeom prst="rect">
+            <a:avLst/>
+          </a:prstGeom>
+          <a:noFill/>
+          <a:ln/>
+        </p:spPr>
+        <p:txBody>
+          <a:bodyPr wrap="square" lIns="0" tIns="0" rIns="0" bIns="0" rtlCol="0" anchor="ctr"/>
+          <a:lstStyle/>
+          <a:p>
+            <a:pPr indent="0" marL="0">
+              <a:buNone/>
+            </a:pPr>
+            <a:r>
+              <a:rPr lang="en-US" sz="1400" b="1" dirty="0">
+                <a:solidFill>
+                  <a:srgbClr val="BE0000"/>
+                </a:solidFill>
+                <a:latin typeface="Calibri" pitchFamily="34" charset="0"/>
+                <a:ea typeface="Calibri" pitchFamily="34" charset="-122"/>
+                <a:cs typeface="Calibri" pitchFamily="34" charset="-120"/>
+              </a:rPr>
+              <a:t>The physical A3 phantom on its grid, and the HFSS model of the same phantom</a:t>
+            </a:r>
+            <a:endParaRPr lang="en-US" sz="1400" dirty="0"/>
+          </a:p>
+        </p:txBody>
+      </p:sp>
+      <p:sp>
+        <p:nvSpPr>
+          <p:cNvPr id="4" name="Shape 2"/>
+          <p:cNvSpPr/>
+          <p:nvPr/>
+        </p:nvSpPr>
+        <p:spPr>
+          <a:xfrm>
+            <a:off x="1463040" y="1645920"/>
+            <a:ext cx="3493008" cy="4434840"/>
+          </a:xfrm>
+          <a:prstGeom prst="roundRect">
+            <a:avLst>
+              <a:gd name="adj" fmla="val 2356"/>
+            </a:avLst>
+          </a:prstGeom>
+          <a:solidFill>
+            <a:srgbClr val="FBF4F2"/>
+          </a:solidFill>
+          <a:ln w="12700">
+            <a:solidFill>
+              <a:srgbClr val="E7D6D1"/>
+            </a:solidFill>
+            <a:prstDash val="solid"/>
+          </a:ln>
+          <a:effectLst>
+            <a:outerShdw sx="100000" sy="100000" kx="0" ky="0" algn="bl" rotWithShape="0" blurRad="88900" dist="38100" dir="5400000">
+              <a:srgbClr val="7A5C5E">
+                <a:alpha val="18000"/>
+              </a:srgbClr>
+            </a:outerShdw>
+          </a:effectLst>
+        </p:spPr>
+      </p:sp>
+      <p:pic>
+        <p:nvPicPr>
+          <p:cNvPr id="5" name="Image 0" descr="setup_photos/A3.jpg">    </p:cNvPr>
+          <p:cNvPicPr>
+            <a:picLocks noChangeAspect="1"/>
+          </p:cNvPicPr>
+          <p:nvPr/>
+        </p:nvPicPr>
+        <p:blipFill>
+          <a:blip r:embed="rId1"/>
+          <a:stretch>
+            <a:fillRect/>
+          </a:stretch>
+        </p:blipFill>
+        <p:spPr>
+          <a:xfrm>
+            <a:off x="1554480" y="1737360"/>
+            <a:ext cx="3310128" cy="3931920"/>
+          </a:xfrm>
+          <a:prstGeom prst="rect">
+            <a:avLst/>
+          </a:prstGeom>
+        </p:spPr>
+      </p:pic>
+      <p:sp>
+        <p:nvSpPr>
+          <p:cNvPr id="6" name="Text 3"/>
+          <p:cNvSpPr/>
+          <p:nvPr/>
+        </p:nvSpPr>
+        <p:spPr>
+          <a:xfrm>
+            <a:off x="1463040" y="5687568"/>
+            <a:ext cx="3493008" cy="365760"/>
+          </a:xfrm>
+          <a:prstGeom prst="rect">
+            <a:avLst/>
+          </a:prstGeom>
+          <a:noFill/>
+          <a:ln/>
+        </p:spPr>
+        <p:txBody>
+          <a:bodyPr wrap="square" lIns="0" tIns="0" rIns="0" bIns="0" rtlCol="0" anchor="ctr"/>
+          <a:lstStyle/>
+          <a:p>
+            <a:pPr algn="ctr" indent="0" marL="0">
+              <a:buNone/>
+            </a:pPr>
+            <a:r>
+              <a:rPr lang="en-US" sz="1300" b="1" dirty="0">
+                <a:solidFill>
+                  <a:srgbClr val="2A1618"/>
+                </a:solidFill>
+                <a:latin typeface="Calibri" pitchFamily="34" charset="0"/>
+                <a:ea typeface="Calibri" pitchFamily="34" charset="-122"/>
+                <a:cs typeface="Calibri" pitchFamily="34" charset="-120"/>
+              </a:rPr>
+              <a:t>Measured: A3 phantom + 6x6 grid + antennas</a:t>
+            </a:r>
+            <a:endParaRPr lang="en-US" sz="1300" dirty="0"/>
+          </a:p>
+        </p:txBody>
+      </p:sp>
+      <p:sp>
+        <p:nvSpPr>
+          <p:cNvPr id="7" name="Shape 4"/>
+          <p:cNvSpPr/>
+          <p:nvPr/>
+        </p:nvSpPr>
+        <p:spPr>
+          <a:xfrm>
+            <a:off x="5943600" y="1645920"/>
+            <a:ext cx="4782312" cy="4434840"/>
+          </a:xfrm>
+          <a:prstGeom prst="roundRect">
+            <a:avLst>
+              <a:gd name="adj" fmla="val 1856"/>
+            </a:avLst>
+          </a:prstGeom>
+          <a:solidFill>
+            <a:srgbClr val="FBF4F2"/>
+          </a:solidFill>
+          <a:ln w="12700">
+            <a:solidFill>
+              <a:srgbClr val="E7D6D1"/>
+            </a:solidFill>
+            <a:prstDash val="solid"/>
+          </a:ln>
+          <a:effectLst>
+            <a:outerShdw sx="100000" sy="100000" kx="0" ky="0" algn="bl" rotWithShape="0" blurRad="88900" dist="38100" dir="5400000">
+              <a:srgbClr val="7A5C5E">
+                <a:alpha val="18000"/>
+              </a:srgbClr>
+            </a:outerShdw>
+          </a:effectLst>
+        </p:spPr>
+      </p:sp>
+      <p:pic>
+        <p:nvPicPr>
+          <p:cNvPr id="8" name="Image 1" descr="setup_photos/SimulatedImage01.png">    </p:cNvPr>
+          <p:cNvPicPr>
+            <a:picLocks noChangeAspect="1"/>
+          </p:cNvPicPr>
+          <p:nvPr/>
+        </p:nvPicPr>
+        <p:blipFill>
+          <a:blip r:embed="rId2"/>
+          <a:stretch>
+            <a:fillRect/>
+          </a:stretch>
+        </p:blipFill>
+        <p:spPr>
+          <a:xfrm>
+            <a:off x="6035040" y="1737360"/>
+            <a:ext cx="4599432" cy="3931920"/>
+          </a:xfrm>
+          <a:prstGeom prst="rect">
+            <a:avLst/>
+          </a:prstGeom>
+        </p:spPr>
+      </p:pic>
+      <p:sp>
+        <p:nvSpPr>
+          <p:cNvPr id="9" name="Text 5"/>
+          <p:cNvSpPr/>
+          <p:nvPr/>
+        </p:nvSpPr>
+        <p:spPr>
+          <a:xfrm>
+            <a:off x="5943600" y="5687568"/>
+            <a:ext cx="4782312" cy="365760"/>
+          </a:xfrm>
+          <a:prstGeom prst="rect">
+            <a:avLst/>
+          </a:prstGeom>
+          <a:noFill/>
+          <a:ln/>
+        </p:spPr>
+        <p:txBody>
+          <a:bodyPr wrap="square" lIns="0" tIns="0" rIns="0" bIns="0" rtlCol="0" anchor="ctr"/>
+          <a:lstStyle/>
+          <a:p>
+            <a:pPr algn="ctr" indent="0" marL="0">
+              <a:buNone/>
+            </a:pPr>
+            <a:r>
+              <a:rPr lang="en-US" sz="1300" b="1" dirty="0">
+                <a:solidFill>
+                  <a:srgbClr val="2A1618"/>
+                </a:solidFill>
+                <a:latin typeface="Calibri" pitchFamily="34" charset="0"/>
+                <a:ea typeface="Calibri" pitchFamily="34" charset="-122"/>
+                <a:cs typeface="Calibri" pitchFamily="34" charset="-120"/>
+              </a:rPr>
+              <a:t>Simulated: HFSS phantom, oil, antennas, tumor</a:t>
+            </a:r>
+            <a:endParaRPr lang="en-US" sz="1300" dirty="0"/>
+          </a:p>
+        </p:txBody>
+      </p:sp>
+    </p:spTree>
+  </p:cSld>
+  <p:clrMapOvr>
+    <a:masterClrMapping/>
+  </p:clrMapOvr>
+</p:sld>
+</file>
+
+<file path=ppt/slides/slide3.xml><?xml version="1.0" encoding="utf-8"?>
+<p:sld xmlns:a="http://schemas.openxmlformats.org/drawingml/2006/main" xmlns:r="http://schemas.openxmlformats.org/officeDocument/2006/relationships" xmlns:p="http://schemas.openxmlformats.org/presentationml/2006/main">
+  <p:cSld name="Slide 3">
+    <p:bg>
+      <p:bgPr>
+        <a:solidFill>
+          <a:srgbClr val="FFFFFF"/>
+        </a:solidFill>
+      </p:bgPr>
+    </p:bg>
+    <p:spTree>
+      <p:nvGrpSpPr>
+        <p:cNvPr id="1" name=""/>
+        <p:cNvGrpSpPr/>
+        <p:nvPr/>
+      </p:nvGrpSpPr>
+      <p:grpSpPr>
+        <a:xfrm>
+          <a:off x="0" y="0"/>
+          <a:ext cx="0" cy="0"/>
+          <a:chOff x="0" y="0"/>
+          <a:chExt cx="0" cy="0"/>
+        </a:xfrm>
+      </p:grpSpPr>
+      <p:sp>
+        <p:nvSpPr>
+          <p:cNvPr id="2" name="Text 0"/>
+          <p:cNvSpPr/>
+          <p:nvPr/>
+        </p:nvSpPr>
+        <p:spPr>
+          <a:xfrm>
+            <a:off x="548640" y="384048"/>
+            <a:ext cx="11091672" cy="640080"/>
+          </a:xfrm>
+          <a:prstGeom prst="rect">
+            <a:avLst/>
+          </a:prstGeom>
+          <a:noFill/>
+          <a:ln/>
+        </p:spPr>
+        <p:txBody>
+          <a:bodyPr wrap="square" lIns="0" tIns="0" rIns="0" bIns="0" rtlCol="0" anchor="ctr"/>
+          <a:lstStyle/>
+          <a:p>
+            <a:pPr indent="0" marL="0">
+              <a:buNone/>
+            </a:pPr>
+            <a:r>
+              <a:rPr lang="en-US" sz="2900" b="1" dirty="0">
+                <a:solidFill>
+                  <a:srgbClr val="2A1618"/>
+                </a:solidFill>
+                <a:latin typeface="Cambria" pitchFamily="34" charset="0"/>
+                <a:ea typeface="Cambria" pitchFamily="34" charset="-122"/>
+                <a:cs typeface="Cambria" pitchFamily="34" charset="-120"/>
+              </a:rPr>
               <a:t>Two sampling grids, and their overlay</a:t>
             </a:r>
             <a:endParaRPr lang="en-US" sz="2900" dirty="0"/>
@@ -2031,9 +2424,9 @@
 </p:sld>
 </file>
 
-<file path=ppt/slides/slide3.xml><?xml version="1.0" encoding="utf-8"?>
+<file path=ppt/slides/slide4.xml><?xml version="1.0" encoding="utf-8"?>
 <p:sld xmlns:a="http://schemas.openxmlformats.org/drawingml/2006/main" xmlns:r="http://schemas.openxmlformats.org/officeDocument/2006/relationships" xmlns:p="http://schemas.openxmlformats.org/presentationml/2006/main">
-  <p:cSld name="Slide 3">
+  <p:cSld name="Slide 4">
     <p:bg>
       <p:bgPr>
         <a:solidFill>
@@ -2135,7 +2528,7 @@
       </p:sp>
       <p:graphicFrame>
         <p:nvGraphicFramePr>
-          <p:cNvPr id="4" name="Table 0"/>
+          <p:cNvPr id="5" name="Table 0"/>
           <p:cNvGraphicFramePr>
             <a:graphicFrameLocks noGrp="1"/>
           </p:cNvGraphicFramePr>
@@ -3642,140 +4035,6 @@
 </p:sld>
 </file>
 
-<file path=ppt/slides/slide4.xml><?xml version="1.0" encoding="utf-8"?>
-<p:sld xmlns:a="http://schemas.openxmlformats.org/drawingml/2006/main" xmlns:r="http://schemas.openxmlformats.org/officeDocument/2006/relationships" xmlns:p="http://schemas.openxmlformats.org/presentationml/2006/main">
-  <p:cSld name="Slide 4">
-    <p:bg>
-      <p:bgPr>
-        <a:solidFill>
-          <a:srgbClr val="FFFFFF"/>
-        </a:solidFill>
-      </p:bgPr>
-    </p:bg>
-    <p:spTree>
-      <p:nvGrpSpPr>
-        <p:cNvPr id="1" name=""/>
-        <p:cNvGrpSpPr/>
-        <p:nvPr/>
-      </p:nvGrpSpPr>
-      <p:grpSpPr>
-        <a:xfrm>
-          <a:off x="0" y="0"/>
-          <a:ext cx="0" cy="0"/>
-          <a:chOff x="0" y="0"/>
-          <a:chExt cx="0" cy="0"/>
-        </a:xfrm>
-      </p:grpSpPr>
-      <p:sp>
-        <p:nvSpPr>
-          <p:cNvPr id="2" name="Text 0"/>
-          <p:cNvSpPr/>
-          <p:nvPr/>
-        </p:nvSpPr>
-        <p:spPr>
-          <a:xfrm>
-            <a:off x="548640" y="384048"/>
-            <a:ext cx="11091672" cy="640080"/>
-          </a:xfrm>
-          <a:prstGeom prst="rect">
-            <a:avLst/>
-          </a:prstGeom>
-          <a:noFill/>
-          <a:ln/>
-        </p:spPr>
-        <p:txBody>
-          <a:bodyPr wrap="square" lIns="0" tIns="0" rIns="0" bIns="0" rtlCol="0" anchor="ctr"/>
-          <a:lstStyle/>
-          <a:p>
-            <a:pPr indent="0" marL="0">
-              <a:buNone/>
-            </a:pPr>
-            <a:r>
-              <a:rPr lang="en-US" sz="2900" b="1" dirty="0">
-                <a:solidFill>
-                  <a:srgbClr val="2A1618"/>
-                </a:solidFill>
-                <a:latin typeface="Cambria" pitchFamily="34" charset="0"/>
-                <a:ea typeface="Cambria" pitchFamily="34" charset="-122"/>
-                <a:cs typeface="Cambria" pitchFamily="34" charset="-120"/>
-              </a:rPr>
-              <a:t>Reflection per antenna, sim vs measured</a:t>
-            </a:r>
-            <a:endParaRPr lang="en-US" sz="2900" dirty="0"/>
-          </a:p>
-        </p:txBody>
-      </p:sp>
-      <p:sp>
-        <p:nvSpPr>
-          <p:cNvPr id="3" name="Text 1"/>
-          <p:cNvSpPr/>
-          <p:nvPr/>
-        </p:nvSpPr>
-        <p:spPr>
-          <a:xfrm>
-            <a:off x="548640" y="1033272"/>
-            <a:ext cx="11091672" cy="365760"/>
-          </a:xfrm>
-          <a:prstGeom prst="rect">
-            <a:avLst/>
-          </a:prstGeom>
-          <a:noFill/>
-          <a:ln/>
-        </p:spPr>
-        <p:txBody>
-          <a:bodyPr wrap="square" lIns="0" tIns="0" rIns="0" bIns="0" rtlCol="0" anchor="ctr"/>
-          <a:lstStyle/>
-          <a:p>
-            <a:pPr indent="0" marL="0">
-              <a:buNone/>
-            </a:pPr>
-            <a:r>
-              <a:rPr lang="en-US" sz="1400" b="1" dirty="0">
-                <a:solidFill>
-                  <a:srgbClr val="BE0000"/>
-                </a:solidFill>
-                <a:latin typeface="Calibri" pitchFamily="34" charset="0"/>
-                <a:ea typeface="Calibri" pitchFamily="34" charset="-122"/>
-                <a:cs typeface="Calibri" pitchFamily="34" charset="-120"/>
-              </a:rPr>
-              <a:t>Same design, yet the measured ports differ from each other; the sim ones are near-identical</a:t>
-            </a:r>
-            <a:endParaRPr lang="en-US" sz="1400" dirty="0"/>
-          </a:p>
-        </p:txBody>
-      </p:sp>
-      <p:pic>
-        <p:nvPicPr>
-          <p:cNvPr id="4" name="Image 0" descr="raw_sparam_sim_vs_meas.png">    </p:cNvPr>
-          <p:cNvPicPr>
-            <a:picLocks noChangeAspect="1"/>
-          </p:cNvPicPr>
-          <p:nvPr/>
-        </p:nvPicPr>
-        <p:blipFill>
-          <a:blip r:embed="rId1"/>
-          <a:stretch>
-            <a:fillRect/>
-          </a:stretch>
-        </p:blipFill>
-        <p:spPr>
-          <a:xfrm>
-            <a:off x="2148840" y="1554480"/>
-            <a:ext cx="7863840" cy="4828032"/>
-          </a:xfrm>
-          <a:prstGeom prst="rect">
-            <a:avLst/>
-          </a:prstGeom>
-        </p:spPr>
-      </p:pic>
-    </p:spTree>
-  </p:cSld>
-  <p:clrMapOvr>
-    <a:masterClrMapping/>
-  </p:clrMapOvr>
-</p:sld>
-</file>
-
 <file path=ppt/slides/slide5.xml><?xml version="1.0" encoding="utf-8"?>
 <p:sld xmlns:a="http://schemas.openxmlformats.org/drawingml/2006/main" xmlns:r="http://schemas.openxmlformats.org/officeDocument/2006/relationships" xmlns:p="http://schemas.openxmlformats.org/presentationml/2006/main">
   <p:cSld name="Slide 5">
@@ -3833,7 +4092,7 @@
                 <a:ea typeface="Cambria" pitchFamily="34" charset="-122"/>
                 <a:cs typeface="Cambria" pitchFamily="34" charset="-120"/>
               </a:rPr>
-              <a:t>Detectable-difference pattern, measured vs sim</a:t>
+              <a:t>Reflection per antenna, sim vs measured</a:t>
             </a:r>
             <a:endParaRPr lang="en-US" sz="2900" dirty="0"/>
           </a:p>
@@ -3872,7 +4131,7 @@
                 <a:ea typeface="Calibri" pitchFamily="34" charset="-122"/>
                 <a:cs typeface="Calibri" pitchFamily="34" charset="-120"/>
               </a:rPr>
-              <a:t>The tumor's detectable change per position; the spatial pattern matches</a:t>
+              <a:t>Same design, yet the measured ports differ from each other; the sim ones are near-identical</a:t>
             </a:r>
             <a:endParaRPr lang="en-US" sz="1400" dirty="0"/>
           </a:p>
@@ -3880,7 +4139,7 @@
       </p:sp>
       <p:pic>
         <p:nvPicPr>
-          <p:cNvPr id="4" name="Image 0" descr="dd_measured_vs_sim.png">    </p:cNvPr>
+          <p:cNvPr id="4" name="Image 0" descr="raw_sparam_sim_vs_meas.png">    </p:cNvPr>
           <p:cNvPicPr>
             <a:picLocks noChangeAspect="1"/>
           </p:cNvPicPr>
@@ -3894,8 +4153,8 @@
         </p:blipFill>
         <p:spPr>
           <a:xfrm>
-            <a:off x="822960" y="1600200"/>
-            <a:ext cx="10515600" cy="4892040"/>
+            <a:off x="2148840" y="1554480"/>
+            <a:ext cx="7863840" cy="4828032"/>
           </a:xfrm>
           <a:prstGeom prst="rect">
             <a:avLst/>
@@ -3967,6 +4226,140 @@
                 <a:ea typeface="Cambria" pitchFamily="34" charset="-122"/>
                 <a:cs typeface="Cambria" pitchFamily="34" charset="-120"/>
               </a:rPr>
+              <a:t>Detectable-difference pattern, measured vs sim</a:t>
+            </a:r>
+            <a:endParaRPr lang="en-US" sz="2900" dirty="0"/>
+          </a:p>
+        </p:txBody>
+      </p:sp>
+      <p:sp>
+        <p:nvSpPr>
+          <p:cNvPr id="3" name="Text 1"/>
+          <p:cNvSpPr/>
+          <p:nvPr/>
+        </p:nvSpPr>
+        <p:spPr>
+          <a:xfrm>
+            <a:off x="548640" y="1033272"/>
+            <a:ext cx="11091672" cy="365760"/>
+          </a:xfrm>
+          <a:prstGeom prst="rect">
+            <a:avLst/>
+          </a:prstGeom>
+          <a:noFill/>
+          <a:ln/>
+        </p:spPr>
+        <p:txBody>
+          <a:bodyPr wrap="square" lIns="0" tIns="0" rIns="0" bIns="0" rtlCol="0" anchor="ctr"/>
+          <a:lstStyle/>
+          <a:p>
+            <a:pPr indent="0" marL="0">
+              <a:buNone/>
+            </a:pPr>
+            <a:r>
+              <a:rPr lang="en-US" sz="1400" b="1" dirty="0">
+                <a:solidFill>
+                  <a:srgbClr val="BE0000"/>
+                </a:solidFill>
+                <a:latin typeface="Calibri" pitchFamily="34" charset="0"/>
+                <a:ea typeface="Calibri" pitchFamily="34" charset="-122"/>
+                <a:cs typeface="Calibri" pitchFamily="34" charset="-120"/>
+              </a:rPr>
+              <a:t>The tumor's detectable change per position; the spatial pattern matches</a:t>
+            </a:r>
+            <a:endParaRPr lang="en-US" sz="1400" dirty="0"/>
+          </a:p>
+        </p:txBody>
+      </p:sp>
+      <p:pic>
+        <p:nvPicPr>
+          <p:cNvPr id="4" name="Image 0" descr="dd_measured_vs_sim.png">    </p:cNvPr>
+          <p:cNvPicPr>
+            <a:picLocks noChangeAspect="1"/>
+          </p:cNvPicPr>
+          <p:nvPr/>
+        </p:nvPicPr>
+        <p:blipFill>
+          <a:blip r:embed="rId1"/>
+          <a:stretch>
+            <a:fillRect/>
+          </a:stretch>
+        </p:blipFill>
+        <p:spPr>
+          <a:xfrm>
+            <a:off x="822960" y="1600200"/>
+            <a:ext cx="10515600" cy="4892040"/>
+          </a:xfrm>
+          <a:prstGeom prst="rect">
+            <a:avLst/>
+          </a:prstGeom>
+        </p:spPr>
+      </p:pic>
+    </p:spTree>
+  </p:cSld>
+  <p:clrMapOvr>
+    <a:masterClrMapping/>
+  </p:clrMapOvr>
+</p:sld>
+</file>
+
+<file path=ppt/slides/slide7.xml><?xml version="1.0" encoding="utf-8"?>
+<p:sld xmlns:a="http://schemas.openxmlformats.org/drawingml/2006/main" xmlns:r="http://schemas.openxmlformats.org/officeDocument/2006/relationships" xmlns:p="http://schemas.openxmlformats.org/presentationml/2006/main">
+  <p:cSld name="Slide 7">
+    <p:bg>
+      <p:bgPr>
+        <a:solidFill>
+          <a:srgbClr val="FFFFFF"/>
+        </a:solidFill>
+      </p:bgPr>
+    </p:bg>
+    <p:spTree>
+      <p:nvGrpSpPr>
+        <p:cNvPr id="1" name=""/>
+        <p:cNvGrpSpPr/>
+        <p:nvPr/>
+      </p:nvGrpSpPr>
+      <p:grpSpPr>
+        <a:xfrm>
+          <a:off x="0" y="0"/>
+          <a:ext cx="0" cy="0"/>
+          <a:chOff x="0" y="0"/>
+          <a:chExt cx="0" cy="0"/>
+        </a:xfrm>
+      </p:grpSpPr>
+      <p:sp>
+        <p:nvSpPr>
+          <p:cNvPr id="2" name="Text 0"/>
+          <p:cNvSpPr/>
+          <p:nvPr/>
+        </p:nvSpPr>
+        <p:spPr>
+          <a:xfrm>
+            <a:off x="548640" y="384048"/>
+            <a:ext cx="11091672" cy="640080"/>
+          </a:xfrm>
+          <a:prstGeom prst="rect">
+            <a:avLst/>
+          </a:prstGeom>
+          <a:noFill/>
+          <a:ln/>
+        </p:spPr>
+        <p:txBody>
+          <a:bodyPr wrap="square" lIns="0" tIns="0" rIns="0" bIns="0" rtlCol="0" anchor="ctr"/>
+          <a:lstStyle/>
+          <a:p>
+            <a:pPr indent="0" marL="0">
+              <a:buNone/>
+            </a:pPr>
+            <a:r>
+              <a:rPr lang="en-US" sz="2900" b="1" dirty="0">
+                <a:solidFill>
+                  <a:srgbClr val="2A1618"/>
+                </a:solidFill>
+                <a:latin typeface="Cambria" pitchFamily="34" charset="0"/>
+                <a:ea typeface="Cambria" pitchFamily="34" charset="-122"/>
+                <a:cs typeface="Cambria" pitchFamily="34" charset="-120"/>
+              </a:rPr>
               <a:t>The numbers, signal vs. model</a:t>
             </a:r>
             <a:endParaRPr lang="en-US" sz="2900" dirty="0"/>
@@ -4014,7 +4407,7 @@
       </p:sp>
       <p:graphicFrame>
         <p:nvGraphicFramePr>
-          <p:cNvPr id="7" name="Table 0"/>
+          <p:cNvPr id="8" name="Table 0"/>
           <p:cNvGraphicFramePr>
             <a:graphicFrameLocks noGrp="1"/>
           </p:cNvGraphicFramePr>
@@ -5390,9 +5783,9 @@
 </p:sld>
 </file>
 
-<file path=ppt/slides/slide7.xml><?xml version="1.0" encoding="utf-8"?>
+<file path=ppt/slides/slide8.xml><?xml version="1.0" encoding="utf-8"?>
 <p:sld xmlns:a="http://schemas.openxmlformats.org/drawingml/2006/main" xmlns:r="http://schemas.openxmlformats.org/officeDocument/2006/relationships" xmlns:p="http://schemas.openxmlformats.org/presentationml/2006/main">
-  <p:cSld name="Slide 7">
+  <p:cSld name="Slide 8">
     <p:bg>
       <p:bgPr>
         <a:solidFill>
@@ -5721,9 +6114,9 @@
 </p:sld>
 </file>
 
-<file path=ppt/slides/slide8.xml><?xml version="1.0" encoding="utf-8"?>
+<file path=ppt/slides/slide9.xml><?xml version="1.0" encoding="utf-8"?>
 <p:sld xmlns:a="http://schemas.openxmlformats.org/drawingml/2006/main" xmlns:r="http://schemas.openxmlformats.org/officeDocument/2006/relationships" xmlns:p="http://schemas.openxmlformats.org/presentationml/2006/main">
-  <p:cSld name="Slide 8">
+  <p:cSld name="Slide 9">
     <p:bg>
       <p:bgPr>
         <a:solidFill>

--- a/regression_deck/Deck3_Sim_vs_Measured.pptx
+++ b/regression_deck/Deck3_Sim_vs_Measured.pptx
@@ -5688,7 +5688,7 @@
                 <a:ea typeface="Calibri" pitchFamily="34" charset="-122"/>
                 <a:cs typeface="Calibri" pitchFamily="34" charset="-120"/>
               </a:rPr>
-              <a:t>Signal floor is the same: sim 6.7 ~ measured 6.0 mm. Sim is realistic, not smoother.</a:t>
+              <a:t>Signal floor is the same: sim 6.7 vs measured 6.0 mm; the two agree closely.</a:t>
             </a:r>
             <a:endParaRPr lang="en-US" sz="1050" dirty="0"/>
           </a:p>
@@ -5976,7 +5976,7 @@
                 <a:ea typeface="Cambria" pitchFamily="34" charset="-122"/>
                 <a:cs typeface="Cambria" pitchFamily="34" charset="-120"/>
               </a:rPr>
-              <a:t>First-pass finding</a:t>
+              <a:t>How to read it</a:t>
             </a:r>
             <a:endParaRPr lang="en-US" sz="1500" dirty="0"/>
           </a:p>
@@ -5990,8 +5990,8 @@
         </p:nvSpPr>
         <p:spPr>
           <a:xfrm>
-            <a:off x="8595360" y="2286000"/>
-            <a:ext cx="2971800" cy="2926080"/>
+            <a:off x="8595360" y="2212848"/>
+            <a:ext cx="2971800" cy="3108960"/>
           </a:xfrm>
           <a:prstGeom prst="rect">
             <a:avLst/>
@@ -6011,7 +6011,7 @@
               <a:buChar char="•"/>
             </a:pPr>
             <a:r>
-              <a:rPr lang="en-US" sz="1150" dirty="0">
+              <a:rPr lang="en-US" sz="1050" dirty="0">
                 <a:solidFill>
                   <a:srgbClr val="2A1618"/>
                 </a:solidFill>
@@ -6019,9 +6019,9 @@
                 <a:ea typeface="Calibri" pitchFamily="34" charset="-122"/>
                 <a:cs typeface="Calibri" pitchFamily="34" charset="-120"/>
               </a:rPr>
-              <a:t>Raw sim-vs-measured |S| correlation: 0.61.</a:t>
+              <a:t>Left: for one port, the dashed line is the simulated S11 after the learned map. A perfect map would land on the measured (red) curve; it moves toward it but does not fully match.</a:t>
             </a:r>
-            <a:endParaRPr lang="en-US" sz="1150" dirty="0"/>
+            <a:endParaRPr lang="en-US" sz="1050" dirty="0"/>
           </a:p>
           <a:p>
             <a:pPr marL="342900" indent="-342900">
@@ -6032,7 +6032,7 @@
               <a:buChar char="•"/>
             </a:pPr>
             <a:r>
-              <a:rPr lang="en-US" sz="1150" dirty="0">
+              <a:rPr lang="en-US" sz="1050" dirty="0">
                 <a:solidFill>
                   <a:srgbClr val="2A1618"/>
                 </a:solidFill>
@@ -6040,9 +6040,9 @@
                 <a:ea typeface="Calibri" pitchFamily="34" charset="-122"/>
                 <a:cs typeface="Calibri" pitchFamily="34" charset="-120"/>
               </a:rPr>
-              <a:t>A LINEAR transfer predicts measured from sim to R2 = 0.65 on frequencies it never saw, a real learnable relationship.</a:t>
+              <a:t>Right: predicted vs measured on held-out frequencies. Points on the diagonal are exact; R2 = 0.65 means the linear map captures most, not all, of the relationship.</a:t>
             </a:r>
-            <a:endParaRPr lang="en-US" sz="1150" dirty="0"/>
+            <a:endParaRPr lang="en-US" sz="1050" dirty="0"/>
           </a:p>
           <a:p>
             <a:pPr marL="342900" indent="-342900">
@@ -6053,7 +6053,7 @@
               <a:buChar char="•"/>
             </a:pPr>
             <a:r>
-              <a:rPr lang="en-US" sz="1150" dirty="0">
+              <a:rPr lang="en-US" sz="1050" dirty="0">
                 <a:solidFill>
                   <a:srgbClr val="2A1618"/>
                 </a:solidFill>
@@ -6063,7 +6063,7 @@
               </a:rPr>
               <a:t>A flexible MLP overfits the single paired baseline (R2 &lt; 0).</a:t>
             </a:r>
-            <a:endParaRPr lang="en-US" sz="1150" dirty="0"/>
+            <a:endParaRPr lang="en-US" sz="1050" dirty="0"/>
           </a:p>
         </p:txBody>
       </p:sp>
@@ -6303,7 +6303,7 @@
                 <a:ea typeface="Calibri" pitchFamily="34" charset="-122"/>
                 <a:cs typeface="Calibri" pitchFamily="34" charset="-120"/>
               </a:rPr>
-              <a:t>the empty phantom interpolates to ~6 mm on BOTH (k-NN); the simulation is realistic, not artificially smooth.</a:t>
+              <a:t>the empty phantom interpolates to ~6 mm on both (k-NN), indicating the simulated signal is realistic.</a:t>
             </a:r>
             <a:endParaRPr lang="en-US" sz="1400" dirty="0"/>
           </a:p>

--- a/regression_deck/Deck3_Sim_vs_Measured.pptx
+++ b/regression_deck/Deck3_Sim_vs_Measured.pptx
@@ -14,9 +14,11 @@
     <p:sldId id="262" r:id="rId8"/>
     <p:sldId id="263" r:id="rId9"/>
     <p:sldId id="264" r:id="rId10"/>
+    <p:sldId id="265" r:id="rId11"/>
+    <p:sldId id="266" r:id="rId12"/>
   </p:sldIdLst>
   <p:notesMasterIdLst>
-    <p:notesMasterId r:id="rId11"/>
+    <p:notesMasterId r:id="rId13"/>
   </p:notesMasterIdLst>
   <p:sldSz cx="12188952" cy="6858000"/>
   <p:notesSz cx="6858000" cy="12188952"/>
@@ -534,6 +536,182 @@
             <a:fld id="{F7021451-1387-4CA6-816F-3879F97B5CBC}" type="slidenum">
               <a:rPr lang="en-US"/>
               <a:t>1</a:t>
+            </a:fld>
+            <a:endParaRPr lang="en-US"/>
+          </a:p>
+        </p:txBody>
+      </p:sp>
+    </p:spTree>
+    <p:extLst>
+      <p:ext uri="{BB962C8B-B14F-4D97-AF65-F5344CB8AC3E}">
+        <p14:creationId xmlns:p14="http://schemas.microsoft.com/office/powerpoint/2010/main" val="1024086991"/>
+      </p:ext>
+    </p:extLst>
+  </p:cSld>
+  <p:clrMapOvr>
+    <a:masterClrMapping/>
+  </p:clrMapOvr>
+</p:notes>
+</file>
+
+<file path=ppt/notesSlides/notesSlide10.xml><?xml version="1.0" encoding="utf-8"?>
+<p:notes xmlns:a="http://schemas.openxmlformats.org/drawingml/2006/main" xmlns:r="http://schemas.openxmlformats.org/officeDocument/2006/relationships" xmlns:p="http://schemas.openxmlformats.org/presentationml/2006/main">
+  <p:cSld>
+    <p:spTree>
+      <p:nvGrpSpPr>
+        <p:cNvPr id="1" name=""/>
+        <p:cNvGrpSpPr/>
+        <p:nvPr/>
+      </p:nvGrpSpPr>
+      <p:grpSpPr>
+        <a:xfrm>
+          <a:off x="0" y="0"/>
+          <a:ext cx="0" cy="0"/>
+          <a:chOff x="0" y="0"/>
+          <a:chExt cx="0" cy="0"/>
+        </a:xfrm>
+      </p:grpSpPr>
+      <p:sp>
+        <p:nvSpPr>
+          <p:cNvPr id="2" name="Slide Image Placeholder 1"/>
+          <p:cNvSpPr>
+            <a:spLocks noGrp="1" noRot="1" noChangeAspect="1"/>
+          </p:cNvSpPr>
+          <p:nvPr>
+            <p:ph type="sldImg"/>
+          </p:nvPr>
+        </p:nvSpPr>
+        <p:spPr/>
+      </p:sp>
+      <p:sp>
+        <p:nvSpPr>
+          <p:cNvPr id="3" name="Notes Placeholder 2"/>
+          <p:cNvSpPr>
+            <a:spLocks noGrp="1"/>
+          </p:cNvSpPr>
+          <p:nvPr>
+            <p:ph type="body" idx="1"/>
+          </p:nvPr>
+        </p:nvSpPr>
+        <p:spPr/>
+        <p:txBody>
+          <a:bodyPr/>
+          <a:lstStyle/>
+          <a:p>
+            <a:r>
+              <a:rPr lang="en-US" dirty="0"/>
+              <a:t/>
+            </a:r>
+            <a:endParaRPr lang="en-US" dirty="0"/>
+          </a:p>
+        </p:txBody>
+      </p:sp>
+      <p:sp>
+        <p:nvSpPr>
+          <p:cNvPr id="4" name="Slide Number Placeholder 3"/>
+          <p:cNvSpPr>
+            <a:spLocks noGrp="1"/>
+          </p:cNvSpPr>
+          <p:nvPr>
+            <p:ph type="sldNum" sz="quarter" idx="10"/>
+          </p:nvPr>
+        </p:nvSpPr>
+        <p:spPr/>
+        <p:txBody>
+          <a:bodyPr/>
+          <a:lstStyle/>
+          <a:p>
+            <a:fld id="{F7021451-1387-4CA6-816F-3879F97B5CBC}" type="slidenum">
+              <a:rPr lang="en-US"/>
+              <a:t>10</a:t>
+            </a:fld>
+            <a:endParaRPr lang="en-US"/>
+          </a:p>
+        </p:txBody>
+      </p:sp>
+    </p:spTree>
+    <p:extLst>
+      <p:ext uri="{BB962C8B-B14F-4D97-AF65-F5344CB8AC3E}">
+        <p14:creationId xmlns:p14="http://schemas.microsoft.com/office/powerpoint/2010/main" val="1024086991"/>
+      </p:ext>
+    </p:extLst>
+  </p:cSld>
+  <p:clrMapOvr>
+    <a:masterClrMapping/>
+  </p:clrMapOvr>
+</p:notes>
+</file>
+
+<file path=ppt/notesSlides/notesSlide11.xml><?xml version="1.0" encoding="utf-8"?>
+<p:notes xmlns:a="http://schemas.openxmlformats.org/drawingml/2006/main" xmlns:r="http://schemas.openxmlformats.org/officeDocument/2006/relationships" xmlns:p="http://schemas.openxmlformats.org/presentationml/2006/main">
+  <p:cSld>
+    <p:spTree>
+      <p:nvGrpSpPr>
+        <p:cNvPr id="1" name=""/>
+        <p:cNvGrpSpPr/>
+        <p:nvPr/>
+      </p:nvGrpSpPr>
+      <p:grpSpPr>
+        <a:xfrm>
+          <a:off x="0" y="0"/>
+          <a:ext cx="0" cy="0"/>
+          <a:chOff x="0" y="0"/>
+          <a:chExt cx="0" cy="0"/>
+        </a:xfrm>
+      </p:grpSpPr>
+      <p:sp>
+        <p:nvSpPr>
+          <p:cNvPr id="2" name="Slide Image Placeholder 1"/>
+          <p:cNvSpPr>
+            <a:spLocks noGrp="1" noRot="1" noChangeAspect="1"/>
+          </p:cNvSpPr>
+          <p:nvPr>
+            <p:ph type="sldImg"/>
+          </p:nvPr>
+        </p:nvSpPr>
+        <p:spPr/>
+      </p:sp>
+      <p:sp>
+        <p:nvSpPr>
+          <p:cNvPr id="3" name="Notes Placeholder 2"/>
+          <p:cNvSpPr>
+            <a:spLocks noGrp="1"/>
+          </p:cNvSpPr>
+          <p:nvPr>
+            <p:ph type="body" idx="1"/>
+          </p:nvPr>
+        </p:nvSpPr>
+        <p:spPr/>
+        <p:txBody>
+          <a:bodyPr/>
+          <a:lstStyle/>
+          <a:p>
+            <a:r>
+              <a:rPr lang="en-US" dirty="0"/>
+              <a:t/>
+            </a:r>
+            <a:endParaRPr lang="en-US" dirty="0"/>
+          </a:p>
+        </p:txBody>
+      </p:sp>
+      <p:sp>
+        <p:nvSpPr>
+          <p:cNvPr id="4" name="Slide Number Placeholder 3"/>
+          <p:cNvSpPr>
+            <a:spLocks noGrp="1"/>
+          </p:cNvSpPr>
+          <p:nvPr>
+            <p:ph type="sldNum" sz="quarter" idx="10"/>
+          </p:nvPr>
+        </p:nvSpPr>
+        <p:spPr/>
+        <p:txBody>
+          <a:bodyPr/>
+          <a:lstStyle/>
+          <a:p>
+            <a:fld id="{F7021451-1387-4CA6-816F-3879F97B5CBC}" type="slidenum">
+              <a:rPr lang="en-US"/>
+              <a:t>11</a:t>
             </a:fld>
             <a:endParaRPr lang="en-US"/>
           </a:p>
@@ -1986,6 +2164,830 @@
 </p:sld>
 </file>
 
+<file path=ppt/slides/slide10.xml><?xml version="1.0" encoding="utf-8"?>
+<p:sld xmlns:a="http://schemas.openxmlformats.org/drawingml/2006/main" xmlns:r="http://schemas.openxmlformats.org/officeDocument/2006/relationships" xmlns:p="http://schemas.openxmlformats.org/presentationml/2006/main">
+  <p:cSld name="Slide 10">
+    <p:bg>
+      <p:bgPr>
+        <a:solidFill>
+          <a:srgbClr val="FFFFFF"/>
+        </a:solidFill>
+      </p:bgPr>
+    </p:bg>
+    <p:spTree>
+      <p:nvGrpSpPr>
+        <p:cNvPr id="1" name=""/>
+        <p:cNvGrpSpPr/>
+        <p:nvPr/>
+      </p:nvGrpSpPr>
+      <p:grpSpPr>
+        <a:xfrm>
+          <a:off x="0" y="0"/>
+          <a:ext cx="0" cy="0"/>
+          <a:chOff x="0" y="0"/>
+          <a:chExt cx="0" cy="0"/>
+        </a:xfrm>
+      </p:grpSpPr>
+      <p:sp>
+        <p:nvSpPr>
+          <p:cNvPr id="2" name="Text 0"/>
+          <p:cNvSpPr/>
+          <p:nvPr/>
+        </p:nvSpPr>
+        <p:spPr>
+          <a:xfrm>
+            <a:off x="548640" y="384048"/>
+            <a:ext cx="11091672" cy="640080"/>
+          </a:xfrm>
+          <a:prstGeom prst="rect">
+            <a:avLst/>
+          </a:prstGeom>
+          <a:noFill/>
+          <a:ln/>
+        </p:spPr>
+        <p:txBody>
+          <a:bodyPr wrap="square" lIns="0" tIns="0" rIns="0" bIns="0" rtlCol="0" anchor="ctr"/>
+          <a:lstStyle/>
+          <a:p>
+            <a:pPr indent="0" marL="0">
+              <a:buNone/>
+            </a:pPr>
+            <a:r>
+              <a:rPr lang="en-US" sz="2900" b="1" dirty="0">
+                <a:solidFill>
+                  <a:srgbClr val="2A1618"/>
+                </a:solidFill>
+                <a:latin typeface="Cambria" pitchFamily="34" charset="0"/>
+                <a:ea typeface="Cambria" pitchFamily="34" charset="-122"/>
+                <a:cs typeface="Cambria" pitchFamily="34" charset="-120"/>
+              </a:rPr>
+              <a:t>Beet (dielectric) vs metal tumor, sim and measured</a:t>
+            </a:r>
+            <a:endParaRPr lang="en-US" sz="2900" dirty="0"/>
+          </a:p>
+        </p:txBody>
+      </p:sp>
+      <p:sp>
+        <p:nvSpPr>
+          <p:cNvPr id="3" name="Text 1"/>
+          <p:cNvSpPr/>
+          <p:nvPr/>
+        </p:nvSpPr>
+        <p:spPr>
+          <a:xfrm>
+            <a:off x="548640" y="1033272"/>
+            <a:ext cx="11091672" cy="365760"/>
+          </a:xfrm>
+          <a:prstGeom prst="rect">
+            <a:avLst/>
+          </a:prstGeom>
+          <a:noFill/>
+          <a:ln/>
+        </p:spPr>
+        <p:txBody>
+          <a:bodyPr wrap="square" lIns="0" tIns="0" rIns="0" bIns="0" rtlCol="0" anchor="ctr"/>
+          <a:lstStyle/>
+          <a:p>
+            <a:pPr indent="0" marL="0">
+              <a:buNone/>
+            </a:pPr>
+            <a:r>
+              <a:rPr lang="en-US" sz="1400" b="1" dirty="0">
+                <a:solidFill>
+                  <a:srgbClr val="BE0000"/>
+                </a:solidFill>
+                <a:latin typeface="Calibri" pitchFamily="34" charset="0"/>
+                <a:ea typeface="Calibri" pitchFamily="34" charset="-122"/>
+                <a:cs typeface="Calibri" pitchFamily="34" charset="-120"/>
+              </a:rPr>
+              <a:t>How much differential signal a realistic dielectric target produces relative to metal</a:t>
+            </a:r>
+            <a:endParaRPr lang="en-US" sz="1400" dirty="0"/>
+          </a:p>
+        </p:txBody>
+      </p:sp>
+      <p:pic>
+        <p:nvPicPr>
+          <p:cNvPr id="4" name="Image 0" descr="beet_vs_metal_dS.png">    </p:cNvPr>
+          <p:cNvPicPr>
+            <a:picLocks noChangeAspect="1"/>
+          </p:cNvPicPr>
+          <p:nvPr/>
+        </p:nvPicPr>
+        <p:blipFill>
+          <a:blip r:embed="rId1"/>
+          <a:stretch>
+            <a:fillRect/>
+          </a:stretch>
+        </p:blipFill>
+        <p:spPr>
+          <a:xfrm>
+            <a:off x="822960" y="1737360"/>
+            <a:ext cx="10515600" cy="4892040"/>
+          </a:xfrm>
+          <a:prstGeom prst="rect">
+            <a:avLst/>
+          </a:prstGeom>
+        </p:spPr>
+      </p:pic>
+    </p:spTree>
+  </p:cSld>
+  <p:clrMapOvr>
+    <a:masterClrMapping/>
+  </p:clrMapOvr>
+</p:sld>
+</file>
+
+<file path=ppt/slides/slide11.xml><?xml version="1.0" encoding="utf-8"?>
+<p:sld xmlns:a="http://schemas.openxmlformats.org/drawingml/2006/main" xmlns:r="http://schemas.openxmlformats.org/officeDocument/2006/relationships" xmlns:p="http://schemas.openxmlformats.org/presentationml/2006/main">
+  <p:cSld name="Slide 11">
+    <p:bg>
+      <p:bgPr>
+        <a:solidFill>
+          <a:srgbClr val="FDF8F6"/>
+        </a:solidFill>
+      </p:bgPr>
+    </p:bg>
+    <p:spTree>
+      <p:nvGrpSpPr>
+        <p:cNvPr id="1" name=""/>
+        <p:cNvGrpSpPr/>
+        <p:nvPr/>
+      </p:nvGrpSpPr>
+      <p:grpSpPr>
+        <a:xfrm>
+          <a:off x="0" y="0"/>
+          <a:ext cx="0" cy="0"/>
+          <a:chOff x="0" y="0"/>
+          <a:chExt cx="0" cy="0"/>
+        </a:xfrm>
+      </p:grpSpPr>
+      <p:sp>
+        <p:nvSpPr>
+          <p:cNvPr id="2" name="Shape 0"/>
+          <p:cNvSpPr/>
+          <p:nvPr/>
+        </p:nvSpPr>
+        <p:spPr>
+          <a:xfrm>
+            <a:off x="0" y="0"/>
+            <a:ext cx="12188952" cy="237744"/>
+          </a:xfrm>
+          <a:prstGeom prst="rect">
+            <a:avLst/>
+          </a:prstGeom>
+          <a:solidFill>
+            <a:srgbClr val="BE0000"/>
+          </a:solidFill>
+          <a:ln/>
+        </p:spPr>
+      </p:sp>
+      <p:sp>
+        <p:nvSpPr>
+          <p:cNvPr id="3" name="Text 1"/>
+          <p:cNvSpPr/>
+          <p:nvPr/>
+        </p:nvSpPr>
+        <p:spPr>
+          <a:xfrm>
+            <a:off x="822960" y="640080"/>
+            <a:ext cx="10058400" cy="731520"/>
+          </a:xfrm>
+          <a:prstGeom prst="rect">
+            <a:avLst/>
+          </a:prstGeom>
+          <a:noFill/>
+          <a:ln/>
+        </p:spPr>
+        <p:txBody>
+          <a:bodyPr wrap="square" lIns="0" tIns="0" rIns="0" bIns="0" rtlCol="0" anchor="ctr"/>
+          <a:lstStyle/>
+          <a:p>
+            <a:pPr indent="0" marL="0">
+              <a:buNone/>
+            </a:pPr>
+            <a:r>
+              <a:rPr lang="en-US" sz="2800" b="1" dirty="0">
+                <a:solidFill>
+                  <a:srgbClr val="BE0000"/>
+                </a:solidFill>
+                <a:latin typeface="Cambria" pitchFamily="34" charset="0"/>
+                <a:ea typeface="Cambria" pitchFamily="34" charset="-122"/>
+                <a:cs typeface="Cambria" pitchFamily="34" charset="-120"/>
+              </a:rPr>
+              <a:t>Part 3, bottom line</a:t>
+            </a:r>
+            <a:endParaRPr lang="en-US" sz="2800" dirty="0"/>
+          </a:p>
+        </p:txBody>
+      </p:sp>
+      <p:sp>
+        <p:nvSpPr>
+          <p:cNvPr id="4" name="Shape 2"/>
+          <p:cNvSpPr/>
+          <p:nvPr/>
+        </p:nvSpPr>
+        <p:spPr>
+          <a:xfrm>
+            <a:off x="822960" y="1600200"/>
+            <a:ext cx="384048" cy="384048"/>
+          </a:xfrm>
+          <a:prstGeom prst="ellipse">
+            <a:avLst/>
+          </a:prstGeom>
+          <a:solidFill>
+            <a:srgbClr val="BE0000"/>
+          </a:solidFill>
+          <a:ln/>
+        </p:spPr>
+      </p:sp>
+      <p:sp>
+        <p:nvSpPr>
+          <p:cNvPr id="5" name="Text 3"/>
+          <p:cNvSpPr/>
+          <p:nvPr/>
+        </p:nvSpPr>
+        <p:spPr>
+          <a:xfrm>
+            <a:off x="822960" y="1600200"/>
+            <a:ext cx="384048" cy="384048"/>
+          </a:xfrm>
+          <a:prstGeom prst="rect">
+            <a:avLst/>
+          </a:prstGeom>
+          <a:noFill/>
+          <a:ln/>
+        </p:spPr>
+        <p:txBody>
+          <a:bodyPr wrap="square" lIns="0" tIns="0" rIns="0" bIns="0" rtlCol="0" anchor="ctr"/>
+          <a:lstStyle/>
+          <a:p>
+            <a:pPr algn="ctr" indent="0" marL="0">
+              <a:buNone/>
+            </a:pPr>
+            <a:r>
+              <a:rPr lang="en-US" sz="1500" b="1" dirty="0">
+                <a:solidFill>
+                  <a:srgbClr val="FFFFFF"/>
+                </a:solidFill>
+                <a:latin typeface="Cambria" pitchFamily="34" charset="0"/>
+                <a:ea typeface="Cambria" pitchFamily="34" charset="-122"/>
+                <a:cs typeface="Cambria" pitchFamily="34" charset="-120"/>
+              </a:rPr>
+              <a:t>1</a:t>
+            </a:r>
+            <a:endParaRPr lang="en-US" sz="1500" dirty="0"/>
+          </a:p>
+        </p:txBody>
+      </p:sp>
+      <p:sp>
+        <p:nvSpPr>
+          <p:cNvPr id="6" name="Text 4"/>
+          <p:cNvSpPr/>
+          <p:nvPr/>
+        </p:nvSpPr>
+        <p:spPr>
+          <a:xfrm>
+            <a:off x="1371600" y="1508760"/>
+            <a:ext cx="10241280" cy="868680"/>
+          </a:xfrm>
+          <a:prstGeom prst="rect">
+            <a:avLst/>
+          </a:prstGeom>
+          <a:noFill/>
+          <a:ln/>
+        </p:spPr>
+        <p:txBody>
+          <a:bodyPr wrap="square" lIns="0" tIns="0" rIns="0" bIns="0" rtlCol="0" anchor="ctr"/>
+          <a:lstStyle/>
+          <a:p>
+            <a:pPr indent="0" marL="0">
+              <a:buNone/>
+            </a:pPr>
+            <a:r>
+              <a:rPr lang="en-US" sz="1400" b="1" dirty="0">
+                <a:solidFill>
+                  <a:srgbClr val="2A1618"/>
+                </a:solidFill>
+                <a:latin typeface="Calibri" pitchFamily="34" charset="0"/>
+                <a:ea typeface="Calibri" pitchFamily="34" charset="-122"/>
+                <a:cs typeface="Calibri" pitchFamily="34" charset="-120"/>
+              </a:rPr>
+              <a:t>Sim and measured agree at the signal level:  </a:t>
+            </a:r>
+            <a:pPr indent="0" marL="0">
+              <a:buNone/>
+            </a:pPr>
+            <a:r>
+              <a:rPr lang="en-US" sz="1400" dirty="0">
+                <a:solidFill>
+                  <a:srgbClr val="836A68"/>
+                </a:solidFill>
+                <a:latin typeface="Calibri" pitchFamily="34" charset="0"/>
+                <a:ea typeface="Calibri" pitchFamily="34" charset="-122"/>
+                <a:cs typeface="Calibri" pitchFamily="34" charset="-120"/>
+              </a:rPr>
+              <a:t>the empty phantom interpolates to ~6 mm on both (k-NN), indicating the simulated signal is realistic.</a:t>
+            </a:r>
+            <a:endParaRPr lang="en-US" sz="1400" dirty="0"/>
+          </a:p>
+        </p:txBody>
+      </p:sp>
+      <p:sp>
+        <p:nvSpPr>
+          <p:cNvPr id="7" name="Shape 5"/>
+          <p:cNvSpPr/>
+          <p:nvPr/>
+        </p:nvSpPr>
+        <p:spPr>
+          <a:xfrm>
+            <a:off x="822960" y="2569464"/>
+            <a:ext cx="384048" cy="384048"/>
+          </a:xfrm>
+          <a:prstGeom prst="ellipse">
+            <a:avLst/>
+          </a:prstGeom>
+          <a:solidFill>
+            <a:srgbClr val="BE0000"/>
+          </a:solidFill>
+          <a:ln/>
+        </p:spPr>
+      </p:sp>
+      <p:sp>
+        <p:nvSpPr>
+          <p:cNvPr id="8" name="Text 6"/>
+          <p:cNvSpPr/>
+          <p:nvPr/>
+        </p:nvSpPr>
+        <p:spPr>
+          <a:xfrm>
+            <a:off x="822960" y="2569464"/>
+            <a:ext cx="384048" cy="384048"/>
+          </a:xfrm>
+          <a:prstGeom prst="rect">
+            <a:avLst/>
+          </a:prstGeom>
+          <a:noFill/>
+          <a:ln/>
+        </p:spPr>
+        <p:txBody>
+          <a:bodyPr wrap="square" lIns="0" tIns="0" rIns="0" bIns="0" rtlCol="0" anchor="ctr"/>
+          <a:lstStyle/>
+          <a:p>
+            <a:pPr algn="ctr" indent="0" marL="0">
+              <a:buNone/>
+            </a:pPr>
+            <a:r>
+              <a:rPr lang="en-US" sz="1500" b="1" dirty="0">
+                <a:solidFill>
+                  <a:srgbClr val="FFFFFF"/>
+                </a:solidFill>
+                <a:latin typeface="Cambria" pitchFamily="34" charset="0"/>
+                <a:ea typeface="Cambria" pitchFamily="34" charset="-122"/>
+                <a:cs typeface="Cambria" pitchFamily="34" charset="-120"/>
+              </a:rPr>
+              <a:t>2</a:t>
+            </a:r>
+            <a:endParaRPr lang="en-US" sz="1500" dirty="0"/>
+          </a:p>
+        </p:txBody>
+      </p:sp>
+      <p:sp>
+        <p:nvSpPr>
+          <p:cNvPr id="9" name="Text 7"/>
+          <p:cNvSpPr/>
+          <p:nvPr/>
+        </p:nvSpPr>
+        <p:spPr>
+          <a:xfrm>
+            <a:off x="1371600" y="2478024"/>
+            <a:ext cx="10241280" cy="868680"/>
+          </a:xfrm>
+          <a:prstGeom prst="rect">
+            <a:avLst/>
+          </a:prstGeom>
+          <a:noFill/>
+          <a:ln/>
+        </p:spPr>
+        <p:txBody>
+          <a:bodyPr wrap="square" lIns="0" tIns="0" rIns="0" bIns="0" rtlCol="0" anchor="ctr"/>
+          <a:lstStyle/>
+          <a:p>
+            <a:pPr indent="0" marL="0">
+              <a:buNone/>
+            </a:pPr>
+            <a:r>
+              <a:rPr lang="en-US" sz="1400" b="1" dirty="0">
+                <a:solidFill>
+                  <a:srgbClr val="2A1618"/>
+                </a:solidFill>
+                <a:latin typeface="Calibri" pitchFamily="34" charset="0"/>
+                <a:ea typeface="Calibri" pitchFamily="34" charset="-122"/>
+                <a:cs typeface="Calibri" pitchFamily="34" charset="-120"/>
+              </a:rPr>
+              <a:t>The detectable-difference pattern matches:  </a:t>
+            </a:r>
+            <a:pPr indent="0" marL="0">
+              <a:buNone/>
+            </a:pPr>
+            <a:r>
+              <a:rPr lang="en-US" sz="1400" dirty="0">
+                <a:solidFill>
+                  <a:srgbClr val="836A68"/>
+                </a:solidFill>
+                <a:latin typeface="Calibri" pitchFamily="34" charset="0"/>
+                <a:ea typeface="Calibri" pitchFamily="34" charset="-122"/>
+                <a:cs typeface="Calibri" pitchFamily="34" charset="-120"/>
+              </a:rPr>
+              <a:t>bench and sim place the tumor's strongest change in the same regions (toward the antenna sides).</a:t>
+            </a:r>
+            <a:endParaRPr lang="en-US" sz="1400" dirty="0"/>
+          </a:p>
+        </p:txBody>
+      </p:sp>
+      <p:sp>
+        <p:nvSpPr>
+          <p:cNvPr id="10" name="Shape 8"/>
+          <p:cNvSpPr/>
+          <p:nvPr/>
+        </p:nvSpPr>
+        <p:spPr>
+          <a:xfrm>
+            <a:off x="822960" y="3538728"/>
+            <a:ext cx="384048" cy="384048"/>
+          </a:xfrm>
+          <a:prstGeom prst="ellipse">
+            <a:avLst/>
+          </a:prstGeom>
+          <a:solidFill>
+            <a:srgbClr val="BE0000"/>
+          </a:solidFill>
+          <a:ln/>
+        </p:spPr>
+      </p:sp>
+      <p:sp>
+        <p:nvSpPr>
+          <p:cNvPr id="11" name="Text 9"/>
+          <p:cNvSpPr/>
+          <p:nvPr/>
+        </p:nvSpPr>
+        <p:spPr>
+          <a:xfrm>
+            <a:off x="822960" y="3538728"/>
+            <a:ext cx="384048" cy="384048"/>
+          </a:xfrm>
+          <a:prstGeom prst="rect">
+            <a:avLst/>
+          </a:prstGeom>
+          <a:noFill/>
+          <a:ln/>
+        </p:spPr>
+        <p:txBody>
+          <a:bodyPr wrap="square" lIns="0" tIns="0" rIns="0" bIns="0" rtlCol="0" anchor="ctr"/>
+          <a:lstStyle/>
+          <a:p>
+            <a:pPr algn="ctr" indent="0" marL="0">
+              <a:buNone/>
+            </a:pPr>
+            <a:r>
+              <a:rPr lang="en-US" sz="1500" b="1" dirty="0">
+                <a:solidFill>
+                  <a:srgbClr val="FFFFFF"/>
+                </a:solidFill>
+                <a:latin typeface="Cambria" pitchFamily="34" charset="0"/>
+                <a:ea typeface="Cambria" pitchFamily="34" charset="-122"/>
+                <a:cs typeface="Cambria" pitchFamily="34" charset="-120"/>
+              </a:rPr>
+              <a:t>3</a:t>
+            </a:r>
+            <a:endParaRPr lang="en-US" sz="1500" dirty="0"/>
+          </a:p>
+        </p:txBody>
+      </p:sp>
+      <p:sp>
+        <p:nvSpPr>
+          <p:cNvPr id="12" name="Text 10"/>
+          <p:cNvSpPr/>
+          <p:nvPr/>
+        </p:nvSpPr>
+        <p:spPr>
+          <a:xfrm>
+            <a:off x="1371600" y="3447288"/>
+            <a:ext cx="10241280" cy="868680"/>
+          </a:xfrm>
+          <a:prstGeom prst="rect">
+            <a:avLst/>
+          </a:prstGeom>
+          <a:noFill/>
+          <a:ln/>
+        </p:spPr>
+        <p:txBody>
+          <a:bodyPr wrap="square" lIns="0" tIns="0" rIns="0" bIns="0" rtlCol="0" anchor="ctr"/>
+          <a:lstStyle/>
+          <a:p>
+            <a:pPr indent="0" marL="0">
+              <a:buNone/>
+            </a:pPr>
+            <a:r>
+              <a:rPr lang="en-US" sz="1400" b="1" dirty="0">
+                <a:solidFill>
+                  <a:srgbClr val="2A1618"/>
+                </a:solidFill>
+                <a:latin typeface="Calibri" pitchFamily="34" charset="0"/>
+                <a:ea typeface="Calibri" pitchFamily="34" charset="-122"/>
+                <a:cs typeface="Calibri" pitchFamily="34" charset="-120"/>
+              </a:rPr>
+              <a:t>The CNN gap is data coverage, not fidelity:  </a:t>
+            </a:r>
+            <a:pPr indent="0" marL="0">
+              <a:buNone/>
+            </a:pPr>
+            <a:r>
+              <a:rPr lang="en-US" sz="1400" dirty="0">
+                <a:solidFill>
+                  <a:srgbClr val="836A68"/>
+                </a:solidFill>
+                <a:latin typeface="Calibri" pitchFamily="34" charset="0"/>
+                <a:ea typeface="Calibri" pitchFamily="34" charset="-122"/>
+                <a:cs typeface="Calibri" pitchFamily="34" charset="-120"/>
+              </a:rPr>
+              <a:t>sim's 3.9 mm comes from ~1000 distinct positions; measured's 9.9 mm from only ~50. Same model, different coverage.</a:t>
+            </a:r>
+            <a:endParaRPr lang="en-US" sz="1400" dirty="0"/>
+          </a:p>
+        </p:txBody>
+      </p:sp>
+      <p:sp>
+        <p:nvSpPr>
+          <p:cNvPr id="13" name="Shape 11"/>
+          <p:cNvSpPr/>
+          <p:nvPr/>
+        </p:nvSpPr>
+        <p:spPr>
+          <a:xfrm>
+            <a:off x="822960" y="4507992"/>
+            <a:ext cx="384048" cy="384048"/>
+          </a:xfrm>
+          <a:prstGeom prst="ellipse">
+            <a:avLst/>
+          </a:prstGeom>
+          <a:solidFill>
+            <a:srgbClr val="BE0000"/>
+          </a:solidFill>
+          <a:ln/>
+        </p:spPr>
+      </p:sp>
+      <p:sp>
+        <p:nvSpPr>
+          <p:cNvPr id="14" name="Text 12"/>
+          <p:cNvSpPr/>
+          <p:nvPr/>
+        </p:nvSpPr>
+        <p:spPr>
+          <a:xfrm>
+            <a:off x="822960" y="4507992"/>
+            <a:ext cx="384048" cy="384048"/>
+          </a:xfrm>
+          <a:prstGeom prst="rect">
+            <a:avLst/>
+          </a:prstGeom>
+          <a:noFill/>
+          <a:ln/>
+        </p:spPr>
+        <p:txBody>
+          <a:bodyPr wrap="square" lIns="0" tIns="0" rIns="0" bIns="0" rtlCol="0" anchor="ctr"/>
+          <a:lstStyle/>
+          <a:p>
+            <a:pPr algn="ctr" indent="0" marL="0">
+              <a:buNone/>
+            </a:pPr>
+            <a:r>
+              <a:rPr lang="en-US" sz="1500" b="1" dirty="0">
+                <a:solidFill>
+                  <a:srgbClr val="FFFFFF"/>
+                </a:solidFill>
+                <a:latin typeface="Cambria" pitchFamily="34" charset="0"/>
+                <a:ea typeface="Cambria" pitchFamily="34" charset="-122"/>
+                <a:cs typeface="Cambria" pitchFamily="34" charset="-120"/>
+              </a:rPr>
+              <a:t>4</a:t>
+            </a:r>
+            <a:endParaRPr lang="en-US" sz="1500" dirty="0"/>
+          </a:p>
+        </p:txBody>
+      </p:sp>
+      <p:sp>
+        <p:nvSpPr>
+          <p:cNvPr id="15" name="Text 13"/>
+          <p:cNvSpPr/>
+          <p:nvPr/>
+        </p:nvSpPr>
+        <p:spPr>
+          <a:xfrm>
+            <a:off x="1371600" y="4416552"/>
+            <a:ext cx="10241280" cy="868680"/>
+          </a:xfrm>
+          <a:prstGeom prst="rect">
+            <a:avLst/>
+          </a:prstGeom>
+          <a:noFill/>
+          <a:ln/>
+        </p:spPr>
+        <p:txBody>
+          <a:bodyPr wrap="square" lIns="0" tIns="0" rIns="0" bIns="0" rtlCol="0" anchor="ctr"/>
+          <a:lstStyle/>
+          <a:p>
+            <a:pPr indent="0" marL="0">
+              <a:buNone/>
+            </a:pPr>
+            <a:r>
+              <a:rPr lang="en-US" sz="1400" b="1" dirty="0">
+                <a:solidFill>
+                  <a:srgbClr val="2A1618"/>
+                </a:solidFill>
+                <a:latin typeface="Calibri" pitchFamily="34" charset="0"/>
+                <a:ea typeface="Calibri" pitchFamily="34" charset="-122"/>
+                <a:cs typeface="Calibri" pitchFamily="34" charset="-120"/>
+              </a:rPr>
+              <a:t>Sim predicts beet approximately equals metal, but the bench does not:  </a:t>
+            </a:r>
+            <a:pPr indent="0" marL="0">
+              <a:buNone/>
+            </a:pPr>
+            <a:r>
+              <a:rPr lang="en-US" sz="1400" dirty="0">
+                <a:solidFill>
+                  <a:srgbClr val="836A68"/>
+                </a:solidFill>
+                <a:latin typeface="Calibri" pitchFamily="34" charset="0"/>
+                <a:ea typeface="Calibri" pitchFamily="34" charset="-122"/>
+                <a:cs typeface="Calibri" pitchFamily="34" charset="-120"/>
+              </a:rPr>
+              <a:t>in sim the beet produces 93% of the metal signal; on the bench only 42%, flagging an object-size / depth mismatch or an optimistic sim beet model.</a:t>
+            </a:r>
+            <a:endParaRPr lang="en-US" sz="1400" dirty="0"/>
+          </a:p>
+        </p:txBody>
+      </p:sp>
+      <p:sp>
+        <p:nvSpPr>
+          <p:cNvPr id="16" name="Shape 14"/>
+          <p:cNvSpPr/>
+          <p:nvPr/>
+        </p:nvSpPr>
+        <p:spPr>
+          <a:xfrm>
+            <a:off x="822960" y="5477256"/>
+            <a:ext cx="384048" cy="384048"/>
+          </a:xfrm>
+          <a:prstGeom prst="ellipse">
+            <a:avLst/>
+          </a:prstGeom>
+          <a:solidFill>
+            <a:srgbClr val="BE0000"/>
+          </a:solidFill>
+          <a:ln/>
+        </p:spPr>
+      </p:sp>
+      <p:sp>
+        <p:nvSpPr>
+          <p:cNvPr id="17" name="Text 15"/>
+          <p:cNvSpPr/>
+          <p:nvPr/>
+        </p:nvSpPr>
+        <p:spPr>
+          <a:xfrm>
+            <a:off x="822960" y="5477256"/>
+            <a:ext cx="384048" cy="384048"/>
+          </a:xfrm>
+          <a:prstGeom prst="rect">
+            <a:avLst/>
+          </a:prstGeom>
+          <a:noFill/>
+          <a:ln/>
+        </p:spPr>
+        <p:txBody>
+          <a:bodyPr wrap="square" lIns="0" tIns="0" rIns="0" bIns="0" rtlCol="0" anchor="ctr"/>
+          <a:lstStyle/>
+          <a:p>
+            <a:pPr algn="ctr" indent="0" marL="0">
+              <a:buNone/>
+            </a:pPr>
+            <a:r>
+              <a:rPr lang="en-US" sz="1500" b="1" dirty="0">
+                <a:solidFill>
+                  <a:srgbClr val="FFFFFF"/>
+                </a:solidFill>
+                <a:latin typeface="Cambria" pitchFamily="34" charset="0"/>
+                <a:ea typeface="Cambria" pitchFamily="34" charset="-122"/>
+                <a:cs typeface="Cambria" pitchFamily="34" charset="-120"/>
+              </a:rPr>
+              <a:t>5</a:t>
+            </a:r>
+            <a:endParaRPr lang="en-US" sz="1500" dirty="0"/>
+          </a:p>
+        </p:txBody>
+      </p:sp>
+      <p:sp>
+        <p:nvSpPr>
+          <p:cNvPr id="18" name="Text 16"/>
+          <p:cNvSpPr/>
+          <p:nvPr/>
+        </p:nvSpPr>
+        <p:spPr>
+          <a:xfrm>
+            <a:off x="1371600" y="5385816"/>
+            <a:ext cx="10241280" cy="868680"/>
+          </a:xfrm>
+          <a:prstGeom prst="rect">
+            <a:avLst/>
+          </a:prstGeom>
+          <a:noFill/>
+          <a:ln/>
+        </p:spPr>
+        <p:txBody>
+          <a:bodyPr wrap="square" lIns="0" tIns="0" rIns="0" bIns="0" rtlCol="0" anchor="ctr"/>
+          <a:lstStyle/>
+          <a:p>
+            <a:pPr indent="0" marL="0">
+              <a:buNone/>
+            </a:pPr>
+            <a:r>
+              <a:rPr lang="en-US" sz="1400" b="1" dirty="0">
+                <a:solidFill>
+                  <a:srgbClr val="2A1618"/>
+                </a:solidFill>
+                <a:latin typeface="Calibri" pitchFamily="34" charset="0"/>
+                <a:ea typeface="Calibri" pitchFamily="34" charset="-122"/>
+                <a:cs typeface="Calibri" pitchFamily="34" charset="-120"/>
+              </a:rPr>
+              <a:t>A sim to measured transfer is learnable:  </a:t>
+            </a:r>
+            <a:pPr indent="0" marL="0">
+              <a:buNone/>
+            </a:pPr>
+            <a:r>
+              <a:rPr lang="en-US" sz="1400" dirty="0">
+                <a:solidFill>
+                  <a:srgbClr val="836A68"/>
+                </a:solidFill>
+                <a:latin typeface="Calibri" pitchFamily="34" charset="0"/>
+                <a:ea typeface="Calibri" pitchFamily="34" charset="-122"/>
+                <a:cs typeface="Calibri" pitchFamily="34" charset="-120"/>
+              </a:rPr>
+              <a:t>a linear map already reaches R2 = 0.65 on unseen frequencies, a promising if preliminary calibration path.</a:t>
+            </a:r>
+            <a:endParaRPr lang="en-US" sz="1400" dirty="0"/>
+          </a:p>
+        </p:txBody>
+      </p:sp>
+      <p:sp>
+        <p:nvSpPr>
+          <p:cNvPr id="19" name="Text 17"/>
+          <p:cNvSpPr/>
+          <p:nvPr/>
+        </p:nvSpPr>
+        <p:spPr>
+          <a:xfrm>
+            <a:off x="822960" y="6400800"/>
+            <a:ext cx="10515600" cy="320040"/>
+          </a:xfrm>
+          <a:prstGeom prst="rect">
+            <a:avLst/>
+          </a:prstGeom>
+          <a:noFill/>
+          <a:ln/>
+        </p:spPr>
+        <p:txBody>
+          <a:bodyPr wrap="square" lIns="0" tIns="0" rIns="0" bIns="0" rtlCol="0" anchor="ctr"/>
+          <a:lstStyle/>
+          <a:p>
+            <a:pPr indent="0" marL="0">
+              <a:buNone/>
+            </a:pPr>
+            <a:r>
+              <a:rPr lang="en-US" sz="1100" dirty="0">
+                <a:solidFill>
+                  <a:srgbClr val="BE0000"/>
+                </a:solidFill>
+                <a:latin typeface="Calibri" pitchFamily="34" charset="0"/>
+                <a:ea typeface="Calibri" pitchFamily="34" charset="-122"/>
+                <a:cs typeface="Calibri" pitchFamily="34" charset="-120"/>
+              </a:rPr>
+              <a:t>github.com/pmart1534/microwave-phantom-localization-cnn-mlp</a:t>
+            </a:r>
+            <a:endParaRPr lang="en-US" sz="1100" dirty="0"/>
+          </a:p>
+        </p:txBody>
+      </p:sp>
+    </p:spTree>
+  </p:cSld>
+  <p:clrMapOvr>
+    <a:masterClrMapping/>
+  </p:clrMapOvr>
+</p:sld>
+</file>
+
 <file path=ppt/slides/slide2.xml><?xml version="1.0" encoding="utf-8"?>
 <p:sld xmlns:a="http://schemas.openxmlformats.org/drawingml/2006/main" xmlns:r="http://schemas.openxmlformats.org/officeDocument/2006/relationships" xmlns:p="http://schemas.openxmlformats.org/presentationml/2006/main">
   <p:cSld name="Slide 2">
@@ -4226,7 +5228,7 @@
                 <a:ea typeface="Cambria" pitchFamily="34" charset="-122"/>
                 <a:cs typeface="Cambria" pitchFamily="34" charset="-120"/>
               </a:rPr>
-              <a:t>Detectable-difference pattern, measured vs sim</a:t>
+              <a:t>Transmission (coupling) per pair, sim vs measured</a:t>
             </a:r>
             <a:endParaRPr lang="en-US" sz="2900" dirty="0"/>
           </a:p>
@@ -4265,7 +5267,7 @@
                 <a:ea typeface="Calibri" pitchFamily="34" charset="-122"/>
                 <a:cs typeface="Calibri" pitchFamily="34" charset="-120"/>
               </a:rPr>
-              <a:t>The tumor's detectable change per position; the spatial pattern matches</a:t>
+              <a:t>Four representative antenna-to-antenna terms; couplings also differ between domains</a:t>
             </a:r>
             <a:endParaRPr lang="en-US" sz="1400" dirty="0"/>
           </a:p>
@@ -4273,7 +5275,7 @@
       </p:sp>
       <p:pic>
         <p:nvPicPr>
-          <p:cNvPr id="4" name="Image 0" descr="dd_measured_vs_sim.png">    </p:cNvPr>
+          <p:cNvPr id="4" name="Image 0" descr="transmission_sim_vs_meas.png">    </p:cNvPr>
           <p:cNvPicPr>
             <a:picLocks noChangeAspect="1"/>
           </p:cNvPicPr>
@@ -4287,8 +5289,8 @@
         </p:blipFill>
         <p:spPr>
           <a:xfrm>
-            <a:off x="822960" y="1600200"/>
-            <a:ext cx="10515600" cy="4892040"/>
+            <a:off x="2148840" y="1554480"/>
+            <a:ext cx="7863840" cy="4828032"/>
           </a:xfrm>
           <a:prstGeom prst="rect">
             <a:avLst/>
@@ -4360,6 +5362,140 @@
                 <a:ea typeface="Cambria" pitchFamily="34" charset="-122"/>
                 <a:cs typeface="Cambria" pitchFamily="34" charset="-120"/>
               </a:rPr>
+              <a:t>Detectable difference by S-parameter</a:t>
+            </a:r>
+            <a:endParaRPr lang="en-US" sz="2900" dirty="0"/>
+          </a:p>
+        </p:txBody>
+      </p:sp>
+      <p:sp>
+        <p:nvSpPr>
+          <p:cNvPr id="3" name="Text 1"/>
+          <p:cNvSpPr/>
+          <p:nvPr/>
+        </p:nvSpPr>
+        <p:spPr>
+          <a:xfrm>
+            <a:off x="548640" y="1033272"/>
+            <a:ext cx="11091672" cy="365760"/>
+          </a:xfrm>
+          <a:prstGeom prst="rect">
+            <a:avLst/>
+          </a:prstGeom>
+          <a:noFill/>
+          <a:ln/>
+        </p:spPr>
+        <p:txBody>
+          <a:bodyPr wrap="square" lIns="0" tIns="0" rIns="0" bIns="0" rtlCol="0" anchor="ctr"/>
+          <a:lstStyle/>
+          <a:p>
+            <a:pPr indent="0" marL="0">
+              <a:buNone/>
+            </a:pPr>
+            <a:r>
+              <a:rPr lang="en-US" sz="1400" b="1" dirty="0">
+                <a:solidFill>
+                  <a:srgbClr val="BE0000"/>
+                </a:solidFill>
+                <a:latin typeface="Calibri" pitchFamily="34" charset="0"/>
+                <a:ea typeface="Calibri" pitchFamily="34" charset="-122"/>
+                <a:cs typeface="Calibri" pitchFamily="34" charset="-120"/>
+              </a:rPr>
+              <a:t>Each reflection Sii localizes near an antenna, in measured (top) and simulated (bottom)</a:t>
+            </a:r>
+            <a:endParaRPr lang="en-US" sz="1400" dirty="0"/>
+          </a:p>
+        </p:txBody>
+      </p:sp>
+      <p:pic>
+        <p:nvPicPr>
+          <p:cNvPr id="4" name="Image 0" descr="dd_per_sparam.png">    </p:cNvPr>
+          <p:cNvPicPr>
+            <a:picLocks noChangeAspect="1"/>
+          </p:cNvPicPr>
+          <p:nvPr/>
+        </p:nvPicPr>
+        <p:blipFill>
+          <a:blip r:embed="rId1"/>
+          <a:stretch>
+            <a:fillRect/>
+          </a:stretch>
+        </p:blipFill>
+        <p:spPr>
+          <a:xfrm>
+            <a:off x="274320" y="1417320"/>
+            <a:ext cx="11612880" cy="5074920"/>
+          </a:xfrm>
+          <a:prstGeom prst="rect">
+            <a:avLst/>
+          </a:prstGeom>
+        </p:spPr>
+      </p:pic>
+    </p:spTree>
+  </p:cSld>
+  <p:clrMapOvr>
+    <a:masterClrMapping/>
+  </p:clrMapOvr>
+</p:sld>
+</file>
+
+<file path=ppt/slides/slide8.xml><?xml version="1.0" encoding="utf-8"?>
+<p:sld xmlns:a="http://schemas.openxmlformats.org/drawingml/2006/main" xmlns:r="http://schemas.openxmlformats.org/officeDocument/2006/relationships" xmlns:p="http://schemas.openxmlformats.org/presentationml/2006/main">
+  <p:cSld name="Slide 8">
+    <p:bg>
+      <p:bgPr>
+        <a:solidFill>
+          <a:srgbClr val="FFFFFF"/>
+        </a:solidFill>
+      </p:bgPr>
+    </p:bg>
+    <p:spTree>
+      <p:nvGrpSpPr>
+        <p:cNvPr id="1" name=""/>
+        <p:cNvGrpSpPr/>
+        <p:nvPr/>
+      </p:nvGrpSpPr>
+      <p:grpSpPr>
+        <a:xfrm>
+          <a:off x="0" y="0"/>
+          <a:ext cx="0" cy="0"/>
+          <a:chOff x="0" y="0"/>
+          <a:chExt cx="0" cy="0"/>
+        </a:xfrm>
+      </p:grpSpPr>
+      <p:sp>
+        <p:nvSpPr>
+          <p:cNvPr id="2" name="Text 0"/>
+          <p:cNvSpPr/>
+          <p:nvPr/>
+        </p:nvSpPr>
+        <p:spPr>
+          <a:xfrm>
+            <a:off x="548640" y="384048"/>
+            <a:ext cx="11091672" cy="640080"/>
+          </a:xfrm>
+          <a:prstGeom prst="rect">
+            <a:avLst/>
+          </a:prstGeom>
+          <a:noFill/>
+          <a:ln/>
+        </p:spPr>
+        <p:txBody>
+          <a:bodyPr wrap="square" lIns="0" tIns="0" rIns="0" bIns="0" rtlCol="0" anchor="ctr"/>
+          <a:lstStyle/>
+          <a:p>
+            <a:pPr indent="0" marL="0">
+              <a:buNone/>
+            </a:pPr>
+            <a:r>
+              <a:rPr lang="en-US" sz="2900" b="1" dirty="0">
+                <a:solidFill>
+                  <a:srgbClr val="2A1618"/>
+                </a:solidFill>
+                <a:latin typeface="Cambria" pitchFamily="34" charset="0"/>
+                <a:ea typeface="Cambria" pitchFamily="34" charset="-122"/>
+                <a:cs typeface="Cambria" pitchFamily="34" charset="-120"/>
+              </a:rPr>
               <a:t>The numbers, signal vs. model</a:t>
             </a:r>
             <a:endParaRPr lang="en-US" sz="2900" dirty="0"/>
@@ -4407,7 +5543,7 @@
       </p:sp>
       <p:graphicFrame>
         <p:nvGraphicFramePr>
-          <p:cNvPr id="8" name="Table 0"/>
+          <p:cNvPr id="9" name="Table 0"/>
           <p:cNvGraphicFramePr>
             <a:graphicFrameLocks noGrp="1"/>
           </p:cNvGraphicFramePr>
@@ -5783,9 +6919,9 @@
 </p:sld>
 </file>
 
-<file path=ppt/slides/slide8.xml><?xml version="1.0" encoding="utf-8"?>
+<file path=ppt/slides/slide9.xml><?xml version="1.0" encoding="utf-8"?>
 <p:sld xmlns:a="http://schemas.openxmlformats.org/drawingml/2006/main" xmlns:r="http://schemas.openxmlformats.org/officeDocument/2006/relationships" xmlns:p="http://schemas.openxmlformats.org/presentationml/2006/main">
-  <p:cSld name="Slide 8">
+  <p:cSld name="Slide 9">
     <p:bg>
       <p:bgPr>
         <a:solidFill>
@@ -6103,696 +7239,6 @@
               <a:t>Preliminary: only the empty baseline is cleanly paired. Nonlinear domain adaptation (and any use for calibrating sim toward the bench) needs far more paired data: multiple sessions and, ideally, matched tumor positions.</a:t>
             </a:r>
             <a:endParaRPr lang="en-US" sz="1250" dirty="0"/>
-          </a:p>
-        </p:txBody>
-      </p:sp>
-    </p:spTree>
-  </p:cSld>
-  <p:clrMapOvr>
-    <a:masterClrMapping/>
-  </p:clrMapOvr>
-</p:sld>
-</file>
-
-<file path=ppt/slides/slide9.xml><?xml version="1.0" encoding="utf-8"?>
-<p:sld xmlns:a="http://schemas.openxmlformats.org/drawingml/2006/main" xmlns:r="http://schemas.openxmlformats.org/officeDocument/2006/relationships" xmlns:p="http://schemas.openxmlformats.org/presentationml/2006/main">
-  <p:cSld name="Slide 9">
-    <p:bg>
-      <p:bgPr>
-        <a:solidFill>
-          <a:srgbClr val="FDF8F6"/>
-        </a:solidFill>
-      </p:bgPr>
-    </p:bg>
-    <p:spTree>
-      <p:nvGrpSpPr>
-        <p:cNvPr id="1" name=""/>
-        <p:cNvGrpSpPr/>
-        <p:nvPr/>
-      </p:nvGrpSpPr>
-      <p:grpSpPr>
-        <a:xfrm>
-          <a:off x="0" y="0"/>
-          <a:ext cx="0" cy="0"/>
-          <a:chOff x="0" y="0"/>
-          <a:chExt cx="0" cy="0"/>
-        </a:xfrm>
-      </p:grpSpPr>
-      <p:sp>
-        <p:nvSpPr>
-          <p:cNvPr id="2" name="Shape 0"/>
-          <p:cNvSpPr/>
-          <p:nvPr/>
-        </p:nvSpPr>
-        <p:spPr>
-          <a:xfrm>
-            <a:off x="0" y="0"/>
-            <a:ext cx="12188952" cy="237744"/>
-          </a:xfrm>
-          <a:prstGeom prst="rect">
-            <a:avLst/>
-          </a:prstGeom>
-          <a:solidFill>
-            <a:srgbClr val="BE0000"/>
-          </a:solidFill>
-          <a:ln/>
-        </p:spPr>
-      </p:sp>
-      <p:sp>
-        <p:nvSpPr>
-          <p:cNvPr id="3" name="Text 1"/>
-          <p:cNvSpPr/>
-          <p:nvPr/>
-        </p:nvSpPr>
-        <p:spPr>
-          <a:xfrm>
-            <a:off x="822960" y="640080"/>
-            <a:ext cx="10058400" cy="731520"/>
-          </a:xfrm>
-          <a:prstGeom prst="rect">
-            <a:avLst/>
-          </a:prstGeom>
-          <a:noFill/>
-          <a:ln/>
-        </p:spPr>
-        <p:txBody>
-          <a:bodyPr wrap="square" lIns="0" tIns="0" rIns="0" bIns="0" rtlCol="0" anchor="ctr"/>
-          <a:lstStyle/>
-          <a:p>
-            <a:pPr indent="0" marL="0">
-              <a:buNone/>
-            </a:pPr>
-            <a:r>
-              <a:rPr lang="en-US" sz="2800" b="1" dirty="0">
-                <a:solidFill>
-                  <a:srgbClr val="BE0000"/>
-                </a:solidFill>
-                <a:latin typeface="Cambria" pitchFamily="34" charset="0"/>
-                <a:ea typeface="Cambria" pitchFamily="34" charset="-122"/>
-                <a:cs typeface="Cambria" pitchFamily="34" charset="-120"/>
-              </a:rPr>
-              <a:t>Part 3, bottom line</a:t>
-            </a:r>
-            <a:endParaRPr lang="en-US" sz="2800" dirty="0"/>
-          </a:p>
-        </p:txBody>
-      </p:sp>
-      <p:sp>
-        <p:nvSpPr>
-          <p:cNvPr id="4" name="Shape 2"/>
-          <p:cNvSpPr/>
-          <p:nvPr/>
-        </p:nvSpPr>
-        <p:spPr>
-          <a:xfrm>
-            <a:off x="822960" y="1600200"/>
-            <a:ext cx="384048" cy="384048"/>
-          </a:xfrm>
-          <a:prstGeom prst="ellipse">
-            <a:avLst/>
-          </a:prstGeom>
-          <a:solidFill>
-            <a:srgbClr val="BE0000"/>
-          </a:solidFill>
-          <a:ln/>
-        </p:spPr>
-      </p:sp>
-      <p:sp>
-        <p:nvSpPr>
-          <p:cNvPr id="5" name="Text 3"/>
-          <p:cNvSpPr/>
-          <p:nvPr/>
-        </p:nvSpPr>
-        <p:spPr>
-          <a:xfrm>
-            <a:off x="822960" y="1600200"/>
-            <a:ext cx="384048" cy="384048"/>
-          </a:xfrm>
-          <a:prstGeom prst="rect">
-            <a:avLst/>
-          </a:prstGeom>
-          <a:noFill/>
-          <a:ln/>
-        </p:spPr>
-        <p:txBody>
-          <a:bodyPr wrap="square" lIns="0" tIns="0" rIns="0" bIns="0" rtlCol="0" anchor="ctr"/>
-          <a:lstStyle/>
-          <a:p>
-            <a:pPr algn="ctr" indent="0" marL="0">
-              <a:buNone/>
-            </a:pPr>
-            <a:r>
-              <a:rPr lang="en-US" sz="1500" b="1" dirty="0">
-                <a:solidFill>
-                  <a:srgbClr val="FFFFFF"/>
-                </a:solidFill>
-                <a:latin typeface="Cambria" pitchFamily="34" charset="0"/>
-                <a:ea typeface="Cambria" pitchFamily="34" charset="-122"/>
-                <a:cs typeface="Cambria" pitchFamily="34" charset="-120"/>
-              </a:rPr>
-              <a:t>1</a:t>
-            </a:r>
-            <a:endParaRPr lang="en-US" sz="1500" dirty="0"/>
-          </a:p>
-        </p:txBody>
-      </p:sp>
-      <p:sp>
-        <p:nvSpPr>
-          <p:cNvPr id="6" name="Text 4"/>
-          <p:cNvSpPr/>
-          <p:nvPr/>
-        </p:nvSpPr>
-        <p:spPr>
-          <a:xfrm>
-            <a:off x="1371600" y="1508760"/>
-            <a:ext cx="10241280" cy="868680"/>
-          </a:xfrm>
-          <a:prstGeom prst="rect">
-            <a:avLst/>
-          </a:prstGeom>
-          <a:noFill/>
-          <a:ln/>
-        </p:spPr>
-        <p:txBody>
-          <a:bodyPr wrap="square" lIns="0" tIns="0" rIns="0" bIns="0" rtlCol="0" anchor="ctr"/>
-          <a:lstStyle/>
-          <a:p>
-            <a:pPr indent="0" marL="0">
-              <a:buNone/>
-            </a:pPr>
-            <a:r>
-              <a:rPr lang="en-US" sz="1400" b="1" dirty="0">
-                <a:solidFill>
-                  <a:srgbClr val="2A1618"/>
-                </a:solidFill>
-                <a:latin typeface="Calibri" pitchFamily="34" charset="0"/>
-                <a:ea typeface="Calibri" pitchFamily="34" charset="-122"/>
-                <a:cs typeface="Calibri" pitchFamily="34" charset="-120"/>
-              </a:rPr>
-              <a:t>Sim and measured agree at the signal level:  </a:t>
-            </a:r>
-            <a:pPr indent="0" marL="0">
-              <a:buNone/>
-            </a:pPr>
-            <a:r>
-              <a:rPr lang="en-US" sz="1400" dirty="0">
-                <a:solidFill>
-                  <a:srgbClr val="836A68"/>
-                </a:solidFill>
-                <a:latin typeface="Calibri" pitchFamily="34" charset="0"/>
-                <a:ea typeface="Calibri" pitchFamily="34" charset="-122"/>
-                <a:cs typeface="Calibri" pitchFamily="34" charset="-120"/>
-              </a:rPr>
-              <a:t>the empty phantom interpolates to ~6 mm on both (k-NN), indicating the simulated signal is realistic.</a:t>
-            </a:r>
-            <a:endParaRPr lang="en-US" sz="1400" dirty="0"/>
-          </a:p>
-        </p:txBody>
-      </p:sp>
-      <p:sp>
-        <p:nvSpPr>
-          <p:cNvPr id="7" name="Shape 5"/>
-          <p:cNvSpPr/>
-          <p:nvPr/>
-        </p:nvSpPr>
-        <p:spPr>
-          <a:xfrm>
-            <a:off x="822960" y="2569464"/>
-            <a:ext cx="384048" cy="384048"/>
-          </a:xfrm>
-          <a:prstGeom prst="ellipse">
-            <a:avLst/>
-          </a:prstGeom>
-          <a:solidFill>
-            <a:srgbClr val="BE0000"/>
-          </a:solidFill>
-          <a:ln/>
-        </p:spPr>
-      </p:sp>
-      <p:sp>
-        <p:nvSpPr>
-          <p:cNvPr id="8" name="Text 6"/>
-          <p:cNvSpPr/>
-          <p:nvPr/>
-        </p:nvSpPr>
-        <p:spPr>
-          <a:xfrm>
-            <a:off x="822960" y="2569464"/>
-            <a:ext cx="384048" cy="384048"/>
-          </a:xfrm>
-          <a:prstGeom prst="rect">
-            <a:avLst/>
-          </a:prstGeom>
-          <a:noFill/>
-          <a:ln/>
-        </p:spPr>
-        <p:txBody>
-          <a:bodyPr wrap="square" lIns="0" tIns="0" rIns="0" bIns="0" rtlCol="0" anchor="ctr"/>
-          <a:lstStyle/>
-          <a:p>
-            <a:pPr algn="ctr" indent="0" marL="0">
-              <a:buNone/>
-            </a:pPr>
-            <a:r>
-              <a:rPr lang="en-US" sz="1500" b="1" dirty="0">
-                <a:solidFill>
-                  <a:srgbClr val="FFFFFF"/>
-                </a:solidFill>
-                <a:latin typeface="Cambria" pitchFamily="34" charset="0"/>
-                <a:ea typeface="Cambria" pitchFamily="34" charset="-122"/>
-                <a:cs typeface="Cambria" pitchFamily="34" charset="-120"/>
-              </a:rPr>
-              <a:t>2</a:t>
-            </a:r>
-            <a:endParaRPr lang="en-US" sz="1500" dirty="0"/>
-          </a:p>
-        </p:txBody>
-      </p:sp>
-      <p:sp>
-        <p:nvSpPr>
-          <p:cNvPr id="9" name="Text 7"/>
-          <p:cNvSpPr/>
-          <p:nvPr/>
-        </p:nvSpPr>
-        <p:spPr>
-          <a:xfrm>
-            <a:off x="1371600" y="2478024"/>
-            <a:ext cx="10241280" cy="868680"/>
-          </a:xfrm>
-          <a:prstGeom prst="rect">
-            <a:avLst/>
-          </a:prstGeom>
-          <a:noFill/>
-          <a:ln/>
-        </p:spPr>
-        <p:txBody>
-          <a:bodyPr wrap="square" lIns="0" tIns="0" rIns="0" bIns="0" rtlCol="0" anchor="ctr"/>
-          <a:lstStyle/>
-          <a:p>
-            <a:pPr indent="0" marL="0">
-              <a:buNone/>
-            </a:pPr>
-            <a:r>
-              <a:rPr lang="en-US" sz="1400" b="1" dirty="0">
-                <a:solidFill>
-                  <a:srgbClr val="2A1618"/>
-                </a:solidFill>
-                <a:latin typeface="Calibri" pitchFamily="34" charset="0"/>
-                <a:ea typeface="Calibri" pitchFamily="34" charset="-122"/>
-                <a:cs typeface="Calibri" pitchFamily="34" charset="-120"/>
-              </a:rPr>
-              <a:t>The detectable-difference pattern matches:  </a:t>
-            </a:r>
-            <a:pPr indent="0" marL="0">
-              <a:buNone/>
-            </a:pPr>
-            <a:r>
-              <a:rPr lang="en-US" sz="1400" dirty="0">
-                <a:solidFill>
-                  <a:srgbClr val="836A68"/>
-                </a:solidFill>
-                <a:latin typeface="Calibri" pitchFamily="34" charset="0"/>
-                <a:ea typeface="Calibri" pitchFamily="34" charset="-122"/>
-                <a:cs typeface="Calibri" pitchFamily="34" charset="-120"/>
-              </a:rPr>
-              <a:t>bench and sim place the tumor's strongest change in the same regions (toward the antenna sides).</a:t>
-            </a:r>
-            <a:endParaRPr lang="en-US" sz="1400" dirty="0"/>
-          </a:p>
-        </p:txBody>
-      </p:sp>
-      <p:sp>
-        <p:nvSpPr>
-          <p:cNvPr id="10" name="Shape 8"/>
-          <p:cNvSpPr/>
-          <p:nvPr/>
-        </p:nvSpPr>
-        <p:spPr>
-          <a:xfrm>
-            <a:off x="822960" y="3538728"/>
-            <a:ext cx="384048" cy="384048"/>
-          </a:xfrm>
-          <a:prstGeom prst="ellipse">
-            <a:avLst/>
-          </a:prstGeom>
-          <a:solidFill>
-            <a:srgbClr val="BE0000"/>
-          </a:solidFill>
-          <a:ln/>
-        </p:spPr>
-      </p:sp>
-      <p:sp>
-        <p:nvSpPr>
-          <p:cNvPr id="11" name="Text 9"/>
-          <p:cNvSpPr/>
-          <p:nvPr/>
-        </p:nvSpPr>
-        <p:spPr>
-          <a:xfrm>
-            <a:off x="822960" y="3538728"/>
-            <a:ext cx="384048" cy="384048"/>
-          </a:xfrm>
-          <a:prstGeom prst="rect">
-            <a:avLst/>
-          </a:prstGeom>
-          <a:noFill/>
-          <a:ln/>
-        </p:spPr>
-        <p:txBody>
-          <a:bodyPr wrap="square" lIns="0" tIns="0" rIns="0" bIns="0" rtlCol="0" anchor="ctr"/>
-          <a:lstStyle/>
-          <a:p>
-            <a:pPr algn="ctr" indent="0" marL="0">
-              <a:buNone/>
-            </a:pPr>
-            <a:r>
-              <a:rPr lang="en-US" sz="1500" b="1" dirty="0">
-                <a:solidFill>
-                  <a:srgbClr val="FFFFFF"/>
-                </a:solidFill>
-                <a:latin typeface="Cambria" pitchFamily="34" charset="0"/>
-                <a:ea typeface="Cambria" pitchFamily="34" charset="-122"/>
-                <a:cs typeface="Cambria" pitchFamily="34" charset="-120"/>
-              </a:rPr>
-              <a:t>3</a:t>
-            </a:r>
-            <a:endParaRPr lang="en-US" sz="1500" dirty="0"/>
-          </a:p>
-        </p:txBody>
-      </p:sp>
-      <p:sp>
-        <p:nvSpPr>
-          <p:cNvPr id="12" name="Text 10"/>
-          <p:cNvSpPr/>
-          <p:nvPr/>
-        </p:nvSpPr>
-        <p:spPr>
-          <a:xfrm>
-            <a:off x="1371600" y="3447288"/>
-            <a:ext cx="10241280" cy="868680"/>
-          </a:xfrm>
-          <a:prstGeom prst="rect">
-            <a:avLst/>
-          </a:prstGeom>
-          <a:noFill/>
-          <a:ln/>
-        </p:spPr>
-        <p:txBody>
-          <a:bodyPr wrap="square" lIns="0" tIns="0" rIns="0" bIns="0" rtlCol="0" anchor="ctr"/>
-          <a:lstStyle/>
-          <a:p>
-            <a:pPr indent="0" marL="0">
-              <a:buNone/>
-            </a:pPr>
-            <a:r>
-              <a:rPr lang="en-US" sz="1400" b="1" dirty="0">
-                <a:solidFill>
-                  <a:srgbClr val="2A1618"/>
-                </a:solidFill>
-                <a:latin typeface="Calibri" pitchFamily="34" charset="0"/>
-                <a:ea typeface="Calibri" pitchFamily="34" charset="-122"/>
-                <a:cs typeface="Calibri" pitchFamily="34" charset="-120"/>
-              </a:rPr>
-              <a:t>The CNN gap is data coverage, not fidelity:  </a:t>
-            </a:r>
-            <a:pPr indent="0" marL="0">
-              <a:buNone/>
-            </a:pPr>
-            <a:r>
-              <a:rPr lang="en-US" sz="1400" dirty="0">
-                <a:solidFill>
-                  <a:srgbClr val="836A68"/>
-                </a:solidFill>
-                <a:latin typeface="Calibri" pitchFamily="34" charset="0"/>
-                <a:ea typeface="Calibri" pitchFamily="34" charset="-122"/>
-                <a:cs typeface="Calibri" pitchFamily="34" charset="-120"/>
-              </a:rPr>
-              <a:t>sim's 3.9 mm comes from ~1000 distinct positions; measured's 9.9 mm from only ~50. Same model, different coverage.</a:t>
-            </a:r>
-            <a:endParaRPr lang="en-US" sz="1400" dirty="0"/>
-          </a:p>
-        </p:txBody>
-      </p:sp>
-      <p:sp>
-        <p:nvSpPr>
-          <p:cNvPr id="13" name="Shape 11"/>
-          <p:cNvSpPr/>
-          <p:nvPr/>
-        </p:nvSpPr>
-        <p:spPr>
-          <a:xfrm>
-            <a:off x="822960" y="4507992"/>
-            <a:ext cx="384048" cy="384048"/>
-          </a:xfrm>
-          <a:prstGeom prst="ellipse">
-            <a:avLst/>
-          </a:prstGeom>
-          <a:solidFill>
-            <a:srgbClr val="BE0000"/>
-          </a:solidFill>
-          <a:ln/>
-        </p:spPr>
-      </p:sp>
-      <p:sp>
-        <p:nvSpPr>
-          <p:cNvPr id="14" name="Text 12"/>
-          <p:cNvSpPr/>
-          <p:nvPr/>
-        </p:nvSpPr>
-        <p:spPr>
-          <a:xfrm>
-            <a:off x="822960" y="4507992"/>
-            <a:ext cx="384048" cy="384048"/>
-          </a:xfrm>
-          <a:prstGeom prst="rect">
-            <a:avLst/>
-          </a:prstGeom>
-          <a:noFill/>
-          <a:ln/>
-        </p:spPr>
-        <p:txBody>
-          <a:bodyPr wrap="square" lIns="0" tIns="0" rIns="0" bIns="0" rtlCol="0" anchor="ctr"/>
-          <a:lstStyle/>
-          <a:p>
-            <a:pPr algn="ctr" indent="0" marL="0">
-              <a:buNone/>
-            </a:pPr>
-            <a:r>
-              <a:rPr lang="en-US" sz="1500" b="1" dirty="0">
-                <a:solidFill>
-                  <a:srgbClr val="FFFFFF"/>
-                </a:solidFill>
-                <a:latin typeface="Cambria" pitchFamily="34" charset="0"/>
-                <a:ea typeface="Cambria" pitchFamily="34" charset="-122"/>
-                <a:cs typeface="Cambria" pitchFamily="34" charset="-120"/>
-              </a:rPr>
-              <a:t>4</a:t>
-            </a:r>
-            <a:endParaRPr lang="en-US" sz="1500" dirty="0"/>
-          </a:p>
-        </p:txBody>
-      </p:sp>
-      <p:sp>
-        <p:nvSpPr>
-          <p:cNvPr id="15" name="Text 13"/>
-          <p:cNvSpPr/>
-          <p:nvPr/>
-        </p:nvSpPr>
-        <p:spPr>
-          <a:xfrm>
-            <a:off x="1371600" y="4416552"/>
-            <a:ext cx="10241280" cy="868680"/>
-          </a:xfrm>
-          <a:prstGeom prst="rect">
-            <a:avLst/>
-          </a:prstGeom>
-          <a:noFill/>
-          <a:ln/>
-        </p:spPr>
-        <p:txBody>
-          <a:bodyPr wrap="square" lIns="0" tIns="0" rIns="0" bIns="0" rtlCol="0" anchor="ctr"/>
-          <a:lstStyle/>
-          <a:p>
-            <a:pPr indent="0" marL="0">
-              <a:buNone/>
-            </a:pPr>
-            <a:r>
-              <a:rPr lang="en-US" sz="1400" b="1" dirty="0">
-                <a:solidFill>
-                  <a:srgbClr val="2A1618"/>
-                </a:solidFill>
-                <a:latin typeface="Calibri" pitchFamily="34" charset="0"/>
-                <a:ea typeface="Calibri" pitchFamily="34" charset="-122"/>
-                <a:cs typeface="Calibri" pitchFamily="34" charset="-120"/>
-              </a:rPr>
-              <a:t>Takes and sessions are not new positions:  </a:t>
-            </a:r>
-            <a:pPr indent="0" marL="0">
-              <a:buNone/>
-            </a:pPr>
-            <a:r>
-              <a:rPr lang="en-US" sz="1400" dirty="0">
-                <a:solidFill>
-                  <a:srgbClr val="836A68"/>
-                </a:solidFill>
-                <a:latin typeface="Calibri" pitchFamily="34" charset="0"/>
-                <a:ea typeface="Calibri" pitchFamily="34" charset="-122"/>
-                <a:cs typeface="Calibri" pitchFamily="34" charset="-120"/>
-              </a:rPr>
-              <a:t>16 takes x 3 sessions add robustness (great for LOSO) but no new tumor locations (no help for interpolation).</a:t>
-            </a:r>
-            <a:endParaRPr lang="en-US" sz="1400" dirty="0"/>
-          </a:p>
-        </p:txBody>
-      </p:sp>
-      <p:sp>
-        <p:nvSpPr>
-          <p:cNvPr id="16" name="Shape 14"/>
-          <p:cNvSpPr/>
-          <p:nvPr/>
-        </p:nvSpPr>
-        <p:spPr>
-          <a:xfrm>
-            <a:off x="822960" y="5477256"/>
-            <a:ext cx="384048" cy="384048"/>
-          </a:xfrm>
-          <a:prstGeom prst="ellipse">
-            <a:avLst/>
-          </a:prstGeom>
-          <a:solidFill>
-            <a:srgbClr val="BE0000"/>
-          </a:solidFill>
-          <a:ln/>
-        </p:spPr>
-      </p:sp>
-      <p:sp>
-        <p:nvSpPr>
-          <p:cNvPr id="17" name="Text 15"/>
-          <p:cNvSpPr/>
-          <p:nvPr/>
-        </p:nvSpPr>
-        <p:spPr>
-          <a:xfrm>
-            <a:off x="822960" y="5477256"/>
-            <a:ext cx="384048" cy="384048"/>
-          </a:xfrm>
-          <a:prstGeom prst="rect">
-            <a:avLst/>
-          </a:prstGeom>
-          <a:noFill/>
-          <a:ln/>
-        </p:spPr>
-        <p:txBody>
-          <a:bodyPr wrap="square" lIns="0" tIns="0" rIns="0" bIns="0" rtlCol="0" anchor="ctr"/>
-          <a:lstStyle/>
-          <a:p>
-            <a:pPr algn="ctr" indent="0" marL="0">
-              <a:buNone/>
-            </a:pPr>
-            <a:r>
-              <a:rPr lang="en-US" sz="1500" b="1" dirty="0">
-                <a:solidFill>
-                  <a:srgbClr val="FFFFFF"/>
-                </a:solidFill>
-                <a:latin typeface="Cambria" pitchFamily="34" charset="0"/>
-                <a:ea typeface="Cambria" pitchFamily="34" charset="-122"/>
-                <a:cs typeface="Cambria" pitchFamily="34" charset="-120"/>
-              </a:rPr>
-              <a:t>5</a:t>
-            </a:r>
-            <a:endParaRPr lang="en-US" sz="1500" dirty="0"/>
-          </a:p>
-        </p:txBody>
-      </p:sp>
-      <p:sp>
-        <p:nvSpPr>
-          <p:cNvPr id="18" name="Text 16"/>
-          <p:cNvSpPr/>
-          <p:nvPr/>
-        </p:nvSpPr>
-        <p:spPr>
-          <a:xfrm>
-            <a:off x="1371600" y="5385816"/>
-            <a:ext cx="10241280" cy="868680"/>
-          </a:xfrm>
-          <a:prstGeom prst="rect">
-            <a:avLst/>
-          </a:prstGeom>
-          <a:noFill/>
-          <a:ln/>
-        </p:spPr>
-        <p:txBody>
-          <a:bodyPr wrap="square" lIns="0" tIns="0" rIns="0" bIns="0" rtlCol="0" anchor="ctr"/>
-          <a:lstStyle/>
-          <a:p>
-            <a:pPr indent="0" marL="0">
-              <a:buNone/>
-            </a:pPr>
-            <a:r>
-              <a:rPr lang="en-US" sz="1400" b="1" dirty="0">
-                <a:solidFill>
-                  <a:srgbClr val="2A1618"/>
-                </a:solidFill>
-                <a:latin typeface="Calibri" pitchFamily="34" charset="0"/>
-                <a:ea typeface="Calibri" pitchFamily="34" charset="-122"/>
-                <a:cs typeface="Calibri" pitchFamily="34" charset="-120"/>
-              </a:rPr>
-              <a:t>A sim to measured transfer is learnable:  </a:t>
-            </a:r>
-            <a:pPr indent="0" marL="0">
-              <a:buNone/>
-            </a:pPr>
-            <a:r>
-              <a:rPr lang="en-US" sz="1400" dirty="0">
-                <a:solidFill>
-                  <a:srgbClr val="836A68"/>
-                </a:solidFill>
-                <a:latin typeface="Calibri" pitchFamily="34" charset="0"/>
-                <a:ea typeface="Calibri" pitchFamily="34" charset="-122"/>
-                <a:cs typeface="Calibri" pitchFamily="34" charset="-120"/>
-              </a:rPr>
-              <a:t>a linear map already reaches R2 = 0.65 on unseen frequencies, a promising if preliminary calibration path.</a:t>
-            </a:r>
-            <a:endParaRPr lang="en-US" sz="1400" dirty="0"/>
-          </a:p>
-        </p:txBody>
-      </p:sp>
-      <p:sp>
-        <p:nvSpPr>
-          <p:cNvPr id="19" name="Text 17"/>
-          <p:cNvSpPr/>
-          <p:nvPr/>
-        </p:nvSpPr>
-        <p:spPr>
-          <a:xfrm>
-            <a:off x="822960" y="6400800"/>
-            <a:ext cx="10515600" cy="320040"/>
-          </a:xfrm>
-          <a:prstGeom prst="rect">
-            <a:avLst/>
-          </a:prstGeom>
-          <a:noFill/>
-          <a:ln/>
-        </p:spPr>
-        <p:txBody>
-          <a:bodyPr wrap="square" lIns="0" tIns="0" rIns="0" bIns="0" rtlCol="0" anchor="ctr"/>
-          <a:lstStyle/>
-          <a:p>
-            <a:pPr indent="0" marL="0">
-              <a:buNone/>
-            </a:pPr>
-            <a:r>
-              <a:rPr lang="en-US" sz="1100" dirty="0">
-                <a:solidFill>
-                  <a:srgbClr val="BE0000"/>
-                </a:solidFill>
-                <a:latin typeface="Calibri" pitchFamily="34" charset="0"/>
-                <a:ea typeface="Calibri" pitchFamily="34" charset="-122"/>
-                <a:cs typeface="Calibri" pitchFamily="34" charset="-120"/>
-              </a:rPr>
-              <a:t>github.com/pmart1534/microwave-phantom-localization-cnn-mlp</a:t>
-            </a:r>
-            <a:endParaRPr lang="en-US" sz="1100" dirty="0"/>
           </a:p>
         </p:txBody>
       </p:sp>

--- a/regression_deck/Deck3_Sim_vs_Measured.pptx
+++ b/regression_deck/Deck3_Sim_vs_Measured.pptx
@@ -16,9 +16,10 @@
     <p:sldId id="264" r:id="rId10"/>
     <p:sldId id="265" r:id="rId11"/>
     <p:sldId id="266" r:id="rId12"/>
+    <p:sldId id="267" r:id="rId13"/>
   </p:sldIdLst>
   <p:notesMasterIdLst>
-    <p:notesMasterId r:id="rId13"/>
+    <p:notesMasterId r:id="rId14"/>
   </p:notesMasterIdLst>
   <p:sldSz cx="12188952" cy="6858000"/>
   <p:notesSz cx="6858000" cy="12188952"/>
@@ -712,6 +713,94 @@
             <a:fld id="{F7021451-1387-4CA6-816F-3879F97B5CBC}" type="slidenum">
               <a:rPr lang="en-US"/>
               <a:t>11</a:t>
+            </a:fld>
+            <a:endParaRPr lang="en-US"/>
+          </a:p>
+        </p:txBody>
+      </p:sp>
+    </p:spTree>
+    <p:extLst>
+      <p:ext uri="{BB962C8B-B14F-4D97-AF65-F5344CB8AC3E}">
+        <p14:creationId xmlns:p14="http://schemas.microsoft.com/office/powerpoint/2010/main" val="1024086991"/>
+      </p:ext>
+    </p:extLst>
+  </p:cSld>
+  <p:clrMapOvr>
+    <a:masterClrMapping/>
+  </p:clrMapOvr>
+</p:notes>
+</file>
+
+<file path=ppt/notesSlides/notesSlide12.xml><?xml version="1.0" encoding="utf-8"?>
+<p:notes xmlns:a="http://schemas.openxmlformats.org/drawingml/2006/main" xmlns:r="http://schemas.openxmlformats.org/officeDocument/2006/relationships" xmlns:p="http://schemas.openxmlformats.org/presentationml/2006/main">
+  <p:cSld>
+    <p:spTree>
+      <p:nvGrpSpPr>
+        <p:cNvPr id="1" name=""/>
+        <p:cNvGrpSpPr/>
+        <p:nvPr/>
+      </p:nvGrpSpPr>
+      <p:grpSpPr>
+        <a:xfrm>
+          <a:off x="0" y="0"/>
+          <a:ext cx="0" cy="0"/>
+          <a:chOff x="0" y="0"/>
+          <a:chExt cx="0" cy="0"/>
+        </a:xfrm>
+      </p:grpSpPr>
+      <p:sp>
+        <p:nvSpPr>
+          <p:cNvPr id="2" name="Slide Image Placeholder 1"/>
+          <p:cNvSpPr>
+            <a:spLocks noGrp="1" noRot="1" noChangeAspect="1"/>
+          </p:cNvSpPr>
+          <p:nvPr>
+            <p:ph type="sldImg"/>
+          </p:nvPr>
+        </p:nvSpPr>
+        <p:spPr/>
+      </p:sp>
+      <p:sp>
+        <p:nvSpPr>
+          <p:cNvPr id="3" name="Notes Placeholder 2"/>
+          <p:cNvSpPr>
+            <a:spLocks noGrp="1"/>
+          </p:cNvSpPr>
+          <p:nvPr>
+            <p:ph type="body" idx="1"/>
+          </p:nvPr>
+        </p:nvSpPr>
+        <p:spPr/>
+        <p:txBody>
+          <a:bodyPr/>
+          <a:lstStyle/>
+          <a:p>
+            <a:r>
+              <a:rPr lang="en-US" dirty="0"/>
+              <a:t/>
+            </a:r>
+            <a:endParaRPr lang="en-US" dirty="0"/>
+          </a:p>
+        </p:txBody>
+      </p:sp>
+      <p:sp>
+        <p:nvSpPr>
+          <p:cNvPr id="4" name="Slide Number Placeholder 3"/>
+          <p:cNvSpPr>
+            <a:spLocks noGrp="1"/>
+          </p:cNvSpPr>
+          <p:nvPr>
+            <p:ph type="sldNum" sz="quarter" idx="10"/>
+          </p:nvPr>
+        </p:nvSpPr>
+        <p:spPr/>
+        <p:txBody>
+          <a:bodyPr/>
+          <a:lstStyle/>
+          <a:p>
+            <a:fld id="{F7021451-1387-4CA6-816F-3879F97B5CBC}" type="slidenum">
+              <a:rPr lang="en-US"/>
+              <a:t>12</a:t>
             </a:fld>
             <a:endParaRPr lang="en-US"/>
           </a:p>
@@ -2221,6 +2310,337 @@
                 <a:ea typeface="Cambria" pitchFamily="34" charset="-122"/>
                 <a:cs typeface="Cambria" pitchFamily="34" charset="-120"/>
               </a:rPr>
+              <a:t>Can a model bridge the gap? (exploratory)</a:t>
+            </a:r>
+            <a:endParaRPr lang="en-US" sz="2900" dirty="0"/>
+          </a:p>
+        </p:txBody>
+      </p:sp>
+      <p:sp>
+        <p:nvSpPr>
+          <p:cNvPr id="3" name="Text 1"/>
+          <p:cNvSpPr/>
+          <p:nvPr/>
+        </p:nvSpPr>
+        <p:spPr>
+          <a:xfrm>
+            <a:off x="548640" y="1033272"/>
+            <a:ext cx="11091672" cy="365760"/>
+          </a:xfrm>
+          <a:prstGeom prst="rect">
+            <a:avLst/>
+          </a:prstGeom>
+          <a:noFill/>
+          <a:ln/>
+        </p:spPr>
+        <p:txBody>
+          <a:bodyPr wrap="square" lIns="0" tIns="0" rIns="0" bIns="0" rtlCol="0" anchor="ctr"/>
+          <a:lstStyle/>
+          <a:p>
+            <a:pPr indent="0" marL="0">
+              <a:buNone/>
+            </a:pPr>
+            <a:r>
+              <a:rPr lang="en-US" sz="1400" b="1" dirty="0">
+                <a:solidFill>
+                  <a:srgbClr val="BE0000"/>
+                </a:solidFill>
+                <a:latin typeface="Calibri" pitchFamily="34" charset="0"/>
+                <a:ea typeface="Calibri" pitchFamily="34" charset="-122"/>
+                <a:cs typeface="Calibri" pitchFamily="34" charset="-120"/>
+              </a:rPr>
+              <a:t>Learn a sim to measured map on the empty baseline, test on unseen frequencies</a:t>
+            </a:r>
+            <a:endParaRPr lang="en-US" sz="1400" dirty="0"/>
+          </a:p>
+        </p:txBody>
+      </p:sp>
+      <p:pic>
+        <p:nvPicPr>
+          <p:cNvPr id="4" name="Image 0" descr="sim_meas_correlation.png">    </p:cNvPr>
+          <p:cNvPicPr>
+            <a:picLocks noChangeAspect="1"/>
+          </p:cNvPicPr>
+          <p:nvPr/>
+        </p:nvPicPr>
+        <p:blipFill>
+          <a:blip r:embed="rId1"/>
+          <a:stretch>
+            <a:fillRect/>
+          </a:stretch>
+        </p:blipFill>
+        <p:spPr>
+          <a:xfrm>
+            <a:off x="457200" y="1737360"/>
+            <a:ext cx="7772400" cy="3154680"/>
+          </a:xfrm>
+          <a:prstGeom prst="rect">
+            <a:avLst/>
+          </a:prstGeom>
+        </p:spPr>
+      </p:pic>
+      <p:sp>
+        <p:nvSpPr>
+          <p:cNvPr id="5" name="Shape 2"/>
+          <p:cNvSpPr/>
+          <p:nvPr/>
+        </p:nvSpPr>
+        <p:spPr>
+          <a:xfrm>
+            <a:off x="8412480" y="1645920"/>
+            <a:ext cx="3246120" cy="3749040"/>
+          </a:xfrm>
+          <a:prstGeom prst="roundRect">
+            <a:avLst>
+              <a:gd name="adj" fmla="val 2535"/>
+            </a:avLst>
+          </a:prstGeom>
+          <a:solidFill>
+            <a:srgbClr val="FBF4F2"/>
+          </a:solidFill>
+          <a:ln w="12700">
+            <a:solidFill>
+              <a:srgbClr val="E7D6D1"/>
+            </a:solidFill>
+            <a:prstDash val="solid"/>
+          </a:ln>
+          <a:effectLst>
+            <a:outerShdw sx="100000" sy="100000" kx="0" ky="0" algn="bl" rotWithShape="0" blurRad="88900" dist="38100" dir="5400000">
+              <a:srgbClr val="7A5C5E">
+                <a:alpha val="18000"/>
+              </a:srgbClr>
+            </a:outerShdw>
+          </a:effectLst>
+        </p:spPr>
+      </p:sp>
+      <p:sp>
+        <p:nvSpPr>
+          <p:cNvPr id="6" name="Text 3"/>
+          <p:cNvSpPr/>
+          <p:nvPr/>
+        </p:nvSpPr>
+        <p:spPr>
+          <a:xfrm>
+            <a:off x="8595360" y="1801368"/>
+            <a:ext cx="2926080" cy="365760"/>
+          </a:xfrm>
+          <a:prstGeom prst="rect">
+            <a:avLst/>
+          </a:prstGeom>
+          <a:noFill/>
+          <a:ln/>
+        </p:spPr>
+        <p:txBody>
+          <a:bodyPr wrap="square" lIns="0" tIns="0" rIns="0" bIns="0" rtlCol="0" anchor="ctr"/>
+          <a:lstStyle/>
+          <a:p>
+            <a:pPr indent="0" marL="0">
+              <a:buNone/>
+            </a:pPr>
+            <a:r>
+              <a:rPr lang="en-US" sz="1500" b="1" dirty="0">
+                <a:solidFill>
+                  <a:srgbClr val="BE0000"/>
+                </a:solidFill>
+                <a:latin typeface="Cambria" pitchFamily="34" charset="0"/>
+                <a:ea typeface="Cambria" pitchFamily="34" charset="-122"/>
+                <a:cs typeface="Cambria" pitchFamily="34" charset="-120"/>
+              </a:rPr>
+              <a:t>How to read it</a:t>
+            </a:r>
+            <a:endParaRPr lang="en-US" sz="1500" dirty="0"/>
+          </a:p>
+        </p:txBody>
+      </p:sp>
+      <p:sp>
+        <p:nvSpPr>
+          <p:cNvPr id="7" name="Text 4"/>
+          <p:cNvSpPr/>
+          <p:nvPr/>
+        </p:nvSpPr>
+        <p:spPr>
+          <a:xfrm>
+            <a:off x="8595360" y="2212848"/>
+            <a:ext cx="2971800" cy="3108960"/>
+          </a:xfrm>
+          <a:prstGeom prst="rect">
+            <a:avLst/>
+          </a:prstGeom>
+          <a:noFill/>
+          <a:ln/>
+        </p:spPr>
+        <p:txBody>
+          <a:bodyPr wrap="square" lIns="0" tIns="0" rIns="0" bIns="0" rtlCol="0" anchor="t"/>
+          <a:lstStyle/>
+          <a:p>
+            <a:pPr marL="342900" indent="-342900">
+              <a:spcAft>
+                <a:spcPts val="800"/>
+              </a:spcAft>
+              <a:buSzPct val="100000"/>
+              <a:buChar char="•"/>
+            </a:pPr>
+            <a:r>
+              <a:rPr lang="en-US" sz="1050" dirty="0">
+                <a:solidFill>
+                  <a:srgbClr val="2A1618"/>
+                </a:solidFill>
+                <a:latin typeface="Calibri" pitchFamily="34" charset="0"/>
+                <a:ea typeface="Calibri" pitchFamily="34" charset="-122"/>
+                <a:cs typeface="Calibri" pitchFamily="34" charset="-120"/>
+              </a:rPr>
+              <a:t>Left: for one port, the dashed line is the simulated S11 after the learned map. A perfect map would land on the measured (red) curve; it moves toward it but does not fully match.</a:t>
+            </a:r>
+            <a:endParaRPr lang="en-US" sz="1050" dirty="0"/>
+          </a:p>
+          <a:p>
+            <a:pPr marL="342900" indent="-342900">
+              <a:spcAft>
+                <a:spcPts val="800"/>
+              </a:spcAft>
+              <a:buSzPct val="100000"/>
+              <a:buChar char="•"/>
+            </a:pPr>
+            <a:r>
+              <a:rPr lang="en-US" sz="1050" dirty="0">
+                <a:solidFill>
+                  <a:srgbClr val="2A1618"/>
+                </a:solidFill>
+                <a:latin typeface="Calibri" pitchFamily="34" charset="0"/>
+                <a:ea typeface="Calibri" pitchFamily="34" charset="-122"/>
+                <a:cs typeface="Calibri" pitchFamily="34" charset="-120"/>
+              </a:rPr>
+              <a:t>Right: predicted vs measured on held-out frequencies. Points on the diagonal are exact; R2 = 0.65 means the linear map captures most, not all, of the relationship.</a:t>
+            </a:r>
+            <a:endParaRPr lang="en-US" sz="1050" dirty="0"/>
+          </a:p>
+          <a:p>
+            <a:pPr marL="342900" indent="-342900">
+              <a:spcAft>
+                <a:spcPts val="800"/>
+              </a:spcAft>
+              <a:buSzPct val="100000"/>
+              <a:buChar char="•"/>
+            </a:pPr>
+            <a:r>
+              <a:rPr lang="en-US" sz="1050" dirty="0">
+                <a:solidFill>
+                  <a:srgbClr val="2A1618"/>
+                </a:solidFill>
+                <a:latin typeface="Calibri" pitchFamily="34" charset="0"/>
+                <a:ea typeface="Calibri" pitchFamily="34" charset="-122"/>
+                <a:cs typeface="Calibri" pitchFamily="34" charset="-120"/>
+              </a:rPr>
+              <a:t>A flexible MLP overfits the single paired baseline (R2 &lt; 0).</a:t>
+            </a:r>
+            <a:endParaRPr lang="en-US" sz="1050" dirty="0"/>
+          </a:p>
+        </p:txBody>
+      </p:sp>
+      <p:sp>
+        <p:nvSpPr>
+          <p:cNvPr id="8" name="Text 5"/>
+          <p:cNvSpPr/>
+          <p:nvPr/>
+        </p:nvSpPr>
+        <p:spPr>
+          <a:xfrm>
+            <a:off x="548640" y="6035040"/>
+            <a:ext cx="11091672" cy="548640"/>
+          </a:xfrm>
+          <a:prstGeom prst="rect">
+            <a:avLst/>
+          </a:prstGeom>
+          <a:noFill/>
+          <a:ln/>
+        </p:spPr>
+        <p:txBody>
+          <a:bodyPr wrap="square" lIns="0" tIns="0" rIns="0" bIns="0" rtlCol="0" anchor="ctr"/>
+          <a:lstStyle/>
+          <a:p>
+            <a:pPr algn="ctr" indent="0" marL="0">
+              <a:buNone/>
+            </a:pPr>
+            <a:r>
+              <a:rPr lang="en-US" sz="1250" i="1" dirty="0">
+                <a:solidFill>
+                  <a:srgbClr val="836A68"/>
+                </a:solidFill>
+                <a:latin typeface="Calibri" pitchFamily="34" charset="0"/>
+                <a:ea typeface="Calibri" pitchFamily="34" charset="-122"/>
+                <a:cs typeface="Calibri" pitchFamily="34" charset="-120"/>
+              </a:rPr>
+              <a:t>Preliminary: only the empty baseline is cleanly paired. Nonlinear domain adaptation (and any use for calibrating sim toward the bench) needs far more paired data: multiple sessions and, ideally, matched tumor positions.</a:t>
+            </a:r>
+            <a:endParaRPr lang="en-US" sz="1250" dirty="0"/>
+          </a:p>
+        </p:txBody>
+      </p:sp>
+    </p:spTree>
+  </p:cSld>
+  <p:clrMapOvr>
+    <a:masterClrMapping/>
+  </p:clrMapOvr>
+</p:sld>
+</file>
+
+<file path=ppt/slides/slide11.xml><?xml version="1.0" encoding="utf-8"?>
+<p:sld xmlns:a="http://schemas.openxmlformats.org/drawingml/2006/main" xmlns:r="http://schemas.openxmlformats.org/officeDocument/2006/relationships" xmlns:p="http://schemas.openxmlformats.org/presentationml/2006/main">
+  <p:cSld name="Slide 11">
+    <p:bg>
+      <p:bgPr>
+        <a:solidFill>
+          <a:srgbClr val="FFFFFF"/>
+        </a:solidFill>
+      </p:bgPr>
+    </p:bg>
+    <p:spTree>
+      <p:nvGrpSpPr>
+        <p:cNvPr id="1" name=""/>
+        <p:cNvGrpSpPr/>
+        <p:nvPr/>
+      </p:nvGrpSpPr>
+      <p:grpSpPr>
+        <a:xfrm>
+          <a:off x="0" y="0"/>
+          <a:ext cx="0" cy="0"/>
+          <a:chOff x="0" y="0"/>
+          <a:chExt cx="0" cy="0"/>
+        </a:xfrm>
+      </p:grpSpPr>
+      <p:sp>
+        <p:nvSpPr>
+          <p:cNvPr id="2" name="Text 0"/>
+          <p:cNvSpPr/>
+          <p:nvPr/>
+        </p:nvSpPr>
+        <p:spPr>
+          <a:xfrm>
+            <a:off x="548640" y="384048"/>
+            <a:ext cx="11091672" cy="640080"/>
+          </a:xfrm>
+          <a:prstGeom prst="rect">
+            <a:avLst/>
+          </a:prstGeom>
+          <a:noFill/>
+          <a:ln/>
+        </p:spPr>
+        <p:txBody>
+          <a:bodyPr wrap="square" lIns="0" tIns="0" rIns="0" bIns="0" rtlCol="0" anchor="ctr"/>
+          <a:lstStyle/>
+          <a:p>
+            <a:pPr indent="0" marL="0">
+              <a:buNone/>
+            </a:pPr>
+            <a:r>
+              <a:rPr lang="en-US" sz="2900" b="1" dirty="0">
+                <a:solidFill>
+                  <a:srgbClr val="2A1618"/>
+                </a:solidFill>
+                <a:latin typeface="Cambria" pitchFamily="34" charset="0"/>
+                <a:ea typeface="Cambria" pitchFamily="34" charset="-122"/>
+                <a:cs typeface="Cambria" pitchFamily="34" charset="-120"/>
+              </a:rPr>
               <a:t>Beet (dielectric) vs metal tumor, sim and measured</a:t>
             </a:r>
             <a:endParaRPr lang="en-US" sz="2900" dirty="0"/>
@@ -2298,9 +2718,9 @@
 </p:sld>
 </file>
 
-<file path=ppt/slides/slide11.xml><?xml version="1.0" encoding="utf-8"?>
+<file path=ppt/slides/slide12.xml><?xml version="1.0" encoding="utf-8"?>
 <p:sld xmlns:a="http://schemas.openxmlformats.org/drawingml/2006/main" xmlns:r="http://schemas.openxmlformats.org/officeDocument/2006/relationships" xmlns:p="http://schemas.openxmlformats.org/presentationml/2006/main">
-  <p:cSld name="Slide 11">
+  <p:cSld name="Slide 12">
     <p:bg>
       <p:bgPr>
         <a:solidFill>
@@ -5362,7 +5782,7 @@
                 <a:ea typeface="Cambria" pitchFamily="34" charset="-122"/>
                 <a:cs typeface="Cambria" pitchFamily="34" charset="-120"/>
               </a:rPr>
-              <a:t>Detectable difference by S-parameter</a:t>
+              <a:t>Detectable difference by reflection S-parameter</a:t>
             </a:r>
             <a:endParaRPr lang="en-US" sz="2900" dirty="0"/>
           </a:p>
@@ -5401,7 +5821,7 @@
                 <a:ea typeface="Calibri" pitchFamily="34" charset="-122"/>
                 <a:cs typeface="Calibri" pitchFamily="34" charset="-120"/>
               </a:rPr>
-              <a:t>Each reflection Sii localizes near an antenna, in measured (top) and simulated (bottom)</a:t>
+              <a:t>Each reflection Sii localizes on its antenna, in measured (top) and simulated (bottom)</a:t>
             </a:r>
             <a:endParaRPr lang="en-US" sz="1400" dirty="0"/>
           </a:p>
@@ -5496,6 +5916,140 @@
                 <a:ea typeface="Cambria" pitchFamily="34" charset="-122"/>
                 <a:cs typeface="Cambria" pitchFamily="34" charset="-120"/>
               </a:rPr>
+              <a:t>Detectable difference by transmission S-parameter</a:t>
+            </a:r>
+            <a:endParaRPr lang="en-US" sz="2900" dirty="0"/>
+          </a:p>
+        </p:txBody>
+      </p:sp>
+      <p:sp>
+        <p:nvSpPr>
+          <p:cNvPr id="3" name="Text 1"/>
+          <p:cNvSpPr/>
+          <p:nvPr/>
+        </p:nvSpPr>
+        <p:spPr>
+          <a:xfrm>
+            <a:off x="548640" y="1033272"/>
+            <a:ext cx="11091672" cy="365760"/>
+          </a:xfrm>
+          <a:prstGeom prst="rect">
+            <a:avLst/>
+          </a:prstGeom>
+          <a:noFill/>
+          <a:ln/>
+        </p:spPr>
+        <p:txBody>
+          <a:bodyPr wrap="square" lIns="0" tIns="0" rIns="0" bIns="0" rtlCol="0" anchor="ctr"/>
+          <a:lstStyle/>
+          <a:p>
+            <a:pPr indent="0" marL="0">
+              <a:buNone/>
+            </a:pPr>
+            <a:r>
+              <a:rPr lang="en-US" sz="1400" b="1" dirty="0">
+                <a:solidFill>
+                  <a:srgbClr val="BE0000"/>
+                </a:solidFill>
+                <a:latin typeface="Calibri" pitchFamily="34" charset="0"/>
+                <a:ea typeface="Calibri" pitchFamily="34" charset="-122"/>
+                <a:cs typeface="Calibri" pitchFamily="34" charset="-120"/>
+              </a:rPr>
+              <a:t>Each coupling Sij peaks between its two antennas (sim remapped to physical numbering)</a:t>
+            </a:r>
+            <a:endParaRPr lang="en-US" sz="1400" dirty="0"/>
+          </a:p>
+        </p:txBody>
+      </p:sp>
+      <p:pic>
+        <p:nvPicPr>
+          <p:cNvPr id="4" name="Image 0" descr="dd_per_sparam_trans.png">    </p:cNvPr>
+          <p:cNvPicPr>
+            <a:picLocks noChangeAspect="1"/>
+          </p:cNvPicPr>
+          <p:nvPr/>
+        </p:nvPicPr>
+        <p:blipFill>
+          <a:blip r:embed="rId1"/>
+          <a:stretch>
+            <a:fillRect/>
+          </a:stretch>
+        </p:blipFill>
+        <p:spPr>
+          <a:xfrm>
+            <a:off x="274320" y="1417320"/>
+            <a:ext cx="11612880" cy="5074920"/>
+          </a:xfrm>
+          <a:prstGeom prst="rect">
+            <a:avLst/>
+          </a:prstGeom>
+        </p:spPr>
+      </p:pic>
+    </p:spTree>
+  </p:cSld>
+  <p:clrMapOvr>
+    <a:masterClrMapping/>
+  </p:clrMapOvr>
+</p:sld>
+</file>
+
+<file path=ppt/slides/slide9.xml><?xml version="1.0" encoding="utf-8"?>
+<p:sld xmlns:a="http://schemas.openxmlformats.org/drawingml/2006/main" xmlns:r="http://schemas.openxmlformats.org/officeDocument/2006/relationships" xmlns:p="http://schemas.openxmlformats.org/presentationml/2006/main">
+  <p:cSld name="Slide 9">
+    <p:bg>
+      <p:bgPr>
+        <a:solidFill>
+          <a:srgbClr val="FFFFFF"/>
+        </a:solidFill>
+      </p:bgPr>
+    </p:bg>
+    <p:spTree>
+      <p:nvGrpSpPr>
+        <p:cNvPr id="1" name=""/>
+        <p:cNvGrpSpPr/>
+        <p:nvPr/>
+      </p:nvGrpSpPr>
+      <p:grpSpPr>
+        <a:xfrm>
+          <a:off x="0" y="0"/>
+          <a:ext cx="0" cy="0"/>
+          <a:chOff x="0" y="0"/>
+          <a:chExt cx="0" cy="0"/>
+        </a:xfrm>
+      </p:grpSpPr>
+      <p:sp>
+        <p:nvSpPr>
+          <p:cNvPr id="2" name="Text 0"/>
+          <p:cNvSpPr/>
+          <p:nvPr/>
+        </p:nvSpPr>
+        <p:spPr>
+          <a:xfrm>
+            <a:off x="548640" y="384048"/>
+            <a:ext cx="11091672" cy="640080"/>
+          </a:xfrm>
+          <a:prstGeom prst="rect">
+            <a:avLst/>
+          </a:prstGeom>
+          <a:noFill/>
+          <a:ln/>
+        </p:spPr>
+        <p:txBody>
+          <a:bodyPr wrap="square" lIns="0" tIns="0" rIns="0" bIns="0" rtlCol="0" anchor="ctr"/>
+          <a:lstStyle/>
+          <a:p>
+            <a:pPr indent="0" marL="0">
+              <a:buNone/>
+            </a:pPr>
+            <a:r>
+              <a:rPr lang="en-US" sz="2900" b="1" dirty="0">
+                <a:solidFill>
+                  <a:srgbClr val="2A1618"/>
+                </a:solidFill>
+                <a:latin typeface="Cambria" pitchFamily="34" charset="0"/>
+                <a:ea typeface="Cambria" pitchFamily="34" charset="-122"/>
+                <a:cs typeface="Cambria" pitchFamily="34" charset="-120"/>
+              </a:rPr>
               <a:t>The numbers, signal vs. model</a:t>
             </a:r>
             <a:endParaRPr lang="en-US" sz="2900" dirty="0"/>
@@ -5543,7 +6097,7 @@
       </p:sp>
       <p:graphicFrame>
         <p:nvGraphicFramePr>
-          <p:cNvPr id="9" name="Table 0"/>
+          <p:cNvPr id="10" name="Table 0"/>
           <p:cNvGraphicFramePr>
             <a:graphicFrameLocks noGrp="1"/>
           </p:cNvGraphicFramePr>
@@ -6908,337 +7462,6 @@
               <a:t>The sim vs measured CNN gap is distinct-position COVERAGE, not fidelity. To match 3.9 mm on the bench: denser grid / more depths, not a better model.</a:t>
             </a:r>
             <a:endParaRPr lang="en-US" sz="1150" dirty="0"/>
-          </a:p>
-        </p:txBody>
-      </p:sp>
-    </p:spTree>
-  </p:cSld>
-  <p:clrMapOvr>
-    <a:masterClrMapping/>
-  </p:clrMapOvr>
-</p:sld>
-</file>
-
-<file path=ppt/slides/slide9.xml><?xml version="1.0" encoding="utf-8"?>
-<p:sld xmlns:a="http://schemas.openxmlformats.org/drawingml/2006/main" xmlns:r="http://schemas.openxmlformats.org/officeDocument/2006/relationships" xmlns:p="http://schemas.openxmlformats.org/presentationml/2006/main">
-  <p:cSld name="Slide 9">
-    <p:bg>
-      <p:bgPr>
-        <a:solidFill>
-          <a:srgbClr val="FFFFFF"/>
-        </a:solidFill>
-      </p:bgPr>
-    </p:bg>
-    <p:spTree>
-      <p:nvGrpSpPr>
-        <p:cNvPr id="1" name=""/>
-        <p:cNvGrpSpPr/>
-        <p:nvPr/>
-      </p:nvGrpSpPr>
-      <p:grpSpPr>
-        <a:xfrm>
-          <a:off x="0" y="0"/>
-          <a:ext cx="0" cy="0"/>
-          <a:chOff x="0" y="0"/>
-          <a:chExt cx="0" cy="0"/>
-        </a:xfrm>
-      </p:grpSpPr>
-      <p:sp>
-        <p:nvSpPr>
-          <p:cNvPr id="2" name="Text 0"/>
-          <p:cNvSpPr/>
-          <p:nvPr/>
-        </p:nvSpPr>
-        <p:spPr>
-          <a:xfrm>
-            <a:off x="548640" y="384048"/>
-            <a:ext cx="11091672" cy="640080"/>
-          </a:xfrm>
-          <a:prstGeom prst="rect">
-            <a:avLst/>
-          </a:prstGeom>
-          <a:noFill/>
-          <a:ln/>
-        </p:spPr>
-        <p:txBody>
-          <a:bodyPr wrap="square" lIns="0" tIns="0" rIns="0" bIns="0" rtlCol="0" anchor="ctr"/>
-          <a:lstStyle/>
-          <a:p>
-            <a:pPr indent="0" marL="0">
-              <a:buNone/>
-            </a:pPr>
-            <a:r>
-              <a:rPr lang="en-US" sz="2900" b="1" dirty="0">
-                <a:solidFill>
-                  <a:srgbClr val="2A1618"/>
-                </a:solidFill>
-                <a:latin typeface="Cambria" pitchFamily="34" charset="0"/>
-                <a:ea typeface="Cambria" pitchFamily="34" charset="-122"/>
-                <a:cs typeface="Cambria" pitchFamily="34" charset="-120"/>
-              </a:rPr>
-              <a:t>Can a model bridge the gap? (exploratory)</a:t>
-            </a:r>
-            <a:endParaRPr lang="en-US" sz="2900" dirty="0"/>
-          </a:p>
-        </p:txBody>
-      </p:sp>
-      <p:sp>
-        <p:nvSpPr>
-          <p:cNvPr id="3" name="Text 1"/>
-          <p:cNvSpPr/>
-          <p:nvPr/>
-        </p:nvSpPr>
-        <p:spPr>
-          <a:xfrm>
-            <a:off x="548640" y="1033272"/>
-            <a:ext cx="11091672" cy="365760"/>
-          </a:xfrm>
-          <a:prstGeom prst="rect">
-            <a:avLst/>
-          </a:prstGeom>
-          <a:noFill/>
-          <a:ln/>
-        </p:spPr>
-        <p:txBody>
-          <a:bodyPr wrap="square" lIns="0" tIns="0" rIns="0" bIns="0" rtlCol="0" anchor="ctr"/>
-          <a:lstStyle/>
-          <a:p>
-            <a:pPr indent="0" marL="0">
-              <a:buNone/>
-            </a:pPr>
-            <a:r>
-              <a:rPr lang="en-US" sz="1400" b="1" dirty="0">
-                <a:solidFill>
-                  <a:srgbClr val="BE0000"/>
-                </a:solidFill>
-                <a:latin typeface="Calibri" pitchFamily="34" charset="0"/>
-                <a:ea typeface="Calibri" pitchFamily="34" charset="-122"/>
-                <a:cs typeface="Calibri" pitchFamily="34" charset="-120"/>
-              </a:rPr>
-              <a:t>Learn a sim to measured map on the empty baseline, test on unseen frequencies</a:t>
-            </a:r>
-            <a:endParaRPr lang="en-US" sz="1400" dirty="0"/>
-          </a:p>
-        </p:txBody>
-      </p:sp>
-      <p:pic>
-        <p:nvPicPr>
-          <p:cNvPr id="4" name="Image 0" descr="sim_meas_correlation.png">    </p:cNvPr>
-          <p:cNvPicPr>
-            <a:picLocks noChangeAspect="1"/>
-          </p:cNvPicPr>
-          <p:nvPr/>
-        </p:nvPicPr>
-        <p:blipFill>
-          <a:blip r:embed="rId1"/>
-          <a:stretch>
-            <a:fillRect/>
-          </a:stretch>
-        </p:blipFill>
-        <p:spPr>
-          <a:xfrm>
-            <a:off x="457200" y="1737360"/>
-            <a:ext cx="7772400" cy="3154680"/>
-          </a:xfrm>
-          <a:prstGeom prst="rect">
-            <a:avLst/>
-          </a:prstGeom>
-        </p:spPr>
-      </p:pic>
-      <p:sp>
-        <p:nvSpPr>
-          <p:cNvPr id="5" name="Shape 2"/>
-          <p:cNvSpPr/>
-          <p:nvPr/>
-        </p:nvSpPr>
-        <p:spPr>
-          <a:xfrm>
-            <a:off x="8412480" y="1645920"/>
-            <a:ext cx="3246120" cy="3749040"/>
-          </a:xfrm>
-          <a:prstGeom prst="roundRect">
-            <a:avLst>
-              <a:gd name="adj" fmla="val 2535"/>
-            </a:avLst>
-          </a:prstGeom>
-          <a:solidFill>
-            <a:srgbClr val="FBF4F2"/>
-          </a:solidFill>
-          <a:ln w="12700">
-            <a:solidFill>
-              <a:srgbClr val="E7D6D1"/>
-            </a:solidFill>
-            <a:prstDash val="solid"/>
-          </a:ln>
-          <a:effectLst>
-            <a:outerShdw sx="100000" sy="100000" kx="0" ky="0" algn="bl" rotWithShape="0" blurRad="88900" dist="38100" dir="5400000">
-              <a:srgbClr val="7A5C5E">
-                <a:alpha val="18000"/>
-              </a:srgbClr>
-            </a:outerShdw>
-          </a:effectLst>
-        </p:spPr>
-      </p:sp>
-      <p:sp>
-        <p:nvSpPr>
-          <p:cNvPr id="6" name="Text 3"/>
-          <p:cNvSpPr/>
-          <p:nvPr/>
-        </p:nvSpPr>
-        <p:spPr>
-          <a:xfrm>
-            <a:off x="8595360" y="1801368"/>
-            <a:ext cx="2926080" cy="365760"/>
-          </a:xfrm>
-          <a:prstGeom prst="rect">
-            <a:avLst/>
-          </a:prstGeom>
-          <a:noFill/>
-          <a:ln/>
-        </p:spPr>
-        <p:txBody>
-          <a:bodyPr wrap="square" lIns="0" tIns="0" rIns="0" bIns="0" rtlCol="0" anchor="ctr"/>
-          <a:lstStyle/>
-          <a:p>
-            <a:pPr indent="0" marL="0">
-              <a:buNone/>
-            </a:pPr>
-            <a:r>
-              <a:rPr lang="en-US" sz="1500" b="1" dirty="0">
-                <a:solidFill>
-                  <a:srgbClr val="BE0000"/>
-                </a:solidFill>
-                <a:latin typeface="Cambria" pitchFamily="34" charset="0"/>
-                <a:ea typeface="Cambria" pitchFamily="34" charset="-122"/>
-                <a:cs typeface="Cambria" pitchFamily="34" charset="-120"/>
-              </a:rPr>
-              <a:t>How to read it</a:t>
-            </a:r>
-            <a:endParaRPr lang="en-US" sz="1500" dirty="0"/>
-          </a:p>
-        </p:txBody>
-      </p:sp>
-      <p:sp>
-        <p:nvSpPr>
-          <p:cNvPr id="7" name="Text 4"/>
-          <p:cNvSpPr/>
-          <p:nvPr/>
-        </p:nvSpPr>
-        <p:spPr>
-          <a:xfrm>
-            <a:off x="8595360" y="2212848"/>
-            <a:ext cx="2971800" cy="3108960"/>
-          </a:xfrm>
-          <a:prstGeom prst="rect">
-            <a:avLst/>
-          </a:prstGeom>
-          <a:noFill/>
-          <a:ln/>
-        </p:spPr>
-        <p:txBody>
-          <a:bodyPr wrap="square" lIns="0" tIns="0" rIns="0" bIns="0" rtlCol="0" anchor="t"/>
-          <a:lstStyle/>
-          <a:p>
-            <a:pPr marL="342900" indent="-342900">
-              <a:spcAft>
-                <a:spcPts val="800"/>
-              </a:spcAft>
-              <a:buSzPct val="100000"/>
-              <a:buChar char="•"/>
-            </a:pPr>
-            <a:r>
-              <a:rPr lang="en-US" sz="1050" dirty="0">
-                <a:solidFill>
-                  <a:srgbClr val="2A1618"/>
-                </a:solidFill>
-                <a:latin typeface="Calibri" pitchFamily="34" charset="0"/>
-                <a:ea typeface="Calibri" pitchFamily="34" charset="-122"/>
-                <a:cs typeface="Calibri" pitchFamily="34" charset="-120"/>
-              </a:rPr>
-              <a:t>Left: for one port, the dashed line is the simulated S11 after the learned map. A perfect map would land on the measured (red) curve; it moves toward it but does not fully match.</a:t>
-            </a:r>
-            <a:endParaRPr lang="en-US" sz="1050" dirty="0"/>
-          </a:p>
-          <a:p>
-            <a:pPr marL="342900" indent="-342900">
-              <a:spcAft>
-                <a:spcPts val="800"/>
-              </a:spcAft>
-              <a:buSzPct val="100000"/>
-              <a:buChar char="•"/>
-            </a:pPr>
-            <a:r>
-              <a:rPr lang="en-US" sz="1050" dirty="0">
-                <a:solidFill>
-                  <a:srgbClr val="2A1618"/>
-                </a:solidFill>
-                <a:latin typeface="Calibri" pitchFamily="34" charset="0"/>
-                <a:ea typeface="Calibri" pitchFamily="34" charset="-122"/>
-                <a:cs typeface="Calibri" pitchFamily="34" charset="-120"/>
-              </a:rPr>
-              <a:t>Right: predicted vs measured on held-out frequencies. Points on the diagonal are exact; R2 = 0.65 means the linear map captures most, not all, of the relationship.</a:t>
-            </a:r>
-            <a:endParaRPr lang="en-US" sz="1050" dirty="0"/>
-          </a:p>
-          <a:p>
-            <a:pPr marL="342900" indent="-342900">
-              <a:spcAft>
-                <a:spcPts val="800"/>
-              </a:spcAft>
-              <a:buSzPct val="100000"/>
-              <a:buChar char="•"/>
-            </a:pPr>
-            <a:r>
-              <a:rPr lang="en-US" sz="1050" dirty="0">
-                <a:solidFill>
-                  <a:srgbClr val="2A1618"/>
-                </a:solidFill>
-                <a:latin typeface="Calibri" pitchFamily="34" charset="0"/>
-                <a:ea typeface="Calibri" pitchFamily="34" charset="-122"/>
-                <a:cs typeface="Calibri" pitchFamily="34" charset="-120"/>
-              </a:rPr>
-              <a:t>A flexible MLP overfits the single paired baseline (R2 &lt; 0).</a:t>
-            </a:r>
-            <a:endParaRPr lang="en-US" sz="1050" dirty="0"/>
-          </a:p>
-        </p:txBody>
-      </p:sp>
-      <p:sp>
-        <p:nvSpPr>
-          <p:cNvPr id="8" name="Text 5"/>
-          <p:cNvSpPr/>
-          <p:nvPr/>
-        </p:nvSpPr>
-        <p:spPr>
-          <a:xfrm>
-            <a:off x="548640" y="6035040"/>
-            <a:ext cx="11091672" cy="548640"/>
-          </a:xfrm>
-          <a:prstGeom prst="rect">
-            <a:avLst/>
-          </a:prstGeom>
-          <a:noFill/>
-          <a:ln/>
-        </p:spPr>
-        <p:txBody>
-          <a:bodyPr wrap="square" lIns="0" tIns="0" rIns="0" bIns="0" rtlCol="0" anchor="ctr"/>
-          <a:lstStyle/>
-          <a:p>
-            <a:pPr algn="ctr" indent="0" marL="0">
-              <a:buNone/>
-            </a:pPr>
-            <a:r>
-              <a:rPr lang="en-US" sz="1250" i="1" dirty="0">
-                <a:solidFill>
-                  <a:srgbClr val="836A68"/>
-                </a:solidFill>
-                <a:latin typeface="Calibri" pitchFamily="34" charset="0"/>
-                <a:ea typeface="Calibri" pitchFamily="34" charset="-122"/>
-                <a:cs typeface="Calibri" pitchFamily="34" charset="-120"/>
-              </a:rPr>
-              <a:t>Preliminary: only the empty baseline is cleanly paired. Nonlinear domain adaptation (and any use for calibrating sim toward the bench) needs far more paired data: multiple sessions and, ideally, matched tumor positions.</a:t>
-            </a:r>
-            <a:endParaRPr lang="en-US" sz="1250" dirty="0"/>
           </a:p>
         </p:txBody>
       </p:sp>

--- a/regression_deck/Deck3_Sim_vs_Measured.pptx
+++ b/regression_deck/Deck3_Sim_vs_Measured.pptx
@@ -2371,7 +2371,7 @@
         </p:blipFill>
         <p:spPr>
           <a:xfrm>
-            <a:off x="457200" y="1737360"/>
+            <a:off x="457200" y="1600200"/>
             <a:ext cx="7772400" cy="3154680"/>
           </a:xfrm>
           <a:prstGeom prst="rect">
@@ -2387,8 +2387,8 @@
         </p:nvSpPr>
         <p:spPr>
           <a:xfrm>
-            <a:off x="8412480" y="1645920"/>
-            <a:ext cx="3246120" cy="3749040"/>
+            <a:off x="8412480" y="1554480"/>
+            <a:ext cx="3246120" cy="3977640"/>
           </a:xfrm>
           <a:prstGeom prst="roundRect">
             <a:avLst>
@@ -2421,7 +2421,7 @@
         </p:nvSpPr>
         <p:spPr>
           <a:xfrm>
-            <a:off x="8595360" y="1801368"/>
+            <a:off x="8595360" y="1691640"/>
             <a:ext cx="2926080" cy="365760"/>
           </a:xfrm>
           <a:prstGeom prst="rect">
@@ -2460,8 +2460,8 @@
         </p:nvSpPr>
         <p:spPr>
           <a:xfrm>
-            <a:off x="8595360" y="2212848"/>
-            <a:ext cx="2971800" cy="3108960"/>
+            <a:off x="8595360" y="2103120"/>
+            <a:ext cx="2971800" cy="3291840"/>
           </a:xfrm>
           <a:prstGeom prst="rect">
             <a:avLst/>
@@ -2539,14 +2539,101 @@
       </p:sp>
       <p:sp>
         <p:nvSpPr>
-          <p:cNvPr id="8" name="Text 5"/>
+          <p:cNvPr id="8" name="Shape 5"/>
           <p:cNvSpPr/>
           <p:nvPr/>
         </p:nvSpPr>
         <p:spPr>
           <a:xfrm>
-            <a:off x="548640" y="6035040"/>
-            <a:ext cx="11091672" cy="548640"/>
+            <a:off x="457200" y="4937760"/>
+            <a:ext cx="7772400" cy="1417320"/>
+          </a:xfrm>
+          <a:prstGeom prst="roundRect">
+            <a:avLst>
+              <a:gd name="adj" fmla="val 5806"/>
+            </a:avLst>
+          </a:prstGeom>
+          <a:solidFill>
+            <a:srgbClr val="FBF4F2"/>
+          </a:solidFill>
+          <a:ln w="12700">
+            <a:solidFill>
+              <a:srgbClr val="E7D6D1"/>
+            </a:solidFill>
+            <a:prstDash val="solid"/>
+          </a:ln>
+          <a:effectLst>
+            <a:outerShdw sx="100000" sy="100000" kx="0" ky="0" algn="bl" rotWithShape="0" blurRad="88900" dist="38100" dir="5400000">
+              <a:srgbClr val="7A5C5E">
+                <a:alpha val="18000"/>
+              </a:srgbClr>
+            </a:outerShdw>
+          </a:effectLst>
+        </p:spPr>
+      </p:sp>
+      <p:sp>
+        <p:nvSpPr>
+          <p:cNvPr id="9" name="Text 6"/>
+          <p:cNvSpPr/>
+          <p:nvPr/>
+        </p:nvSpPr>
+        <p:spPr>
+          <a:xfrm>
+            <a:off x="640080" y="5029200"/>
+            <a:ext cx="7406640" cy="1234440"/>
+          </a:xfrm>
+          <a:prstGeom prst="rect">
+            <a:avLst/>
+          </a:prstGeom>
+          <a:noFill/>
+          <a:ln/>
+        </p:spPr>
+        <p:txBody>
+          <a:bodyPr wrap="square" lIns="0" tIns="0" rIns="0" bIns="0" rtlCol="0" anchor="t"/>
+          <a:lstStyle/>
+          <a:p>
+            <a:pPr indent="0" marL="0">
+              <a:buNone/>
+            </a:pPr>
+            <a:r>
+              <a:rPr lang="en-US" sz="1100" b="1" dirty="0">
+                <a:solidFill>
+                  <a:srgbClr val="BE0000"/>
+                </a:solidFill>
+                <a:latin typeface="Calibri" pitchFamily="34" charset="0"/>
+                <a:ea typeface="Calibri" pitchFamily="34" charset="-122"/>
+                <a:cs typeface="Calibri" pitchFamily="34" charset="-120"/>
+              </a:rPr>
+              <a:t>How the map is built.  </a:t>
+            </a:r>
+            <a:pPr indent="0" marL="0">
+              <a:buNone/>
+            </a:pPr>
+            <a:r>
+              <a:rPr lang="en-US" sz="1100" dirty="0">
+                <a:solidFill>
+                  <a:srgbClr val="2A1618"/>
+                </a:solidFill>
+                <a:latin typeface="Calibri" pitchFamily="34" charset="0"/>
+                <a:ea typeface="Calibri" pitchFamily="34" charset="-122"/>
+                <a:cs typeface="Calibri" pitchFamily="34" charset="-120"/>
+              </a:rPr>
+              <a:t>On the empty baseline, at each frequency f form a 32-D vector x = [Re, Im of the 16 S-parameters]. Fit a ridge (L2) linear regression  y = W x + b  that maps the SIMULATED vector to the MEASURED vector, learning the 32x32 matrix W and offset b. Trained on 70% of frequencies, tested on the held-out 30%. 'Sim after linear map' = W x_sim + b.</a:t>
+            </a:r>
+            <a:endParaRPr lang="en-US" sz="1100" dirty="0"/>
+          </a:p>
+        </p:txBody>
+      </p:sp>
+      <p:sp>
+        <p:nvSpPr>
+          <p:cNvPr id="10" name="Text 7"/>
+          <p:cNvSpPr/>
+          <p:nvPr/>
+        </p:nvSpPr>
+        <p:spPr>
+          <a:xfrm>
+            <a:off x="457200" y="6446520"/>
+            <a:ext cx="11247120" cy="365760"/>
           </a:xfrm>
           <a:prstGeom prst="rect">
             <a:avLst/>
@@ -2562,7 +2649,7 @@
               <a:buNone/>
             </a:pPr>
             <a:r>
-              <a:rPr lang="en-US" sz="1250" i="1" dirty="0">
+              <a:rPr lang="en-US" sz="1100" i="1" dirty="0">
                 <a:solidFill>
                   <a:srgbClr val="836A68"/>
                 </a:solidFill>
@@ -2570,9 +2657,9 @@
                 <a:ea typeface="Calibri" pitchFamily="34" charset="-122"/>
                 <a:cs typeface="Calibri" pitchFamily="34" charset="-120"/>
               </a:rPr>
-              <a:t>Preliminary: only the empty baseline is cleanly paired. Nonlinear domain adaptation (and any use for calibrating sim toward the bench) needs far more paired data: multiple sessions and, ideally, matched tumor positions.</a:t>
-            </a:r>
-            <a:endParaRPr lang="en-US" sz="1250" dirty="0"/>
+              <a:t>Preliminary: only the empty baseline is cleanly paired. Nonlinear domain adaptation needs far more paired data (multiple sessions, matched tumor positions).</a:t>
+            </a:r>
+            <a:endParaRPr lang="en-US" sz="1100" dirty="0"/>
           </a:p>
         </p:txBody>
       </p:sp>

--- a/regression_deck/Deck3_Sim_vs_Measured.pptx
+++ b/regression_deck/Deck3_Sim_vs_Measured.pptx
@@ -17,9 +17,10 @@
     <p:sldId id="265" r:id="rId11"/>
     <p:sldId id="266" r:id="rId12"/>
     <p:sldId id="267" r:id="rId13"/>
+    <p:sldId id="268" r:id="rId14"/>
   </p:sldIdLst>
   <p:notesMasterIdLst>
-    <p:notesMasterId r:id="rId14"/>
+    <p:notesMasterId r:id="rId15"/>
   </p:notesMasterIdLst>
   <p:sldSz cx="12188952" cy="6858000"/>
   <p:notesSz cx="6858000" cy="12188952"/>
@@ -801,6 +802,94 @@
             <a:fld id="{F7021451-1387-4CA6-816F-3879F97B5CBC}" type="slidenum">
               <a:rPr lang="en-US"/>
               <a:t>12</a:t>
+            </a:fld>
+            <a:endParaRPr lang="en-US"/>
+          </a:p>
+        </p:txBody>
+      </p:sp>
+    </p:spTree>
+    <p:extLst>
+      <p:ext uri="{BB962C8B-B14F-4D97-AF65-F5344CB8AC3E}">
+        <p14:creationId xmlns:p14="http://schemas.microsoft.com/office/powerpoint/2010/main" val="1024086991"/>
+      </p:ext>
+    </p:extLst>
+  </p:cSld>
+  <p:clrMapOvr>
+    <a:masterClrMapping/>
+  </p:clrMapOvr>
+</p:notes>
+</file>
+
+<file path=ppt/notesSlides/notesSlide13.xml><?xml version="1.0" encoding="utf-8"?>
+<p:notes xmlns:a="http://schemas.openxmlformats.org/drawingml/2006/main" xmlns:r="http://schemas.openxmlformats.org/officeDocument/2006/relationships" xmlns:p="http://schemas.openxmlformats.org/presentationml/2006/main">
+  <p:cSld>
+    <p:spTree>
+      <p:nvGrpSpPr>
+        <p:cNvPr id="1" name=""/>
+        <p:cNvGrpSpPr/>
+        <p:nvPr/>
+      </p:nvGrpSpPr>
+      <p:grpSpPr>
+        <a:xfrm>
+          <a:off x="0" y="0"/>
+          <a:ext cx="0" cy="0"/>
+          <a:chOff x="0" y="0"/>
+          <a:chExt cx="0" cy="0"/>
+        </a:xfrm>
+      </p:grpSpPr>
+      <p:sp>
+        <p:nvSpPr>
+          <p:cNvPr id="2" name="Slide Image Placeholder 1"/>
+          <p:cNvSpPr>
+            <a:spLocks noGrp="1" noRot="1" noChangeAspect="1"/>
+          </p:cNvSpPr>
+          <p:nvPr>
+            <p:ph type="sldImg"/>
+          </p:nvPr>
+        </p:nvSpPr>
+        <p:spPr/>
+      </p:sp>
+      <p:sp>
+        <p:nvSpPr>
+          <p:cNvPr id="3" name="Notes Placeholder 2"/>
+          <p:cNvSpPr>
+            <a:spLocks noGrp="1"/>
+          </p:cNvSpPr>
+          <p:nvPr>
+            <p:ph type="body" idx="1"/>
+          </p:nvPr>
+        </p:nvSpPr>
+        <p:spPr/>
+        <p:txBody>
+          <a:bodyPr/>
+          <a:lstStyle/>
+          <a:p>
+            <a:r>
+              <a:rPr lang="en-US" dirty="0"/>
+              <a:t/>
+            </a:r>
+            <a:endParaRPr lang="en-US" dirty="0"/>
+          </a:p>
+        </p:txBody>
+      </p:sp>
+      <p:sp>
+        <p:nvSpPr>
+          <p:cNvPr id="4" name="Slide Number Placeholder 3"/>
+          <p:cNvSpPr>
+            <a:spLocks noGrp="1"/>
+          </p:cNvSpPr>
+          <p:nvPr>
+            <p:ph type="sldNum" sz="quarter" idx="10"/>
+          </p:nvPr>
+        </p:nvSpPr>
+        <p:spPr/>
+        <p:txBody>
+          <a:bodyPr/>
+          <a:lstStyle/>
+          <a:p>
+            <a:fld id="{F7021451-1387-4CA6-816F-3879F97B5CBC}" type="slidenum">
+              <a:rPr lang="en-US"/>
+              <a:t>13</a:t>
             </a:fld>
             <a:endParaRPr lang="en-US"/>
           </a:p>
@@ -2310,7 +2399,7 @@
                 <a:ea typeface="Cambria" pitchFamily="34" charset="-122"/>
                 <a:cs typeface="Cambria" pitchFamily="34" charset="-120"/>
               </a:rPr>
-              <a:t>Can a model bridge the gap? (exploratory)</a:t>
+              <a:t>How the sim to measured map is learned</a:t>
             </a:r>
             <a:endParaRPr lang="en-US" sz="2900" dirty="0"/>
           </a:p>
@@ -2349,50 +2438,26 @@
                 <a:ea typeface="Calibri" pitchFamily="34" charset="-122"/>
                 <a:cs typeface="Calibri" pitchFamily="34" charset="-120"/>
               </a:rPr>
-              <a:t>Learn a sim to measured map on the empty baseline, test on unseen frequencies</a:t>
+              <a:t>A linear transfer fit on the empty baseline and tested on frequencies it never saw</a:t>
             </a:r>
             <a:endParaRPr lang="en-US" sz="1400" dirty="0"/>
           </a:p>
         </p:txBody>
       </p:sp>
-      <p:pic>
-        <p:nvPicPr>
-          <p:cNvPr id="4" name="Image 0" descr="sim_meas_correlation.png">    </p:cNvPr>
-          <p:cNvPicPr>
-            <a:picLocks noChangeAspect="1"/>
-          </p:cNvPicPr>
-          <p:nvPr/>
-        </p:nvPicPr>
-        <p:blipFill>
-          <a:blip r:embed="rId1"/>
-          <a:stretch>
-            <a:fillRect/>
-          </a:stretch>
-        </p:blipFill>
-        <p:spPr>
-          <a:xfrm>
-            <a:off x="457200" y="1600200"/>
-            <a:ext cx="7772400" cy="3154680"/>
-          </a:xfrm>
-          <a:prstGeom prst="rect">
-            <a:avLst/>
-          </a:prstGeom>
-        </p:spPr>
-      </p:pic>
-      <p:sp>
-        <p:nvSpPr>
-          <p:cNvPr id="5" name="Shape 2"/>
-          <p:cNvSpPr/>
-          <p:nvPr/>
-        </p:nvSpPr>
-        <p:spPr>
-          <a:xfrm>
-            <a:off x="8412480" y="1554480"/>
-            <a:ext cx="3246120" cy="3977640"/>
+      <p:sp>
+        <p:nvSpPr>
+          <p:cNvPr id="4" name="Shape 2"/>
+          <p:cNvSpPr/>
+          <p:nvPr/>
+        </p:nvSpPr>
+        <p:spPr>
+          <a:xfrm>
+            <a:off x="548640" y="1554480"/>
+            <a:ext cx="7040880" cy="822960"/>
           </a:xfrm>
           <a:prstGeom prst="roundRect">
             <a:avLst>
-              <a:gd name="adj" fmla="val 2535"/>
+              <a:gd name="adj" fmla="val 10000"/>
             </a:avLst>
           </a:prstGeom>
           <a:solidFill>
@@ -2415,14 +2480,73 @@
       </p:sp>
       <p:sp>
         <p:nvSpPr>
-          <p:cNvPr id="6" name="Text 3"/>
-          <p:cNvSpPr/>
-          <p:nvPr/>
-        </p:nvSpPr>
-        <p:spPr>
-          <a:xfrm>
-            <a:off x="8595360" y="1691640"/>
-            <a:ext cx="2926080" cy="365760"/>
+          <p:cNvPr id="5" name="Shape 3"/>
+          <p:cNvSpPr/>
+          <p:nvPr/>
+        </p:nvSpPr>
+        <p:spPr>
+          <a:xfrm>
+            <a:off x="749808" y="1737360"/>
+            <a:ext cx="457200" cy="457200"/>
+          </a:xfrm>
+          <a:prstGeom prst="ellipse">
+            <a:avLst/>
+          </a:prstGeom>
+          <a:solidFill>
+            <a:srgbClr val="BE0000"/>
+          </a:solidFill>
+          <a:ln/>
+        </p:spPr>
+      </p:sp>
+      <p:sp>
+        <p:nvSpPr>
+          <p:cNvPr id="6" name="Text 4"/>
+          <p:cNvSpPr/>
+          <p:nvPr/>
+        </p:nvSpPr>
+        <p:spPr>
+          <a:xfrm>
+            <a:off x="749808" y="1737360"/>
+            <a:ext cx="457200" cy="457200"/>
+          </a:xfrm>
+          <a:prstGeom prst="rect">
+            <a:avLst/>
+          </a:prstGeom>
+          <a:noFill/>
+          <a:ln/>
+        </p:spPr>
+        <p:txBody>
+          <a:bodyPr wrap="square" lIns="0" tIns="0" rIns="0" bIns="0" rtlCol="0" anchor="ctr"/>
+          <a:lstStyle/>
+          <a:p>
+            <a:pPr algn="ctr" indent="0" marL="0">
+              <a:buNone/>
+            </a:pPr>
+            <a:r>
+              <a:rPr lang="en-US" sz="1800" b="1" dirty="0">
+                <a:solidFill>
+                  <a:srgbClr val="FFFFFF"/>
+                </a:solidFill>
+                <a:latin typeface="Cambria" pitchFamily="34" charset="0"/>
+                <a:ea typeface="Cambria" pitchFamily="34" charset="-122"/>
+                <a:cs typeface="Cambria" pitchFamily="34" charset="-120"/>
+              </a:rPr>
+              <a:t>1</a:t>
+            </a:r>
+            <a:endParaRPr lang="en-US" sz="1800" dirty="0"/>
+          </a:p>
+        </p:txBody>
+      </p:sp>
+      <p:sp>
+        <p:nvSpPr>
+          <p:cNvPr id="7" name="Text 5"/>
+          <p:cNvSpPr/>
+          <p:nvPr/>
+        </p:nvSpPr>
+        <p:spPr>
+          <a:xfrm>
+            <a:off x="1371600" y="1609344"/>
+            <a:ext cx="2286000" cy="713232"/>
           </a:xfrm>
           <a:prstGeom prst="rect">
             <a:avLst/>
@@ -2438,7 +2562,7 @@
               <a:buNone/>
             </a:pPr>
             <a:r>
-              <a:rPr lang="en-US" sz="1500" b="1" dirty="0">
+              <a:rPr lang="en-US" sz="1400" b="1" dirty="0">
                 <a:solidFill>
                   <a:srgbClr val="BE0000"/>
                 </a:solidFill>
@@ -2446,22 +2570,22 @@
                 <a:ea typeface="Cambria" pitchFamily="34" charset="-122"/>
                 <a:cs typeface="Cambria" pitchFamily="34" charset="-120"/>
               </a:rPr>
-              <a:t>How to read it</a:t>
-            </a:r>
-            <a:endParaRPr lang="en-US" sz="1500" dirty="0"/>
-          </a:p>
-        </p:txBody>
-      </p:sp>
-      <p:sp>
-        <p:nvSpPr>
-          <p:cNvPr id="7" name="Text 4"/>
-          <p:cNvSpPr/>
-          <p:nvPr/>
-        </p:nvSpPr>
-        <p:spPr>
-          <a:xfrm>
-            <a:off x="8595360" y="2103120"/>
-            <a:ext cx="2971800" cy="3291840"/>
+              <a:t>Pair the empty baselines</a:t>
+            </a:r>
+            <a:endParaRPr lang="en-US" sz="1400" dirty="0"/>
+          </a:p>
+        </p:txBody>
+      </p:sp>
+      <p:sp>
+        <p:nvSpPr>
+          <p:cNvPr id="8" name="Text 6"/>
+          <p:cNvSpPr/>
+          <p:nvPr/>
+        </p:nvSpPr>
+        <p:spPr>
+          <a:xfrm>
+            <a:off x="3703320" y="1591056"/>
+            <a:ext cx="3794760" cy="749808"/>
           </a:xfrm>
           <a:prstGeom prst="rect">
             <a:avLst/>
@@ -2470,18 +2594,14 @@
           <a:ln/>
         </p:spPr>
         <p:txBody>
-          <a:bodyPr wrap="square" lIns="0" tIns="0" rIns="0" bIns="0" rtlCol="0" anchor="t"/>
-          <a:lstStyle/>
-          <a:p>
-            <a:pPr marL="342900" indent="-342900">
-              <a:spcAft>
-                <a:spcPts val="800"/>
-              </a:spcAft>
-              <a:buSzPct val="100000"/>
-              <a:buChar char="•"/>
+          <a:bodyPr wrap="square" lIns="0" tIns="0" rIns="0" bIns="0" rtlCol="0" anchor="ctr"/>
+          <a:lstStyle/>
+          <a:p>
+            <a:pPr indent="0" marL="0">
+              <a:buNone/>
             </a:pPr>
             <a:r>
-              <a:rPr lang="en-US" sz="1050" dirty="0">
+              <a:rPr lang="en-US" sz="1070" dirty="0">
                 <a:solidFill>
                   <a:srgbClr val="2A1618"/>
                 </a:solidFill>
@@ -2489,68 +2609,26 @@
                 <a:ea typeface="Calibri" pitchFamily="34" charset="-122"/>
                 <a:cs typeface="Calibri" pitchFamily="34" charset="-120"/>
               </a:rPr>
-              <a:t>Left: for one port, the dashed line is the simulated S11 after the learned map. A perfect map would land on the measured (red) curve; it moves toward it but does not fully match.</a:t>
-            </a:r>
-            <a:endParaRPr lang="en-US" sz="1050" dirty="0"/>
-          </a:p>
-          <a:p>
-            <a:pPr marL="342900" indent="-342900">
-              <a:spcAft>
-                <a:spcPts val="800"/>
-              </a:spcAft>
-              <a:buSzPct val="100000"/>
-              <a:buChar char="•"/>
-            </a:pPr>
-            <a:r>
-              <a:rPr lang="en-US" sz="1050" dirty="0">
-                <a:solidFill>
-                  <a:srgbClr val="2A1618"/>
-                </a:solidFill>
-                <a:latin typeface="Calibri" pitchFamily="34" charset="0"/>
-                <a:ea typeface="Calibri" pitchFamily="34" charset="-122"/>
-                <a:cs typeface="Calibri" pitchFamily="34" charset="-120"/>
-              </a:rPr>
-              <a:t>Right: predicted vs measured on held-out frequencies. Points on the diagonal are exact; R2 = 0.65 means the linear map captures most, not all, of the relationship.</a:t>
-            </a:r>
-            <a:endParaRPr lang="en-US" sz="1050" dirty="0"/>
-          </a:p>
-          <a:p>
-            <a:pPr marL="342900" indent="-342900">
-              <a:spcAft>
-                <a:spcPts val="800"/>
-              </a:spcAft>
-              <a:buSzPct val="100000"/>
-              <a:buChar char="•"/>
-            </a:pPr>
-            <a:r>
-              <a:rPr lang="en-US" sz="1050" dirty="0">
-                <a:solidFill>
-                  <a:srgbClr val="2A1618"/>
-                </a:solidFill>
-                <a:latin typeface="Calibri" pitchFamily="34" charset="0"/>
-                <a:ea typeface="Calibri" pitchFamily="34" charset="-122"/>
-                <a:cs typeface="Calibri" pitchFamily="34" charset="-120"/>
-              </a:rPr>
-              <a:t>A flexible MLP overfits the single paired baseline (R2 &lt; 0).</a:t>
-            </a:r>
-            <a:endParaRPr lang="en-US" sz="1050" dirty="0"/>
-          </a:p>
-        </p:txBody>
-      </p:sp>
-      <p:sp>
-        <p:nvSpPr>
-          <p:cNvPr id="8" name="Shape 5"/>
-          <p:cNvSpPr/>
-          <p:nvPr/>
-        </p:nvSpPr>
-        <p:spPr>
-          <a:xfrm>
-            <a:off x="457200" y="4937760"/>
-            <a:ext cx="7772400" cy="1417320"/>
+              <a:t>Sim empty phantom and measured empty phantom are the same physical state (no tumor), so their S-parameters can be matched frequency by frequency.</a:t>
+            </a:r>
+            <a:endParaRPr lang="en-US" sz="1070" dirty="0"/>
+          </a:p>
+        </p:txBody>
+      </p:sp>
+      <p:sp>
+        <p:nvSpPr>
+          <p:cNvPr id="9" name="Shape 7"/>
+          <p:cNvSpPr/>
+          <p:nvPr/>
+        </p:nvSpPr>
+        <p:spPr>
+          <a:xfrm>
+            <a:off x="548640" y="2487168"/>
+            <a:ext cx="7040880" cy="822960"/>
           </a:xfrm>
           <a:prstGeom prst="roundRect">
             <a:avLst>
-              <a:gd name="adj" fmla="val 5806"/>
+              <a:gd name="adj" fmla="val 10000"/>
             </a:avLst>
           </a:prstGeom>
           <a:solidFill>
@@ -2573,14 +2651,34 @@
       </p:sp>
       <p:sp>
         <p:nvSpPr>
-          <p:cNvPr id="9" name="Text 6"/>
-          <p:cNvSpPr/>
-          <p:nvPr/>
-        </p:nvSpPr>
-        <p:spPr>
-          <a:xfrm>
-            <a:off x="640080" y="5029200"/>
-            <a:ext cx="7406640" cy="1234440"/>
+          <p:cNvPr id="10" name="Shape 8"/>
+          <p:cNvSpPr/>
+          <p:nvPr/>
+        </p:nvSpPr>
+        <p:spPr>
+          <a:xfrm>
+            <a:off x="749808" y="2670048"/>
+            <a:ext cx="457200" cy="457200"/>
+          </a:xfrm>
+          <a:prstGeom prst="ellipse">
+            <a:avLst/>
+          </a:prstGeom>
+          <a:solidFill>
+            <a:srgbClr val="BE0000"/>
+          </a:solidFill>
+          <a:ln/>
+        </p:spPr>
+      </p:sp>
+      <p:sp>
+        <p:nvSpPr>
+          <p:cNvPr id="11" name="Text 9"/>
+          <p:cNvSpPr/>
+          <p:nvPr/>
+        </p:nvSpPr>
+        <p:spPr>
+          <a:xfrm>
+            <a:off x="749808" y="2670048"/>
+            <a:ext cx="457200" cy="457200"/>
           </a:xfrm>
           <a:prstGeom prst="rect">
             <a:avLst/>
@@ -2589,24 +2687,867 @@
           <a:ln/>
         </p:spPr>
         <p:txBody>
-          <a:bodyPr wrap="square" lIns="0" tIns="0" rIns="0" bIns="0" rtlCol="0" anchor="t"/>
+          <a:bodyPr wrap="square" lIns="0" tIns="0" rIns="0" bIns="0" rtlCol="0" anchor="ctr"/>
+          <a:lstStyle/>
+          <a:p>
+            <a:pPr algn="ctr" indent="0" marL="0">
+              <a:buNone/>
+            </a:pPr>
+            <a:r>
+              <a:rPr lang="en-US" sz="1800" b="1" dirty="0">
+                <a:solidFill>
+                  <a:srgbClr val="FFFFFF"/>
+                </a:solidFill>
+                <a:latin typeface="Cambria" pitchFamily="34" charset="0"/>
+                <a:ea typeface="Cambria" pitchFamily="34" charset="-122"/>
+                <a:cs typeface="Cambria" pitchFamily="34" charset="-120"/>
+              </a:rPr>
+              <a:t>2</a:t>
+            </a:r>
+            <a:endParaRPr lang="en-US" sz="1800" dirty="0"/>
+          </a:p>
+        </p:txBody>
+      </p:sp>
+      <p:sp>
+        <p:nvSpPr>
+          <p:cNvPr id="12" name="Text 10"/>
+          <p:cNvSpPr/>
+          <p:nvPr/>
+        </p:nvSpPr>
+        <p:spPr>
+          <a:xfrm>
+            <a:off x="1371600" y="2542032"/>
+            <a:ext cx="2286000" cy="713232"/>
+          </a:xfrm>
+          <a:prstGeom prst="rect">
+            <a:avLst/>
+          </a:prstGeom>
+          <a:noFill/>
+          <a:ln/>
+        </p:spPr>
+        <p:txBody>
+          <a:bodyPr wrap="square" lIns="0" tIns="0" rIns="0" bIns="0" rtlCol="0" anchor="ctr"/>
           <a:lstStyle/>
           <a:p>
             <a:pPr indent="0" marL="0">
               <a:buNone/>
             </a:pPr>
             <a:r>
-              <a:rPr lang="en-US" sz="1100" b="1" dirty="0">
+              <a:rPr lang="en-US" sz="1400" b="1" dirty="0">
                 <a:solidFill>
                   <a:srgbClr val="BE0000"/>
+                </a:solidFill>
+                <a:latin typeface="Cambria" pitchFamily="34" charset="0"/>
+                <a:ea typeface="Cambria" pitchFamily="34" charset="-122"/>
+                <a:cs typeface="Cambria" pitchFamily="34" charset="-120"/>
+              </a:rPr>
+              <a:t>One vector per frequency</a:t>
+            </a:r>
+            <a:endParaRPr lang="en-US" sz="1400" dirty="0"/>
+          </a:p>
+        </p:txBody>
+      </p:sp>
+      <p:sp>
+        <p:nvSpPr>
+          <p:cNvPr id="13" name="Text 11"/>
+          <p:cNvSpPr/>
+          <p:nvPr/>
+        </p:nvSpPr>
+        <p:spPr>
+          <a:xfrm>
+            <a:off x="3703320" y="2523744"/>
+            <a:ext cx="3794760" cy="749808"/>
+          </a:xfrm>
+          <a:prstGeom prst="rect">
+            <a:avLst/>
+          </a:prstGeom>
+          <a:noFill/>
+          <a:ln/>
+        </p:spPr>
+        <p:txBody>
+          <a:bodyPr wrap="square" lIns="0" tIns="0" rIns="0" bIns="0" rtlCol="0" anchor="ctr"/>
+          <a:lstStyle/>
+          <a:p>
+            <a:pPr indent="0" marL="0">
+              <a:buNone/>
+            </a:pPr>
+            <a:r>
+              <a:rPr lang="en-US" sz="1070" dirty="0">
+                <a:solidFill>
+                  <a:srgbClr val="2A1618"/>
                 </a:solidFill>
                 <a:latin typeface="Calibri" pitchFamily="34" charset="0"/>
                 <a:ea typeface="Calibri" pitchFamily="34" charset="-122"/>
                 <a:cs typeface="Calibri" pitchFamily="34" charset="-120"/>
               </a:rPr>
-              <a:t>How the map is built.  </a:t>
-            </a:r>
+              <a:t>At each of 512 frequencies (2 to 8 GHz), stack the real and imaginary parts of the 16 S-parameters into a 32-D vector. Sim = input x, measured = target y.</a:t>
+            </a:r>
+            <a:endParaRPr lang="en-US" sz="1070" dirty="0"/>
+          </a:p>
+        </p:txBody>
+      </p:sp>
+      <p:sp>
+        <p:nvSpPr>
+          <p:cNvPr id="14" name="Shape 12"/>
+          <p:cNvSpPr/>
+          <p:nvPr/>
+        </p:nvSpPr>
+        <p:spPr>
+          <a:xfrm>
+            <a:off x="548640" y="3419856"/>
+            <a:ext cx="7040880" cy="822960"/>
+          </a:xfrm>
+          <a:prstGeom prst="roundRect">
+            <a:avLst>
+              <a:gd name="adj" fmla="val 10000"/>
+            </a:avLst>
+          </a:prstGeom>
+          <a:solidFill>
+            <a:srgbClr val="FBF4F2"/>
+          </a:solidFill>
+          <a:ln w="12700">
+            <a:solidFill>
+              <a:srgbClr val="E7D6D1"/>
+            </a:solidFill>
+            <a:prstDash val="solid"/>
+          </a:ln>
+          <a:effectLst>
+            <a:outerShdw sx="100000" sy="100000" kx="0" ky="0" algn="bl" rotWithShape="0" blurRad="88900" dist="38100" dir="5400000">
+              <a:srgbClr val="7A5C5E">
+                <a:alpha val="18000"/>
+              </a:srgbClr>
+            </a:outerShdw>
+          </a:effectLst>
+        </p:spPr>
+      </p:sp>
+      <p:sp>
+        <p:nvSpPr>
+          <p:cNvPr id="15" name="Shape 13"/>
+          <p:cNvSpPr/>
+          <p:nvPr/>
+        </p:nvSpPr>
+        <p:spPr>
+          <a:xfrm>
+            <a:off x="749808" y="3602736"/>
+            <a:ext cx="457200" cy="457200"/>
+          </a:xfrm>
+          <a:prstGeom prst="ellipse">
+            <a:avLst/>
+          </a:prstGeom>
+          <a:solidFill>
+            <a:srgbClr val="BE0000"/>
+          </a:solidFill>
+          <a:ln/>
+        </p:spPr>
+      </p:sp>
+      <p:sp>
+        <p:nvSpPr>
+          <p:cNvPr id="16" name="Text 14"/>
+          <p:cNvSpPr/>
+          <p:nvPr/>
+        </p:nvSpPr>
+        <p:spPr>
+          <a:xfrm>
+            <a:off x="749808" y="3602736"/>
+            <a:ext cx="457200" cy="457200"/>
+          </a:xfrm>
+          <a:prstGeom prst="rect">
+            <a:avLst/>
+          </a:prstGeom>
+          <a:noFill/>
+          <a:ln/>
+        </p:spPr>
+        <p:txBody>
+          <a:bodyPr wrap="square" lIns="0" tIns="0" rIns="0" bIns="0" rtlCol="0" anchor="ctr"/>
+          <a:lstStyle/>
+          <a:p>
+            <a:pPr algn="ctr" indent="0" marL="0">
+              <a:buNone/>
+            </a:pPr>
+            <a:r>
+              <a:rPr lang="en-US" sz="1800" b="1" dirty="0">
+                <a:solidFill>
+                  <a:srgbClr val="FFFFFF"/>
+                </a:solidFill>
+                <a:latin typeface="Cambria" pitchFamily="34" charset="0"/>
+                <a:ea typeface="Cambria" pitchFamily="34" charset="-122"/>
+                <a:cs typeface="Cambria" pitchFamily="34" charset="-120"/>
+              </a:rPr>
+              <a:t>3</a:t>
+            </a:r>
+            <a:endParaRPr lang="en-US" sz="1800" dirty="0"/>
+          </a:p>
+        </p:txBody>
+      </p:sp>
+      <p:sp>
+        <p:nvSpPr>
+          <p:cNvPr id="17" name="Text 15"/>
+          <p:cNvSpPr/>
+          <p:nvPr/>
+        </p:nvSpPr>
+        <p:spPr>
+          <a:xfrm>
+            <a:off x="1371600" y="3474720"/>
+            <a:ext cx="2286000" cy="713232"/>
+          </a:xfrm>
+          <a:prstGeom prst="rect">
+            <a:avLst/>
+          </a:prstGeom>
+          <a:noFill/>
+          <a:ln/>
+        </p:spPr>
+        <p:txBody>
+          <a:bodyPr wrap="square" lIns="0" tIns="0" rIns="0" bIns="0" rtlCol="0" anchor="ctr"/>
+          <a:lstStyle/>
+          <a:p>
             <a:pPr indent="0" marL="0">
+              <a:buNone/>
+            </a:pPr>
+            <a:r>
+              <a:rPr lang="en-US" sz="1400" b="1" dirty="0">
+                <a:solidFill>
+                  <a:srgbClr val="BE0000"/>
+                </a:solidFill>
+                <a:latin typeface="Cambria" pitchFamily="34" charset="0"/>
+                <a:ea typeface="Cambria" pitchFamily="34" charset="-122"/>
+                <a:cs typeface="Cambria" pitchFamily="34" charset="-120"/>
+              </a:rPr>
+              <a:t>Split the frequencies 70 / 30</a:t>
+            </a:r>
+            <a:endParaRPr lang="en-US" sz="1400" dirty="0"/>
+          </a:p>
+        </p:txBody>
+      </p:sp>
+      <p:sp>
+        <p:nvSpPr>
+          <p:cNvPr id="18" name="Text 16"/>
+          <p:cNvSpPr/>
+          <p:nvPr/>
+        </p:nvSpPr>
+        <p:spPr>
+          <a:xfrm>
+            <a:off x="3703320" y="3456432"/>
+            <a:ext cx="3794760" cy="749808"/>
+          </a:xfrm>
+          <a:prstGeom prst="rect">
+            <a:avLst/>
+          </a:prstGeom>
+          <a:noFill/>
+          <a:ln/>
+        </p:spPr>
+        <p:txBody>
+          <a:bodyPr wrap="square" lIns="0" tIns="0" rIns="0" bIns="0" rtlCol="0" anchor="ctr"/>
+          <a:lstStyle/>
+          <a:p>
+            <a:pPr indent="0" marL="0">
+              <a:buNone/>
+            </a:pPr>
+            <a:r>
+              <a:rPr lang="en-US" sz="1070" dirty="0">
+                <a:solidFill>
+                  <a:srgbClr val="2A1618"/>
+                </a:solidFill>
+                <a:latin typeface="Calibri" pitchFamily="34" charset="0"/>
+                <a:ea typeface="Calibri" pitchFamily="34" charset="-122"/>
+                <a:cs typeface="Calibri" pitchFamily="34" charset="-120"/>
+              </a:rPr>
+              <a:t>Fit on 70% of the frequencies; hold out the other 30% for testing. The map never sees the test frequencies while it is being fit.</a:t>
+            </a:r>
+            <a:endParaRPr lang="en-US" sz="1070" dirty="0"/>
+          </a:p>
+        </p:txBody>
+      </p:sp>
+      <p:sp>
+        <p:nvSpPr>
+          <p:cNvPr id="19" name="Shape 17"/>
+          <p:cNvSpPr/>
+          <p:nvPr/>
+        </p:nvSpPr>
+        <p:spPr>
+          <a:xfrm>
+            <a:off x="548640" y="4352544"/>
+            <a:ext cx="7040880" cy="822960"/>
+          </a:xfrm>
+          <a:prstGeom prst="roundRect">
+            <a:avLst>
+              <a:gd name="adj" fmla="val 10000"/>
+            </a:avLst>
+          </a:prstGeom>
+          <a:solidFill>
+            <a:srgbClr val="FBF4F2"/>
+          </a:solidFill>
+          <a:ln w="12700">
+            <a:solidFill>
+              <a:srgbClr val="E7D6D1"/>
+            </a:solidFill>
+            <a:prstDash val="solid"/>
+          </a:ln>
+          <a:effectLst>
+            <a:outerShdw sx="100000" sy="100000" kx="0" ky="0" algn="bl" rotWithShape="0" blurRad="88900" dist="38100" dir="5400000">
+              <a:srgbClr val="7A5C5E">
+                <a:alpha val="18000"/>
+              </a:srgbClr>
+            </a:outerShdw>
+          </a:effectLst>
+        </p:spPr>
+      </p:sp>
+      <p:sp>
+        <p:nvSpPr>
+          <p:cNvPr id="20" name="Shape 18"/>
+          <p:cNvSpPr/>
+          <p:nvPr/>
+        </p:nvSpPr>
+        <p:spPr>
+          <a:xfrm>
+            <a:off x="749808" y="4535424"/>
+            <a:ext cx="457200" cy="457200"/>
+          </a:xfrm>
+          <a:prstGeom prst="ellipse">
+            <a:avLst/>
+          </a:prstGeom>
+          <a:solidFill>
+            <a:srgbClr val="BE0000"/>
+          </a:solidFill>
+          <a:ln/>
+        </p:spPr>
+      </p:sp>
+      <p:sp>
+        <p:nvSpPr>
+          <p:cNvPr id="21" name="Text 19"/>
+          <p:cNvSpPr/>
+          <p:nvPr/>
+        </p:nvSpPr>
+        <p:spPr>
+          <a:xfrm>
+            <a:off x="749808" y="4535424"/>
+            <a:ext cx="457200" cy="457200"/>
+          </a:xfrm>
+          <a:prstGeom prst="rect">
+            <a:avLst/>
+          </a:prstGeom>
+          <a:noFill/>
+          <a:ln/>
+        </p:spPr>
+        <p:txBody>
+          <a:bodyPr wrap="square" lIns="0" tIns="0" rIns="0" bIns="0" rtlCol="0" anchor="ctr"/>
+          <a:lstStyle/>
+          <a:p>
+            <a:pPr algn="ctr" indent="0" marL="0">
+              <a:buNone/>
+            </a:pPr>
+            <a:r>
+              <a:rPr lang="en-US" sz="1800" b="1" dirty="0">
+                <a:solidFill>
+                  <a:srgbClr val="FFFFFF"/>
+                </a:solidFill>
+                <a:latin typeface="Cambria" pitchFamily="34" charset="0"/>
+                <a:ea typeface="Cambria" pitchFamily="34" charset="-122"/>
+                <a:cs typeface="Cambria" pitchFamily="34" charset="-120"/>
+              </a:rPr>
+              <a:t>4</a:t>
+            </a:r>
+            <a:endParaRPr lang="en-US" sz="1800" dirty="0"/>
+          </a:p>
+        </p:txBody>
+      </p:sp>
+      <p:sp>
+        <p:nvSpPr>
+          <p:cNvPr id="22" name="Text 20"/>
+          <p:cNvSpPr/>
+          <p:nvPr/>
+        </p:nvSpPr>
+        <p:spPr>
+          <a:xfrm>
+            <a:off x="1371600" y="4407408"/>
+            <a:ext cx="2286000" cy="713232"/>
+          </a:xfrm>
+          <a:prstGeom prst="rect">
+            <a:avLst/>
+          </a:prstGeom>
+          <a:noFill/>
+          <a:ln/>
+        </p:spPr>
+        <p:txBody>
+          <a:bodyPr wrap="square" lIns="0" tIns="0" rIns="0" bIns="0" rtlCol="0" anchor="ctr"/>
+          <a:lstStyle/>
+          <a:p>
+            <a:pPr indent="0" marL="0">
+              <a:buNone/>
+            </a:pPr>
+            <a:r>
+              <a:rPr lang="en-US" sz="1400" b="1" dirty="0">
+                <a:solidFill>
+                  <a:srgbClr val="BE0000"/>
+                </a:solidFill>
+                <a:latin typeface="Cambria" pitchFamily="34" charset="0"/>
+                <a:ea typeface="Cambria" pitchFamily="34" charset="-122"/>
+                <a:cs typeface="Cambria" pitchFamily="34" charset="-120"/>
+              </a:rPr>
+              <a:t>Fit the linear map</a:t>
+            </a:r>
+            <a:endParaRPr lang="en-US" sz="1400" dirty="0"/>
+          </a:p>
+        </p:txBody>
+      </p:sp>
+      <p:sp>
+        <p:nvSpPr>
+          <p:cNvPr id="23" name="Text 21"/>
+          <p:cNvSpPr/>
+          <p:nvPr/>
+        </p:nvSpPr>
+        <p:spPr>
+          <a:xfrm>
+            <a:off x="3703320" y="4389120"/>
+            <a:ext cx="3794760" cy="749808"/>
+          </a:xfrm>
+          <a:prstGeom prst="rect">
+            <a:avLst/>
+          </a:prstGeom>
+          <a:noFill/>
+          <a:ln/>
+        </p:spPr>
+        <p:txBody>
+          <a:bodyPr wrap="square" lIns="0" tIns="0" rIns="0" bIns="0" rtlCol="0" anchor="ctr"/>
+          <a:lstStyle/>
+          <a:p>
+            <a:pPr indent="0" marL="0">
+              <a:buNone/>
+            </a:pPr>
+            <a:r>
+              <a:rPr lang="en-US" sz="1070" dirty="0">
+                <a:solidFill>
+                  <a:srgbClr val="2A1618"/>
+                </a:solidFill>
+                <a:latin typeface="Calibri" pitchFamily="34" charset="0"/>
+                <a:ea typeface="Calibri" pitchFamily="34" charset="-122"/>
+                <a:cs typeface="Calibri" pitchFamily="34" charset="-120"/>
+              </a:rPr>
+              <a:t>Ridge (L2) regression learns a 32x32 matrix W and offset b that best convert the sim vector into the measured vector.</a:t>
+            </a:r>
+            <a:endParaRPr lang="en-US" sz="1070" dirty="0"/>
+          </a:p>
+        </p:txBody>
+      </p:sp>
+      <p:sp>
+        <p:nvSpPr>
+          <p:cNvPr id="24" name="Shape 22"/>
+          <p:cNvSpPr/>
+          <p:nvPr/>
+        </p:nvSpPr>
+        <p:spPr>
+          <a:xfrm>
+            <a:off x="548640" y="5285232"/>
+            <a:ext cx="7040880" cy="822960"/>
+          </a:xfrm>
+          <a:prstGeom prst="roundRect">
+            <a:avLst>
+              <a:gd name="adj" fmla="val 10000"/>
+            </a:avLst>
+          </a:prstGeom>
+          <a:solidFill>
+            <a:srgbClr val="FBF4F2"/>
+          </a:solidFill>
+          <a:ln w="12700">
+            <a:solidFill>
+              <a:srgbClr val="E7D6D1"/>
+            </a:solidFill>
+            <a:prstDash val="solid"/>
+          </a:ln>
+          <a:effectLst>
+            <a:outerShdw sx="100000" sy="100000" kx="0" ky="0" algn="bl" rotWithShape="0" blurRad="88900" dist="38100" dir="5400000">
+              <a:srgbClr val="7A5C5E">
+                <a:alpha val="18000"/>
+              </a:srgbClr>
+            </a:outerShdw>
+          </a:effectLst>
+        </p:spPr>
+      </p:sp>
+      <p:sp>
+        <p:nvSpPr>
+          <p:cNvPr id="25" name="Shape 23"/>
+          <p:cNvSpPr/>
+          <p:nvPr/>
+        </p:nvSpPr>
+        <p:spPr>
+          <a:xfrm>
+            <a:off x="749808" y="5468112"/>
+            <a:ext cx="457200" cy="457200"/>
+          </a:xfrm>
+          <a:prstGeom prst="ellipse">
+            <a:avLst/>
+          </a:prstGeom>
+          <a:solidFill>
+            <a:srgbClr val="BE0000"/>
+          </a:solidFill>
+          <a:ln/>
+        </p:spPr>
+      </p:sp>
+      <p:sp>
+        <p:nvSpPr>
+          <p:cNvPr id="26" name="Text 24"/>
+          <p:cNvSpPr/>
+          <p:nvPr/>
+        </p:nvSpPr>
+        <p:spPr>
+          <a:xfrm>
+            <a:off x="749808" y="5468112"/>
+            <a:ext cx="457200" cy="457200"/>
+          </a:xfrm>
+          <a:prstGeom prst="rect">
+            <a:avLst/>
+          </a:prstGeom>
+          <a:noFill/>
+          <a:ln/>
+        </p:spPr>
+        <p:txBody>
+          <a:bodyPr wrap="square" lIns="0" tIns="0" rIns="0" bIns="0" rtlCol="0" anchor="ctr"/>
+          <a:lstStyle/>
+          <a:p>
+            <a:pPr algn="ctr" indent="0" marL="0">
+              <a:buNone/>
+            </a:pPr>
+            <a:r>
+              <a:rPr lang="en-US" sz="1800" b="1" dirty="0">
+                <a:solidFill>
+                  <a:srgbClr val="FFFFFF"/>
+                </a:solidFill>
+                <a:latin typeface="Cambria" pitchFamily="34" charset="0"/>
+                <a:ea typeface="Cambria" pitchFamily="34" charset="-122"/>
+                <a:cs typeface="Cambria" pitchFamily="34" charset="-120"/>
+              </a:rPr>
+              <a:t>5</a:t>
+            </a:r>
+            <a:endParaRPr lang="en-US" sz="1800" dirty="0"/>
+          </a:p>
+        </p:txBody>
+      </p:sp>
+      <p:sp>
+        <p:nvSpPr>
+          <p:cNvPr id="27" name="Text 25"/>
+          <p:cNvSpPr/>
+          <p:nvPr/>
+        </p:nvSpPr>
+        <p:spPr>
+          <a:xfrm>
+            <a:off x="1371600" y="5340096"/>
+            <a:ext cx="2286000" cy="713232"/>
+          </a:xfrm>
+          <a:prstGeom prst="rect">
+            <a:avLst/>
+          </a:prstGeom>
+          <a:noFill/>
+          <a:ln/>
+        </p:spPr>
+        <p:txBody>
+          <a:bodyPr wrap="square" lIns="0" tIns="0" rIns="0" bIns="0" rtlCol="0" anchor="ctr"/>
+          <a:lstStyle/>
+          <a:p>
+            <a:pPr indent="0" marL="0">
+              <a:buNone/>
+            </a:pPr>
+            <a:r>
+              <a:rPr lang="en-US" sz="1400" b="1" dirty="0">
+                <a:solidFill>
+                  <a:srgbClr val="BE0000"/>
+                </a:solidFill>
+                <a:latin typeface="Cambria" pitchFamily="34" charset="0"/>
+                <a:ea typeface="Cambria" pitchFamily="34" charset="-122"/>
+                <a:cs typeface="Cambria" pitchFamily="34" charset="-120"/>
+              </a:rPr>
+              <a:t>Test on the held-out 30%</a:t>
+            </a:r>
+            <a:endParaRPr lang="en-US" sz="1400" dirty="0"/>
+          </a:p>
+        </p:txBody>
+      </p:sp>
+      <p:sp>
+        <p:nvSpPr>
+          <p:cNvPr id="28" name="Text 26"/>
+          <p:cNvSpPr/>
+          <p:nvPr/>
+        </p:nvSpPr>
+        <p:spPr>
+          <a:xfrm>
+            <a:off x="3703320" y="5321808"/>
+            <a:ext cx="3794760" cy="749808"/>
+          </a:xfrm>
+          <a:prstGeom prst="rect">
+            <a:avLst/>
+          </a:prstGeom>
+          <a:noFill/>
+          <a:ln/>
+        </p:spPr>
+        <p:txBody>
+          <a:bodyPr wrap="square" lIns="0" tIns="0" rIns="0" bIns="0" rtlCol="0" anchor="ctr"/>
+          <a:lstStyle/>
+          <a:p>
+            <a:pPr indent="0" marL="0">
+              <a:buNone/>
+            </a:pPr>
+            <a:r>
+              <a:rPr lang="en-US" sz="1070" dirty="0">
+                <a:solidFill>
+                  <a:srgbClr val="2A1618"/>
+                </a:solidFill>
+                <a:latin typeface="Calibri" pitchFamily="34" charset="0"/>
+                <a:ea typeface="Calibri" pitchFamily="34" charset="-122"/>
+                <a:cs typeface="Calibri" pitchFamily="34" charset="-120"/>
+              </a:rPr>
+              <a:t>Apply W and b to the unseen frequencies and compare to the true measured values, giving R2 = 0.65.</a:t>
+            </a:r>
+            <a:endParaRPr lang="en-US" sz="1070" dirty="0"/>
+          </a:p>
+        </p:txBody>
+      </p:sp>
+      <p:sp>
+        <p:nvSpPr>
+          <p:cNvPr id="29" name="Shape 27"/>
+          <p:cNvSpPr/>
+          <p:nvPr/>
+        </p:nvSpPr>
+        <p:spPr>
+          <a:xfrm>
+            <a:off x="7772400" y="1554480"/>
+            <a:ext cx="3886200" cy="1600200"/>
+          </a:xfrm>
+          <a:prstGeom prst="roundRect">
+            <a:avLst>
+              <a:gd name="adj" fmla="val 5143"/>
+            </a:avLst>
+          </a:prstGeom>
+          <a:solidFill>
+            <a:srgbClr val="FBF4F2"/>
+          </a:solidFill>
+          <a:ln w="12700">
+            <a:solidFill>
+              <a:srgbClr val="E7D6D1"/>
+            </a:solidFill>
+            <a:prstDash val="solid"/>
+          </a:ln>
+          <a:effectLst>
+            <a:outerShdw sx="100000" sy="100000" kx="0" ky="0" algn="bl" rotWithShape="0" blurRad="88900" dist="38100" dir="5400000">
+              <a:srgbClr val="7A5C5E">
+                <a:alpha val="18000"/>
+              </a:srgbClr>
+            </a:outerShdw>
+          </a:effectLst>
+        </p:spPr>
+      </p:sp>
+      <p:sp>
+        <p:nvSpPr>
+          <p:cNvPr id="30" name="Text 28"/>
+          <p:cNvSpPr/>
+          <p:nvPr/>
+        </p:nvSpPr>
+        <p:spPr>
+          <a:xfrm>
+            <a:off x="7955280" y="1691640"/>
+            <a:ext cx="3474720" cy="320040"/>
+          </a:xfrm>
+          <a:prstGeom prst="rect">
+            <a:avLst/>
+          </a:prstGeom>
+          <a:noFill/>
+          <a:ln/>
+        </p:spPr>
+        <p:txBody>
+          <a:bodyPr wrap="square" lIns="0" tIns="0" rIns="0" bIns="0" rtlCol="0" anchor="ctr"/>
+          <a:lstStyle/>
+          <a:p>
+            <a:pPr indent="0" marL="0">
+              <a:buNone/>
+            </a:pPr>
+            <a:r>
+              <a:rPr lang="en-US" sz="1400" b="1" dirty="0">
+                <a:solidFill>
+                  <a:srgbClr val="BE0000"/>
+                </a:solidFill>
+                <a:latin typeface="Cambria" pitchFamily="34" charset="0"/>
+                <a:ea typeface="Cambria" pitchFamily="34" charset="-122"/>
+                <a:cs typeface="Cambria" pitchFamily="34" charset="-120"/>
+              </a:rPr>
+              <a:t>The equation</a:t>
+            </a:r>
+            <a:endParaRPr lang="en-US" sz="1400" dirty="0"/>
+          </a:p>
+        </p:txBody>
+      </p:sp>
+      <p:sp>
+        <p:nvSpPr>
+          <p:cNvPr id="31" name="Text 29"/>
+          <p:cNvSpPr/>
+          <p:nvPr/>
+        </p:nvSpPr>
+        <p:spPr>
+          <a:xfrm>
+            <a:off x="7955280" y="2011680"/>
+            <a:ext cx="3520440" cy="457200"/>
+          </a:xfrm>
+          <a:prstGeom prst="rect">
+            <a:avLst/>
+          </a:prstGeom>
+          <a:noFill/>
+          <a:ln/>
+        </p:spPr>
+        <p:txBody>
+          <a:bodyPr wrap="square" lIns="0" tIns="0" rIns="0" bIns="0" rtlCol="0" anchor="ctr"/>
+          <a:lstStyle/>
+          <a:p>
+            <a:pPr algn="ctr" indent="0" marL="0">
+              <a:buNone/>
+            </a:pPr>
+            <a:r>
+              <a:rPr lang="en-US" sz="2200" b="1" dirty="0">
+                <a:solidFill>
+                  <a:srgbClr val="2A1618"/>
+                </a:solidFill>
+                <a:latin typeface="Cambria" pitchFamily="34" charset="0"/>
+                <a:ea typeface="Cambria" pitchFamily="34" charset="-122"/>
+                <a:cs typeface="Cambria" pitchFamily="34" charset="-120"/>
+              </a:rPr>
+              <a:t>y = W x + b</a:t>
+            </a:r>
+            <a:endParaRPr lang="en-US" sz="2200" dirty="0"/>
+          </a:p>
+        </p:txBody>
+      </p:sp>
+      <p:sp>
+        <p:nvSpPr>
+          <p:cNvPr id="32" name="Text 30"/>
+          <p:cNvSpPr/>
+          <p:nvPr/>
+        </p:nvSpPr>
+        <p:spPr>
+          <a:xfrm>
+            <a:off x="7955280" y="2514600"/>
+            <a:ext cx="3520440" cy="548640"/>
+          </a:xfrm>
+          <a:prstGeom prst="rect">
+            <a:avLst/>
+          </a:prstGeom>
+          <a:noFill/>
+          <a:ln/>
+        </p:spPr>
+        <p:txBody>
+          <a:bodyPr wrap="square" lIns="0" tIns="0" rIns="0" bIns="0" rtlCol="0" anchor="t"/>
+          <a:lstStyle/>
+          <a:p>
+            <a:pPr indent="0" marL="0">
+              <a:buNone/>
+            </a:pPr>
+            <a:r>
+              <a:rPr lang="en-US" sz="1000" dirty="0">
+                <a:solidFill>
+                  <a:srgbClr val="836A68"/>
+                </a:solidFill>
+                <a:latin typeface="Calibri" pitchFamily="34" charset="0"/>
+                <a:ea typeface="Calibri" pitchFamily="34" charset="-122"/>
+                <a:cs typeface="Calibri" pitchFamily="34" charset="-120"/>
+              </a:rPr>
+              <a:t>x = sim [Re, Im of 16 S-params] (32-D); y = predicted measured; W (32x32) and b learned on the train frequencies.</a:t>
+            </a:r>
+            <a:endParaRPr lang="en-US" sz="1000" dirty="0"/>
+          </a:p>
+        </p:txBody>
+      </p:sp>
+      <p:sp>
+        <p:nvSpPr>
+          <p:cNvPr id="33" name="Shape 31"/>
+          <p:cNvSpPr/>
+          <p:nvPr/>
+        </p:nvSpPr>
+        <p:spPr>
+          <a:xfrm>
+            <a:off x="7772400" y="3291840"/>
+            <a:ext cx="3886200" cy="2971800"/>
+          </a:xfrm>
+          <a:prstGeom prst="roundRect">
+            <a:avLst>
+              <a:gd name="adj" fmla="val 2769"/>
+            </a:avLst>
+          </a:prstGeom>
+          <a:solidFill>
+            <a:srgbClr val="FBF4F2"/>
+          </a:solidFill>
+          <a:ln w="12700">
+            <a:solidFill>
+              <a:srgbClr val="E7D6D1"/>
+            </a:solidFill>
+            <a:prstDash val="solid"/>
+          </a:ln>
+          <a:effectLst>
+            <a:outerShdw sx="100000" sy="100000" kx="0" ky="0" algn="bl" rotWithShape="0" blurRad="88900" dist="38100" dir="5400000">
+              <a:srgbClr val="7A5C5E">
+                <a:alpha val="18000"/>
+              </a:srgbClr>
+            </a:outerShdw>
+          </a:effectLst>
+        </p:spPr>
+      </p:sp>
+      <p:sp>
+        <p:nvSpPr>
+          <p:cNvPr id="34" name="Text 32"/>
+          <p:cNvSpPr/>
+          <p:nvPr/>
+        </p:nvSpPr>
+        <p:spPr>
+          <a:xfrm>
+            <a:off x="7955280" y="3429000"/>
+            <a:ext cx="3566160" cy="365760"/>
+          </a:xfrm>
+          <a:prstGeom prst="rect">
+            <a:avLst/>
+          </a:prstGeom>
+          <a:noFill/>
+          <a:ln/>
+        </p:spPr>
+        <p:txBody>
+          <a:bodyPr wrap="square" lIns="0" tIns="0" rIns="0" bIns="0" rtlCol="0" anchor="ctr"/>
+          <a:lstStyle/>
+          <a:p>
+            <a:pPr indent="0" marL="0">
+              <a:buNone/>
+            </a:pPr>
+            <a:r>
+              <a:rPr lang="en-US" sz="1400" b="1" dirty="0">
+                <a:solidFill>
+                  <a:srgbClr val="BE0000"/>
+                </a:solidFill>
+                <a:latin typeface="Cambria" pitchFamily="34" charset="0"/>
+                <a:ea typeface="Cambria" pitchFamily="34" charset="-122"/>
+                <a:cs typeface="Cambria" pitchFamily="34" charset="-120"/>
+              </a:rPr>
+              <a:t>Why R2 = 0.65 is meaningful</a:t>
+            </a:r>
+            <a:endParaRPr lang="en-US" sz="1400" dirty="0"/>
+          </a:p>
+        </p:txBody>
+      </p:sp>
+      <p:sp>
+        <p:nvSpPr>
+          <p:cNvPr id="35" name="Text 33"/>
+          <p:cNvSpPr/>
+          <p:nvPr/>
+        </p:nvSpPr>
+        <p:spPr>
+          <a:xfrm>
+            <a:off x="7955280" y="3840480"/>
+            <a:ext cx="3566160" cy="2331720"/>
+          </a:xfrm>
+          <a:prstGeom prst="rect">
+            <a:avLst/>
+          </a:prstGeom>
+          <a:noFill/>
+          <a:ln/>
+        </p:spPr>
+        <p:txBody>
+          <a:bodyPr wrap="square" lIns="0" tIns="0" rIns="0" bIns="0" rtlCol="0" anchor="t"/>
+          <a:lstStyle/>
+          <a:p>
+            <a:pPr indent="0" marL="0">
+              <a:spcAft>
+                <a:spcPts val="900"/>
+              </a:spcAft>
               <a:buNone/>
             </a:pPr>
             <a:r>
@@ -2618,46 +3559,44 @@
                 <a:ea typeface="Calibri" pitchFamily="34" charset="-122"/>
                 <a:cs typeface="Calibri" pitchFamily="34" charset="-120"/>
               </a:rPr>
-              <a:t>On the empty baseline, at each frequency f form a 32-D vector x = [Re, Im of the 16 S-parameters]. Fit a ridge (L2) linear regression  y = W x + b  that maps the SIMULATED vector to the MEASURED vector, learning the 32x32 matrix W and offset b. Trained on 70% of frequencies, tested on the held-out 30%. 'Sim after linear map' = W x_sim + b.</a:t>
+              <a:t>R2 is computed only on frequencies the map never used while fitting, so it measures genuine generalization, not curve-fitting.</a:t>
             </a:r>
             <a:endParaRPr lang="en-US" sz="1100" dirty="0"/>
           </a:p>
-        </p:txBody>
-      </p:sp>
-      <p:sp>
-        <p:nvSpPr>
-          <p:cNvPr id="10" name="Text 7"/>
-          <p:cNvSpPr/>
-          <p:nvPr/>
-        </p:nvSpPr>
-        <p:spPr>
-          <a:xfrm>
-            <a:off x="457200" y="6446520"/>
-            <a:ext cx="11247120" cy="365760"/>
-          </a:xfrm>
-          <a:prstGeom prst="rect">
-            <a:avLst/>
-          </a:prstGeom>
-          <a:noFill/>
-          <a:ln/>
-        </p:spPr>
-        <p:txBody>
-          <a:bodyPr wrap="square" lIns="0" tIns="0" rIns="0" bIns="0" rtlCol="0" anchor="ctr"/>
-          <a:lstStyle/>
-          <a:p>
-            <a:pPr algn="ctr" indent="0" marL="0">
+          <a:p>
+            <a:pPr indent="0" marL="0">
+              <a:spcAft>
+                <a:spcPts val="900"/>
+              </a:spcAft>
               <a:buNone/>
             </a:pPr>
             <a:r>
-              <a:rPr lang="en-US" sz="1100" i="1" dirty="0">
+              <a:rPr lang="en-US" sz="1100" dirty="0">
                 <a:solidFill>
-                  <a:srgbClr val="836A68"/>
+                  <a:srgbClr val="2A1618"/>
                 </a:solidFill>
                 <a:latin typeface="Calibri" pitchFamily="34" charset="0"/>
                 <a:ea typeface="Calibri" pitchFamily="34" charset="-122"/>
                 <a:cs typeface="Calibri" pitchFamily="34" charset="-120"/>
               </a:rPr>
-              <a:t>Preliminary: only the empty baseline is cleanly paired. Nonlinear domain adaptation needs far more paired data (multiple sessions, matched tumor positions).</a:t>
+              <a:t>A model that merely memorized the training frequencies would score near 0 on the held-out set. The flexible MLP did exactly that (R2 &lt; 0).</a:t>
+            </a:r>
+            <a:endParaRPr lang="en-US" sz="1100" dirty="0"/>
+          </a:p>
+          <a:p>
+            <a:pPr indent="0" marL="0">
+              <a:buNone/>
+            </a:pPr>
+            <a:r>
+              <a:rPr lang="en-US" sz="1100" dirty="0">
+                <a:solidFill>
+                  <a:srgbClr val="2A1618"/>
+                </a:solidFill>
+                <a:latin typeface="Calibri" pitchFamily="34" charset="0"/>
+                <a:ea typeface="Calibri" pitchFamily="34" charset="-122"/>
+                <a:cs typeface="Calibri" pitchFamily="34" charset="-120"/>
+              </a:rPr>
+              <a:t>So R2 = 0.65 says a fixed linear transform already recovers most of the measured signal from the sim, on data it has not seen.</a:t>
             </a:r>
             <a:endParaRPr lang="en-US" sz="1100" dirty="0"/>
           </a:p>
@@ -2728,7 +3667,7 @@
                 <a:ea typeface="Cambria" pitchFamily="34" charset="-122"/>
                 <a:cs typeface="Cambria" pitchFamily="34" charset="-120"/>
               </a:rPr>
-              <a:t>Beet (dielectric) vs metal tumor, sim and measured</a:t>
+              <a:t>Can a model bridge the gap? (exploratory)</a:t>
             </a:r>
             <a:endParaRPr lang="en-US" sz="2900" dirty="0"/>
           </a:p>
@@ -2767,7 +3706,7 @@
                 <a:ea typeface="Calibri" pitchFamily="34" charset="-122"/>
                 <a:cs typeface="Calibri" pitchFamily="34" charset="-120"/>
               </a:rPr>
-              <a:t>How much differential signal a realistic dielectric target produces relative to metal</a:t>
+              <a:t>The learned map applied to one port, and its accuracy on unseen frequencies</a:t>
             </a:r>
             <a:endParaRPr lang="en-US" sz="1400" dirty="0"/>
           </a:p>
@@ -2775,7 +3714,7 @@
       </p:sp>
       <p:pic>
         <p:nvPicPr>
-          <p:cNvPr id="4" name="Image 0" descr="beet_vs_metal_dS.png">    </p:cNvPr>
+          <p:cNvPr id="4" name="Image 0" descr="sim_meas_correlation.png">    </p:cNvPr>
           <p:cNvPicPr>
             <a:picLocks noChangeAspect="1"/>
           </p:cNvPicPr>
@@ -2789,14 +3728,211 @@
         </p:blipFill>
         <p:spPr>
           <a:xfrm>
-            <a:off x="822960" y="1737360"/>
-            <a:ext cx="10515600" cy="4892040"/>
+            <a:off x="457200" y="1737360"/>
+            <a:ext cx="7772400" cy="3154680"/>
           </a:xfrm>
           <a:prstGeom prst="rect">
             <a:avLst/>
           </a:prstGeom>
         </p:spPr>
       </p:pic>
+      <p:sp>
+        <p:nvSpPr>
+          <p:cNvPr id="5" name="Shape 2"/>
+          <p:cNvSpPr/>
+          <p:nvPr/>
+        </p:nvSpPr>
+        <p:spPr>
+          <a:xfrm>
+            <a:off x="8412480" y="1645920"/>
+            <a:ext cx="3246120" cy="3794760"/>
+          </a:xfrm>
+          <a:prstGeom prst="roundRect">
+            <a:avLst>
+              <a:gd name="adj" fmla="val 2535"/>
+            </a:avLst>
+          </a:prstGeom>
+          <a:solidFill>
+            <a:srgbClr val="FBF4F2"/>
+          </a:solidFill>
+          <a:ln w="12700">
+            <a:solidFill>
+              <a:srgbClr val="E7D6D1"/>
+            </a:solidFill>
+            <a:prstDash val="solid"/>
+          </a:ln>
+          <a:effectLst>
+            <a:outerShdw sx="100000" sy="100000" kx="0" ky="0" algn="bl" rotWithShape="0" blurRad="88900" dist="38100" dir="5400000">
+              <a:srgbClr val="7A5C5E">
+                <a:alpha val="18000"/>
+              </a:srgbClr>
+            </a:outerShdw>
+          </a:effectLst>
+        </p:spPr>
+      </p:sp>
+      <p:sp>
+        <p:nvSpPr>
+          <p:cNvPr id="6" name="Text 3"/>
+          <p:cNvSpPr/>
+          <p:nvPr/>
+        </p:nvSpPr>
+        <p:spPr>
+          <a:xfrm>
+            <a:off x="8595360" y="1783080"/>
+            <a:ext cx="2926080" cy="365760"/>
+          </a:xfrm>
+          <a:prstGeom prst="rect">
+            <a:avLst/>
+          </a:prstGeom>
+          <a:noFill/>
+          <a:ln/>
+        </p:spPr>
+        <p:txBody>
+          <a:bodyPr wrap="square" lIns="0" tIns="0" rIns="0" bIns="0" rtlCol="0" anchor="ctr"/>
+          <a:lstStyle/>
+          <a:p>
+            <a:pPr indent="0" marL="0">
+              <a:buNone/>
+            </a:pPr>
+            <a:r>
+              <a:rPr lang="en-US" sz="1500" b="1" dirty="0">
+                <a:solidFill>
+                  <a:srgbClr val="BE0000"/>
+                </a:solidFill>
+                <a:latin typeface="Cambria" pitchFamily="34" charset="0"/>
+                <a:ea typeface="Cambria" pitchFamily="34" charset="-122"/>
+                <a:cs typeface="Cambria" pitchFamily="34" charset="-120"/>
+              </a:rPr>
+              <a:t>How to read it</a:t>
+            </a:r>
+            <a:endParaRPr lang="en-US" sz="1500" dirty="0"/>
+          </a:p>
+        </p:txBody>
+      </p:sp>
+      <p:sp>
+        <p:nvSpPr>
+          <p:cNvPr id="7" name="Text 4"/>
+          <p:cNvSpPr/>
+          <p:nvPr/>
+        </p:nvSpPr>
+        <p:spPr>
+          <a:xfrm>
+            <a:off x="8595360" y="2194560"/>
+            <a:ext cx="2971800" cy="3108960"/>
+          </a:xfrm>
+          <a:prstGeom prst="rect">
+            <a:avLst/>
+          </a:prstGeom>
+          <a:noFill/>
+          <a:ln/>
+        </p:spPr>
+        <p:txBody>
+          <a:bodyPr wrap="square" lIns="0" tIns="0" rIns="0" bIns="0" rtlCol="0" anchor="t"/>
+          <a:lstStyle/>
+          <a:p>
+            <a:pPr marL="342900" indent="-342900">
+              <a:spcAft>
+                <a:spcPts val="800"/>
+              </a:spcAft>
+              <a:buSzPct val="100000"/>
+              <a:buChar char="•"/>
+            </a:pPr>
+            <a:r>
+              <a:rPr lang="en-US" sz="1050" dirty="0">
+                <a:solidFill>
+                  <a:srgbClr val="2A1618"/>
+                </a:solidFill>
+                <a:latin typeface="Calibri" pitchFamily="34" charset="0"/>
+                <a:ea typeface="Calibri" pitchFamily="34" charset="-122"/>
+                <a:cs typeface="Calibri" pitchFamily="34" charset="-120"/>
+              </a:rPr>
+              <a:t>Left: the dashed line is the simulated S11 after the map (W x_sim + b). A perfect map would land on the measured (red) curve; it moves toward it but does not fully match.</a:t>
+            </a:r>
+            <a:endParaRPr lang="en-US" sz="1050" dirty="0"/>
+          </a:p>
+          <a:p>
+            <a:pPr marL="342900" indent="-342900">
+              <a:spcAft>
+                <a:spcPts val="800"/>
+              </a:spcAft>
+              <a:buSzPct val="100000"/>
+              <a:buChar char="•"/>
+            </a:pPr>
+            <a:r>
+              <a:rPr lang="en-US" sz="1050" dirty="0">
+                <a:solidFill>
+                  <a:srgbClr val="2A1618"/>
+                </a:solidFill>
+                <a:latin typeface="Calibri" pitchFamily="34" charset="0"/>
+                <a:ea typeface="Calibri" pitchFamily="34" charset="-122"/>
+                <a:cs typeface="Calibri" pitchFamily="34" charset="-120"/>
+              </a:rPr>
+              <a:t>Right: predicted vs measured on the held-out frequencies. Points on the diagonal are exact; the R2 = 0.65 spread shows the map captures most, not all, of the relationship.</a:t>
+            </a:r>
+            <a:endParaRPr lang="en-US" sz="1050" dirty="0"/>
+          </a:p>
+          <a:p>
+            <a:pPr marL="342900" indent="-342900">
+              <a:spcAft>
+                <a:spcPts val="800"/>
+              </a:spcAft>
+              <a:buSzPct val="100000"/>
+              <a:buChar char="•"/>
+            </a:pPr>
+            <a:r>
+              <a:rPr lang="en-US" sz="1050" dirty="0">
+                <a:solidFill>
+                  <a:srgbClr val="2A1618"/>
+                </a:solidFill>
+                <a:latin typeface="Calibri" pitchFamily="34" charset="0"/>
+                <a:ea typeface="Calibri" pitchFamily="34" charset="-122"/>
+                <a:cs typeface="Calibri" pitchFamily="34" charset="-120"/>
+              </a:rPr>
+              <a:t>A flexible MLP overfits and fails to generalize (R2 &lt; 0).</a:t>
+            </a:r>
+            <a:endParaRPr lang="en-US" sz="1050" dirty="0"/>
+          </a:p>
+        </p:txBody>
+      </p:sp>
+      <p:sp>
+        <p:nvSpPr>
+          <p:cNvPr id="8" name="Text 5"/>
+          <p:cNvSpPr/>
+          <p:nvPr/>
+        </p:nvSpPr>
+        <p:spPr>
+          <a:xfrm>
+            <a:off x="548640" y="6035040"/>
+            <a:ext cx="11091672" cy="548640"/>
+          </a:xfrm>
+          <a:prstGeom prst="rect">
+            <a:avLst/>
+          </a:prstGeom>
+          <a:noFill/>
+          <a:ln/>
+        </p:spPr>
+        <p:txBody>
+          <a:bodyPr wrap="square" lIns="0" tIns="0" rIns="0" bIns="0" rtlCol="0" anchor="ctr"/>
+          <a:lstStyle/>
+          <a:p>
+            <a:pPr algn="ctr" indent="0" marL="0">
+              <a:buNone/>
+            </a:pPr>
+            <a:r>
+              <a:rPr lang="en-US" sz="1250" i="1" dirty="0">
+                <a:solidFill>
+                  <a:srgbClr val="836A68"/>
+                </a:solidFill>
+                <a:latin typeface="Calibri" pitchFamily="34" charset="0"/>
+                <a:ea typeface="Calibri" pitchFamily="34" charset="-122"/>
+                <a:cs typeface="Calibri" pitchFamily="34" charset="-120"/>
+              </a:rPr>
+              <a:t>Preliminary: only the empty baseline is cleanly paired. Nonlinear domain adaptation needs far more paired data (multiple sessions, matched tumor positions).</a:t>
+            </a:r>
+            <a:endParaRPr lang="en-US" sz="1250" dirty="0"/>
+          </a:p>
+        </p:txBody>
+      </p:sp>
     </p:spTree>
   </p:cSld>
   <p:clrMapOvr>
@@ -2808,6 +3944,140 @@
 <file path=ppt/slides/slide12.xml><?xml version="1.0" encoding="utf-8"?>
 <p:sld xmlns:a="http://schemas.openxmlformats.org/drawingml/2006/main" xmlns:r="http://schemas.openxmlformats.org/officeDocument/2006/relationships" xmlns:p="http://schemas.openxmlformats.org/presentationml/2006/main">
   <p:cSld name="Slide 12">
+    <p:bg>
+      <p:bgPr>
+        <a:solidFill>
+          <a:srgbClr val="FFFFFF"/>
+        </a:solidFill>
+      </p:bgPr>
+    </p:bg>
+    <p:spTree>
+      <p:nvGrpSpPr>
+        <p:cNvPr id="1" name=""/>
+        <p:cNvGrpSpPr/>
+        <p:nvPr/>
+      </p:nvGrpSpPr>
+      <p:grpSpPr>
+        <a:xfrm>
+          <a:off x="0" y="0"/>
+          <a:ext cx="0" cy="0"/>
+          <a:chOff x="0" y="0"/>
+          <a:chExt cx="0" cy="0"/>
+        </a:xfrm>
+      </p:grpSpPr>
+      <p:sp>
+        <p:nvSpPr>
+          <p:cNvPr id="2" name="Text 0"/>
+          <p:cNvSpPr/>
+          <p:nvPr/>
+        </p:nvSpPr>
+        <p:spPr>
+          <a:xfrm>
+            <a:off x="548640" y="384048"/>
+            <a:ext cx="11091672" cy="640080"/>
+          </a:xfrm>
+          <a:prstGeom prst="rect">
+            <a:avLst/>
+          </a:prstGeom>
+          <a:noFill/>
+          <a:ln/>
+        </p:spPr>
+        <p:txBody>
+          <a:bodyPr wrap="square" lIns="0" tIns="0" rIns="0" bIns="0" rtlCol="0" anchor="ctr"/>
+          <a:lstStyle/>
+          <a:p>
+            <a:pPr indent="0" marL="0">
+              <a:buNone/>
+            </a:pPr>
+            <a:r>
+              <a:rPr lang="en-US" sz="2900" b="1" dirty="0">
+                <a:solidFill>
+                  <a:srgbClr val="2A1618"/>
+                </a:solidFill>
+                <a:latin typeface="Cambria" pitchFamily="34" charset="0"/>
+                <a:ea typeface="Cambria" pitchFamily="34" charset="-122"/>
+                <a:cs typeface="Cambria" pitchFamily="34" charset="-120"/>
+              </a:rPr>
+              <a:t>Beet (dielectric) vs metal tumor, sim and measured</a:t>
+            </a:r>
+            <a:endParaRPr lang="en-US" sz="2900" dirty="0"/>
+          </a:p>
+        </p:txBody>
+      </p:sp>
+      <p:sp>
+        <p:nvSpPr>
+          <p:cNvPr id="3" name="Text 1"/>
+          <p:cNvSpPr/>
+          <p:nvPr/>
+        </p:nvSpPr>
+        <p:spPr>
+          <a:xfrm>
+            <a:off x="548640" y="1033272"/>
+            <a:ext cx="11091672" cy="365760"/>
+          </a:xfrm>
+          <a:prstGeom prst="rect">
+            <a:avLst/>
+          </a:prstGeom>
+          <a:noFill/>
+          <a:ln/>
+        </p:spPr>
+        <p:txBody>
+          <a:bodyPr wrap="square" lIns="0" tIns="0" rIns="0" bIns="0" rtlCol="0" anchor="ctr"/>
+          <a:lstStyle/>
+          <a:p>
+            <a:pPr indent="0" marL="0">
+              <a:buNone/>
+            </a:pPr>
+            <a:r>
+              <a:rPr lang="en-US" sz="1400" b="1" dirty="0">
+                <a:solidFill>
+                  <a:srgbClr val="BE0000"/>
+                </a:solidFill>
+                <a:latin typeface="Calibri" pitchFamily="34" charset="0"/>
+                <a:ea typeface="Calibri" pitchFamily="34" charset="-122"/>
+                <a:cs typeface="Calibri" pitchFamily="34" charset="-120"/>
+              </a:rPr>
+              <a:t>How much differential signal a realistic dielectric target produces relative to metal</a:t>
+            </a:r>
+            <a:endParaRPr lang="en-US" sz="1400" dirty="0"/>
+          </a:p>
+        </p:txBody>
+      </p:sp>
+      <p:pic>
+        <p:nvPicPr>
+          <p:cNvPr id="4" name="Image 0" descr="beet_vs_metal_dS.png">    </p:cNvPr>
+          <p:cNvPicPr>
+            <a:picLocks noChangeAspect="1"/>
+          </p:cNvPicPr>
+          <p:nvPr/>
+        </p:nvPicPr>
+        <p:blipFill>
+          <a:blip r:embed="rId1"/>
+          <a:stretch>
+            <a:fillRect/>
+          </a:stretch>
+        </p:blipFill>
+        <p:spPr>
+          <a:xfrm>
+            <a:off x="822960" y="1737360"/>
+            <a:ext cx="10515600" cy="4892040"/>
+          </a:xfrm>
+          <a:prstGeom prst="rect">
+            <a:avLst/>
+          </a:prstGeom>
+        </p:spPr>
+      </p:pic>
+    </p:spTree>
+  </p:cSld>
+  <p:clrMapOvr>
+    <a:masterClrMapping/>
+  </p:clrMapOvr>
+</p:sld>
+</file>
+
+<file path=ppt/slides/slide13.xml><?xml version="1.0" encoding="utf-8"?>
+<p:sld xmlns:a="http://schemas.openxmlformats.org/drawingml/2006/main" xmlns:r="http://schemas.openxmlformats.org/officeDocument/2006/relationships" xmlns:p="http://schemas.openxmlformats.org/presentationml/2006/main">
+  <p:cSld name="Slide 13">
     <p:bg>
       <p:bgPr>
         <a:solidFill>

--- a/regression_deck/Deck3_Sim_vs_Measured.pptx
+++ b/regression_deck/Deck3_Sim_vs_Measured.pptx
@@ -18,9 +18,10 @@
     <p:sldId id="266" r:id="rId12"/>
     <p:sldId id="267" r:id="rId13"/>
     <p:sldId id="268" r:id="rId14"/>
+    <p:sldId id="269" r:id="rId15"/>
   </p:sldIdLst>
   <p:notesMasterIdLst>
-    <p:notesMasterId r:id="rId15"/>
+    <p:notesMasterId r:id="rId16"/>
   </p:notesMasterIdLst>
   <p:sldSz cx="12188952" cy="6858000"/>
   <p:notesSz cx="6858000" cy="12188952"/>
@@ -890,6 +891,94 @@
             <a:fld id="{F7021451-1387-4CA6-816F-3879F97B5CBC}" type="slidenum">
               <a:rPr lang="en-US"/>
               <a:t>13</a:t>
+            </a:fld>
+            <a:endParaRPr lang="en-US"/>
+          </a:p>
+        </p:txBody>
+      </p:sp>
+    </p:spTree>
+    <p:extLst>
+      <p:ext uri="{BB962C8B-B14F-4D97-AF65-F5344CB8AC3E}">
+        <p14:creationId xmlns:p14="http://schemas.microsoft.com/office/powerpoint/2010/main" val="1024086991"/>
+      </p:ext>
+    </p:extLst>
+  </p:cSld>
+  <p:clrMapOvr>
+    <a:masterClrMapping/>
+  </p:clrMapOvr>
+</p:notes>
+</file>
+
+<file path=ppt/notesSlides/notesSlide14.xml><?xml version="1.0" encoding="utf-8"?>
+<p:notes xmlns:a="http://schemas.openxmlformats.org/drawingml/2006/main" xmlns:r="http://schemas.openxmlformats.org/officeDocument/2006/relationships" xmlns:p="http://schemas.openxmlformats.org/presentationml/2006/main">
+  <p:cSld>
+    <p:spTree>
+      <p:nvGrpSpPr>
+        <p:cNvPr id="1" name=""/>
+        <p:cNvGrpSpPr/>
+        <p:nvPr/>
+      </p:nvGrpSpPr>
+      <p:grpSpPr>
+        <a:xfrm>
+          <a:off x="0" y="0"/>
+          <a:ext cx="0" cy="0"/>
+          <a:chOff x="0" y="0"/>
+          <a:chExt cx="0" cy="0"/>
+        </a:xfrm>
+      </p:grpSpPr>
+      <p:sp>
+        <p:nvSpPr>
+          <p:cNvPr id="2" name="Slide Image Placeholder 1"/>
+          <p:cNvSpPr>
+            <a:spLocks noGrp="1" noRot="1" noChangeAspect="1"/>
+          </p:cNvSpPr>
+          <p:nvPr>
+            <p:ph type="sldImg"/>
+          </p:nvPr>
+        </p:nvSpPr>
+        <p:spPr/>
+      </p:sp>
+      <p:sp>
+        <p:nvSpPr>
+          <p:cNvPr id="3" name="Notes Placeholder 2"/>
+          <p:cNvSpPr>
+            <a:spLocks noGrp="1"/>
+          </p:cNvSpPr>
+          <p:nvPr>
+            <p:ph type="body" idx="1"/>
+          </p:nvPr>
+        </p:nvSpPr>
+        <p:spPr/>
+        <p:txBody>
+          <a:bodyPr/>
+          <a:lstStyle/>
+          <a:p>
+            <a:r>
+              <a:rPr lang="en-US" dirty="0"/>
+              <a:t/>
+            </a:r>
+            <a:endParaRPr lang="en-US" dirty="0"/>
+          </a:p>
+        </p:txBody>
+      </p:sp>
+      <p:sp>
+        <p:nvSpPr>
+          <p:cNvPr id="4" name="Slide Number Placeholder 3"/>
+          <p:cNvSpPr>
+            <a:spLocks noGrp="1"/>
+          </p:cNvSpPr>
+          <p:nvPr>
+            <p:ph type="sldNum" sz="quarter" idx="10"/>
+          </p:nvPr>
+        </p:nvSpPr>
+        <p:spPr/>
+        <p:txBody>
+          <a:bodyPr/>
+          <a:lstStyle/>
+          <a:p>
+            <a:fld id="{F7021451-1387-4CA6-816F-3879F97B5CBC}" type="slidenum">
+              <a:rPr lang="en-US"/>
+              <a:t>14</a:t>
             </a:fld>
             <a:endParaRPr lang="en-US"/>
           </a:p>
@@ -2399,7 +2488,7 @@
                 <a:ea typeface="Cambria" pitchFamily="34" charset="-122"/>
                 <a:cs typeface="Cambria" pitchFamily="34" charset="-120"/>
               </a:rPr>
-              <a:t>How the sim to measured map is learned</a:t>
+              <a:t>Test 1: zero-shot, train on sim only, test on the bench</a:t>
             </a:r>
             <a:endParaRPr lang="en-US" sz="2900" dirty="0"/>
           </a:p>
@@ -2438,26 +2527,50 @@
                 <a:ea typeface="Calibri" pitchFamily="34" charset="-122"/>
                 <a:cs typeface="Calibri" pitchFamily="34" charset="-120"/>
               </a:rPr>
-              <a:t>A linear transfer fit on the empty baseline and tested on frequencies it never saw</a:t>
+              <a:t>If the CNN sees only simulated tumors, can it locate a real one? Direct transfer collapses</a:t>
             </a:r>
             <a:endParaRPr lang="en-US" sz="1400" dirty="0"/>
           </a:p>
         </p:txBody>
       </p:sp>
-      <p:sp>
-        <p:nvSpPr>
-          <p:cNvPr id="4" name="Shape 2"/>
-          <p:cNvSpPr/>
-          <p:nvPr/>
-        </p:nvSpPr>
-        <p:spPr>
-          <a:xfrm>
-            <a:off x="548640" y="1554480"/>
-            <a:ext cx="7040880" cy="822960"/>
+      <p:pic>
+        <p:nvPicPr>
+          <p:cNvPr id="4" name="Image 0" descr="zero_shot_sim2meas.png">    </p:cNvPr>
+          <p:cNvPicPr>
+            <a:picLocks noChangeAspect="1"/>
+          </p:cNvPicPr>
+          <p:nvPr/>
+        </p:nvPicPr>
+        <p:blipFill>
+          <a:blip r:embed="rId1"/>
+          <a:stretch>
+            <a:fillRect/>
+          </a:stretch>
+        </p:blipFill>
+        <p:spPr>
+          <a:xfrm>
+            <a:off x="320040" y="1463040"/>
+            <a:ext cx="8275320" cy="4434840"/>
+          </a:xfrm>
+          <a:prstGeom prst="rect">
+            <a:avLst/>
+          </a:prstGeom>
+        </p:spPr>
+      </p:pic>
+      <p:sp>
+        <p:nvSpPr>
+          <p:cNvPr id="5" name="Shape 2"/>
+          <p:cNvSpPr/>
+          <p:nvPr/>
+        </p:nvSpPr>
+        <p:spPr>
+          <a:xfrm>
+            <a:off x="8732520" y="1554480"/>
+            <a:ext cx="3108960" cy="4480560"/>
           </a:xfrm>
           <a:prstGeom prst="roundRect">
             <a:avLst>
-              <a:gd name="adj" fmla="val 10000"/>
+              <a:gd name="adj" fmla="val 2647"/>
             </a:avLst>
           </a:prstGeom>
           <a:solidFill>
@@ -2480,73 +2593,14 @@
       </p:sp>
       <p:sp>
         <p:nvSpPr>
-          <p:cNvPr id="5" name="Shape 3"/>
-          <p:cNvSpPr/>
-          <p:nvPr/>
-        </p:nvSpPr>
-        <p:spPr>
-          <a:xfrm>
-            <a:off x="749808" y="1737360"/>
-            <a:ext cx="457200" cy="457200"/>
-          </a:xfrm>
-          <a:prstGeom prst="ellipse">
-            <a:avLst/>
-          </a:prstGeom>
-          <a:solidFill>
-            <a:srgbClr val="BE0000"/>
-          </a:solidFill>
-          <a:ln/>
-        </p:spPr>
-      </p:sp>
-      <p:sp>
-        <p:nvSpPr>
-          <p:cNvPr id="6" name="Text 4"/>
-          <p:cNvSpPr/>
-          <p:nvPr/>
-        </p:nvSpPr>
-        <p:spPr>
-          <a:xfrm>
-            <a:off x="749808" y="1737360"/>
-            <a:ext cx="457200" cy="457200"/>
-          </a:xfrm>
-          <a:prstGeom prst="rect">
-            <a:avLst/>
-          </a:prstGeom>
-          <a:noFill/>
-          <a:ln/>
-        </p:spPr>
-        <p:txBody>
-          <a:bodyPr wrap="square" lIns="0" tIns="0" rIns="0" bIns="0" rtlCol="0" anchor="ctr"/>
-          <a:lstStyle/>
-          <a:p>
-            <a:pPr algn="ctr" indent="0" marL="0">
-              <a:buNone/>
-            </a:pPr>
-            <a:r>
-              <a:rPr lang="en-US" sz="1800" b="1" dirty="0">
-                <a:solidFill>
-                  <a:srgbClr val="FFFFFF"/>
-                </a:solidFill>
-                <a:latin typeface="Cambria" pitchFamily="34" charset="0"/>
-                <a:ea typeface="Cambria" pitchFamily="34" charset="-122"/>
-                <a:cs typeface="Cambria" pitchFamily="34" charset="-120"/>
-              </a:rPr>
-              <a:t>1</a:t>
-            </a:r>
-            <a:endParaRPr lang="en-US" sz="1800" dirty="0"/>
-          </a:p>
-        </p:txBody>
-      </p:sp>
-      <p:sp>
-        <p:nvSpPr>
-          <p:cNvPr id="7" name="Text 5"/>
-          <p:cNvSpPr/>
-          <p:nvPr/>
-        </p:nvSpPr>
-        <p:spPr>
-          <a:xfrm>
-            <a:off x="1371600" y="1609344"/>
-            <a:ext cx="2286000" cy="713232"/>
+          <p:cNvPr id="6" name="Text 3"/>
+          <p:cNvSpPr/>
+          <p:nvPr/>
+        </p:nvSpPr>
+        <p:spPr>
+          <a:xfrm>
+            <a:off x="8915400" y="1691640"/>
+            <a:ext cx="2788920" cy="320040"/>
           </a:xfrm>
           <a:prstGeom prst="rect">
             <a:avLst/>
@@ -2570,7 +2624,7 @@
                 <a:ea typeface="Cambria" pitchFamily="34" charset="-122"/>
                 <a:cs typeface="Cambria" pitchFamily="34" charset="-120"/>
               </a:rPr>
-              <a:t>Pair the empty baselines</a:t>
+              <a:t>What this tests</a:t>
             </a:r>
             <a:endParaRPr lang="en-US" sz="1400" dirty="0"/>
           </a:p>
@@ -2578,14 +2632,14 @@
       </p:sp>
       <p:sp>
         <p:nvSpPr>
-          <p:cNvPr id="8" name="Text 6"/>
-          <p:cNvSpPr/>
-          <p:nvPr/>
-        </p:nvSpPr>
-        <p:spPr>
-          <a:xfrm>
-            <a:off x="3703320" y="1591056"/>
-            <a:ext cx="3794760" cy="749808"/>
+          <p:cNvPr id="7" name="Text 4"/>
+          <p:cNvSpPr/>
+          <p:nvPr/>
+        </p:nvSpPr>
+        <p:spPr>
+          <a:xfrm>
+            <a:off x="8915400" y="2057400"/>
+            <a:ext cx="2788920" cy="1371600"/>
           </a:xfrm>
           <a:prstGeom prst="rect">
             <a:avLst/>
@@ -2594,14 +2648,18 @@
           <a:ln/>
         </p:spPr>
         <p:txBody>
-          <a:bodyPr wrap="square" lIns="0" tIns="0" rIns="0" bIns="0" rtlCol="0" anchor="ctr"/>
-          <a:lstStyle/>
-          <a:p>
-            <a:pPr indent="0" marL="0">
-              <a:buNone/>
+          <a:bodyPr wrap="square" lIns="0" tIns="0" rIns="0" bIns="0" rtlCol="0" anchor="t"/>
+          <a:lstStyle/>
+          <a:p>
+            <a:pPr marL="342900" indent="-342900">
+              <a:spcAft>
+                <a:spcPts val="800"/>
+              </a:spcAft>
+              <a:buSzPct val="100000"/>
+              <a:buChar char="•"/>
             </a:pPr>
             <a:r>
-              <a:rPr lang="en-US" sz="1070" dirty="0">
+              <a:rPr lang="en-US" sz="1030" dirty="0">
                 <a:solidFill>
                   <a:srgbClr val="2A1618"/>
                 </a:solidFill>
@@ -2609,115 +2667,43 @@
                 <a:ea typeface="Calibri" pitchFamily="34" charset="-122"/>
                 <a:cs typeface="Calibri" pitchFamily="34" charset="-120"/>
               </a:rPr>
-              <a:t>Sim empty phantom and measured empty phantom are the same physical state (no tumor), so their S-parameters can be matched frequency by frequency.</a:t>
-            </a:r>
-            <a:endParaRPr lang="en-US" sz="1070" dirty="0"/>
-          </a:p>
-        </p:txBody>
-      </p:sp>
-      <p:sp>
-        <p:nvSpPr>
-          <p:cNvPr id="9" name="Shape 7"/>
-          <p:cNvSpPr/>
-          <p:nvPr/>
-        </p:nvSpPr>
-        <p:spPr>
-          <a:xfrm>
-            <a:off x="548640" y="2487168"/>
-            <a:ext cx="7040880" cy="822960"/>
-          </a:xfrm>
-          <a:prstGeom prst="roundRect">
-            <a:avLst>
-              <a:gd name="adj" fmla="val 10000"/>
-            </a:avLst>
-          </a:prstGeom>
-          <a:solidFill>
-            <a:srgbClr val="FBF4F2"/>
-          </a:solidFill>
-          <a:ln w="12700">
-            <a:solidFill>
-              <a:srgbClr val="E7D6D1"/>
-            </a:solidFill>
-            <a:prstDash val="solid"/>
-          </a:ln>
-          <a:effectLst>
-            <a:outerShdw sx="100000" sy="100000" kx="0" ky="0" algn="bl" rotWithShape="0" blurRad="88900" dist="38100" dir="5400000">
-              <a:srgbClr val="7A5C5E">
-                <a:alpha val="18000"/>
-              </a:srgbClr>
-            </a:outerShdw>
-          </a:effectLst>
-        </p:spPr>
-      </p:sp>
-      <p:sp>
-        <p:nvSpPr>
-          <p:cNvPr id="10" name="Shape 8"/>
-          <p:cNvSpPr/>
-          <p:nvPr/>
-        </p:nvSpPr>
-        <p:spPr>
-          <a:xfrm>
-            <a:off x="749808" y="2670048"/>
-            <a:ext cx="457200" cy="457200"/>
-          </a:xfrm>
-          <a:prstGeom prst="ellipse">
-            <a:avLst/>
-          </a:prstGeom>
-          <a:solidFill>
-            <a:srgbClr val="BE0000"/>
-          </a:solidFill>
-          <a:ln/>
-        </p:spPr>
-      </p:sp>
-      <p:sp>
-        <p:nvSpPr>
-          <p:cNvPr id="11" name="Text 9"/>
-          <p:cNvSpPr/>
-          <p:nvPr/>
-        </p:nvSpPr>
-        <p:spPr>
-          <a:xfrm>
-            <a:off x="749808" y="2670048"/>
-            <a:ext cx="457200" cy="457200"/>
-          </a:xfrm>
-          <a:prstGeom prst="rect">
-            <a:avLst/>
-          </a:prstGeom>
-          <a:noFill/>
-          <a:ln/>
-        </p:spPr>
-        <p:txBody>
-          <a:bodyPr wrap="square" lIns="0" tIns="0" rIns="0" bIns="0" rtlCol="0" anchor="ctr"/>
-          <a:lstStyle/>
-          <a:p>
-            <a:pPr algn="ctr" indent="0" marL="0">
-              <a:buNone/>
+              <a:t>Train a CNN on simulated tumor dS only; no measured data is seen in training.</a:t>
+            </a:r>
+            <a:endParaRPr lang="en-US" sz="1030" dirty="0"/>
+          </a:p>
+          <a:p>
+            <a:pPr marL="342900" indent="-342900">
+              <a:spcAft>
+                <a:spcPts val="800"/>
+              </a:spcAft>
+              <a:buSzPct val="100000"/>
+              <a:buChar char="•"/>
             </a:pPr>
             <a:r>
-              <a:rPr lang="en-US" sz="1800" b="1" dirty="0">
+              <a:rPr lang="en-US" sz="1030" dirty="0">
                 <a:solidFill>
-                  <a:srgbClr val="FFFFFF"/>
+                  <a:srgbClr val="2A1618"/>
                 </a:solidFill>
-                <a:latin typeface="Cambria" pitchFamily="34" charset="0"/>
-                <a:ea typeface="Cambria" pitchFamily="34" charset="-122"/>
-                <a:cs typeface="Cambria" pitchFamily="34" charset="-120"/>
+                <a:latin typeface="Calibri" pitchFamily="34" charset="0"/>
+                <a:ea typeface="Calibri" pitchFamily="34" charset="-122"/>
+                <a:cs typeface="Calibri" pitchFamily="34" charset="-120"/>
               </a:rPr>
-              <a:t>2</a:t>
-            </a:r>
-            <a:endParaRPr lang="en-US" sz="1800" dirty="0"/>
-          </a:p>
-        </p:txBody>
-      </p:sp>
-      <p:sp>
-        <p:nvSpPr>
-          <p:cNvPr id="12" name="Text 10"/>
-          <p:cNvSpPr/>
-          <p:nvPr/>
-        </p:nvSpPr>
-        <p:spPr>
-          <a:xfrm>
-            <a:off x="1371600" y="2542032"/>
-            <a:ext cx="2286000" cy="713232"/>
+              <a:t>Then hand it the measured S-parameters and ask for (x,y).</a:t>
+            </a:r>
+            <a:endParaRPr lang="en-US" sz="1030" dirty="0"/>
+          </a:p>
+        </p:txBody>
+      </p:sp>
+      <p:sp>
+        <p:nvSpPr>
+          <p:cNvPr id="8" name="Text 5"/>
+          <p:cNvSpPr/>
+          <p:nvPr/>
+        </p:nvSpPr>
+        <p:spPr>
+          <a:xfrm>
+            <a:off x="8915400" y="3611880"/>
+            <a:ext cx="2788920" cy="320040"/>
           </a:xfrm>
           <a:prstGeom prst="rect">
             <a:avLst/>
@@ -2741,7 +2727,7 @@
                 <a:ea typeface="Cambria" pitchFamily="34" charset="-122"/>
                 <a:cs typeface="Cambria" pitchFamily="34" charset="-120"/>
               </a:rPr>
-              <a:t>One vector per frequency</a:t>
+              <a:t>The result</a:t>
             </a:r>
             <a:endParaRPr lang="en-US" sz="1400" dirty="0"/>
           </a:p>
@@ -2749,14 +2735,14 @@
       </p:sp>
       <p:sp>
         <p:nvSpPr>
-          <p:cNvPr id="13" name="Text 11"/>
-          <p:cNvSpPr/>
-          <p:nvPr/>
-        </p:nvSpPr>
-        <p:spPr>
-          <a:xfrm>
-            <a:off x="3703320" y="2523744"/>
-            <a:ext cx="3794760" cy="749808"/>
+          <p:cNvPr id="9" name="Text 6"/>
+          <p:cNvSpPr/>
+          <p:nvPr/>
+        </p:nvSpPr>
+        <p:spPr>
+          <a:xfrm>
+            <a:off x="8915400" y="3977640"/>
+            <a:ext cx="2788920" cy="1965960"/>
           </a:xfrm>
           <a:prstGeom prst="rect">
             <a:avLst/>
@@ -2765,14 +2751,18 @@
           <a:ln/>
         </p:spPr>
         <p:txBody>
-          <a:bodyPr wrap="square" lIns="0" tIns="0" rIns="0" bIns="0" rtlCol="0" anchor="ctr"/>
-          <a:lstStyle/>
-          <a:p>
-            <a:pPr indent="0" marL="0">
-              <a:buNone/>
+          <a:bodyPr wrap="square" lIns="0" tIns="0" rIns="0" bIns="0" rtlCol="0" anchor="t"/>
+          <a:lstStyle/>
+          <a:p>
+            <a:pPr marL="342900" indent="-342900">
+              <a:spcAft>
+                <a:spcPts val="800"/>
+              </a:spcAft>
+              <a:buSzPct val="100000"/>
+              <a:buChar char="•"/>
             </a:pPr>
             <a:r>
-              <a:rPr lang="en-US" sz="1070" dirty="0">
+              <a:rPr lang="en-US" sz="1030" dirty="0">
                 <a:solidFill>
                   <a:srgbClr val="2A1618"/>
                 </a:solidFill>
@@ -2780,170 +2770,20 @@
                 <a:ea typeface="Calibri" pitchFamily="34" charset="-122"/>
                 <a:cs typeface="Calibri" pitchFamily="34" charset="-120"/>
               </a:rPr>
-              <a:t>At each of 512 frequencies (2 to 8 GHz), stack the real and imaginary parts of the 16 S-parameters into a 32-D vector. Sim = input x, measured = target y.</a:t>
-            </a:r>
-            <a:endParaRPr lang="en-US" sz="1070" dirty="0"/>
-          </a:p>
-        </p:txBody>
-      </p:sp>
-      <p:sp>
-        <p:nvSpPr>
-          <p:cNvPr id="14" name="Shape 12"/>
-          <p:cNvSpPr/>
-          <p:nvPr/>
-        </p:nvSpPr>
-        <p:spPr>
-          <a:xfrm>
-            <a:off x="548640" y="3419856"/>
-            <a:ext cx="7040880" cy="822960"/>
-          </a:xfrm>
-          <a:prstGeom prst="roundRect">
-            <a:avLst>
-              <a:gd name="adj" fmla="val 10000"/>
-            </a:avLst>
-          </a:prstGeom>
-          <a:solidFill>
-            <a:srgbClr val="FBF4F2"/>
-          </a:solidFill>
-          <a:ln w="12700">
-            <a:solidFill>
-              <a:srgbClr val="E7D6D1"/>
-            </a:solidFill>
-            <a:prstDash val="solid"/>
-          </a:ln>
-          <a:effectLst>
-            <a:outerShdw sx="100000" sy="100000" kx="0" ky="0" algn="bl" rotWithShape="0" blurRad="88900" dist="38100" dir="5400000">
-              <a:srgbClr val="7A5C5E">
-                <a:alpha val="18000"/>
-              </a:srgbClr>
-            </a:outerShdw>
-          </a:effectLst>
-        </p:spPr>
-      </p:sp>
-      <p:sp>
-        <p:nvSpPr>
-          <p:cNvPr id="15" name="Shape 13"/>
-          <p:cNvSpPr/>
-          <p:nvPr/>
-        </p:nvSpPr>
-        <p:spPr>
-          <a:xfrm>
-            <a:off x="749808" y="3602736"/>
-            <a:ext cx="457200" cy="457200"/>
-          </a:xfrm>
-          <a:prstGeom prst="ellipse">
-            <a:avLst/>
-          </a:prstGeom>
-          <a:solidFill>
-            <a:srgbClr val="BE0000"/>
-          </a:solidFill>
-          <a:ln/>
-        </p:spPr>
-      </p:sp>
-      <p:sp>
-        <p:nvSpPr>
-          <p:cNvPr id="16" name="Text 14"/>
-          <p:cNvSpPr/>
-          <p:nvPr/>
-        </p:nvSpPr>
-        <p:spPr>
-          <a:xfrm>
-            <a:off x="749808" y="3602736"/>
-            <a:ext cx="457200" cy="457200"/>
-          </a:xfrm>
-          <a:prstGeom prst="rect">
-            <a:avLst/>
-          </a:prstGeom>
-          <a:noFill/>
-          <a:ln/>
-        </p:spPr>
-        <p:txBody>
-          <a:bodyPr wrap="square" lIns="0" tIns="0" rIns="0" bIns="0" rtlCol="0" anchor="ctr"/>
-          <a:lstStyle/>
-          <a:p>
-            <a:pPr algn="ctr" indent="0" marL="0">
-              <a:buNone/>
+              <a:t>In-domain (held-out sim) it localizes to 15 mm, so the pipeline works.</a:t>
+            </a:r>
+            <a:endParaRPr lang="en-US" sz="1030" dirty="0"/>
+          </a:p>
+          <a:p>
+            <a:pPr marL="342900" indent="-342900">
+              <a:spcAft>
+                <a:spcPts val="800"/>
+              </a:spcAft>
+              <a:buSzPct val="100000"/>
+              <a:buChar char="•"/>
             </a:pPr>
             <a:r>
-              <a:rPr lang="en-US" sz="1800" b="1" dirty="0">
-                <a:solidFill>
-                  <a:srgbClr val="FFFFFF"/>
-                </a:solidFill>
-                <a:latin typeface="Cambria" pitchFamily="34" charset="0"/>
-                <a:ea typeface="Cambria" pitchFamily="34" charset="-122"/>
-                <a:cs typeface="Cambria" pitchFamily="34" charset="-120"/>
-              </a:rPr>
-              <a:t>3</a:t>
-            </a:r>
-            <a:endParaRPr lang="en-US" sz="1800" dirty="0"/>
-          </a:p>
-        </p:txBody>
-      </p:sp>
-      <p:sp>
-        <p:nvSpPr>
-          <p:cNvPr id="17" name="Text 15"/>
-          <p:cNvSpPr/>
-          <p:nvPr/>
-        </p:nvSpPr>
-        <p:spPr>
-          <a:xfrm>
-            <a:off x="1371600" y="3474720"/>
-            <a:ext cx="2286000" cy="713232"/>
-          </a:xfrm>
-          <a:prstGeom prst="rect">
-            <a:avLst/>
-          </a:prstGeom>
-          <a:noFill/>
-          <a:ln/>
-        </p:spPr>
-        <p:txBody>
-          <a:bodyPr wrap="square" lIns="0" tIns="0" rIns="0" bIns="0" rtlCol="0" anchor="ctr"/>
-          <a:lstStyle/>
-          <a:p>
-            <a:pPr indent="0" marL="0">
-              <a:buNone/>
-            </a:pPr>
-            <a:r>
-              <a:rPr lang="en-US" sz="1400" b="1" dirty="0">
-                <a:solidFill>
-                  <a:srgbClr val="BE0000"/>
-                </a:solidFill>
-                <a:latin typeface="Cambria" pitchFamily="34" charset="0"/>
-                <a:ea typeface="Cambria" pitchFamily="34" charset="-122"/>
-                <a:cs typeface="Cambria" pitchFamily="34" charset="-120"/>
-              </a:rPr>
-              <a:t>Split the frequencies 70 / 30</a:t>
-            </a:r>
-            <a:endParaRPr lang="en-US" sz="1400" dirty="0"/>
-          </a:p>
-        </p:txBody>
-      </p:sp>
-      <p:sp>
-        <p:nvSpPr>
-          <p:cNvPr id="18" name="Text 16"/>
-          <p:cNvSpPr/>
-          <p:nvPr/>
-        </p:nvSpPr>
-        <p:spPr>
-          <a:xfrm>
-            <a:off x="3703320" y="3456432"/>
-            <a:ext cx="3794760" cy="749808"/>
-          </a:xfrm>
-          <a:prstGeom prst="rect">
-            <a:avLst/>
-          </a:prstGeom>
-          <a:noFill/>
-          <a:ln/>
-        </p:spPr>
-        <p:txBody>
-          <a:bodyPr wrap="square" lIns="0" tIns="0" rIns="0" bIns="0" rtlCol="0" anchor="ctr"/>
-          <a:lstStyle/>
-          <a:p>
-            <a:pPr indent="0" marL="0">
-              <a:buNone/>
-            </a:pPr>
-            <a:r>
-              <a:rPr lang="en-US" sz="1070" dirty="0">
+              <a:rPr lang="en-US" sz="1030" dirty="0">
                 <a:solidFill>
                   <a:srgbClr val="2A1618"/>
                 </a:solidFill>
@@ -2951,170 +2791,20 @@
                 <a:ea typeface="Calibri" pitchFamily="34" charset="-122"/>
                 <a:cs typeface="Calibri" pitchFamily="34" charset="-120"/>
               </a:rPr>
-              <a:t>Fit on 70% of the frequencies; hold out the other 30% for testing. The map never sees the test frequencies while it is being fit.</a:t>
-            </a:r>
-            <a:endParaRPr lang="en-US" sz="1070" dirty="0"/>
-          </a:p>
-        </p:txBody>
-      </p:sp>
-      <p:sp>
-        <p:nvSpPr>
-          <p:cNvPr id="19" name="Shape 17"/>
-          <p:cNvSpPr/>
-          <p:nvPr/>
-        </p:nvSpPr>
-        <p:spPr>
-          <a:xfrm>
-            <a:off x="548640" y="4352544"/>
-            <a:ext cx="7040880" cy="822960"/>
-          </a:xfrm>
-          <a:prstGeom prst="roundRect">
-            <a:avLst>
-              <a:gd name="adj" fmla="val 10000"/>
-            </a:avLst>
-          </a:prstGeom>
-          <a:solidFill>
-            <a:srgbClr val="FBF4F2"/>
-          </a:solidFill>
-          <a:ln w="12700">
-            <a:solidFill>
-              <a:srgbClr val="E7D6D1"/>
-            </a:solidFill>
-            <a:prstDash val="solid"/>
-          </a:ln>
-          <a:effectLst>
-            <a:outerShdw sx="100000" sy="100000" kx="0" ky="0" algn="bl" rotWithShape="0" blurRad="88900" dist="38100" dir="5400000">
-              <a:srgbClr val="7A5C5E">
-                <a:alpha val="18000"/>
-              </a:srgbClr>
-            </a:outerShdw>
-          </a:effectLst>
-        </p:spPr>
-      </p:sp>
-      <p:sp>
-        <p:nvSpPr>
-          <p:cNvPr id="20" name="Shape 18"/>
-          <p:cNvSpPr/>
-          <p:nvPr/>
-        </p:nvSpPr>
-        <p:spPr>
-          <a:xfrm>
-            <a:off x="749808" y="4535424"/>
-            <a:ext cx="457200" cy="457200"/>
-          </a:xfrm>
-          <a:prstGeom prst="ellipse">
-            <a:avLst/>
-          </a:prstGeom>
-          <a:solidFill>
-            <a:srgbClr val="BE0000"/>
-          </a:solidFill>
-          <a:ln/>
-        </p:spPr>
-      </p:sp>
-      <p:sp>
-        <p:nvSpPr>
-          <p:cNvPr id="21" name="Text 19"/>
-          <p:cNvSpPr/>
-          <p:nvPr/>
-        </p:nvSpPr>
-        <p:spPr>
-          <a:xfrm>
-            <a:off x="749808" y="4535424"/>
-            <a:ext cx="457200" cy="457200"/>
-          </a:xfrm>
-          <a:prstGeom prst="rect">
-            <a:avLst/>
-          </a:prstGeom>
-          <a:noFill/>
-          <a:ln/>
-        </p:spPr>
-        <p:txBody>
-          <a:bodyPr wrap="square" lIns="0" tIns="0" rIns="0" bIns="0" rtlCol="0" anchor="ctr"/>
-          <a:lstStyle/>
-          <a:p>
-            <a:pPr algn="ctr" indent="0" marL="0">
-              <a:buNone/>
+              <a:t>On the bench it hits 74 mm, worse than the 34 mm predict-centre chance line.</a:t>
+            </a:r>
+            <a:endParaRPr lang="en-US" sz="1030" dirty="0"/>
+          </a:p>
+          <a:p>
+            <a:pPr marL="342900" indent="-342900">
+              <a:spcAft>
+                <a:spcPts val="800"/>
+              </a:spcAft>
+              <a:buSzPct val="100000"/>
+              <a:buChar char="•"/>
             </a:pPr>
             <a:r>
-              <a:rPr lang="en-US" sz="1800" b="1" dirty="0">
-                <a:solidFill>
-                  <a:srgbClr val="FFFFFF"/>
-                </a:solidFill>
-                <a:latin typeface="Cambria" pitchFamily="34" charset="0"/>
-                <a:ea typeface="Cambria" pitchFamily="34" charset="-122"/>
-                <a:cs typeface="Cambria" pitchFamily="34" charset="-120"/>
-              </a:rPr>
-              <a:t>4</a:t>
-            </a:r>
-            <a:endParaRPr lang="en-US" sz="1800" dirty="0"/>
-          </a:p>
-        </p:txBody>
-      </p:sp>
-      <p:sp>
-        <p:nvSpPr>
-          <p:cNvPr id="22" name="Text 20"/>
-          <p:cNvSpPr/>
-          <p:nvPr/>
-        </p:nvSpPr>
-        <p:spPr>
-          <a:xfrm>
-            <a:off x="1371600" y="4407408"/>
-            <a:ext cx="2286000" cy="713232"/>
-          </a:xfrm>
-          <a:prstGeom prst="rect">
-            <a:avLst/>
-          </a:prstGeom>
-          <a:noFill/>
-          <a:ln/>
-        </p:spPr>
-        <p:txBody>
-          <a:bodyPr wrap="square" lIns="0" tIns="0" rIns="0" bIns="0" rtlCol="0" anchor="ctr"/>
-          <a:lstStyle/>
-          <a:p>
-            <a:pPr indent="0" marL="0">
-              <a:buNone/>
-            </a:pPr>
-            <a:r>
-              <a:rPr lang="en-US" sz="1400" b="1" dirty="0">
-                <a:solidFill>
-                  <a:srgbClr val="BE0000"/>
-                </a:solidFill>
-                <a:latin typeface="Cambria" pitchFamily="34" charset="0"/>
-                <a:ea typeface="Cambria" pitchFamily="34" charset="-122"/>
-                <a:cs typeface="Cambria" pitchFamily="34" charset="-120"/>
-              </a:rPr>
-              <a:t>Fit the linear map</a:t>
-            </a:r>
-            <a:endParaRPr lang="en-US" sz="1400" dirty="0"/>
-          </a:p>
-        </p:txBody>
-      </p:sp>
-      <p:sp>
-        <p:nvSpPr>
-          <p:cNvPr id="23" name="Text 21"/>
-          <p:cNvSpPr/>
-          <p:nvPr/>
-        </p:nvSpPr>
-        <p:spPr>
-          <a:xfrm>
-            <a:off x="3703320" y="4389120"/>
-            <a:ext cx="3794760" cy="749808"/>
-          </a:xfrm>
-          <a:prstGeom prst="rect">
-            <a:avLst/>
-          </a:prstGeom>
-          <a:noFill/>
-          <a:ln/>
-        </p:spPr>
-        <p:txBody>
-          <a:bodyPr wrap="square" lIns="0" tIns="0" rIns="0" bIns="0" rtlCol="0" anchor="ctr"/>
-          <a:lstStyle/>
-          <a:p>
-            <a:pPr indent="0" marL="0">
-              <a:buNone/>
-            </a:pPr>
-            <a:r>
-              <a:rPr lang="en-US" sz="1070" dirty="0">
+              <a:rPr lang="en-US" sz="1030" dirty="0">
                 <a:solidFill>
                   <a:srgbClr val="2A1618"/>
                 </a:solidFill>
@@ -3122,76 +2812,22 @@
                 <a:ea typeface="Calibri" pitchFamily="34" charset="-122"/>
                 <a:cs typeface="Calibri" pitchFamily="34" charset="-120"/>
               </a:rPr>
-              <a:t>Ridge (L2) regression learns a 32x32 matrix W and offset b that best convert the sim vector into the measured vector.</a:t>
-            </a:r>
-            <a:endParaRPr lang="en-US" sz="1070" dirty="0"/>
-          </a:p>
-        </p:txBody>
-      </p:sp>
-      <p:sp>
-        <p:nvSpPr>
-          <p:cNvPr id="24" name="Shape 22"/>
-          <p:cNvSpPr/>
-          <p:nvPr/>
-        </p:nvSpPr>
-        <p:spPr>
-          <a:xfrm>
-            <a:off x="548640" y="5285232"/>
-            <a:ext cx="7040880" cy="822960"/>
-          </a:xfrm>
-          <a:prstGeom prst="roundRect">
-            <a:avLst>
-              <a:gd name="adj" fmla="val 10000"/>
-            </a:avLst>
-          </a:prstGeom>
-          <a:solidFill>
-            <a:srgbClr val="FBF4F2"/>
-          </a:solidFill>
-          <a:ln w="12700">
-            <a:solidFill>
-              <a:srgbClr val="E7D6D1"/>
-            </a:solidFill>
-            <a:prstDash val="solid"/>
-          </a:ln>
-          <a:effectLst>
-            <a:outerShdw sx="100000" sy="100000" kx="0" ky="0" algn="bl" rotWithShape="0" blurRad="88900" dist="38100" dir="5400000">
-              <a:srgbClr val="7A5C5E">
-                <a:alpha val="18000"/>
-              </a:srgbClr>
-            </a:outerShdw>
-          </a:effectLst>
-        </p:spPr>
-      </p:sp>
-      <p:sp>
-        <p:nvSpPr>
-          <p:cNvPr id="25" name="Shape 23"/>
-          <p:cNvSpPr/>
-          <p:nvPr/>
-        </p:nvSpPr>
-        <p:spPr>
-          <a:xfrm>
-            <a:off x="749808" y="5468112"/>
-            <a:ext cx="457200" cy="457200"/>
-          </a:xfrm>
-          <a:prstGeom prst="ellipse">
-            <a:avLst/>
-          </a:prstGeom>
-          <a:solidFill>
-            <a:srgbClr val="BE0000"/>
-          </a:solidFill>
-          <a:ln/>
-        </p:spPr>
-      </p:sp>
-      <p:sp>
-        <p:nvSpPr>
-          <p:cNvPr id="26" name="Text 24"/>
-          <p:cNvSpPr/>
-          <p:nvPr/>
-        </p:nvSpPr>
-        <p:spPr>
-          <a:xfrm>
-            <a:off x="749808" y="5468112"/>
-            <a:ext cx="457200" cy="457200"/>
+              <a:t>Predictions collapse to one biased corner: the measured signal is out-of-distribution for a sim-only model.</a:t>
+            </a:r>
+            <a:endParaRPr lang="en-US" sz="1030" dirty="0"/>
+          </a:p>
+        </p:txBody>
+      </p:sp>
+      <p:sp>
+        <p:nvSpPr>
+          <p:cNvPr id="10" name="Text 7"/>
+          <p:cNvSpPr/>
+          <p:nvPr/>
+        </p:nvSpPr>
+        <p:spPr>
+          <a:xfrm>
+            <a:off x="320040" y="6035040"/>
+            <a:ext cx="8275320" cy="502920"/>
           </a:xfrm>
           <a:prstGeom prst="rect">
             <a:avLst/>
@@ -3207,236 +2843,7 @@
               <a:buNone/>
             </a:pPr>
             <a:r>
-              <a:rPr lang="en-US" sz="1800" b="1" dirty="0">
-                <a:solidFill>
-                  <a:srgbClr val="FFFFFF"/>
-                </a:solidFill>
-                <a:latin typeface="Cambria" pitchFamily="34" charset="0"/>
-                <a:ea typeface="Cambria" pitchFamily="34" charset="-122"/>
-                <a:cs typeface="Cambria" pitchFamily="34" charset="-120"/>
-              </a:rPr>
-              <a:t>5</a:t>
-            </a:r>
-            <a:endParaRPr lang="en-US" sz="1800" dirty="0"/>
-          </a:p>
-        </p:txBody>
-      </p:sp>
-      <p:sp>
-        <p:nvSpPr>
-          <p:cNvPr id="27" name="Text 25"/>
-          <p:cNvSpPr/>
-          <p:nvPr/>
-        </p:nvSpPr>
-        <p:spPr>
-          <a:xfrm>
-            <a:off x="1371600" y="5340096"/>
-            <a:ext cx="2286000" cy="713232"/>
-          </a:xfrm>
-          <a:prstGeom prst="rect">
-            <a:avLst/>
-          </a:prstGeom>
-          <a:noFill/>
-          <a:ln/>
-        </p:spPr>
-        <p:txBody>
-          <a:bodyPr wrap="square" lIns="0" tIns="0" rIns="0" bIns="0" rtlCol="0" anchor="ctr"/>
-          <a:lstStyle/>
-          <a:p>
-            <a:pPr indent="0" marL="0">
-              <a:buNone/>
-            </a:pPr>
-            <a:r>
-              <a:rPr lang="en-US" sz="1400" b="1" dirty="0">
-                <a:solidFill>
-                  <a:srgbClr val="BE0000"/>
-                </a:solidFill>
-                <a:latin typeface="Cambria" pitchFamily="34" charset="0"/>
-                <a:ea typeface="Cambria" pitchFamily="34" charset="-122"/>
-                <a:cs typeface="Cambria" pitchFamily="34" charset="-120"/>
-              </a:rPr>
-              <a:t>Test on the held-out 30%</a:t>
-            </a:r>
-            <a:endParaRPr lang="en-US" sz="1400" dirty="0"/>
-          </a:p>
-        </p:txBody>
-      </p:sp>
-      <p:sp>
-        <p:nvSpPr>
-          <p:cNvPr id="28" name="Text 26"/>
-          <p:cNvSpPr/>
-          <p:nvPr/>
-        </p:nvSpPr>
-        <p:spPr>
-          <a:xfrm>
-            <a:off x="3703320" y="5321808"/>
-            <a:ext cx="3794760" cy="749808"/>
-          </a:xfrm>
-          <a:prstGeom prst="rect">
-            <a:avLst/>
-          </a:prstGeom>
-          <a:noFill/>
-          <a:ln/>
-        </p:spPr>
-        <p:txBody>
-          <a:bodyPr wrap="square" lIns="0" tIns="0" rIns="0" bIns="0" rtlCol="0" anchor="ctr"/>
-          <a:lstStyle/>
-          <a:p>
-            <a:pPr indent="0" marL="0">
-              <a:buNone/>
-            </a:pPr>
-            <a:r>
-              <a:rPr lang="en-US" sz="1070" dirty="0">
-                <a:solidFill>
-                  <a:srgbClr val="2A1618"/>
-                </a:solidFill>
-                <a:latin typeface="Calibri" pitchFamily="34" charset="0"/>
-                <a:ea typeface="Calibri" pitchFamily="34" charset="-122"/>
-                <a:cs typeface="Calibri" pitchFamily="34" charset="-120"/>
-              </a:rPr>
-              <a:t>Apply W and b to the unseen frequencies and compare to the true measured values, giving R2 = 0.65.</a:t>
-            </a:r>
-            <a:endParaRPr lang="en-US" sz="1070" dirty="0"/>
-          </a:p>
-        </p:txBody>
-      </p:sp>
-      <p:sp>
-        <p:nvSpPr>
-          <p:cNvPr id="29" name="Shape 27"/>
-          <p:cNvSpPr/>
-          <p:nvPr/>
-        </p:nvSpPr>
-        <p:spPr>
-          <a:xfrm>
-            <a:off x="7772400" y="1554480"/>
-            <a:ext cx="3886200" cy="1600200"/>
-          </a:xfrm>
-          <a:prstGeom prst="roundRect">
-            <a:avLst>
-              <a:gd name="adj" fmla="val 5143"/>
-            </a:avLst>
-          </a:prstGeom>
-          <a:solidFill>
-            <a:srgbClr val="FBF4F2"/>
-          </a:solidFill>
-          <a:ln w="12700">
-            <a:solidFill>
-              <a:srgbClr val="E7D6D1"/>
-            </a:solidFill>
-            <a:prstDash val="solid"/>
-          </a:ln>
-          <a:effectLst>
-            <a:outerShdw sx="100000" sy="100000" kx="0" ky="0" algn="bl" rotWithShape="0" blurRad="88900" dist="38100" dir="5400000">
-              <a:srgbClr val="7A5C5E">
-                <a:alpha val="18000"/>
-              </a:srgbClr>
-            </a:outerShdw>
-          </a:effectLst>
-        </p:spPr>
-      </p:sp>
-      <p:sp>
-        <p:nvSpPr>
-          <p:cNvPr id="30" name="Text 28"/>
-          <p:cNvSpPr/>
-          <p:nvPr/>
-        </p:nvSpPr>
-        <p:spPr>
-          <a:xfrm>
-            <a:off x="7955280" y="1691640"/>
-            <a:ext cx="3474720" cy="320040"/>
-          </a:xfrm>
-          <a:prstGeom prst="rect">
-            <a:avLst/>
-          </a:prstGeom>
-          <a:noFill/>
-          <a:ln/>
-        </p:spPr>
-        <p:txBody>
-          <a:bodyPr wrap="square" lIns="0" tIns="0" rIns="0" bIns="0" rtlCol="0" anchor="ctr"/>
-          <a:lstStyle/>
-          <a:p>
-            <a:pPr indent="0" marL="0">
-              <a:buNone/>
-            </a:pPr>
-            <a:r>
-              <a:rPr lang="en-US" sz="1400" b="1" dirty="0">
-                <a:solidFill>
-                  <a:srgbClr val="BE0000"/>
-                </a:solidFill>
-                <a:latin typeface="Cambria" pitchFamily="34" charset="0"/>
-                <a:ea typeface="Cambria" pitchFamily="34" charset="-122"/>
-                <a:cs typeface="Cambria" pitchFamily="34" charset="-120"/>
-              </a:rPr>
-              <a:t>The equation</a:t>
-            </a:r>
-            <a:endParaRPr lang="en-US" sz="1400" dirty="0"/>
-          </a:p>
-        </p:txBody>
-      </p:sp>
-      <p:sp>
-        <p:nvSpPr>
-          <p:cNvPr id="31" name="Text 29"/>
-          <p:cNvSpPr/>
-          <p:nvPr/>
-        </p:nvSpPr>
-        <p:spPr>
-          <a:xfrm>
-            <a:off x="7955280" y="2011680"/>
-            <a:ext cx="3520440" cy="457200"/>
-          </a:xfrm>
-          <a:prstGeom prst="rect">
-            <a:avLst/>
-          </a:prstGeom>
-          <a:noFill/>
-          <a:ln/>
-        </p:spPr>
-        <p:txBody>
-          <a:bodyPr wrap="square" lIns="0" tIns="0" rIns="0" bIns="0" rtlCol="0" anchor="ctr"/>
-          <a:lstStyle/>
-          <a:p>
-            <a:pPr algn="ctr" indent="0" marL="0">
-              <a:buNone/>
-            </a:pPr>
-            <a:r>
-              <a:rPr lang="en-US" sz="2200" b="1" dirty="0">
-                <a:solidFill>
-                  <a:srgbClr val="2A1618"/>
-                </a:solidFill>
-                <a:latin typeface="Cambria" pitchFamily="34" charset="0"/>
-                <a:ea typeface="Cambria" pitchFamily="34" charset="-122"/>
-                <a:cs typeface="Cambria" pitchFamily="34" charset="-120"/>
-              </a:rPr>
-              <a:t>y = W x + b</a:t>
-            </a:r>
-            <a:endParaRPr lang="en-US" sz="2200" dirty="0"/>
-          </a:p>
-        </p:txBody>
-      </p:sp>
-      <p:sp>
-        <p:nvSpPr>
-          <p:cNvPr id="32" name="Text 30"/>
-          <p:cNvSpPr/>
-          <p:nvPr/>
-        </p:nvSpPr>
-        <p:spPr>
-          <a:xfrm>
-            <a:off x="7955280" y="2514600"/>
-            <a:ext cx="3520440" cy="548640"/>
-          </a:xfrm>
-          <a:prstGeom prst="rect">
-            <a:avLst/>
-          </a:prstGeom>
-          <a:noFill/>
-          <a:ln/>
-        </p:spPr>
-        <p:txBody>
-          <a:bodyPr wrap="square" lIns="0" tIns="0" rIns="0" bIns="0" rtlCol="0" anchor="t"/>
-          <a:lstStyle/>
-          <a:p>
-            <a:pPr indent="0" marL="0">
-              <a:buNone/>
-            </a:pPr>
-            <a:r>
-              <a:rPr lang="en-US" sz="1000" dirty="0">
+              <a:rPr lang="en-US" sz="1200" i="1" dirty="0">
                 <a:solidFill>
                   <a:srgbClr val="836A68"/>
                 </a:solidFill>
@@ -3444,161 +2851,9 @@
                 <a:ea typeface="Calibri" pitchFamily="34" charset="-122"/>
                 <a:cs typeface="Calibri" pitchFamily="34" charset="-120"/>
               </a:rPr>
-              <a:t>x = sim [Re, Im of 16 S-params] (32-D); y = predicted measured; W (32x32) and b learned on the train frequencies.</a:t>
-            </a:r>
-            <a:endParaRPr lang="en-US" sz="1000" dirty="0"/>
-          </a:p>
-        </p:txBody>
-      </p:sp>
-      <p:sp>
-        <p:nvSpPr>
-          <p:cNvPr id="33" name="Shape 31"/>
-          <p:cNvSpPr/>
-          <p:nvPr/>
-        </p:nvSpPr>
-        <p:spPr>
-          <a:xfrm>
-            <a:off x="7772400" y="3291840"/>
-            <a:ext cx="3886200" cy="2971800"/>
-          </a:xfrm>
-          <a:prstGeom prst="roundRect">
-            <a:avLst>
-              <a:gd name="adj" fmla="val 2769"/>
-            </a:avLst>
-          </a:prstGeom>
-          <a:solidFill>
-            <a:srgbClr val="FBF4F2"/>
-          </a:solidFill>
-          <a:ln w="12700">
-            <a:solidFill>
-              <a:srgbClr val="E7D6D1"/>
-            </a:solidFill>
-            <a:prstDash val="solid"/>
-          </a:ln>
-          <a:effectLst>
-            <a:outerShdw sx="100000" sy="100000" kx="0" ky="0" algn="bl" rotWithShape="0" blurRad="88900" dist="38100" dir="5400000">
-              <a:srgbClr val="7A5C5E">
-                <a:alpha val="18000"/>
-              </a:srgbClr>
-            </a:outerShdw>
-          </a:effectLst>
-        </p:spPr>
-      </p:sp>
-      <p:sp>
-        <p:nvSpPr>
-          <p:cNvPr id="34" name="Text 32"/>
-          <p:cNvSpPr/>
-          <p:nvPr/>
-        </p:nvSpPr>
-        <p:spPr>
-          <a:xfrm>
-            <a:off x="7955280" y="3429000"/>
-            <a:ext cx="3566160" cy="365760"/>
-          </a:xfrm>
-          <a:prstGeom prst="rect">
-            <a:avLst/>
-          </a:prstGeom>
-          <a:noFill/>
-          <a:ln/>
-        </p:spPr>
-        <p:txBody>
-          <a:bodyPr wrap="square" lIns="0" tIns="0" rIns="0" bIns="0" rtlCol="0" anchor="ctr"/>
-          <a:lstStyle/>
-          <a:p>
-            <a:pPr indent="0" marL="0">
-              <a:buNone/>
-            </a:pPr>
-            <a:r>
-              <a:rPr lang="en-US" sz="1400" b="1" dirty="0">
-                <a:solidFill>
-                  <a:srgbClr val="BE0000"/>
-                </a:solidFill>
-                <a:latin typeface="Cambria" pitchFamily="34" charset="0"/>
-                <a:ea typeface="Cambria" pitchFamily="34" charset="-122"/>
-                <a:cs typeface="Cambria" pitchFamily="34" charset="-120"/>
-              </a:rPr>
-              <a:t>Why R2 = 0.65 is meaningful</a:t>
-            </a:r>
-            <a:endParaRPr lang="en-US" sz="1400" dirty="0"/>
-          </a:p>
-        </p:txBody>
-      </p:sp>
-      <p:sp>
-        <p:nvSpPr>
-          <p:cNvPr id="35" name="Text 33"/>
-          <p:cNvSpPr/>
-          <p:nvPr/>
-        </p:nvSpPr>
-        <p:spPr>
-          <a:xfrm>
-            <a:off x="7955280" y="3840480"/>
-            <a:ext cx="3566160" cy="2331720"/>
-          </a:xfrm>
-          <a:prstGeom prst="rect">
-            <a:avLst/>
-          </a:prstGeom>
-          <a:noFill/>
-          <a:ln/>
-        </p:spPr>
-        <p:txBody>
-          <a:bodyPr wrap="square" lIns="0" tIns="0" rIns="0" bIns="0" rtlCol="0" anchor="t"/>
-          <a:lstStyle/>
-          <a:p>
-            <a:pPr indent="0" marL="0">
-              <a:spcAft>
-                <a:spcPts val="900"/>
-              </a:spcAft>
-              <a:buNone/>
-            </a:pPr>
-            <a:r>
-              <a:rPr lang="en-US" sz="1100" dirty="0">
-                <a:solidFill>
-                  <a:srgbClr val="2A1618"/>
-                </a:solidFill>
-                <a:latin typeface="Calibri" pitchFamily="34" charset="0"/>
-                <a:ea typeface="Calibri" pitchFamily="34" charset="-122"/>
-                <a:cs typeface="Calibri" pitchFamily="34" charset="-120"/>
-              </a:rPr>
-              <a:t>R2 is computed only on frequencies the map never used while fitting, so it measures genuine generalization, not curve-fitting.</a:t>
-            </a:r>
-            <a:endParaRPr lang="en-US" sz="1100" dirty="0"/>
-          </a:p>
-          <a:p>
-            <a:pPr indent="0" marL="0">
-              <a:spcAft>
-                <a:spcPts val="900"/>
-              </a:spcAft>
-              <a:buNone/>
-            </a:pPr>
-            <a:r>
-              <a:rPr lang="en-US" sz="1100" dirty="0">
-                <a:solidFill>
-                  <a:srgbClr val="2A1618"/>
-                </a:solidFill>
-                <a:latin typeface="Calibri" pitchFamily="34" charset="0"/>
-                <a:ea typeface="Calibri" pitchFamily="34" charset="-122"/>
-                <a:cs typeface="Calibri" pitchFamily="34" charset="-120"/>
-              </a:rPr>
-              <a:t>A model that merely memorized the training frequencies would score near 0 on the held-out set. The flexible MLP did exactly that (R2 &lt; 0).</a:t>
-            </a:r>
-            <a:endParaRPr lang="en-US" sz="1100" dirty="0"/>
-          </a:p>
-          <a:p>
-            <a:pPr indent="0" marL="0">
-              <a:buNone/>
-            </a:pPr>
-            <a:r>
-              <a:rPr lang="en-US" sz="1100" dirty="0">
-                <a:solidFill>
-                  <a:srgbClr val="2A1618"/>
-                </a:solidFill>
-                <a:latin typeface="Calibri" pitchFamily="34" charset="0"/>
-                <a:ea typeface="Calibri" pitchFamily="34" charset="-122"/>
-                <a:cs typeface="Calibri" pitchFamily="34" charset="-120"/>
-              </a:rPr>
-              <a:t>So R2 = 0.65 says a fixed linear transform already recovers most of the measured signal from the sim, on data it has not seen.</a:t>
-            </a:r>
-            <a:endParaRPr lang="en-US" sz="1100" dirty="0"/>
+              <a:t>The antenna domain gap breaks direct transfer. The sim signal must be calibrated toward the bench first (next slides).</a:t>
+            </a:r>
+            <a:endParaRPr lang="en-US" sz="1200" dirty="0"/>
           </a:p>
         </p:txBody>
       </p:sp>
@@ -3667,7 +2922,7 @@
                 <a:ea typeface="Cambria" pitchFamily="34" charset="-122"/>
                 <a:cs typeface="Cambria" pitchFamily="34" charset="-120"/>
               </a:rPr>
-              <a:t>Can a model bridge the gap? (exploratory)</a:t>
+              <a:t>How the sim to measured map is learned</a:t>
             </a:r>
             <a:endParaRPr lang="en-US" sz="2900" dirty="0"/>
           </a:p>
@@ -3706,50 +2961,26 @@
                 <a:ea typeface="Calibri" pitchFamily="34" charset="-122"/>
                 <a:cs typeface="Calibri" pitchFamily="34" charset="-120"/>
               </a:rPr>
-              <a:t>The learned map applied to one port, and its accuracy on unseen frequencies</a:t>
+              <a:t>A linear transfer fit on the empty baseline and tested on frequencies it never saw</a:t>
             </a:r>
             <a:endParaRPr lang="en-US" sz="1400" dirty="0"/>
           </a:p>
         </p:txBody>
       </p:sp>
-      <p:pic>
-        <p:nvPicPr>
-          <p:cNvPr id="4" name="Image 0" descr="sim_meas_correlation.png">    </p:cNvPr>
-          <p:cNvPicPr>
-            <a:picLocks noChangeAspect="1"/>
-          </p:cNvPicPr>
-          <p:nvPr/>
-        </p:nvPicPr>
-        <p:blipFill>
-          <a:blip r:embed="rId1"/>
-          <a:stretch>
-            <a:fillRect/>
-          </a:stretch>
-        </p:blipFill>
-        <p:spPr>
-          <a:xfrm>
-            <a:off x="457200" y="1737360"/>
-            <a:ext cx="7772400" cy="3154680"/>
-          </a:xfrm>
-          <a:prstGeom prst="rect">
-            <a:avLst/>
-          </a:prstGeom>
-        </p:spPr>
-      </p:pic>
-      <p:sp>
-        <p:nvSpPr>
-          <p:cNvPr id="5" name="Shape 2"/>
-          <p:cNvSpPr/>
-          <p:nvPr/>
-        </p:nvSpPr>
-        <p:spPr>
-          <a:xfrm>
-            <a:off x="8412480" y="1645920"/>
-            <a:ext cx="3246120" cy="3794760"/>
+      <p:sp>
+        <p:nvSpPr>
+          <p:cNvPr id="4" name="Shape 2"/>
+          <p:cNvSpPr/>
+          <p:nvPr/>
+        </p:nvSpPr>
+        <p:spPr>
+          <a:xfrm>
+            <a:off x="548640" y="1554480"/>
+            <a:ext cx="7040880" cy="822960"/>
           </a:xfrm>
           <a:prstGeom prst="roundRect">
             <a:avLst>
-              <a:gd name="adj" fmla="val 2535"/>
+              <a:gd name="adj" fmla="val 10000"/>
             </a:avLst>
           </a:prstGeom>
           <a:solidFill>
@@ -3772,14 +3003,73 @@
       </p:sp>
       <p:sp>
         <p:nvSpPr>
-          <p:cNvPr id="6" name="Text 3"/>
-          <p:cNvSpPr/>
-          <p:nvPr/>
-        </p:nvSpPr>
-        <p:spPr>
-          <a:xfrm>
-            <a:off x="8595360" y="1783080"/>
-            <a:ext cx="2926080" cy="365760"/>
+          <p:cNvPr id="5" name="Shape 3"/>
+          <p:cNvSpPr/>
+          <p:nvPr/>
+        </p:nvSpPr>
+        <p:spPr>
+          <a:xfrm>
+            <a:off x="749808" y="1737360"/>
+            <a:ext cx="457200" cy="457200"/>
+          </a:xfrm>
+          <a:prstGeom prst="ellipse">
+            <a:avLst/>
+          </a:prstGeom>
+          <a:solidFill>
+            <a:srgbClr val="BE0000"/>
+          </a:solidFill>
+          <a:ln/>
+        </p:spPr>
+      </p:sp>
+      <p:sp>
+        <p:nvSpPr>
+          <p:cNvPr id="6" name="Text 4"/>
+          <p:cNvSpPr/>
+          <p:nvPr/>
+        </p:nvSpPr>
+        <p:spPr>
+          <a:xfrm>
+            <a:off x="749808" y="1737360"/>
+            <a:ext cx="457200" cy="457200"/>
+          </a:xfrm>
+          <a:prstGeom prst="rect">
+            <a:avLst/>
+          </a:prstGeom>
+          <a:noFill/>
+          <a:ln/>
+        </p:spPr>
+        <p:txBody>
+          <a:bodyPr wrap="square" lIns="0" tIns="0" rIns="0" bIns="0" rtlCol="0" anchor="ctr"/>
+          <a:lstStyle/>
+          <a:p>
+            <a:pPr algn="ctr" indent="0" marL="0">
+              <a:buNone/>
+            </a:pPr>
+            <a:r>
+              <a:rPr lang="en-US" sz="1800" b="1" dirty="0">
+                <a:solidFill>
+                  <a:srgbClr val="FFFFFF"/>
+                </a:solidFill>
+                <a:latin typeface="Cambria" pitchFamily="34" charset="0"/>
+                <a:ea typeface="Cambria" pitchFamily="34" charset="-122"/>
+                <a:cs typeface="Cambria" pitchFamily="34" charset="-120"/>
+              </a:rPr>
+              <a:t>1</a:t>
+            </a:r>
+            <a:endParaRPr lang="en-US" sz="1800" dirty="0"/>
+          </a:p>
+        </p:txBody>
+      </p:sp>
+      <p:sp>
+        <p:nvSpPr>
+          <p:cNvPr id="7" name="Text 5"/>
+          <p:cNvSpPr/>
+          <p:nvPr/>
+        </p:nvSpPr>
+        <p:spPr>
+          <a:xfrm>
+            <a:off x="1371600" y="1609344"/>
+            <a:ext cx="2286000" cy="713232"/>
           </a:xfrm>
           <a:prstGeom prst="rect">
             <a:avLst/>
@@ -3795,7 +3085,7 @@
               <a:buNone/>
             </a:pPr>
             <a:r>
-              <a:rPr lang="en-US" sz="1500" b="1" dirty="0">
+              <a:rPr lang="en-US" sz="1400" b="1" dirty="0">
                 <a:solidFill>
                   <a:srgbClr val="BE0000"/>
                 </a:solidFill>
@@ -3803,22 +3093,22 @@
                 <a:ea typeface="Cambria" pitchFamily="34" charset="-122"/>
                 <a:cs typeface="Cambria" pitchFamily="34" charset="-120"/>
               </a:rPr>
-              <a:t>How to read it</a:t>
-            </a:r>
-            <a:endParaRPr lang="en-US" sz="1500" dirty="0"/>
-          </a:p>
-        </p:txBody>
-      </p:sp>
-      <p:sp>
-        <p:nvSpPr>
-          <p:cNvPr id="7" name="Text 4"/>
-          <p:cNvSpPr/>
-          <p:nvPr/>
-        </p:nvSpPr>
-        <p:spPr>
-          <a:xfrm>
-            <a:off x="8595360" y="2194560"/>
-            <a:ext cx="2971800" cy="3108960"/>
+              <a:t>Pair the empty baselines</a:t>
+            </a:r>
+            <a:endParaRPr lang="en-US" sz="1400" dirty="0"/>
+          </a:p>
+        </p:txBody>
+      </p:sp>
+      <p:sp>
+        <p:nvSpPr>
+          <p:cNvPr id="8" name="Text 6"/>
+          <p:cNvSpPr/>
+          <p:nvPr/>
+        </p:nvSpPr>
+        <p:spPr>
+          <a:xfrm>
+            <a:off x="3703320" y="1591056"/>
+            <a:ext cx="3794760" cy="749808"/>
           </a:xfrm>
           <a:prstGeom prst="rect">
             <a:avLst/>
@@ -3827,18 +3117,14 @@
           <a:ln/>
         </p:spPr>
         <p:txBody>
-          <a:bodyPr wrap="square" lIns="0" tIns="0" rIns="0" bIns="0" rtlCol="0" anchor="t"/>
-          <a:lstStyle/>
-          <a:p>
-            <a:pPr marL="342900" indent="-342900">
-              <a:spcAft>
-                <a:spcPts val="800"/>
-              </a:spcAft>
-              <a:buSzPct val="100000"/>
-              <a:buChar char="•"/>
+          <a:bodyPr wrap="square" lIns="0" tIns="0" rIns="0" bIns="0" rtlCol="0" anchor="ctr"/>
+          <a:lstStyle/>
+          <a:p>
+            <a:pPr indent="0" marL="0">
+              <a:buNone/>
             </a:pPr>
             <a:r>
-              <a:rPr lang="en-US" sz="1050" dirty="0">
+              <a:rPr lang="en-US" sz="1070" dirty="0">
                 <a:solidFill>
                   <a:srgbClr val="2A1618"/>
                 </a:solidFill>
@@ -3846,20 +3132,170 @@
                 <a:ea typeface="Calibri" pitchFamily="34" charset="-122"/>
                 <a:cs typeface="Calibri" pitchFamily="34" charset="-120"/>
               </a:rPr>
-              <a:t>Left: the dashed line is the simulated S11 after the map (W x_sim + b). A perfect map would land on the measured (red) curve; it moves toward it but does not fully match.</a:t>
-            </a:r>
-            <a:endParaRPr lang="en-US" sz="1050" dirty="0"/>
-          </a:p>
-          <a:p>
-            <a:pPr marL="342900" indent="-342900">
-              <a:spcAft>
-                <a:spcPts val="800"/>
-              </a:spcAft>
-              <a:buSzPct val="100000"/>
-              <a:buChar char="•"/>
+              <a:t>Sim empty phantom and measured empty phantom are the same physical state (no tumor), so their S-parameters can be matched frequency by frequency.</a:t>
+            </a:r>
+            <a:endParaRPr lang="en-US" sz="1070" dirty="0"/>
+          </a:p>
+        </p:txBody>
+      </p:sp>
+      <p:sp>
+        <p:nvSpPr>
+          <p:cNvPr id="9" name="Shape 7"/>
+          <p:cNvSpPr/>
+          <p:nvPr/>
+        </p:nvSpPr>
+        <p:spPr>
+          <a:xfrm>
+            <a:off x="548640" y="2487168"/>
+            <a:ext cx="7040880" cy="822960"/>
+          </a:xfrm>
+          <a:prstGeom prst="roundRect">
+            <a:avLst>
+              <a:gd name="adj" fmla="val 10000"/>
+            </a:avLst>
+          </a:prstGeom>
+          <a:solidFill>
+            <a:srgbClr val="FBF4F2"/>
+          </a:solidFill>
+          <a:ln w="12700">
+            <a:solidFill>
+              <a:srgbClr val="E7D6D1"/>
+            </a:solidFill>
+            <a:prstDash val="solid"/>
+          </a:ln>
+          <a:effectLst>
+            <a:outerShdw sx="100000" sy="100000" kx="0" ky="0" algn="bl" rotWithShape="0" blurRad="88900" dist="38100" dir="5400000">
+              <a:srgbClr val="7A5C5E">
+                <a:alpha val="18000"/>
+              </a:srgbClr>
+            </a:outerShdw>
+          </a:effectLst>
+        </p:spPr>
+      </p:sp>
+      <p:sp>
+        <p:nvSpPr>
+          <p:cNvPr id="10" name="Shape 8"/>
+          <p:cNvSpPr/>
+          <p:nvPr/>
+        </p:nvSpPr>
+        <p:spPr>
+          <a:xfrm>
+            <a:off x="749808" y="2670048"/>
+            <a:ext cx="457200" cy="457200"/>
+          </a:xfrm>
+          <a:prstGeom prst="ellipse">
+            <a:avLst/>
+          </a:prstGeom>
+          <a:solidFill>
+            <a:srgbClr val="BE0000"/>
+          </a:solidFill>
+          <a:ln/>
+        </p:spPr>
+      </p:sp>
+      <p:sp>
+        <p:nvSpPr>
+          <p:cNvPr id="11" name="Text 9"/>
+          <p:cNvSpPr/>
+          <p:nvPr/>
+        </p:nvSpPr>
+        <p:spPr>
+          <a:xfrm>
+            <a:off x="749808" y="2670048"/>
+            <a:ext cx="457200" cy="457200"/>
+          </a:xfrm>
+          <a:prstGeom prst="rect">
+            <a:avLst/>
+          </a:prstGeom>
+          <a:noFill/>
+          <a:ln/>
+        </p:spPr>
+        <p:txBody>
+          <a:bodyPr wrap="square" lIns="0" tIns="0" rIns="0" bIns="0" rtlCol="0" anchor="ctr"/>
+          <a:lstStyle/>
+          <a:p>
+            <a:pPr algn="ctr" indent="0" marL="0">
+              <a:buNone/>
             </a:pPr>
             <a:r>
-              <a:rPr lang="en-US" sz="1050" dirty="0">
+              <a:rPr lang="en-US" sz="1800" b="1" dirty="0">
+                <a:solidFill>
+                  <a:srgbClr val="FFFFFF"/>
+                </a:solidFill>
+                <a:latin typeface="Cambria" pitchFamily="34" charset="0"/>
+                <a:ea typeface="Cambria" pitchFamily="34" charset="-122"/>
+                <a:cs typeface="Cambria" pitchFamily="34" charset="-120"/>
+              </a:rPr>
+              <a:t>2</a:t>
+            </a:r>
+            <a:endParaRPr lang="en-US" sz="1800" dirty="0"/>
+          </a:p>
+        </p:txBody>
+      </p:sp>
+      <p:sp>
+        <p:nvSpPr>
+          <p:cNvPr id="12" name="Text 10"/>
+          <p:cNvSpPr/>
+          <p:nvPr/>
+        </p:nvSpPr>
+        <p:spPr>
+          <a:xfrm>
+            <a:off x="1371600" y="2542032"/>
+            <a:ext cx="2286000" cy="713232"/>
+          </a:xfrm>
+          <a:prstGeom prst="rect">
+            <a:avLst/>
+          </a:prstGeom>
+          <a:noFill/>
+          <a:ln/>
+        </p:spPr>
+        <p:txBody>
+          <a:bodyPr wrap="square" lIns="0" tIns="0" rIns="0" bIns="0" rtlCol="0" anchor="ctr"/>
+          <a:lstStyle/>
+          <a:p>
+            <a:pPr indent="0" marL="0">
+              <a:buNone/>
+            </a:pPr>
+            <a:r>
+              <a:rPr lang="en-US" sz="1400" b="1" dirty="0">
+                <a:solidFill>
+                  <a:srgbClr val="BE0000"/>
+                </a:solidFill>
+                <a:latin typeface="Cambria" pitchFamily="34" charset="0"/>
+                <a:ea typeface="Cambria" pitchFamily="34" charset="-122"/>
+                <a:cs typeface="Cambria" pitchFamily="34" charset="-120"/>
+              </a:rPr>
+              <a:t>One vector per frequency</a:t>
+            </a:r>
+            <a:endParaRPr lang="en-US" sz="1400" dirty="0"/>
+          </a:p>
+        </p:txBody>
+      </p:sp>
+      <p:sp>
+        <p:nvSpPr>
+          <p:cNvPr id="13" name="Text 11"/>
+          <p:cNvSpPr/>
+          <p:nvPr/>
+        </p:nvSpPr>
+        <p:spPr>
+          <a:xfrm>
+            <a:off x="3703320" y="2523744"/>
+            <a:ext cx="3794760" cy="749808"/>
+          </a:xfrm>
+          <a:prstGeom prst="rect">
+            <a:avLst/>
+          </a:prstGeom>
+          <a:noFill/>
+          <a:ln/>
+        </p:spPr>
+        <p:txBody>
+          <a:bodyPr wrap="square" lIns="0" tIns="0" rIns="0" bIns="0" rtlCol="0" anchor="ctr"/>
+          <a:lstStyle/>
+          <a:p>
+            <a:pPr indent="0" marL="0">
+              <a:buNone/>
+            </a:pPr>
+            <a:r>
+              <a:rPr lang="en-US" sz="1070" dirty="0">
                 <a:solidFill>
                   <a:srgbClr val="2A1618"/>
                 </a:solidFill>
@@ -3867,20 +3303,170 @@
                 <a:ea typeface="Calibri" pitchFamily="34" charset="-122"/>
                 <a:cs typeface="Calibri" pitchFamily="34" charset="-120"/>
               </a:rPr>
-              <a:t>Right: predicted vs measured on the held-out frequencies. Points on the diagonal are exact; the R2 = 0.65 spread shows the map captures most, not all, of the relationship.</a:t>
-            </a:r>
-            <a:endParaRPr lang="en-US" sz="1050" dirty="0"/>
-          </a:p>
-          <a:p>
-            <a:pPr marL="342900" indent="-342900">
-              <a:spcAft>
-                <a:spcPts val="800"/>
-              </a:spcAft>
-              <a:buSzPct val="100000"/>
-              <a:buChar char="•"/>
+              <a:t>At each of 512 frequencies (2 to 8 GHz), stack the real and imaginary parts of the 16 S-parameters into a 32-D vector. Sim = input x, measured = target y.</a:t>
+            </a:r>
+            <a:endParaRPr lang="en-US" sz="1070" dirty="0"/>
+          </a:p>
+        </p:txBody>
+      </p:sp>
+      <p:sp>
+        <p:nvSpPr>
+          <p:cNvPr id="14" name="Shape 12"/>
+          <p:cNvSpPr/>
+          <p:nvPr/>
+        </p:nvSpPr>
+        <p:spPr>
+          <a:xfrm>
+            <a:off x="548640" y="3419856"/>
+            <a:ext cx="7040880" cy="822960"/>
+          </a:xfrm>
+          <a:prstGeom prst="roundRect">
+            <a:avLst>
+              <a:gd name="adj" fmla="val 10000"/>
+            </a:avLst>
+          </a:prstGeom>
+          <a:solidFill>
+            <a:srgbClr val="FBF4F2"/>
+          </a:solidFill>
+          <a:ln w="12700">
+            <a:solidFill>
+              <a:srgbClr val="E7D6D1"/>
+            </a:solidFill>
+            <a:prstDash val="solid"/>
+          </a:ln>
+          <a:effectLst>
+            <a:outerShdw sx="100000" sy="100000" kx="0" ky="0" algn="bl" rotWithShape="0" blurRad="88900" dist="38100" dir="5400000">
+              <a:srgbClr val="7A5C5E">
+                <a:alpha val="18000"/>
+              </a:srgbClr>
+            </a:outerShdw>
+          </a:effectLst>
+        </p:spPr>
+      </p:sp>
+      <p:sp>
+        <p:nvSpPr>
+          <p:cNvPr id="15" name="Shape 13"/>
+          <p:cNvSpPr/>
+          <p:nvPr/>
+        </p:nvSpPr>
+        <p:spPr>
+          <a:xfrm>
+            <a:off x="749808" y="3602736"/>
+            <a:ext cx="457200" cy="457200"/>
+          </a:xfrm>
+          <a:prstGeom prst="ellipse">
+            <a:avLst/>
+          </a:prstGeom>
+          <a:solidFill>
+            <a:srgbClr val="BE0000"/>
+          </a:solidFill>
+          <a:ln/>
+        </p:spPr>
+      </p:sp>
+      <p:sp>
+        <p:nvSpPr>
+          <p:cNvPr id="16" name="Text 14"/>
+          <p:cNvSpPr/>
+          <p:nvPr/>
+        </p:nvSpPr>
+        <p:spPr>
+          <a:xfrm>
+            <a:off x="749808" y="3602736"/>
+            <a:ext cx="457200" cy="457200"/>
+          </a:xfrm>
+          <a:prstGeom prst="rect">
+            <a:avLst/>
+          </a:prstGeom>
+          <a:noFill/>
+          <a:ln/>
+        </p:spPr>
+        <p:txBody>
+          <a:bodyPr wrap="square" lIns="0" tIns="0" rIns="0" bIns="0" rtlCol="0" anchor="ctr"/>
+          <a:lstStyle/>
+          <a:p>
+            <a:pPr algn="ctr" indent="0" marL="0">
+              <a:buNone/>
             </a:pPr>
             <a:r>
-              <a:rPr lang="en-US" sz="1050" dirty="0">
+              <a:rPr lang="en-US" sz="1800" b="1" dirty="0">
+                <a:solidFill>
+                  <a:srgbClr val="FFFFFF"/>
+                </a:solidFill>
+                <a:latin typeface="Cambria" pitchFamily="34" charset="0"/>
+                <a:ea typeface="Cambria" pitchFamily="34" charset="-122"/>
+                <a:cs typeface="Cambria" pitchFamily="34" charset="-120"/>
+              </a:rPr>
+              <a:t>3</a:t>
+            </a:r>
+            <a:endParaRPr lang="en-US" sz="1800" dirty="0"/>
+          </a:p>
+        </p:txBody>
+      </p:sp>
+      <p:sp>
+        <p:nvSpPr>
+          <p:cNvPr id="17" name="Text 15"/>
+          <p:cNvSpPr/>
+          <p:nvPr/>
+        </p:nvSpPr>
+        <p:spPr>
+          <a:xfrm>
+            <a:off x="1371600" y="3474720"/>
+            <a:ext cx="2286000" cy="713232"/>
+          </a:xfrm>
+          <a:prstGeom prst="rect">
+            <a:avLst/>
+          </a:prstGeom>
+          <a:noFill/>
+          <a:ln/>
+        </p:spPr>
+        <p:txBody>
+          <a:bodyPr wrap="square" lIns="0" tIns="0" rIns="0" bIns="0" rtlCol="0" anchor="ctr"/>
+          <a:lstStyle/>
+          <a:p>
+            <a:pPr indent="0" marL="0">
+              <a:buNone/>
+            </a:pPr>
+            <a:r>
+              <a:rPr lang="en-US" sz="1400" b="1" dirty="0">
+                <a:solidFill>
+                  <a:srgbClr val="BE0000"/>
+                </a:solidFill>
+                <a:latin typeface="Cambria" pitchFamily="34" charset="0"/>
+                <a:ea typeface="Cambria" pitchFamily="34" charset="-122"/>
+                <a:cs typeface="Cambria" pitchFamily="34" charset="-120"/>
+              </a:rPr>
+              <a:t>Split the frequencies 70 / 30</a:t>
+            </a:r>
+            <a:endParaRPr lang="en-US" sz="1400" dirty="0"/>
+          </a:p>
+        </p:txBody>
+      </p:sp>
+      <p:sp>
+        <p:nvSpPr>
+          <p:cNvPr id="18" name="Text 16"/>
+          <p:cNvSpPr/>
+          <p:nvPr/>
+        </p:nvSpPr>
+        <p:spPr>
+          <a:xfrm>
+            <a:off x="3703320" y="3456432"/>
+            <a:ext cx="3794760" cy="749808"/>
+          </a:xfrm>
+          <a:prstGeom prst="rect">
+            <a:avLst/>
+          </a:prstGeom>
+          <a:noFill/>
+          <a:ln/>
+        </p:spPr>
+        <p:txBody>
+          <a:bodyPr wrap="square" lIns="0" tIns="0" rIns="0" bIns="0" rtlCol="0" anchor="ctr"/>
+          <a:lstStyle/>
+          <a:p>
+            <a:pPr indent="0" marL="0">
+              <a:buNone/>
+            </a:pPr>
+            <a:r>
+              <a:rPr lang="en-US" sz="1070" dirty="0">
                 <a:solidFill>
                   <a:srgbClr val="2A1618"/>
                 </a:solidFill>
@@ -3888,22 +3474,76 @@
                 <a:ea typeface="Calibri" pitchFamily="34" charset="-122"/>
                 <a:cs typeface="Calibri" pitchFamily="34" charset="-120"/>
               </a:rPr>
-              <a:t>A flexible MLP overfits and fails to generalize (R2 &lt; 0).</a:t>
-            </a:r>
-            <a:endParaRPr lang="en-US" sz="1050" dirty="0"/>
-          </a:p>
-        </p:txBody>
-      </p:sp>
-      <p:sp>
-        <p:nvSpPr>
-          <p:cNvPr id="8" name="Text 5"/>
-          <p:cNvSpPr/>
-          <p:nvPr/>
-        </p:nvSpPr>
-        <p:spPr>
-          <a:xfrm>
-            <a:off x="548640" y="6035040"/>
-            <a:ext cx="11091672" cy="548640"/>
+              <a:t>Fit on 70% of the frequencies; hold out the other 30% for testing. The map never sees the test frequencies while it is being fit.</a:t>
+            </a:r>
+            <a:endParaRPr lang="en-US" sz="1070" dirty="0"/>
+          </a:p>
+        </p:txBody>
+      </p:sp>
+      <p:sp>
+        <p:nvSpPr>
+          <p:cNvPr id="19" name="Shape 17"/>
+          <p:cNvSpPr/>
+          <p:nvPr/>
+        </p:nvSpPr>
+        <p:spPr>
+          <a:xfrm>
+            <a:off x="548640" y="4352544"/>
+            <a:ext cx="7040880" cy="822960"/>
+          </a:xfrm>
+          <a:prstGeom prst="roundRect">
+            <a:avLst>
+              <a:gd name="adj" fmla="val 10000"/>
+            </a:avLst>
+          </a:prstGeom>
+          <a:solidFill>
+            <a:srgbClr val="FBF4F2"/>
+          </a:solidFill>
+          <a:ln w="12700">
+            <a:solidFill>
+              <a:srgbClr val="E7D6D1"/>
+            </a:solidFill>
+            <a:prstDash val="solid"/>
+          </a:ln>
+          <a:effectLst>
+            <a:outerShdw sx="100000" sy="100000" kx="0" ky="0" algn="bl" rotWithShape="0" blurRad="88900" dist="38100" dir="5400000">
+              <a:srgbClr val="7A5C5E">
+                <a:alpha val="18000"/>
+              </a:srgbClr>
+            </a:outerShdw>
+          </a:effectLst>
+        </p:spPr>
+      </p:sp>
+      <p:sp>
+        <p:nvSpPr>
+          <p:cNvPr id="20" name="Shape 18"/>
+          <p:cNvSpPr/>
+          <p:nvPr/>
+        </p:nvSpPr>
+        <p:spPr>
+          <a:xfrm>
+            <a:off x="749808" y="4535424"/>
+            <a:ext cx="457200" cy="457200"/>
+          </a:xfrm>
+          <a:prstGeom prst="ellipse">
+            <a:avLst/>
+          </a:prstGeom>
+          <a:solidFill>
+            <a:srgbClr val="BE0000"/>
+          </a:solidFill>
+          <a:ln/>
+        </p:spPr>
+      </p:sp>
+      <p:sp>
+        <p:nvSpPr>
+          <p:cNvPr id="21" name="Text 19"/>
+          <p:cNvSpPr/>
+          <p:nvPr/>
+        </p:nvSpPr>
+        <p:spPr>
+          <a:xfrm>
+            <a:off x="749808" y="4535424"/>
+            <a:ext cx="457200" cy="457200"/>
           </a:xfrm>
           <a:prstGeom prst="rect">
             <a:avLst/>
@@ -3919,7 +3559,407 @@
               <a:buNone/>
             </a:pPr>
             <a:r>
-              <a:rPr lang="en-US" sz="1250" i="1" dirty="0">
+              <a:rPr lang="en-US" sz="1800" b="1" dirty="0">
+                <a:solidFill>
+                  <a:srgbClr val="FFFFFF"/>
+                </a:solidFill>
+                <a:latin typeface="Cambria" pitchFamily="34" charset="0"/>
+                <a:ea typeface="Cambria" pitchFamily="34" charset="-122"/>
+                <a:cs typeface="Cambria" pitchFamily="34" charset="-120"/>
+              </a:rPr>
+              <a:t>4</a:t>
+            </a:r>
+            <a:endParaRPr lang="en-US" sz="1800" dirty="0"/>
+          </a:p>
+        </p:txBody>
+      </p:sp>
+      <p:sp>
+        <p:nvSpPr>
+          <p:cNvPr id="22" name="Text 20"/>
+          <p:cNvSpPr/>
+          <p:nvPr/>
+        </p:nvSpPr>
+        <p:spPr>
+          <a:xfrm>
+            <a:off x="1371600" y="4407408"/>
+            <a:ext cx="2286000" cy="713232"/>
+          </a:xfrm>
+          <a:prstGeom prst="rect">
+            <a:avLst/>
+          </a:prstGeom>
+          <a:noFill/>
+          <a:ln/>
+        </p:spPr>
+        <p:txBody>
+          <a:bodyPr wrap="square" lIns="0" tIns="0" rIns="0" bIns="0" rtlCol="0" anchor="ctr"/>
+          <a:lstStyle/>
+          <a:p>
+            <a:pPr indent="0" marL="0">
+              <a:buNone/>
+            </a:pPr>
+            <a:r>
+              <a:rPr lang="en-US" sz="1400" b="1" dirty="0">
+                <a:solidFill>
+                  <a:srgbClr val="BE0000"/>
+                </a:solidFill>
+                <a:latin typeface="Cambria" pitchFamily="34" charset="0"/>
+                <a:ea typeface="Cambria" pitchFamily="34" charset="-122"/>
+                <a:cs typeface="Cambria" pitchFamily="34" charset="-120"/>
+              </a:rPr>
+              <a:t>Fit the linear map</a:t>
+            </a:r>
+            <a:endParaRPr lang="en-US" sz="1400" dirty="0"/>
+          </a:p>
+        </p:txBody>
+      </p:sp>
+      <p:sp>
+        <p:nvSpPr>
+          <p:cNvPr id="23" name="Text 21"/>
+          <p:cNvSpPr/>
+          <p:nvPr/>
+        </p:nvSpPr>
+        <p:spPr>
+          <a:xfrm>
+            <a:off x="3703320" y="4389120"/>
+            <a:ext cx="3794760" cy="749808"/>
+          </a:xfrm>
+          <a:prstGeom prst="rect">
+            <a:avLst/>
+          </a:prstGeom>
+          <a:noFill/>
+          <a:ln/>
+        </p:spPr>
+        <p:txBody>
+          <a:bodyPr wrap="square" lIns="0" tIns="0" rIns="0" bIns="0" rtlCol="0" anchor="ctr"/>
+          <a:lstStyle/>
+          <a:p>
+            <a:pPr indent="0" marL="0">
+              <a:buNone/>
+            </a:pPr>
+            <a:r>
+              <a:rPr lang="en-US" sz="1070" dirty="0">
+                <a:solidFill>
+                  <a:srgbClr val="2A1618"/>
+                </a:solidFill>
+                <a:latin typeface="Calibri" pitchFamily="34" charset="0"/>
+                <a:ea typeface="Calibri" pitchFamily="34" charset="-122"/>
+                <a:cs typeface="Calibri" pitchFamily="34" charset="-120"/>
+              </a:rPr>
+              <a:t>Ridge (L2) regression learns a 32x32 matrix W and offset b that best convert the sim vector into the measured vector.</a:t>
+            </a:r>
+            <a:endParaRPr lang="en-US" sz="1070" dirty="0"/>
+          </a:p>
+        </p:txBody>
+      </p:sp>
+      <p:sp>
+        <p:nvSpPr>
+          <p:cNvPr id="24" name="Shape 22"/>
+          <p:cNvSpPr/>
+          <p:nvPr/>
+        </p:nvSpPr>
+        <p:spPr>
+          <a:xfrm>
+            <a:off x="548640" y="5285232"/>
+            <a:ext cx="7040880" cy="822960"/>
+          </a:xfrm>
+          <a:prstGeom prst="roundRect">
+            <a:avLst>
+              <a:gd name="adj" fmla="val 10000"/>
+            </a:avLst>
+          </a:prstGeom>
+          <a:solidFill>
+            <a:srgbClr val="FBF4F2"/>
+          </a:solidFill>
+          <a:ln w="12700">
+            <a:solidFill>
+              <a:srgbClr val="E7D6D1"/>
+            </a:solidFill>
+            <a:prstDash val="solid"/>
+          </a:ln>
+          <a:effectLst>
+            <a:outerShdw sx="100000" sy="100000" kx="0" ky="0" algn="bl" rotWithShape="0" blurRad="88900" dist="38100" dir="5400000">
+              <a:srgbClr val="7A5C5E">
+                <a:alpha val="18000"/>
+              </a:srgbClr>
+            </a:outerShdw>
+          </a:effectLst>
+        </p:spPr>
+      </p:sp>
+      <p:sp>
+        <p:nvSpPr>
+          <p:cNvPr id="25" name="Shape 23"/>
+          <p:cNvSpPr/>
+          <p:nvPr/>
+        </p:nvSpPr>
+        <p:spPr>
+          <a:xfrm>
+            <a:off x="749808" y="5468112"/>
+            <a:ext cx="457200" cy="457200"/>
+          </a:xfrm>
+          <a:prstGeom prst="ellipse">
+            <a:avLst/>
+          </a:prstGeom>
+          <a:solidFill>
+            <a:srgbClr val="BE0000"/>
+          </a:solidFill>
+          <a:ln/>
+        </p:spPr>
+      </p:sp>
+      <p:sp>
+        <p:nvSpPr>
+          <p:cNvPr id="26" name="Text 24"/>
+          <p:cNvSpPr/>
+          <p:nvPr/>
+        </p:nvSpPr>
+        <p:spPr>
+          <a:xfrm>
+            <a:off x="749808" y="5468112"/>
+            <a:ext cx="457200" cy="457200"/>
+          </a:xfrm>
+          <a:prstGeom prst="rect">
+            <a:avLst/>
+          </a:prstGeom>
+          <a:noFill/>
+          <a:ln/>
+        </p:spPr>
+        <p:txBody>
+          <a:bodyPr wrap="square" lIns="0" tIns="0" rIns="0" bIns="0" rtlCol="0" anchor="ctr"/>
+          <a:lstStyle/>
+          <a:p>
+            <a:pPr algn="ctr" indent="0" marL="0">
+              <a:buNone/>
+            </a:pPr>
+            <a:r>
+              <a:rPr lang="en-US" sz="1800" b="1" dirty="0">
+                <a:solidFill>
+                  <a:srgbClr val="FFFFFF"/>
+                </a:solidFill>
+                <a:latin typeface="Cambria" pitchFamily="34" charset="0"/>
+                <a:ea typeface="Cambria" pitchFamily="34" charset="-122"/>
+                <a:cs typeface="Cambria" pitchFamily="34" charset="-120"/>
+              </a:rPr>
+              <a:t>5</a:t>
+            </a:r>
+            <a:endParaRPr lang="en-US" sz="1800" dirty="0"/>
+          </a:p>
+        </p:txBody>
+      </p:sp>
+      <p:sp>
+        <p:nvSpPr>
+          <p:cNvPr id="27" name="Text 25"/>
+          <p:cNvSpPr/>
+          <p:nvPr/>
+        </p:nvSpPr>
+        <p:spPr>
+          <a:xfrm>
+            <a:off x="1371600" y="5340096"/>
+            <a:ext cx="2286000" cy="713232"/>
+          </a:xfrm>
+          <a:prstGeom prst="rect">
+            <a:avLst/>
+          </a:prstGeom>
+          <a:noFill/>
+          <a:ln/>
+        </p:spPr>
+        <p:txBody>
+          <a:bodyPr wrap="square" lIns="0" tIns="0" rIns="0" bIns="0" rtlCol="0" anchor="ctr"/>
+          <a:lstStyle/>
+          <a:p>
+            <a:pPr indent="0" marL="0">
+              <a:buNone/>
+            </a:pPr>
+            <a:r>
+              <a:rPr lang="en-US" sz="1400" b="1" dirty="0">
+                <a:solidFill>
+                  <a:srgbClr val="BE0000"/>
+                </a:solidFill>
+                <a:latin typeface="Cambria" pitchFamily="34" charset="0"/>
+                <a:ea typeface="Cambria" pitchFamily="34" charset="-122"/>
+                <a:cs typeface="Cambria" pitchFamily="34" charset="-120"/>
+              </a:rPr>
+              <a:t>Test on the held-out 30%</a:t>
+            </a:r>
+            <a:endParaRPr lang="en-US" sz="1400" dirty="0"/>
+          </a:p>
+        </p:txBody>
+      </p:sp>
+      <p:sp>
+        <p:nvSpPr>
+          <p:cNvPr id="28" name="Text 26"/>
+          <p:cNvSpPr/>
+          <p:nvPr/>
+        </p:nvSpPr>
+        <p:spPr>
+          <a:xfrm>
+            <a:off x="3703320" y="5321808"/>
+            <a:ext cx="3794760" cy="749808"/>
+          </a:xfrm>
+          <a:prstGeom prst="rect">
+            <a:avLst/>
+          </a:prstGeom>
+          <a:noFill/>
+          <a:ln/>
+        </p:spPr>
+        <p:txBody>
+          <a:bodyPr wrap="square" lIns="0" tIns="0" rIns="0" bIns="0" rtlCol="0" anchor="ctr"/>
+          <a:lstStyle/>
+          <a:p>
+            <a:pPr indent="0" marL="0">
+              <a:buNone/>
+            </a:pPr>
+            <a:r>
+              <a:rPr lang="en-US" sz="1070" dirty="0">
+                <a:solidFill>
+                  <a:srgbClr val="2A1618"/>
+                </a:solidFill>
+                <a:latin typeface="Calibri" pitchFamily="34" charset="0"/>
+                <a:ea typeface="Calibri" pitchFamily="34" charset="-122"/>
+                <a:cs typeface="Calibri" pitchFamily="34" charset="-120"/>
+              </a:rPr>
+              <a:t>Apply W and b to the unseen frequencies and compare to the true measured values, giving R2 = 0.65.</a:t>
+            </a:r>
+            <a:endParaRPr lang="en-US" sz="1070" dirty="0"/>
+          </a:p>
+        </p:txBody>
+      </p:sp>
+      <p:sp>
+        <p:nvSpPr>
+          <p:cNvPr id="29" name="Shape 27"/>
+          <p:cNvSpPr/>
+          <p:nvPr/>
+        </p:nvSpPr>
+        <p:spPr>
+          <a:xfrm>
+            <a:off x="7772400" y="1554480"/>
+            <a:ext cx="3886200" cy="1600200"/>
+          </a:xfrm>
+          <a:prstGeom prst="roundRect">
+            <a:avLst>
+              <a:gd name="adj" fmla="val 5143"/>
+            </a:avLst>
+          </a:prstGeom>
+          <a:solidFill>
+            <a:srgbClr val="FBF4F2"/>
+          </a:solidFill>
+          <a:ln w="12700">
+            <a:solidFill>
+              <a:srgbClr val="E7D6D1"/>
+            </a:solidFill>
+            <a:prstDash val="solid"/>
+          </a:ln>
+          <a:effectLst>
+            <a:outerShdw sx="100000" sy="100000" kx="0" ky="0" algn="bl" rotWithShape="0" blurRad="88900" dist="38100" dir="5400000">
+              <a:srgbClr val="7A5C5E">
+                <a:alpha val="18000"/>
+              </a:srgbClr>
+            </a:outerShdw>
+          </a:effectLst>
+        </p:spPr>
+      </p:sp>
+      <p:sp>
+        <p:nvSpPr>
+          <p:cNvPr id="30" name="Text 28"/>
+          <p:cNvSpPr/>
+          <p:nvPr/>
+        </p:nvSpPr>
+        <p:spPr>
+          <a:xfrm>
+            <a:off x="7955280" y="1691640"/>
+            <a:ext cx="3474720" cy="320040"/>
+          </a:xfrm>
+          <a:prstGeom prst="rect">
+            <a:avLst/>
+          </a:prstGeom>
+          <a:noFill/>
+          <a:ln/>
+        </p:spPr>
+        <p:txBody>
+          <a:bodyPr wrap="square" lIns="0" tIns="0" rIns="0" bIns="0" rtlCol="0" anchor="ctr"/>
+          <a:lstStyle/>
+          <a:p>
+            <a:pPr indent="0" marL="0">
+              <a:buNone/>
+            </a:pPr>
+            <a:r>
+              <a:rPr lang="en-US" sz="1400" b="1" dirty="0">
+                <a:solidFill>
+                  <a:srgbClr val="BE0000"/>
+                </a:solidFill>
+                <a:latin typeface="Cambria" pitchFamily="34" charset="0"/>
+                <a:ea typeface="Cambria" pitchFamily="34" charset="-122"/>
+                <a:cs typeface="Cambria" pitchFamily="34" charset="-120"/>
+              </a:rPr>
+              <a:t>The equation</a:t>
+            </a:r>
+            <a:endParaRPr lang="en-US" sz="1400" dirty="0"/>
+          </a:p>
+        </p:txBody>
+      </p:sp>
+      <p:sp>
+        <p:nvSpPr>
+          <p:cNvPr id="31" name="Text 29"/>
+          <p:cNvSpPr/>
+          <p:nvPr/>
+        </p:nvSpPr>
+        <p:spPr>
+          <a:xfrm>
+            <a:off x="7955280" y="2011680"/>
+            <a:ext cx="3520440" cy="457200"/>
+          </a:xfrm>
+          <a:prstGeom prst="rect">
+            <a:avLst/>
+          </a:prstGeom>
+          <a:noFill/>
+          <a:ln/>
+        </p:spPr>
+        <p:txBody>
+          <a:bodyPr wrap="square" lIns="0" tIns="0" rIns="0" bIns="0" rtlCol="0" anchor="ctr"/>
+          <a:lstStyle/>
+          <a:p>
+            <a:pPr algn="ctr" indent="0" marL="0">
+              <a:buNone/>
+            </a:pPr>
+            <a:r>
+              <a:rPr lang="en-US" sz="2200" b="1" dirty="0">
+                <a:solidFill>
+                  <a:srgbClr val="2A1618"/>
+                </a:solidFill>
+                <a:latin typeface="Cambria" pitchFamily="34" charset="0"/>
+                <a:ea typeface="Cambria" pitchFamily="34" charset="-122"/>
+                <a:cs typeface="Cambria" pitchFamily="34" charset="-120"/>
+              </a:rPr>
+              <a:t>y = W x + b</a:t>
+            </a:r>
+            <a:endParaRPr lang="en-US" sz="2200" dirty="0"/>
+          </a:p>
+        </p:txBody>
+      </p:sp>
+      <p:sp>
+        <p:nvSpPr>
+          <p:cNvPr id="32" name="Text 30"/>
+          <p:cNvSpPr/>
+          <p:nvPr/>
+        </p:nvSpPr>
+        <p:spPr>
+          <a:xfrm>
+            <a:off x="7955280" y="2514600"/>
+            <a:ext cx="3520440" cy="548640"/>
+          </a:xfrm>
+          <a:prstGeom prst="rect">
+            <a:avLst/>
+          </a:prstGeom>
+          <a:noFill/>
+          <a:ln/>
+        </p:spPr>
+        <p:txBody>
+          <a:bodyPr wrap="square" lIns="0" tIns="0" rIns="0" bIns="0" rtlCol="0" anchor="t"/>
+          <a:lstStyle/>
+          <a:p>
+            <a:pPr indent="0" marL="0">
+              <a:buNone/>
+            </a:pPr>
+            <a:r>
+              <a:rPr lang="en-US" sz="1000" dirty="0">
                 <a:solidFill>
                   <a:srgbClr val="836A68"/>
                 </a:solidFill>
@@ -3927,9 +3967,161 @@
                 <a:ea typeface="Calibri" pitchFamily="34" charset="-122"/>
                 <a:cs typeface="Calibri" pitchFamily="34" charset="-120"/>
               </a:rPr>
-              <a:t>Preliminary: only the empty baseline is cleanly paired. Nonlinear domain adaptation needs far more paired data (multiple sessions, matched tumor positions).</a:t>
-            </a:r>
-            <a:endParaRPr lang="en-US" sz="1250" dirty="0"/>
+              <a:t>x = sim [Re, Im of 16 S-params] (32-D); y = predicted measured; W (32x32) and b learned on the train frequencies.</a:t>
+            </a:r>
+            <a:endParaRPr lang="en-US" sz="1000" dirty="0"/>
+          </a:p>
+        </p:txBody>
+      </p:sp>
+      <p:sp>
+        <p:nvSpPr>
+          <p:cNvPr id="33" name="Shape 31"/>
+          <p:cNvSpPr/>
+          <p:nvPr/>
+        </p:nvSpPr>
+        <p:spPr>
+          <a:xfrm>
+            <a:off x="7772400" y="3291840"/>
+            <a:ext cx="3886200" cy="2971800"/>
+          </a:xfrm>
+          <a:prstGeom prst="roundRect">
+            <a:avLst>
+              <a:gd name="adj" fmla="val 2769"/>
+            </a:avLst>
+          </a:prstGeom>
+          <a:solidFill>
+            <a:srgbClr val="FBF4F2"/>
+          </a:solidFill>
+          <a:ln w="12700">
+            <a:solidFill>
+              <a:srgbClr val="E7D6D1"/>
+            </a:solidFill>
+            <a:prstDash val="solid"/>
+          </a:ln>
+          <a:effectLst>
+            <a:outerShdw sx="100000" sy="100000" kx="0" ky="0" algn="bl" rotWithShape="0" blurRad="88900" dist="38100" dir="5400000">
+              <a:srgbClr val="7A5C5E">
+                <a:alpha val="18000"/>
+              </a:srgbClr>
+            </a:outerShdw>
+          </a:effectLst>
+        </p:spPr>
+      </p:sp>
+      <p:sp>
+        <p:nvSpPr>
+          <p:cNvPr id="34" name="Text 32"/>
+          <p:cNvSpPr/>
+          <p:nvPr/>
+        </p:nvSpPr>
+        <p:spPr>
+          <a:xfrm>
+            <a:off x="7955280" y="3429000"/>
+            <a:ext cx="3566160" cy="365760"/>
+          </a:xfrm>
+          <a:prstGeom prst="rect">
+            <a:avLst/>
+          </a:prstGeom>
+          <a:noFill/>
+          <a:ln/>
+        </p:spPr>
+        <p:txBody>
+          <a:bodyPr wrap="square" lIns="0" tIns="0" rIns="0" bIns="0" rtlCol="0" anchor="ctr"/>
+          <a:lstStyle/>
+          <a:p>
+            <a:pPr indent="0" marL="0">
+              <a:buNone/>
+            </a:pPr>
+            <a:r>
+              <a:rPr lang="en-US" sz="1400" b="1" dirty="0">
+                <a:solidFill>
+                  <a:srgbClr val="BE0000"/>
+                </a:solidFill>
+                <a:latin typeface="Cambria" pitchFamily="34" charset="0"/>
+                <a:ea typeface="Cambria" pitchFamily="34" charset="-122"/>
+                <a:cs typeface="Cambria" pitchFamily="34" charset="-120"/>
+              </a:rPr>
+              <a:t>Why R2 = 0.65 is meaningful</a:t>
+            </a:r>
+            <a:endParaRPr lang="en-US" sz="1400" dirty="0"/>
+          </a:p>
+        </p:txBody>
+      </p:sp>
+      <p:sp>
+        <p:nvSpPr>
+          <p:cNvPr id="35" name="Text 33"/>
+          <p:cNvSpPr/>
+          <p:nvPr/>
+        </p:nvSpPr>
+        <p:spPr>
+          <a:xfrm>
+            <a:off x="7955280" y="3840480"/>
+            <a:ext cx="3566160" cy="2331720"/>
+          </a:xfrm>
+          <a:prstGeom prst="rect">
+            <a:avLst/>
+          </a:prstGeom>
+          <a:noFill/>
+          <a:ln/>
+        </p:spPr>
+        <p:txBody>
+          <a:bodyPr wrap="square" lIns="0" tIns="0" rIns="0" bIns="0" rtlCol="0" anchor="t"/>
+          <a:lstStyle/>
+          <a:p>
+            <a:pPr indent="0" marL="0">
+              <a:spcAft>
+                <a:spcPts val="900"/>
+              </a:spcAft>
+              <a:buNone/>
+            </a:pPr>
+            <a:r>
+              <a:rPr lang="en-US" sz="1100" dirty="0">
+                <a:solidFill>
+                  <a:srgbClr val="2A1618"/>
+                </a:solidFill>
+                <a:latin typeface="Calibri" pitchFamily="34" charset="0"/>
+                <a:ea typeface="Calibri" pitchFamily="34" charset="-122"/>
+                <a:cs typeface="Calibri" pitchFamily="34" charset="-120"/>
+              </a:rPr>
+              <a:t>R2 is computed only on frequencies the map never used while fitting, so it measures genuine generalization, not curve-fitting.</a:t>
+            </a:r>
+            <a:endParaRPr lang="en-US" sz="1100" dirty="0"/>
+          </a:p>
+          <a:p>
+            <a:pPr indent="0" marL="0">
+              <a:spcAft>
+                <a:spcPts val="900"/>
+              </a:spcAft>
+              <a:buNone/>
+            </a:pPr>
+            <a:r>
+              <a:rPr lang="en-US" sz="1100" dirty="0">
+                <a:solidFill>
+                  <a:srgbClr val="2A1618"/>
+                </a:solidFill>
+                <a:latin typeface="Calibri" pitchFamily="34" charset="0"/>
+                <a:ea typeface="Calibri" pitchFamily="34" charset="-122"/>
+                <a:cs typeface="Calibri" pitchFamily="34" charset="-120"/>
+              </a:rPr>
+              <a:t>A model that merely memorized the training frequencies would score near 0 on the held-out set. The flexible MLP did exactly that (R2 &lt; 0).</a:t>
+            </a:r>
+            <a:endParaRPr lang="en-US" sz="1100" dirty="0"/>
+          </a:p>
+          <a:p>
+            <a:pPr indent="0" marL="0">
+              <a:buNone/>
+            </a:pPr>
+            <a:r>
+              <a:rPr lang="en-US" sz="1100" dirty="0">
+                <a:solidFill>
+                  <a:srgbClr val="2A1618"/>
+                </a:solidFill>
+                <a:latin typeface="Calibri" pitchFamily="34" charset="0"/>
+                <a:ea typeface="Calibri" pitchFamily="34" charset="-122"/>
+                <a:cs typeface="Calibri" pitchFamily="34" charset="-120"/>
+              </a:rPr>
+              <a:t>So R2 = 0.65 says a fixed linear transform already recovers most of the measured signal from the sim, on data it has not seen.</a:t>
+            </a:r>
+            <a:endParaRPr lang="en-US" sz="1100" dirty="0"/>
           </a:p>
         </p:txBody>
       </p:sp>
@@ -3998,7 +4190,7 @@
                 <a:ea typeface="Cambria" pitchFamily="34" charset="-122"/>
                 <a:cs typeface="Cambria" pitchFamily="34" charset="-120"/>
               </a:rPr>
-              <a:t>Beet (dielectric) vs metal tumor, sim and measured</a:t>
+              <a:t>Can a model bridge the gap? (exploratory)</a:t>
             </a:r>
             <a:endParaRPr lang="en-US" sz="2900" dirty="0"/>
           </a:p>
@@ -4037,7 +4229,7 @@
                 <a:ea typeface="Calibri" pitchFamily="34" charset="-122"/>
                 <a:cs typeface="Calibri" pitchFamily="34" charset="-120"/>
               </a:rPr>
-              <a:t>How much differential signal a realistic dielectric target produces relative to metal</a:t>
+              <a:t>The learned map applied to one port, and its accuracy on unseen frequencies</a:t>
             </a:r>
             <a:endParaRPr lang="en-US" sz="1400" dirty="0"/>
           </a:p>
@@ -4045,7 +4237,7 @@
       </p:sp>
       <p:pic>
         <p:nvPicPr>
-          <p:cNvPr id="4" name="Image 0" descr="beet_vs_metal_dS.png">    </p:cNvPr>
+          <p:cNvPr id="4" name="Image 0" descr="sim_meas_correlation.png">    </p:cNvPr>
           <p:cNvPicPr>
             <a:picLocks noChangeAspect="1"/>
           </p:cNvPicPr>
@@ -4059,14 +4251,211 @@
         </p:blipFill>
         <p:spPr>
           <a:xfrm>
-            <a:off x="822960" y="1737360"/>
-            <a:ext cx="10515600" cy="4892040"/>
+            <a:off x="457200" y="1737360"/>
+            <a:ext cx="7772400" cy="3154680"/>
           </a:xfrm>
           <a:prstGeom prst="rect">
             <a:avLst/>
           </a:prstGeom>
         </p:spPr>
       </p:pic>
+      <p:sp>
+        <p:nvSpPr>
+          <p:cNvPr id="5" name="Shape 2"/>
+          <p:cNvSpPr/>
+          <p:nvPr/>
+        </p:nvSpPr>
+        <p:spPr>
+          <a:xfrm>
+            <a:off x="8412480" y="1645920"/>
+            <a:ext cx="3246120" cy="3794760"/>
+          </a:xfrm>
+          <a:prstGeom prst="roundRect">
+            <a:avLst>
+              <a:gd name="adj" fmla="val 2535"/>
+            </a:avLst>
+          </a:prstGeom>
+          <a:solidFill>
+            <a:srgbClr val="FBF4F2"/>
+          </a:solidFill>
+          <a:ln w="12700">
+            <a:solidFill>
+              <a:srgbClr val="E7D6D1"/>
+            </a:solidFill>
+            <a:prstDash val="solid"/>
+          </a:ln>
+          <a:effectLst>
+            <a:outerShdw sx="100000" sy="100000" kx="0" ky="0" algn="bl" rotWithShape="0" blurRad="88900" dist="38100" dir="5400000">
+              <a:srgbClr val="7A5C5E">
+                <a:alpha val="18000"/>
+              </a:srgbClr>
+            </a:outerShdw>
+          </a:effectLst>
+        </p:spPr>
+      </p:sp>
+      <p:sp>
+        <p:nvSpPr>
+          <p:cNvPr id="6" name="Text 3"/>
+          <p:cNvSpPr/>
+          <p:nvPr/>
+        </p:nvSpPr>
+        <p:spPr>
+          <a:xfrm>
+            <a:off x="8595360" y="1783080"/>
+            <a:ext cx="2926080" cy="365760"/>
+          </a:xfrm>
+          <a:prstGeom prst="rect">
+            <a:avLst/>
+          </a:prstGeom>
+          <a:noFill/>
+          <a:ln/>
+        </p:spPr>
+        <p:txBody>
+          <a:bodyPr wrap="square" lIns="0" tIns="0" rIns="0" bIns="0" rtlCol="0" anchor="ctr"/>
+          <a:lstStyle/>
+          <a:p>
+            <a:pPr indent="0" marL="0">
+              <a:buNone/>
+            </a:pPr>
+            <a:r>
+              <a:rPr lang="en-US" sz="1500" b="1" dirty="0">
+                <a:solidFill>
+                  <a:srgbClr val="BE0000"/>
+                </a:solidFill>
+                <a:latin typeface="Cambria" pitchFamily="34" charset="0"/>
+                <a:ea typeface="Cambria" pitchFamily="34" charset="-122"/>
+                <a:cs typeface="Cambria" pitchFamily="34" charset="-120"/>
+              </a:rPr>
+              <a:t>How to read it</a:t>
+            </a:r>
+            <a:endParaRPr lang="en-US" sz="1500" dirty="0"/>
+          </a:p>
+        </p:txBody>
+      </p:sp>
+      <p:sp>
+        <p:nvSpPr>
+          <p:cNvPr id="7" name="Text 4"/>
+          <p:cNvSpPr/>
+          <p:nvPr/>
+        </p:nvSpPr>
+        <p:spPr>
+          <a:xfrm>
+            <a:off x="8595360" y="2194560"/>
+            <a:ext cx="2971800" cy="3108960"/>
+          </a:xfrm>
+          <a:prstGeom prst="rect">
+            <a:avLst/>
+          </a:prstGeom>
+          <a:noFill/>
+          <a:ln/>
+        </p:spPr>
+        <p:txBody>
+          <a:bodyPr wrap="square" lIns="0" tIns="0" rIns="0" bIns="0" rtlCol="0" anchor="t"/>
+          <a:lstStyle/>
+          <a:p>
+            <a:pPr marL="342900" indent="-342900">
+              <a:spcAft>
+                <a:spcPts val="800"/>
+              </a:spcAft>
+              <a:buSzPct val="100000"/>
+              <a:buChar char="•"/>
+            </a:pPr>
+            <a:r>
+              <a:rPr lang="en-US" sz="1050" dirty="0">
+                <a:solidFill>
+                  <a:srgbClr val="2A1618"/>
+                </a:solidFill>
+                <a:latin typeface="Calibri" pitchFamily="34" charset="0"/>
+                <a:ea typeface="Calibri" pitchFamily="34" charset="-122"/>
+                <a:cs typeface="Calibri" pitchFamily="34" charset="-120"/>
+              </a:rPr>
+              <a:t>Left: the dashed line is the simulated S11 after the map (W x_sim + b). A perfect map would land on the measured (red) curve; it moves toward it but does not fully match.</a:t>
+            </a:r>
+            <a:endParaRPr lang="en-US" sz="1050" dirty="0"/>
+          </a:p>
+          <a:p>
+            <a:pPr marL="342900" indent="-342900">
+              <a:spcAft>
+                <a:spcPts val="800"/>
+              </a:spcAft>
+              <a:buSzPct val="100000"/>
+              <a:buChar char="•"/>
+            </a:pPr>
+            <a:r>
+              <a:rPr lang="en-US" sz="1050" dirty="0">
+                <a:solidFill>
+                  <a:srgbClr val="2A1618"/>
+                </a:solidFill>
+                <a:latin typeface="Calibri" pitchFamily="34" charset="0"/>
+                <a:ea typeface="Calibri" pitchFamily="34" charset="-122"/>
+                <a:cs typeface="Calibri" pitchFamily="34" charset="-120"/>
+              </a:rPr>
+              <a:t>Right: predicted vs measured on the held-out frequencies. Points on the diagonal are exact; the R2 = 0.65 spread shows the map captures most, not all, of the relationship.</a:t>
+            </a:r>
+            <a:endParaRPr lang="en-US" sz="1050" dirty="0"/>
+          </a:p>
+          <a:p>
+            <a:pPr marL="342900" indent="-342900">
+              <a:spcAft>
+                <a:spcPts val="800"/>
+              </a:spcAft>
+              <a:buSzPct val="100000"/>
+              <a:buChar char="•"/>
+            </a:pPr>
+            <a:r>
+              <a:rPr lang="en-US" sz="1050" dirty="0">
+                <a:solidFill>
+                  <a:srgbClr val="2A1618"/>
+                </a:solidFill>
+                <a:latin typeface="Calibri" pitchFamily="34" charset="0"/>
+                <a:ea typeface="Calibri" pitchFamily="34" charset="-122"/>
+                <a:cs typeface="Calibri" pitchFamily="34" charset="-120"/>
+              </a:rPr>
+              <a:t>A flexible MLP overfits and fails to generalize (R2 &lt; 0).</a:t>
+            </a:r>
+            <a:endParaRPr lang="en-US" sz="1050" dirty="0"/>
+          </a:p>
+        </p:txBody>
+      </p:sp>
+      <p:sp>
+        <p:nvSpPr>
+          <p:cNvPr id="8" name="Text 5"/>
+          <p:cNvSpPr/>
+          <p:nvPr/>
+        </p:nvSpPr>
+        <p:spPr>
+          <a:xfrm>
+            <a:off x="548640" y="6035040"/>
+            <a:ext cx="11091672" cy="548640"/>
+          </a:xfrm>
+          <a:prstGeom prst="rect">
+            <a:avLst/>
+          </a:prstGeom>
+          <a:noFill/>
+          <a:ln/>
+        </p:spPr>
+        <p:txBody>
+          <a:bodyPr wrap="square" lIns="0" tIns="0" rIns="0" bIns="0" rtlCol="0" anchor="ctr"/>
+          <a:lstStyle/>
+          <a:p>
+            <a:pPr algn="ctr" indent="0" marL="0">
+              <a:buNone/>
+            </a:pPr>
+            <a:r>
+              <a:rPr lang="en-US" sz="1250" i="1" dirty="0">
+                <a:solidFill>
+                  <a:srgbClr val="836A68"/>
+                </a:solidFill>
+                <a:latin typeface="Calibri" pitchFamily="34" charset="0"/>
+                <a:ea typeface="Calibri" pitchFamily="34" charset="-122"/>
+                <a:cs typeface="Calibri" pitchFamily="34" charset="-120"/>
+              </a:rPr>
+              <a:t>Preliminary: only the empty baseline is cleanly paired. Nonlinear domain adaptation needs far more paired data (multiple sessions, matched tumor positions).</a:t>
+            </a:r>
+            <a:endParaRPr lang="en-US" sz="1250" dirty="0"/>
+          </a:p>
+        </p:txBody>
+      </p:sp>
     </p:spTree>
   </p:cSld>
   <p:clrMapOvr>
@@ -4078,6 +4467,140 @@
 <file path=ppt/slides/slide13.xml><?xml version="1.0" encoding="utf-8"?>
 <p:sld xmlns:a="http://schemas.openxmlformats.org/drawingml/2006/main" xmlns:r="http://schemas.openxmlformats.org/officeDocument/2006/relationships" xmlns:p="http://schemas.openxmlformats.org/presentationml/2006/main">
   <p:cSld name="Slide 13">
+    <p:bg>
+      <p:bgPr>
+        <a:solidFill>
+          <a:srgbClr val="FFFFFF"/>
+        </a:solidFill>
+      </p:bgPr>
+    </p:bg>
+    <p:spTree>
+      <p:nvGrpSpPr>
+        <p:cNvPr id="1" name=""/>
+        <p:cNvGrpSpPr/>
+        <p:nvPr/>
+      </p:nvGrpSpPr>
+      <p:grpSpPr>
+        <a:xfrm>
+          <a:off x="0" y="0"/>
+          <a:ext cx="0" cy="0"/>
+          <a:chOff x="0" y="0"/>
+          <a:chExt cx="0" cy="0"/>
+        </a:xfrm>
+      </p:grpSpPr>
+      <p:sp>
+        <p:nvSpPr>
+          <p:cNvPr id="2" name="Text 0"/>
+          <p:cNvSpPr/>
+          <p:nvPr/>
+        </p:nvSpPr>
+        <p:spPr>
+          <a:xfrm>
+            <a:off x="548640" y="384048"/>
+            <a:ext cx="11091672" cy="640080"/>
+          </a:xfrm>
+          <a:prstGeom prst="rect">
+            <a:avLst/>
+          </a:prstGeom>
+          <a:noFill/>
+          <a:ln/>
+        </p:spPr>
+        <p:txBody>
+          <a:bodyPr wrap="square" lIns="0" tIns="0" rIns="0" bIns="0" rtlCol="0" anchor="ctr"/>
+          <a:lstStyle/>
+          <a:p>
+            <a:pPr indent="0" marL="0">
+              <a:buNone/>
+            </a:pPr>
+            <a:r>
+              <a:rPr lang="en-US" sz="2900" b="1" dirty="0">
+                <a:solidFill>
+                  <a:srgbClr val="2A1618"/>
+                </a:solidFill>
+                <a:latin typeface="Cambria" pitchFamily="34" charset="0"/>
+                <a:ea typeface="Cambria" pitchFamily="34" charset="-122"/>
+                <a:cs typeface="Cambria" pitchFamily="34" charset="-120"/>
+              </a:rPr>
+              <a:t>Beet (dielectric) vs metal tumor, sim and measured</a:t>
+            </a:r>
+            <a:endParaRPr lang="en-US" sz="2900" dirty="0"/>
+          </a:p>
+        </p:txBody>
+      </p:sp>
+      <p:sp>
+        <p:nvSpPr>
+          <p:cNvPr id="3" name="Text 1"/>
+          <p:cNvSpPr/>
+          <p:nvPr/>
+        </p:nvSpPr>
+        <p:spPr>
+          <a:xfrm>
+            <a:off x="548640" y="1033272"/>
+            <a:ext cx="11091672" cy="365760"/>
+          </a:xfrm>
+          <a:prstGeom prst="rect">
+            <a:avLst/>
+          </a:prstGeom>
+          <a:noFill/>
+          <a:ln/>
+        </p:spPr>
+        <p:txBody>
+          <a:bodyPr wrap="square" lIns="0" tIns="0" rIns="0" bIns="0" rtlCol="0" anchor="ctr"/>
+          <a:lstStyle/>
+          <a:p>
+            <a:pPr indent="0" marL="0">
+              <a:buNone/>
+            </a:pPr>
+            <a:r>
+              <a:rPr lang="en-US" sz="1400" b="1" dirty="0">
+                <a:solidFill>
+                  <a:srgbClr val="BE0000"/>
+                </a:solidFill>
+                <a:latin typeface="Calibri" pitchFamily="34" charset="0"/>
+                <a:ea typeface="Calibri" pitchFamily="34" charset="-122"/>
+                <a:cs typeface="Calibri" pitchFamily="34" charset="-120"/>
+              </a:rPr>
+              <a:t>How much differential signal a realistic dielectric target produces relative to metal</a:t>
+            </a:r>
+            <a:endParaRPr lang="en-US" sz="1400" dirty="0"/>
+          </a:p>
+        </p:txBody>
+      </p:sp>
+      <p:pic>
+        <p:nvPicPr>
+          <p:cNvPr id="4" name="Image 0" descr="beet_vs_metal_dS.png">    </p:cNvPr>
+          <p:cNvPicPr>
+            <a:picLocks noChangeAspect="1"/>
+          </p:cNvPicPr>
+          <p:nvPr/>
+        </p:nvPicPr>
+        <p:blipFill>
+          <a:blip r:embed="rId1"/>
+          <a:stretch>
+            <a:fillRect/>
+          </a:stretch>
+        </p:blipFill>
+        <p:spPr>
+          <a:xfrm>
+            <a:off x="822960" y="1737360"/>
+            <a:ext cx="10515600" cy="4892040"/>
+          </a:xfrm>
+          <a:prstGeom prst="rect">
+            <a:avLst/>
+          </a:prstGeom>
+        </p:spPr>
+      </p:pic>
+    </p:spTree>
+  </p:cSld>
+  <p:clrMapOvr>
+    <a:masterClrMapping/>
+  </p:clrMapOvr>
+</p:sld>
+</file>
+
+<file path=ppt/slides/slide14.xml><?xml version="1.0" encoding="utf-8"?>
+<p:sld xmlns:a="http://schemas.openxmlformats.org/drawingml/2006/main" xmlns:r="http://schemas.openxmlformats.org/officeDocument/2006/relationships" xmlns:p="http://schemas.openxmlformats.org/presentationml/2006/main">
+  <p:cSld name="Slide 14">
     <p:bg>
       <p:bgPr>
         <a:solidFill>

--- a/regression_deck/Deck3_Sim_vs_Measured.pptx
+++ b/regression_deck/Deck3_Sim_vs_Measured.pptx
@@ -19,9 +19,10 @@
     <p:sldId id="267" r:id="rId13"/>
     <p:sldId id="268" r:id="rId14"/>
     <p:sldId id="269" r:id="rId15"/>
+    <p:sldId id="270" r:id="rId16"/>
   </p:sldIdLst>
   <p:notesMasterIdLst>
-    <p:notesMasterId r:id="rId16"/>
+    <p:notesMasterId r:id="rId17"/>
   </p:notesMasterIdLst>
   <p:sldSz cx="12188952" cy="6858000"/>
   <p:notesSz cx="6858000" cy="12188952"/>
@@ -979,6 +980,94 @@
             <a:fld id="{F7021451-1387-4CA6-816F-3879F97B5CBC}" type="slidenum">
               <a:rPr lang="en-US"/>
               <a:t>14</a:t>
+            </a:fld>
+            <a:endParaRPr lang="en-US"/>
+          </a:p>
+        </p:txBody>
+      </p:sp>
+    </p:spTree>
+    <p:extLst>
+      <p:ext uri="{BB962C8B-B14F-4D97-AF65-F5344CB8AC3E}">
+        <p14:creationId xmlns:p14="http://schemas.microsoft.com/office/powerpoint/2010/main" val="1024086991"/>
+      </p:ext>
+    </p:extLst>
+  </p:cSld>
+  <p:clrMapOvr>
+    <a:masterClrMapping/>
+  </p:clrMapOvr>
+</p:notes>
+</file>
+
+<file path=ppt/notesSlides/notesSlide15.xml><?xml version="1.0" encoding="utf-8"?>
+<p:notes xmlns:a="http://schemas.openxmlformats.org/drawingml/2006/main" xmlns:r="http://schemas.openxmlformats.org/officeDocument/2006/relationships" xmlns:p="http://schemas.openxmlformats.org/presentationml/2006/main">
+  <p:cSld>
+    <p:spTree>
+      <p:nvGrpSpPr>
+        <p:cNvPr id="1" name=""/>
+        <p:cNvGrpSpPr/>
+        <p:nvPr/>
+      </p:nvGrpSpPr>
+      <p:grpSpPr>
+        <a:xfrm>
+          <a:off x="0" y="0"/>
+          <a:ext cx="0" cy="0"/>
+          <a:chOff x="0" y="0"/>
+          <a:chExt cx="0" cy="0"/>
+        </a:xfrm>
+      </p:grpSpPr>
+      <p:sp>
+        <p:nvSpPr>
+          <p:cNvPr id="2" name="Slide Image Placeholder 1"/>
+          <p:cNvSpPr>
+            <a:spLocks noGrp="1" noRot="1" noChangeAspect="1"/>
+          </p:cNvSpPr>
+          <p:nvPr>
+            <p:ph type="sldImg"/>
+          </p:nvPr>
+        </p:nvSpPr>
+        <p:spPr/>
+      </p:sp>
+      <p:sp>
+        <p:nvSpPr>
+          <p:cNvPr id="3" name="Notes Placeholder 2"/>
+          <p:cNvSpPr>
+            <a:spLocks noGrp="1"/>
+          </p:cNvSpPr>
+          <p:nvPr>
+            <p:ph type="body" idx="1"/>
+          </p:nvPr>
+        </p:nvSpPr>
+        <p:spPr/>
+        <p:txBody>
+          <a:bodyPr/>
+          <a:lstStyle/>
+          <a:p>
+            <a:r>
+              <a:rPr lang="en-US" dirty="0"/>
+              <a:t/>
+            </a:r>
+            <a:endParaRPr lang="en-US" dirty="0"/>
+          </a:p>
+        </p:txBody>
+      </p:sp>
+      <p:sp>
+        <p:nvSpPr>
+          <p:cNvPr id="4" name="Slide Number Placeholder 3"/>
+          <p:cNvSpPr>
+            <a:spLocks noGrp="1"/>
+          </p:cNvSpPr>
+          <p:nvPr>
+            <p:ph type="sldNum" sz="quarter" idx="10"/>
+          </p:nvPr>
+        </p:nvSpPr>
+        <p:spPr/>
+        <p:txBody>
+          <a:bodyPr/>
+          <a:lstStyle/>
+          <a:p>
+            <a:fld id="{F7021451-1387-4CA6-816F-3879F97B5CBC}" type="slidenum">
+              <a:rPr lang="en-US"/>
+              <a:t>15</a:t>
             </a:fld>
             <a:endParaRPr lang="en-US"/>
           </a:p>
@@ -2417,7 +2506,7 @@
                 <a:ea typeface="Calibri" pitchFamily="34" charset="-122"/>
                 <a:cs typeface="Calibri" pitchFamily="34" charset="-120"/>
               </a:rPr>
-              <a:t>a learnable sim-&gt;measured transfer</a:t>
+              <a:t>empty signal transfers; tumor transfer still open</a:t>
             </a:r>
             <a:endParaRPr lang="en-US" sz="1250" dirty="0"/>
           </a:p>
@@ -2791,7 +2880,7 @@
                 <a:ea typeface="Calibri" pitchFamily="34" charset="-122"/>
                 <a:cs typeface="Calibri" pitchFamily="34" charset="-120"/>
               </a:rPr>
-              <a:t>On the bench it hits 74 mm, worse than the 34 mm predict-centre chance line.</a:t>
+              <a:t>On the bench it hits 43 mm, worse than the 34 mm predict-centre chance line (median of 5 seeds).</a:t>
             </a:r>
             <a:endParaRPr lang="en-US" sz="1030" dirty="0"/>
           </a:p>
@@ -2812,7 +2901,7 @@
                 <a:ea typeface="Calibri" pitchFamily="34" charset="-122"/>
                 <a:cs typeface="Calibri" pitchFamily="34" charset="-120"/>
               </a:rPr>
-              <a:t>Predictions collapse to one biased corner: the measured signal is out-of-distribution for a sim-only model.</a:t>
+              <a:t>Predictions collapse to one biased region: the measured signal is out-of-distribution for a sim-only model.</a:t>
             </a:r>
             <a:endParaRPr lang="en-US" sz="1030" dirty="0"/>
           </a:p>
@@ -4521,7 +4610,7 @@
                 <a:ea typeface="Cambria" pitchFamily="34" charset="-122"/>
                 <a:cs typeface="Cambria" pitchFamily="34" charset="-120"/>
               </a:rPr>
-              <a:t>Beet (dielectric) vs metal tumor, sim and measured</a:t>
+              <a:t>Test 2: calibrate the sim, then transfer</a:t>
             </a:r>
             <a:endParaRPr lang="en-US" sz="2900" dirty="0"/>
           </a:p>
@@ -4560,7 +4649,7 @@
                 <a:ea typeface="Calibri" pitchFamily="34" charset="-122"/>
                 <a:cs typeface="Calibri" pitchFamily="34" charset="-120"/>
               </a:rPr>
-              <a:t>How much differential signal a realistic dielectric target produces relative to metal</a:t>
+              <a:t>Apply the learned empty-baseline map to the sim tumor signal before training. Does it bridge the gap?</a:t>
             </a:r>
             <a:endParaRPr lang="en-US" sz="1400" dirty="0"/>
           </a:p>
@@ -4568,7 +4657,7 @@
       </p:sp>
       <p:pic>
         <p:nvPicPr>
-          <p:cNvPr id="4" name="Image 0" descr="beet_vs_metal_dS.png">    </p:cNvPr>
+          <p:cNvPr id="4" name="Image 0" descr="test2_calibrated_sim2meas.png">    </p:cNvPr>
           <p:cNvPicPr>
             <a:picLocks noChangeAspect="1"/>
           </p:cNvPicPr>
@@ -4582,14 +4671,314 @@
         </p:blipFill>
         <p:spPr>
           <a:xfrm>
-            <a:off x="822960" y="1737360"/>
-            <a:ext cx="10515600" cy="4892040"/>
+            <a:off x="320040" y="1463040"/>
+            <a:ext cx="8275320" cy="4434840"/>
           </a:xfrm>
           <a:prstGeom prst="rect">
             <a:avLst/>
           </a:prstGeom>
         </p:spPr>
       </p:pic>
+      <p:sp>
+        <p:nvSpPr>
+          <p:cNvPr id="5" name="Shape 2"/>
+          <p:cNvSpPr/>
+          <p:nvPr/>
+        </p:nvSpPr>
+        <p:spPr>
+          <a:xfrm>
+            <a:off x="8732520" y="1554480"/>
+            <a:ext cx="3108960" cy="4480560"/>
+          </a:xfrm>
+          <a:prstGeom prst="roundRect">
+            <a:avLst>
+              <a:gd name="adj" fmla="val 2647"/>
+            </a:avLst>
+          </a:prstGeom>
+          <a:solidFill>
+            <a:srgbClr val="FBF4F2"/>
+          </a:solidFill>
+          <a:ln w="12700">
+            <a:solidFill>
+              <a:srgbClr val="E7D6D1"/>
+            </a:solidFill>
+            <a:prstDash val="solid"/>
+          </a:ln>
+          <a:effectLst>
+            <a:outerShdw sx="100000" sy="100000" kx="0" ky="0" algn="bl" rotWithShape="0" blurRad="88900" dist="38100" dir="5400000">
+              <a:srgbClr val="7A5C5E">
+                <a:alpha val="18000"/>
+              </a:srgbClr>
+            </a:outerShdw>
+          </a:effectLst>
+        </p:spPr>
+      </p:sp>
+      <p:sp>
+        <p:nvSpPr>
+          <p:cNvPr id="6" name="Text 3"/>
+          <p:cNvSpPr/>
+          <p:nvPr/>
+        </p:nvSpPr>
+        <p:spPr>
+          <a:xfrm>
+            <a:off x="8915400" y="1691640"/>
+            <a:ext cx="2788920" cy="320040"/>
+          </a:xfrm>
+          <a:prstGeom prst="rect">
+            <a:avLst/>
+          </a:prstGeom>
+          <a:noFill/>
+          <a:ln/>
+        </p:spPr>
+        <p:txBody>
+          <a:bodyPr wrap="square" lIns="0" tIns="0" rIns="0" bIns="0" rtlCol="0" anchor="ctr"/>
+          <a:lstStyle/>
+          <a:p>
+            <a:pPr indent="0" marL="0">
+              <a:buNone/>
+            </a:pPr>
+            <a:r>
+              <a:rPr lang="en-US" sz="1400" b="1" dirty="0">
+                <a:solidFill>
+                  <a:srgbClr val="BE0000"/>
+                </a:solidFill>
+                <a:latin typeface="Cambria" pitchFamily="34" charset="0"/>
+                <a:ea typeface="Cambria" pitchFamily="34" charset="-122"/>
+                <a:cs typeface="Cambria" pitchFamily="34" charset="-120"/>
+              </a:rPr>
+              <a:t>The idea</a:t>
+            </a:r>
+            <a:endParaRPr lang="en-US" sz="1400" dirty="0"/>
+          </a:p>
+        </p:txBody>
+      </p:sp>
+      <p:sp>
+        <p:nvSpPr>
+          <p:cNvPr id="7" name="Text 4"/>
+          <p:cNvSpPr/>
+          <p:nvPr/>
+        </p:nvSpPr>
+        <p:spPr>
+          <a:xfrm>
+            <a:off x="8915400" y="2057400"/>
+            <a:ext cx="2788920" cy="1417320"/>
+          </a:xfrm>
+          <a:prstGeom prst="rect">
+            <a:avLst/>
+          </a:prstGeom>
+          <a:noFill/>
+          <a:ln/>
+        </p:spPr>
+        <p:txBody>
+          <a:bodyPr wrap="square" lIns="0" tIns="0" rIns="0" bIns="0" rtlCol="0" anchor="t"/>
+          <a:lstStyle/>
+          <a:p>
+            <a:pPr marL="342900" indent="-342900">
+              <a:spcAft>
+                <a:spcPts val="800"/>
+              </a:spcAft>
+              <a:buSzPct val="100000"/>
+              <a:buChar char="•"/>
+            </a:pPr>
+            <a:r>
+              <a:rPr lang="en-US" sz="1030" dirty="0">
+                <a:solidFill>
+                  <a:srgbClr val="2A1618"/>
+                </a:solidFill>
+                <a:latin typeface="Calibri" pitchFamily="34" charset="0"/>
+                <a:ea typeface="Calibri" pitchFamily="34" charset="-122"/>
+                <a:cs typeface="Calibri" pitchFamily="34" charset="-120"/>
+              </a:rPr>
+              <a:t>A tumor signal is a difference dS, so the map's offset cancels: dS_measured-like = W dS_sim.</a:t>
+            </a:r>
+            <a:endParaRPr lang="en-US" sz="1030" dirty="0"/>
+          </a:p>
+          <a:p>
+            <a:pPr marL="342900" indent="-342900">
+              <a:spcAft>
+                <a:spcPts val="800"/>
+              </a:spcAft>
+              <a:buSzPct val="100000"/>
+              <a:buChar char="•"/>
+            </a:pPr>
+            <a:r>
+              <a:rPr lang="en-US" sz="1030" dirty="0">
+                <a:solidFill>
+                  <a:srgbClr val="2A1618"/>
+                </a:solidFill>
+                <a:latin typeface="Calibri" pitchFamily="34" charset="0"/>
+                <a:ea typeface="Calibri" pitchFamily="34" charset="-122"/>
+                <a:cs typeface="Calibri" pitchFamily="34" charset="-120"/>
+              </a:rPr>
+              <a:t>Train the CNN on the calibrated sim, test on the untouched bench.</a:t>
+            </a:r>
+            <a:endParaRPr lang="en-US" sz="1030" dirty="0"/>
+          </a:p>
+        </p:txBody>
+      </p:sp>
+      <p:sp>
+        <p:nvSpPr>
+          <p:cNvPr id="8" name="Text 5"/>
+          <p:cNvSpPr/>
+          <p:nvPr/>
+        </p:nvSpPr>
+        <p:spPr>
+          <a:xfrm>
+            <a:off x="8915400" y="3611880"/>
+            <a:ext cx="2788920" cy="320040"/>
+          </a:xfrm>
+          <a:prstGeom prst="rect">
+            <a:avLst/>
+          </a:prstGeom>
+          <a:noFill/>
+          <a:ln/>
+        </p:spPr>
+        <p:txBody>
+          <a:bodyPr wrap="square" lIns="0" tIns="0" rIns="0" bIns="0" rtlCol="0" anchor="ctr"/>
+          <a:lstStyle/>
+          <a:p>
+            <a:pPr indent="0" marL="0">
+              <a:buNone/>
+            </a:pPr>
+            <a:r>
+              <a:rPr lang="en-US" sz="1400" b="1" dirty="0">
+                <a:solidFill>
+                  <a:srgbClr val="BE0000"/>
+                </a:solidFill>
+                <a:latin typeface="Cambria" pitchFamily="34" charset="0"/>
+                <a:ea typeface="Cambria" pitchFamily="34" charset="-122"/>
+                <a:cs typeface="Cambria" pitchFamily="34" charset="-120"/>
+              </a:rPr>
+              <a:t>The result</a:t>
+            </a:r>
+            <a:endParaRPr lang="en-US" sz="1400" dirty="0"/>
+          </a:p>
+        </p:txBody>
+      </p:sp>
+      <p:sp>
+        <p:nvSpPr>
+          <p:cNvPr id="9" name="Text 6"/>
+          <p:cNvSpPr/>
+          <p:nvPr/>
+        </p:nvSpPr>
+        <p:spPr>
+          <a:xfrm>
+            <a:off x="8915400" y="3977640"/>
+            <a:ext cx="2788920" cy="1965960"/>
+          </a:xfrm>
+          <a:prstGeom prst="rect">
+            <a:avLst/>
+          </a:prstGeom>
+          <a:noFill/>
+          <a:ln/>
+        </p:spPr>
+        <p:txBody>
+          <a:bodyPr wrap="square" lIns="0" tIns="0" rIns="0" bIns="0" rtlCol="0" anchor="t"/>
+          <a:lstStyle/>
+          <a:p>
+            <a:pPr marL="342900" indent="-342900">
+              <a:spcAft>
+                <a:spcPts val="800"/>
+              </a:spcAft>
+              <a:buSzPct val="100000"/>
+              <a:buChar char="•"/>
+            </a:pPr>
+            <a:r>
+              <a:rPr lang="en-US" sz="1030" dirty="0">
+                <a:solidFill>
+                  <a:srgbClr val="2A1618"/>
+                </a:solidFill>
+                <a:latin typeface="Calibri" pitchFamily="34" charset="0"/>
+                <a:ea typeface="Calibri" pitchFamily="34" charset="-122"/>
+                <a:cs typeface="Calibri" pitchFamily="34" charset="-120"/>
+              </a:rPr>
+              <a:t>The calibration does not close the gap: 46 mm calibrated vs 43 mm uncalibrated, both above 34 mm chance.</a:t>
+            </a:r>
+            <a:endParaRPr lang="en-US" sz="1030" dirty="0"/>
+          </a:p>
+          <a:p>
+            <a:pPr marL="342900" indent="-342900">
+              <a:spcAft>
+                <a:spcPts val="800"/>
+              </a:spcAft>
+              <a:buSzPct val="100000"/>
+              <a:buChar char="•"/>
+            </a:pPr>
+            <a:r>
+              <a:rPr lang="en-US" sz="1030" dirty="0">
+                <a:solidFill>
+                  <a:srgbClr val="2A1618"/>
+                </a:solidFill>
+                <a:latin typeface="Calibri" pitchFamily="34" charset="0"/>
+                <a:ea typeface="Calibri" pitchFamily="34" charset="-122"/>
+                <a:cs typeface="Calibri" pitchFamily="34" charset="-120"/>
+              </a:rPr>
+              <a:t>Per-sample normalization already removes the map's amplitude effect; what remains is a harder domain gap.</a:t>
+            </a:r>
+            <a:endParaRPr lang="en-US" sz="1030" dirty="0"/>
+          </a:p>
+          <a:p>
+            <a:pPr marL="342900" indent="-342900">
+              <a:spcAft>
+                <a:spcPts val="800"/>
+              </a:spcAft>
+              <a:buSzPct val="100000"/>
+              <a:buChar char="•"/>
+            </a:pPr>
+            <a:r>
+              <a:rPr lang="en-US" sz="1030" dirty="0">
+                <a:solidFill>
+                  <a:srgbClr val="2A1618"/>
+                </a:solidFill>
+                <a:latin typeface="Calibri" pitchFamily="34" charset="0"/>
+                <a:ea typeface="Calibri" pitchFamily="34" charset="-122"/>
+                <a:cs typeface="Calibri" pitchFamily="34" charset="-120"/>
+              </a:rPr>
+              <a:t>Bridging it needs paired tumor data or nonlinear adaptation, not a single empty-baseline linear map.</a:t>
+            </a:r>
+            <a:endParaRPr lang="en-US" sz="1030" dirty="0"/>
+          </a:p>
+        </p:txBody>
+      </p:sp>
+      <p:sp>
+        <p:nvSpPr>
+          <p:cNvPr id="10" name="Text 7"/>
+          <p:cNvSpPr/>
+          <p:nvPr/>
+        </p:nvSpPr>
+        <p:spPr>
+          <a:xfrm>
+            <a:off x="320040" y="6035040"/>
+            <a:ext cx="8275320" cy="502920"/>
+          </a:xfrm>
+          <a:prstGeom prst="rect">
+            <a:avLst/>
+          </a:prstGeom>
+          <a:noFill/>
+          <a:ln/>
+        </p:spPr>
+        <p:txBody>
+          <a:bodyPr wrap="square" lIns="0" tIns="0" rIns="0" bIns="0" rtlCol="0" anchor="ctr"/>
+          <a:lstStyle/>
+          <a:p>
+            <a:pPr algn="ctr" indent="0" marL="0">
+              <a:buNone/>
+            </a:pPr>
+            <a:r>
+              <a:rPr lang="en-US" sz="1200" i="1" dirty="0">
+                <a:solidFill>
+                  <a:srgbClr val="836A68"/>
+                </a:solidFill>
+                <a:latin typeface="Calibri" pitchFamily="34" charset="0"/>
+                <a:ea typeface="Calibri" pitchFamily="34" charset="-122"/>
+                <a:cs typeface="Calibri" pitchFamily="34" charset="-120"/>
+              </a:rPr>
+              <a:t>Honest negative result: the empty-baseline signal transfers (R2 = 0.65), but that alone is not enough to place a tumor from sim on the bench.</a:t>
+            </a:r>
+            <a:endParaRPr lang="en-US" sz="1200" dirty="0"/>
+          </a:p>
+        </p:txBody>
+      </p:sp>
     </p:spTree>
   </p:cSld>
   <p:clrMapOvr>
@@ -4601,6 +4990,140 @@
 <file path=ppt/slides/slide14.xml><?xml version="1.0" encoding="utf-8"?>
 <p:sld xmlns:a="http://schemas.openxmlformats.org/drawingml/2006/main" xmlns:r="http://schemas.openxmlformats.org/officeDocument/2006/relationships" xmlns:p="http://schemas.openxmlformats.org/presentationml/2006/main">
   <p:cSld name="Slide 14">
+    <p:bg>
+      <p:bgPr>
+        <a:solidFill>
+          <a:srgbClr val="FFFFFF"/>
+        </a:solidFill>
+      </p:bgPr>
+    </p:bg>
+    <p:spTree>
+      <p:nvGrpSpPr>
+        <p:cNvPr id="1" name=""/>
+        <p:cNvGrpSpPr/>
+        <p:nvPr/>
+      </p:nvGrpSpPr>
+      <p:grpSpPr>
+        <a:xfrm>
+          <a:off x="0" y="0"/>
+          <a:ext cx="0" cy="0"/>
+          <a:chOff x="0" y="0"/>
+          <a:chExt cx="0" cy="0"/>
+        </a:xfrm>
+      </p:grpSpPr>
+      <p:sp>
+        <p:nvSpPr>
+          <p:cNvPr id="2" name="Text 0"/>
+          <p:cNvSpPr/>
+          <p:nvPr/>
+        </p:nvSpPr>
+        <p:spPr>
+          <a:xfrm>
+            <a:off x="548640" y="384048"/>
+            <a:ext cx="11091672" cy="640080"/>
+          </a:xfrm>
+          <a:prstGeom prst="rect">
+            <a:avLst/>
+          </a:prstGeom>
+          <a:noFill/>
+          <a:ln/>
+        </p:spPr>
+        <p:txBody>
+          <a:bodyPr wrap="square" lIns="0" tIns="0" rIns="0" bIns="0" rtlCol="0" anchor="ctr"/>
+          <a:lstStyle/>
+          <a:p>
+            <a:pPr indent="0" marL="0">
+              <a:buNone/>
+            </a:pPr>
+            <a:r>
+              <a:rPr lang="en-US" sz="2900" b="1" dirty="0">
+                <a:solidFill>
+                  <a:srgbClr val="2A1618"/>
+                </a:solidFill>
+                <a:latin typeface="Cambria" pitchFamily="34" charset="0"/>
+                <a:ea typeface="Cambria" pitchFamily="34" charset="-122"/>
+                <a:cs typeface="Cambria" pitchFamily="34" charset="-120"/>
+              </a:rPr>
+              <a:t>Beet (dielectric) vs metal tumor, sim and measured</a:t>
+            </a:r>
+            <a:endParaRPr lang="en-US" sz="2900" dirty="0"/>
+          </a:p>
+        </p:txBody>
+      </p:sp>
+      <p:sp>
+        <p:nvSpPr>
+          <p:cNvPr id="3" name="Text 1"/>
+          <p:cNvSpPr/>
+          <p:nvPr/>
+        </p:nvSpPr>
+        <p:spPr>
+          <a:xfrm>
+            <a:off x="548640" y="1033272"/>
+            <a:ext cx="11091672" cy="365760"/>
+          </a:xfrm>
+          <a:prstGeom prst="rect">
+            <a:avLst/>
+          </a:prstGeom>
+          <a:noFill/>
+          <a:ln/>
+        </p:spPr>
+        <p:txBody>
+          <a:bodyPr wrap="square" lIns="0" tIns="0" rIns="0" bIns="0" rtlCol="0" anchor="ctr"/>
+          <a:lstStyle/>
+          <a:p>
+            <a:pPr indent="0" marL="0">
+              <a:buNone/>
+            </a:pPr>
+            <a:r>
+              <a:rPr lang="en-US" sz="1400" b="1" dirty="0">
+                <a:solidFill>
+                  <a:srgbClr val="BE0000"/>
+                </a:solidFill>
+                <a:latin typeface="Calibri" pitchFamily="34" charset="0"/>
+                <a:ea typeface="Calibri" pitchFamily="34" charset="-122"/>
+                <a:cs typeface="Calibri" pitchFamily="34" charset="-120"/>
+              </a:rPr>
+              <a:t>How much differential signal a realistic dielectric target produces relative to metal</a:t>
+            </a:r>
+            <a:endParaRPr lang="en-US" sz="1400" dirty="0"/>
+          </a:p>
+        </p:txBody>
+      </p:sp>
+      <p:pic>
+        <p:nvPicPr>
+          <p:cNvPr id="4" name="Image 0" descr="beet_vs_metal_dS.png">    </p:cNvPr>
+          <p:cNvPicPr>
+            <a:picLocks noChangeAspect="1"/>
+          </p:cNvPicPr>
+          <p:nvPr/>
+        </p:nvPicPr>
+        <p:blipFill>
+          <a:blip r:embed="rId1"/>
+          <a:stretch>
+            <a:fillRect/>
+          </a:stretch>
+        </p:blipFill>
+        <p:spPr>
+          <a:xfrm>
+            <a:off x="822960" y="1737360"/>
+            <a:ext cx="10515600" cy="4892040"/>
+          </a:xfrm>
+          <a:prstGeom prst="rect">
+            <a:avLst/>
+          </a:prstGeom>
+        </p:spPr>
+      </p:pic>
+    </p:spTree>
+  </p:cSld>
+  <p:clrMapOvr>
+    <a:masterClrMapping/>
+  </p:clrMapOvr>
+</p:sld>
+</file>
+
+<file path=ppt/slides/slide15.xml><?xml version="1.0" encoding="utf-8"?>
+<p:sld xmlns:a="http://schemas.openxmlformats.org/drawingml/2006/main" xmlns:r="http://schemas.openxmlformats.org/officeDocument/2006/relationships" xmlns:p="http://schemas.openxmlformats.org/presentationml/2006/main">
+  <p:cSld name="Slide 15">
     <p:bg>
       <p:bgPr>
         <a:solidFill>
@@ -5221,7 +5744,7 @@
                 <a:ea typeface="Calibri" pitchFamily="34" charset="-122"/>
                 <a:cs typeface="Calibri" pitchFamily="34" charset="-120"/>
               </a:rPr>
-              <a:t>A sim to measured transfer is learnable:  </a:t>
+              <a:t>The empty signal transfers, but a sim-only tumor model does not:  </a:t>
             </a:r>
             <a:pPr indent="0" marL="0">
               <a:buNone/>
@@ -5235,7 +5758,7 @@
                 <a:ea typeface="Calibri" pitchFamily="34" charset="-122"/>
                 <a:cs typeface="Calibri" pitchFamily="34" charset="-120"/>
               </a:rPr>
-              <a:t>a linear map already reaches R2 = 0.65 on unseen frequencies, a promising if preliminary calibration path.</a:t>
+              <a:t>a linear map reaches R2 = 0.65 on the empty baseline, yet a CNN trained only on sim lands at 43 mm on the bench (worse than chance), and that linear calibration alone does not fix it (46 mm). Closing the gap needs paired tumor data or nonlinear adaptation.</a:t>
             </a:r>
             <a:endParaRPr lang="en-US" sz="1400" dirty="0"/>
           </a:p>
